--- a/deck/初賽簡報_v0.pptx
+++ b/deck/初賽簡報_v0.pptx
@@ -11799,8 +11799,8 @@
               <a:buNone/>
             </a:pPr>
             <a:r>
-              <a:rPr lang="zh-TW"/>
-              <a:t>2026和泰AI黑客松</a:t>
+              <a:rPr lang="zh-TW" sz="4400" b="1"/>
+              <a:t>Lexus車主流失預警與 AI 溝通系統</a:t>
             </a:r>
             <a:endParaRPr/>
           </a:p>
@@ -11853,7 +11853,7 @@
                 <a:cs typeface="Arial"/>
                 <a:sym typeface="Arial"/>
               </a:rPr>
-              <a:t>說明：</a:t>
+              <a:t>2026 和泰 AI 黑客松｜AI 流失風險洞察與智慧溝通：打造Lexus車主忠誠度的終極防線</a:t>
             </a:r>
             <a:endParaRPr b="0" i="0" sz="1800" u="none" cap="none" strike="noStrike">
               <a:solidFill>
@@ -11866,86 +11866,16 @@
             </a:endParaRPr>
           </a:p>
           <a:p>
-            <a:pPr indent="0" lvl="0" marL="0" marR="0" rtl="0" algn="l">
-              <a:lnSpc>
-                <a:spcPct val="130000"/>
-              </a:lnSpc>
-              <a:spcBef>
-                <a:spcPts val="0"/>
-              </a:spcBef>
-              <a:spcAft>
-                <a:spcPts val="0"/>
-              </a:spcAft>
-              <a:buNone/>
-            </a:pPr>
             <a:r>
-              <a:rPr b="0" i="0" lang="zh-TW" sz="1800" u="none" cap="none" strike="noStrike">
-                <a:solidFill>
-                  <a:schemeClr val="dk1"/>
-                </a:solidFill>
-                <a:latin typeface="Arial"/>
-                <a:ea typeface="Arial"/>
-                <a:cs typeface="Arial"/>
-                <a:sym typeface="Arial"/>
-              </a:rPr>
-              <a:t>簡報版面與文字排版可自由設計</a:t>
+              <a:rPr sz="1800"/>
+              <a:t>團隊：回廠率研究所</a:t>
             </a:r>
-            <a:endParaRPr b="0" i="0" sz="1800" u="none" cap="none" strike="noStrike">
-              <a:solidFill>
-                <a:schemeClr val="dk1"/>
-              </a:solidFill>
-              <a:latin typeface="Arial"/>
-              <a:ea typeface="Arial"/>
-              <a:cs typeface="Arial"/>
-              <a:sym typeface="Arial"/>
-            </a:endParaRPr>
           </a:p>
           <a:p>
-            <a:pPr indent="0" lvl="0" marL="0" marR="0" rtl="0" algn="l">
-              <a:lnSpc>
-                <a:spcPct val="130000"/>
-              </a:lnSpc>
-              <a:spcBef>
-                <a:spcPts val="0"/>
-              </a:spcBef>
-              <a:spcAft>
-                <a:spcPts val="0"/>
-              </a:spcAft>
-              <a:buNone/>
-            </a:pPr>
             <a:r>
-              <a:rPr b="0" i="0" lang="zh-TW" sz="1800" u="none" cap="none" strike="noStrike">
-                <a:solidFill>
-                  <a:schemeClr val="dk1"/>
-                </a:solidFill>
-                <a:latin typeface="Arial"/>
-                <a:ea typeface="Arial"/>
-                <a:cs typeface="Arial"/>
-                <a:sym typeface="Arial"/>
-              </a:rPr>
-              <a:t>總頁數限制</a:t>
+              <a:rPr sz="1800"/>
+              <a:t>初賽提案簡報（v0，2026-09）</a:t>
             </a:r>
-            <a:r>
-              <a:rPr lang="zh-TW" sz="1800">
-                <a:solidFill>
-                  <a:schemeClr val="dk1"/>
-                </a:solidFill>
-              </a:rPr>
-              <a:t>15</a:t>
-            </a:r>
-            <a:r>
-              <a:rPr b="0" i="0" lang="zh-TW" sz="1800" u="none" cap="none" strike="noStrike">
-                <a:solidFill>
-                  <a:schemeClr val="dk1"/>
-                </a:solidFill>
-                <a:latin typeface="Arial"/>
-                <a:ea typeface="Arial"/>
-                <a:cs typeface="Arial"/>
-                <a:sym typeface="Arial"/>
-              </a:rPr>
-              <a:t>頁內，不包含附錄 (*決賽需提交 Prototype 或 Demo 完整版)</a:t>
-            </a:r>
-            <a:endParaRPr/>
           </a:p>
         </p:txBody>
       </p:sp>
@@ -20750,13 +20680,13 @@
                       <a:r>
                         <a:rPr sz="1200" b="1" i="0">
                           <a:solidFill>
-                            <a:srgbClr val="C05600"/>
+                            <a:srgbClr val="24323E"/>
                           </a:solidFill>
                           <a:latin typeface="Arial"/>
                           <a:ea typeface="微軟正黑體"/>
                           <a:cs typeface="Arial"/>
                         </a:rPr>
-                        <a:t>【待補：團隊名稱】</a:t>
+                        <a:t>回廠率研究所</a:t>
                       </a:r>
                       <a:endParaRPr sz="1800">
                         <a:solidFill>
@@ -20889,24 +20819,13 @@
                       <a:r>
                         <a:rPr sz="1200" b="1" i="0">
                           <a:solidFill>
-                            <a:srgbClr val="C05600"/>
-                          </a:solidFill>
-                          <a:latin typeface="Arial"/>
-                          <a:ea typeface="微軟正黑體"/>
-                          <a:cs typeface="Arial"/>
-                        </a:rPr>
-                        <a:t>【待補：產品名稱】</a:t>
-                      </a:r>
-                      <a:r>
-                        <a:rPr sz="1200" b="0" i="0">
-                          <a:solidFill>
                             <a:srgbClr val="24323E"/>
                           </a:solidFill>
                           <a:latin typeface="Arial"/>
                           <a:ea typeface="微軟正黑體"/>
                           <a:cs typeface="Arial"/>
                         </a:rPr>
-                        <a:t>（暫用「Lexus 車主流失預警與智慧關懷」）</a:t>
+                        <a:t>Lexus車主流失預警與 AI 溝通系統</a:t>
                       </a:r>
                       <a:endParaRPr sz="1800">
                         <a:solidFill>
@@ -21045,7 +20964,7 @@
                           <a:ea typeface="微軟正黑體"/>
                           <a:cs typeface="Arial"/>
                         </a:rPr>
-                        <a:t>題 3　AI 流失風險洞察與智慧溝通：打造 Lexus 車主忠誠度的終極防線</a:t>
+                        <a:t>AI 流失風險洞察與智慧溝通：打造Lexus車主忠誠度的終極防線</a:t>
                       </a:r>
                       <a:endParaRPr sz="1800">
                         <a:solidFill>

--- a/deck/初賽簡報_v0.pptx
+++ b/deck/初賽簡報_v0.pptx
@@ -12245,7 +12245,7 @@
                         </a:spcAft>
                       </a:pPr>
                       <a:r>
-                        <a:rPr sz="1100" b="1" i="0">
+                        <a:rPr sz="1000" b="1" i="0">
                           <a:solidFill>
                             <a:srgbClr val="FFFFFF"/>
                           </a:solidFill>
@@ -12280,7 +12280,7 @@
                         </a:spcAft>
                       </a:pPr>
                       <a:r>
-                        <a:rPr sz="1100" b="1" i="0">
+                        <a:rPr sz="1000" b="1" i="0">
                           <a:solidFill>
                             <a:srgbClr val="FFFFFF"/>
                           </a:solidFill>
@@ -12315,7 +12315,7 @@
                         </a:spcAft>
                       </a:pPr>
                       <a:r>
-                        <a:rPr sz="1100" b="1" i="0">
+                        <a:rPr sz="1000" b="1" i="0">
                           <a:solidFill>
                             <a:srgbClr val="FFFFFF"/>
                           </a:solidFill>
@@ -12352,7 +12352,7 @@
                         </a:spcAft>
                       </a:pPr>
                       <a:r>
-                        <a:rPr sz="1100" b="0" i="0">
+                        <a:rPr sz="1000" b="0" i="0">
                           <a:solidFill>
                             <a:srgbClr val="24323E"/>
                           </a:solidFill>
@@ -12387,7 +12387,7 @@
                         </a:spcAft>
                       </a:pPr>
                       <a:r>
-                        <a:rPr sz="1100" b="0" i="0">
+                        <a:rPr sz="1000" b="0" i="0">
                           <a:solidFill>
                             <a:srgbClr val="24323E"/>
                           </a:solidFill>
@@ -12422,21 +12422,21 @@
                         </a:spcAft>
                       </a:pPr>
                       <a:r>
-                        <a:rPr sz="1100" b="1" i="0">
+                        <a:rPr sz="1000" b="0" i="0">
                           <a:solidFill>
-                            <a:srgbClr val="C05600"/>
+                            <a:srgbClr val="24323E"/>
                           </a:solidFill>
                           <a:latin typeface="Arial"/>
                           <a:ea typeface="微軟正黑體"/>
                           <a:cs typeface="Arial"/>
                         </a:rPr>
-                        <a:t>【待補：B 的 PB-08】</a:t>
+                        <a:t>保固到期日（4 年／12 萬）、延保購買狀態：到期前 90 天未購延保</a:t>
                       </a:r>
                     </a:p>
                   </a:txBody>
                   <a:tcPr anchor="ctr" marL="73152" marR="54864" marT="36576" marB="27432">
                     <a:solidFill>
-                      <a:srgbClr val="FDEBD0"/>
+                      <a:srgbClr val="FFFFFF"/>
                     </a:solidFill>
                   </a:tcPr>
                 </a:tc>
@@ -12459,7 +12459,7 @@
                         </a:spcAft>
                       </a:pPr>
                       <a:r>
-                        <a:rPr sz="1100" b="0" i="0">
+                        <a:rPr sz="1000" b="0" i="0">
                           <a:solidFill>
                             <a:srgbClr val="24323E"/>
                           </a:solidFill>
@@ -12494,7 +12494,7 @@
                         </a:spcAft>
                       </a:pPr>
                       <a:r>
-                        <a:rPr sz="1100" b="0" i="0">
+                        <a:rPr sz="1000" b="0" i="0">
                           <a:solidFill>
                             <a:srgbClr val="24323E"/>
                           </a:solidFill>
@@ -12529,21 +12529,21 @@
                         </a:spcAft>
                       </a:pPr>
                       <a:r>
-                        <a:rPr sz="1100" b="1" i="0">
+                        <a:rPr sz="1000" b="0" i="0">
                           <a:solidFill>
-                            <a:srgbClr val="C05600"/>
+                            <a:srgbClr val="24323E"/>
                           </a:solidFill>
                           <a:latin typeface="Arial"/>
                           <a:ea typeface="微軟正黑體"/>
                           <a:cs typeface="Arial"/>
                         </a:rPr>
-                        <a:t>【待補：B 的 PB-08】</a:t>
+                        <a:t>工單估價 vs 實收、拒絕估價項目、滿意度價格題：連續 2 次拒項</a:t>
                       </a:r>
                     </a:p>
                   </a:txBody>
                   <a:tcPr anchor="ctr" marL="73152" marR="54864" marT="36576" marB="27432">
                     <a:solidFill>
-                      <a:srgbClr val="FDEBD0"/>
+                      <a:srgbClr val="F7F9FB"/>
                     </a:solidFill>
                   </a:tcPr>
                 </a:tc>
@@ -12566,7 +12566,7 @@
                         </a:spcAft>
                       </a:pPr>
                       <a:r>
-                        <a:rPr sz="1100" b="0" i="0">
+                        <a:rPr sz="1000" b="0" i="0">
                           <a:solidFill>
                             <a:srgbClr val="24323E"/>
                           </a:solidFill>
@@ -12601,7 +12601,7 @@
                         </a:spcAft>
                       </a:pPr>
                       <a:r>
-                        <a:rPr sz="1100" b="0" i="0">
+                        <a:rPr sz="1000" b="0" i="0">
                           <a:solidFill>
                             <a:srgbClr val="24323E"/>
                           </a:solidFill>
@@ -12636,21 +12636,21 @@
                         </a:spcAft>
                       </a:pPr>
                       <a:r>
-                        <a:rPr sz="1100" b="1" i="0">
+                        <a:rPr sz="1000" b="0" i="0">
                           <a:solidFill>
-                            <a:srgbClr val="C05600"/>
+                            <a:srgbClr val="24323E"/>
                           </a:solidFill>
                           <a:latin typeface="Arial"/>
                           <a:ea typeface="微軟正黑體"/>
                           <a:cs typeface="Arial"/>
                         </a:rPr>
-                        <a:t>【待補：B 的 PB-08】</a:t>
+                        <a:t>回廠間隔 vs 建議週期、預約取消、App 查據點未預約：逾期 1.5 倍</a:t>
                       </a:r>
                     </a:p>
                   </a:txBody>
                   <a:tcPr anchor="ctr" marL="73152" marR="54864" marT="36576" marB="27432">
                     <a:solidFill>
-                      <a:srgbClr val="FDEBD0"/>
+                      <a:srgbClr val="FFFFFF"/>
                     </a:solidFill>
                   </a:tcPr>
                 </a:tc>
@@ -12673,7 +12673,7 @@
                         </a:spcAft>
                       </a:pPr>
                       <a:r>
-                        <a:rPr sz="1100" b="0" i="0">
+                        <a:rPr sz="1000" b="0" i="0">
                           <a:solidFill>
                             <a:srgbClr val="24323E"/>
                           </a:solidFill>
@@ -12708,7 +12708,7 @@
                         </a:spcAft>
                       </a:pPr>
                       <a:r>
-                        <a:rPr sz="1100" b="0" i="0">
+                        <a:rPr sz="1000" b="0" i="0">
                           <a:solidFill>
                             <a:srgbClr val="24323E"/>
                           </a:solidFill>
@@ -12743,21 +12743,21 @@
                         </a:spcAft>
                       </a:pPr>
                       <a:r>
-                        <a:rPr sz="1100" b="1" i="0">
+                        <a:rPr sz="1000" b="0" i="0">
                           <a:solidFill>
-                            <a:srgbClr val="C05600"/>
+                            <a:srgbClr val="24323E"/>
                           </a:solidFill>
                           <a:latin typeface="Arial"/>
                           <a:ea typeface="微軟正黑體"/>
                           <a:cs typeface="Arial"/>
                         </a:rPr>
-                        <a:t>【待補：B 的 PB-08】</a:t>
+                        <a:t>工單自備零件／機油註記、只做換油套餐、金額逐次下降 &gt; 40%</a:t>
                       </a:r>
                     </a:p>
                   </a:txBody>
                   <a:tcPr anchor="ctr" marL="73152" marR="54864" marT="36576" marB="27432">
                     <a:solidFill>
-                      <a:srgbClr val="FDEBD0"/>
+                      <a:srgbClr val="F7F9FB"/>
                     </a:solidFill>
                   </a:tcPr>
                 </a:tc>
@@ -12780,7 +12780,7 @@
                         </a:spcAft>
                       </a:pPr>
                       <a:r>
-                        <a:rPr sz="1100" b="0" i="0">
+                        <a:rPr sz="1000" b="0" i="0">
                           <a:solidFill>
                             <a:srgbClr val="24323E"/>
                           </a:solidFill>
@@ -12815,7 +12815,7 @@
                         </a:spcAft>
                       </a:pPr>
                       <a:r>
-                        <a:rPr sz="1100" b="0" i="0">
+                        <a:rPr sz="1000" b="0" i="0">
                           <a:solidFill>
                             <a:srgbClr val="24323E"/>
                           </a:solidFill>
@@ -12850,21 +12850,21 @@
                         </a:spcAft>
                       </a:pPr>
                       <a:r>
-                        <a:rPr sz="1100" b="1" i="0">
+                        <a:rPr sz="1000" b="0" i="0">
                           <a:solidFill>
-                            <a:srgbClr val="C05600"/>
+                            <a:srgbClr val="24323E"/>
                           </a:solidFill>
                           <a:latin typeface="Arial"/>
                           <a:ea typeface="微軟正黑體"/>
                           <a:cs typeface="Arial"/>
                         </a:rPr>
-                        <a:t>【待補：B 的 PB-08】</a:t>
+                        <a:t>零件待料天數、待料改期次數：待料 &gt; 7 天或同車 ≥ 2 次</a:t>
                       </a:r>
                     </a:p>
                   </a:txBody>
                   <a:tcPr anchor="ctr" marL="73152" marR="54864" marT="36576" marB="27432">
                     <a:solidFill>
-                      <a:srgbClr val="FDEBD0"/>
+                      <a:srgbClr val="FFFFFF"/>
                     </a:solidFill>
                   </a:tcPr>
                 </a:tc>
@@ -12887,7 +12887,7 @@
                         </a:spcAft>
                       </a:pPr>
                       <a:r>
-                        <a:rPr sz="1100" b="0" i="0">
+                        <a:rPr sz="1000" b="0" i="0">
                           <a:solidFill>
                             <a:srgbClr val="24323E"/>
                           </a:solidFill>
@@ -12922,7 +12922,7 @@
                         </a:spcAft>
                       </a:pPr>
                       <a:r>
-                        <a:rPr sz="1100" b="0" i="0">
+                        <a:rPr sz="1000" b="0" i="0">
                           <a:solidFill>
                             <a:srgbClr val="24323E"/>
                           </a:solidFill>
@@ -12957,21 +12957,21 @@
                         </a:spcAft>
                       </a:pPr>
                       <a:r>
-                        <a:rPr sz="1100" b="1" i="0">
+                        <a:rPr sz="1000" b="0" i="0">
                           <a:solidFill>
-                            <a:srgbClr val="C05600"/>
+                            <a:srgbClr val="24323E"/>
                           </a:solidFill>
                           <a:latin typeface="Arial"/>
                           <a:ea typeface="微軟正黑體"/>
                           <a:cs typeface="Arial"/>
                         </a:rPr>
-                        <a:t>【待補：B 的 PB-08】</a:t>
+                        <a:t>30 天內同項目重複進廠、技術客訴、召回未完成：comeback ≥ 2</a:t>
                       </a:r>
                     </a:p>
                   </a:txBody>
                   <a:tcPr anchor="ctr" marL="73152" marR="54864" marT="36576" marB="27432">
                     <a:solidFill>
-                      <a:srgbClr val="FDEBD0"/>
+                      <a:srgbClr val="F7F9FB"/>
                     </a:solidFill>
                   </a:tcPr>
                 </a:tc>
@@ -12994,7 +12994,7 @@
                         </a:spcAft>
                       </a:pPr>
                       <a:r>
-                        <a:rPr sz="1100" b="0" i="0">
+                        <a:rPr sz="1000" b="0" i="0">
                           <a:solidFill>
                             <a:srgbClr val="24323E"/>
                           </a:solidFill>
@@ -13029,7 +13029,7 @@
                         </a:spcAft>
                       </a:pPr>
                       <a:r>
-                        <a:rPr sz="1100" b="0" i="0">
+                        <a:rPr sz="1000" b="0" i="0">
                           <a:solidFill>
                             <a:srgbClr val="24323E"/>
                           </a:solidFill>
@@ -13064,21 +13064,21 @@
                         </a:spcAft>
                       </a:pPr>
                       <a:r>
-                        <a:rPr sz="1100" b="1" i="0">
+                        <a:rPr sz="1000" b="0" i="0">
                           <a:solidFill>
-                            <a:srgbClr val="C05600"/>
+                            <a:srgbClr val="24323E"/>
                           </a:solidFill>
                           <a:latin typeface="Arial"/>
                           <a:ea typeface="微軟正黑體"/>
                           <a:cs typeface="Arial"/>
                         </a:rPr>
-                        <a:t>【待補：B 的 PB-08】</a:t>
+                        <a:t>12 個月無工單、過戶／退出會員、App 長期未開啟（驗證用）</a:t>
                       </a:r>
                     </a:p>
                   </a:txBody>
                   <a:tcPr anchor="ctr" marL="73152" marR="54864" marT="36576" marB="27432">
                     <a:solidFill>
-                      <a:srgbClr val="FDEBD0"/>
+                      <a:srgbClr val="FFFFFF"/>
                     </a:solidFill>
                   </a:tcPr>
                 </a:tc>
@@ -13101,7 +13101,7 @@
                         </a:spcAft>
                       </a:pPr>
                       <a:r>
-                        <a:rPr sz="1100" b="0" i="0">
+                        <a:rPr sz="1000" b="0" i="0">
                           <a:solidFill>
                             <a:srgbClr val="24323E"/>
                           </a:solidFill>
@@ -13136,7 +13136,7 @@
                         </a:spcAft>
                       </a:pPr>
                       <a:r>
-                        <a:rPr sz="1100" b="0" i="0">
+                        <a:rPr sz="1000" b="0" i="0">
                           <a:solidFill>
                             <a:srgbClr val="24323E"/>
                           </a:solidFill>
@@ -13171,21 +13171,21 @@
                         </a:spcAft>
                       </a:pPr>
                       <a:r>
-                        <a:rPr sz="1100" b="1" i="0">
+                        <a:rPr sz="1000" b="0" i="0">
                           <a:solidFill>
-                            <a:srgbClr val="C05600"/>
+                            <a:srgbClr val="24323E"/>
                           </a:solidFill>
                           <a:latin typeface="Arial"/>
                           <a:ea typeface="微軟正黑體"/>
                           <a:cs typeface="Arial"/>
                         </a:rPr>
-                        <a:t>【待補：B 的 PB-08】</a:t>
+                        <a:t>NPS 貶損者（0–6）且 12 個月內有客訴、推薦計畫無紀錄</a:t>
                       </a:r>
                     </a:p>
                   </a:txBody>
                   <a:tcPr anchor="ctr" marL="73152" marR="54864" marT="36576" marB="27432">
                     <a:solidFill>
-                      <a:srgbClr val="FDEBD0"/>
+                      <a:srgbClr val="F7F9FB"/>
                     </a:solidFill>
                   </a:tcPr>
                 </a:tc>
@@ -13194,6 +13194,53 @@
           </a:graphicData>
         </a:graphic>
       </p:graphicFrame>
+      <p:sp>
+        <p:nvSpPr>
+          <p:cNvPr id="9" name="TextBox 8"/>
+          <p:cNvSpPr txBox="1"/>
+          <p:nvPr/>
+        </p:nvSpPr>
+        <p:spPr>
+          <a:xfrm>
+            <a:off x="420624" y="5879592"/>
+            <a:ext cx="11356848" cy="320040"/>
+          </a:xfrm>
+          <a:prstGeom prst="rect">
+            <a:avLst/>
+          </a:prstGeom>
+          <a:noFill/>
+        </p:spPr>
+        <p:txBody>
+          <a:bodyPr wrap="square" lIns="36576" rIns="36576" tIns="18288" bIns="18288" anchor="t">
+            <a:spAutoFit/>
+          </a:bodyPr>
+          <a:lstStyle/>
+          <a:p>
+            <a:pPr>
+              <a:lnSpc>
+                <a:spcPct val="100000"/>
+              </a:lnSpc>
+              <a:spcBef>
+                <a:spcPts val="0"/>
+              </a:spcBef>
+              <a:spcAft>
+                <a:spcPts val="200"/>
+              </a:spcAft>
+            </a:pPr>
+            <a:r>
+              <a:rPr sz="1000" b="0" i="0">
+                <a:solidFill>
+                  <a:srgbClr val="5C6B7A"/>
+                </a:solidFill>
+                <a:latin typeface="Arial"/>
+                <a:ea typeface="微軟正黑體"/>
+                <a:cs typeface="Arial"/>
+              </a:rPr>
+              <a:t>CRM 欄位為業界通用假設，導入時以和泰 DMS 實際欄位替換；模型輸入由論壇文字改為工單備註與客訴文字，架構不變。</a:t>
+            </a:r>
+          </a:p>
+        </p:txBody>
+      </p:sp>
     </p:spTree>
   </p:cSld>
   <p:clrMapOvr>

--- a/deck/初賽簡報_v0.pptx
+++ b/deck/初賽簡報_v0.pptx
@@ -13945,15 +13945,15 @@
               </a:spcAft>
             </a:pPr>
             <a:r>
-              <a:rPr sz="1500" b="1" i="0">
+              <a:rPr sz="1500" b="0" i="0">
                 <a:solidFill>
-                  <a:srgbClr val="C05600"/>
+                  <a:srgbClr val="24323E"/>
                 </a:solidFill>
                 <a:latin typeface="Arial"/>
                 <a:ea typeface="微軟正黑體"/>
                 <a:cs typeface="Arial"/>
               </a:rPr>
-              <a:t>【待補：人工標註 300 句 A/B κ 與三模型對人工指標（9/29）】</a:t>
+              <a:t>人工金標 300 句（9/29）：兩人 κ 0.40，仲裁後隨機層 150 句以人工為準：r4 F1 0.82／κ 0.81 與 Sonnet 相同，Haiku F1 0.50；正例僅 9 句，召回 CI 0.45–0.94</a:t>
             </a:r>
           </a:p>
         </p:txBody>

--- a/deck/初賽簡報_v0.pptx
+++ b/deck/初賽簡報_v0.pptx
@@ -1057,7 +1057,7 @@
           <a:lstStyle/>
           <a:p>
             <a:r>
-              <a:t>四種人配三種進廠時機，話還沒寫，價格保固只能引用知識庫。</a:t>
+              <a:t>四種人配三種進廠時機，十二則已過查核，投遞前仍要人工審。</a:t>
             </a:r>
           </a:p>
         </p:txBody>
@@ -15667,7 +15667,7 @@
                 <a:ea typeface="微軟正黑體"/>
                 <a:cs typeface="Arial"/>
               </a:rPr>
-              <a:t>來源：專案架構 §2 L6–L7、knowledge/lexus_aftersales_kb.md（40 條）</a:t>
+              <a:t>來源：knowledge/generated_examples.md、reports/T14_generation_report.md</a:t>
             </a:r>
           </a:p>
         </p:txBody>
@@ -15728,7 +15728,7 @@
         <p:spPr>
           <a:xfrm>
             <a:off x="420624" y="329184"/>
-            <a:ext cx="11356848" cy="841248"/>
+            <a:ext cx="11356848" cy="566928"/>
           </a:xfrm>
           <a:prstGeom prst="rect">
             <a:avLst/>
@@ -15753,7 +15753,7 @@
               </a:spcAft>
             </a:pPr>
             <a:r>
-              <a:rPr sz="2000" b="1" i="0">
+              <a:rPr sz="2400" b="1" i="0">
                 <a:solidFill>
                   <a:srgbClr val="24323E"/>
                 </a:solidFill>
@@ -15761,7 +15761,7 @@
                 <a:ea typeface="微軟正黑體"/>
                 <a:cs typeface="Arial"/>
               </a:rPr>
-              <a:t>先對上是誰、在什麼時候開口；話術範例還等 Sprint 3</a:t>
+              <a:t>先對上是誰、在什麼時候開口；十二則話術已對過知識庫</a:t>
             </a:r>
           </a:p>
         </p:txBody>
@@ -15775,8 +15775,8 @@
           <p:nvPr/>
         </p:nvGraphicFramePr>
         <p:xfrm>
-          <a:off x="420624" y="1261872"/>
-          <a:ext cx="11356848" cy="2331720"/>
+          <a:off x="420624" y="987552"/>
+          <a:ext cx="11356848" cy="4160520"/>
         </p:xfrm>
         <a:graphic>
           <a:graphicData uri="http://schemas.openxmlformats.org/drawingml/2006/table">
@@ -15785,12 +15785,12 @@
                 <a:tableStyleId>{5C22544A-7EE6-4342-B048-85BDC9FD1C3A}</a:tableStyleId>
               </a:tblPr>
               <a:tblGrid>
-                <a:gridCol w="1965960"/>
-                <a:gridCol w="3127248"/>
-                <a:gridCol w="3127248"/>
-                <a:gridCol w="3136392"/>
+                <a:gridCol w="1481328"/>
+                <a:gridCol w="3291840"/>
+                <a:gridCol w="3291840"/>
+                <a:gridCol w="3291840"/>
               </a:tblGrid>
-              <a:tr h="466344">
+              <a:tr h="832104">
                 <a:tc>
                   <a:txBody>
                     <a:bodyPr wrap="square" anchor="ctr"/>
@@ -15808,7 +15808,7 @@
                         </a:spcAft>
                       </a:pPr>
                       <a:r>
-                        <a:rPr sz="1200" b="1" i="0">
+                        <a:rPr sz="1000" b="1" i="0">
                           <a:solidFill>
                             <a:srgbClr val="FFFFFF"/>
                           </a:solidFill>
@@ -15843,7 +15843,7 @@
                         </a:spcAft>
                       </a:pPr>
                       <a:r>
-                        <a:rPr sz="1200" b="1" i="0">
+                        <a:rPr sz="1000" b="1" i="0">
                           <a:solidFill>
                             <a:srgbClr val="FFFFFF"/>
                           </a:solidFill>
@@ -15878,7 +15878,7 @@
                         </a:spcAft>
                       </a:pPr>
                       <a:r>
-                        <a:rPr sz="1200" b="1" i="0">
+                        <a:rPr sz="1000" b="1" i="0">
                           <a:solidFill>
                             <a:srgbClr val="FFFFFF"/>
                           </a:solidFill>
@@ -15913,7 +15913,7 @@
                         </a:spcAft>
                       </a:pPr>
                       <a:r>
-                        <a:rPr sz="1200" b="1" i="0">
+                        <a:rPr sz="1000" b="1" i="0">
                           <a:solidFill>
                             <a:srgbClr val="FFFFFF"/>
                           </a:solidFill>
@@ -15932,7 +15932,7 @@
                   </a:tcPr>
                 </a:tc>
               </a:tr>
-              <a:tr h="466344">
+              <a:tr h="832104">
                 <a:tc>
                   <a:txBody>
                     <a:bodyPr wrap="square" anchor="ctr"/>
@@ -15950,7 +15950,7 @@
                         </a:spcAft>
                       </a:pPr>
                       <a:r>
-                        <a:rPr sz="1200" b="1" i="0">
+                        <a:rPr sz="1000" b="1" i="0">
                           <a:solidFill>
                             <a:srgbClr val="24323E"/>
                           </a:solidFill>
@@ -15985,21 +15985,45 @@
                         </a:spcAft>
                       </a:pPr>
                       <a:r>
-                        <a:rPr sz="1200" b="1" i="0">
+                        <a:rPr sz="1000" b="1" i="0">
                           <a:solidFill>
-                            <a:srgbClr val="C05600"/>
+                            <a:srgbClr val="2F5D9F"/>
                           </a:solidFill>
                           <a:latin typeface="Arial"/>
                           <a:ea typeface="微軟正黑體"/>
                           <a:cs typeface="Arial"/>
                         </a:rPr>
-                        <a:t>【待補：Sprint 3 生成範例】</a:t>
+                        <a:t>Email</a:t>
+                      </a:r>
+                    </a:p>
+                    <a:p>
+                      <a:pPr>
+                        <a:lnSpc>
+                          <a:spcPct val="100000"/>
+                        </a:lnSpc>
+                        <a:spcBef>
+                          <a:spcPts val="0"/>
+                        </a:spcBef>
+                        <a:spcAft>
+                          <a:spcPts val="200"/>
+                        </a:spcAft>
+                      </a:pPr>
+                      <a:r>
+                        <a:rPr sz="1000" b="0" i="0">
+                          <a:solidFill>
+                            <a:srgbClr val="24323E"/>
+                          </a:solidFill>
+                          <a:latin typeface="Arial"/>
+                          <a:ea typeface="微軟正黑體"/>
+                          <a:cs typeface="Arial"/>
+                        </a:rPr>
+                        <a:t>您好，您的愛車保固即將屆滿，新車基本保證為自交車日起4年或120,000公里，以…</a:t>
                       </a:r>
                     </a:p>
                   </a:txBody>
                   <a:tcPr anchor="ctr" marL="73152" marR="54864" marT="36576" marB="27432">
                     <a:solidFill>
-                      <a:srgbClr val="FDEBD0"/>
+                      <a:srgbClr val="FFFFFF"/>
                     </a:solidFill>
                   </a:tcPr>
                 </a:tc>
@@ -16020,21 +16044,45 @@
                         </a:spcAft>
                       </a:pPr>
                       <a:r>
-                        <a:rPr sz="1200" b="1" i="0">
+                        <a:rPr sz="1000" b="1" i="0">
                           <a:solidFill>
-                            <a:srgbClr val="C05600"/>
+                            <a:srgbClr val="2F5D9F"/>
                           </a:solidFill>
                           <a:latin typeface="Arial"/>
                           <a:ea typeface="微軟正黑體"/>
                           <a:cs typeface="Arial"/>
                         </a:rPr>
-                        <a:t>【待補：Sprint 3 生成範例】</a:t>
+                        <a:t>LINE 官方帳號推播</a:t>
+                      </a:r>
+                    </a:p>
+                    <a:p>
+                      <a:pPr>
+                        <a:lnSpc>
+                          <a:spcPct val="100000"/>
+                        </a:lnSpc>
+                        <a:spcBef>
+                          <a:spcPts val="0"/>
+                        </a:spcBef>
+                        <a:spcAft>
+                          <a:spcPts val="200"/>
+                        </a:spcAft>
+                      </a:pPr>
+                      <a:r>
+                        <a:rPr sz="1000" b="0" i="0">
+                          <a:solidFill>
+                            <a:srgbClr val="24323E"/>
+                          </a:solidFill>
+                          <a:latin typeface="Arial"/>
+                          <a:ea typeface="微軟正黑體"/>
+                          <a:cs typeface="Arial"/>
+                        </a:rPr>
+                        <a:t>一般使用建議每六個月回廠保養；若半年超過一萬公里，則以每一萬公里為週期。您可依實…</a:t>
                       </a:r>
                     </a:p>
                   </a:txBody>
                   <a:tcPr anchor="ctr" marL="73152" marR="54864" marT="36576" marB="27432">
                     <a:solidFill>
-                      <a:srgbClr val="FDEBD0"/>
+                      <a:srgbClr val="FFFFFF"/>
                     </a:solidFill>
                   </a:tcPr>
                 </a:tc>
@@ -16055,26 +16103,50 @@
                         </a:spcAft>
                       </a:pPr>
                       <a:r>
-                        <a:rPr sz="1200" b="1" i="0">
+                        <a:rPr sz="1000" b="1" i="0">
                           <a:solidFill>
-                            <a:srgbClr val="C05600"/>
+                            <a:srgbClr val="2F5D9F"/>
                           </a:solidFill>
                           <a:latin typeface="Arial"/>
                           <a:ea typeface="微軟正黑體"/>
                           <a:cs typeface="Arial"/>
                         </a:rPr>
-                        <a:t>【待補：Sprint 3 生成範例】</a:t>
+                        <a:t>服務廠專員電話腳本</a:t>
+                      </a:r>
+                    </a:p>
+                    <a:p>
+                      <a:pPr>
+                        <a:lnSpc>
+                          <a:spcPct val="100000"/>
+                        </a:lnSpc>
+                        <a:spcBef>
+                          <a:spcPts val="0"/>
+                        </a:spcBef>
+                        <a:spcAft>
+                          <a:spcPts val="200"/>
+                        </a:spcAft>
+                      </a:pPr>
+                      <a:r>
+                        <a:rPr sz="1000" b="0" i="0">
+                          <a:solidFill>
+                            <a:srgbClr val="24323E"/>
+                          </a:solidFill>
+                          <a:latin typeface="Arial"/>
+                          <a:ea typeface="微軟正黑體"/>
+                          <a:cs typeface="Arial"/>
+                        </a:rPr>
+                        <a:t>您好，我是Lexus服務廠專員。您上次有未同意的估價項目，因此致電說明；是否回廠…</a:t>
                       </a:r>
                     </a:p>
                   </a:txBody>
                   <a:tcPr anchor="ctr" marL="73152" marR="54864" marT="36576" marB="27432">
                     <a:solidFill>
-                      <a:srgbClr val="FDEBD0"/>
+                      <a:srgbClr val="FFFFFF"/>
                     </a:solidFill>
                   </a:tcPr>
                 </a:tc>
               </a:tr>
-              <a:tr h="466344">
+              <a:tr h="832104">
                 <a:tc>
                   <a:txBody>
                     <a:bodyPr wrap="square" anchor="ctr"/>
@@ -16092,7 +16164,7 @@
                         </a:spcAft>
                       </a:pPr>
                       <a:r>
-                        <a:rPr sz="1200" b="1" i="0">
+                        <a:rPr sz="1000" b="1" i="0">
                           <a:solidFill>
                             <a:srgbClr val="24323E"/>
                           </a:solidFill>
@@ -16127,21 +16199,45 @@
                         </a:spcAft>
                       </a:pPr>
                       <a:r>
-                        <a:rPr sz="1200" b="1" i="0">
+                        <a:rPr sz="1000" b="1" i="0">
                           <a:solidFill>
-                            <a:srgbClr val="C05600"/>
+                            <a:srgbClr val="2F5D9F"/>
                           </a:solidFill>
                           <a:latin typeface="Arial"/>
                           <a:ea typeface="微軟正黑體"/>
                           <a:cs typeface="Arial"/>
                         </a:rPr>
-                        <a:t>【待補：Sprint 3 生成範例】</a:t>
+                        <a:t>服務廠專員電話腳本</a:t>
+                      </a:r>
+                    </a:p>
+                    <a:p>
+                      <a:pPr>
+                        <a:lnSpc>
+                          <a:spcPct val="100000"/>
+                        </a:lnSpc>
+                        <a:spcBef>
+                          <a:spcPts val="0"/>
+                        </a:spcBef>
+                        <a:spcAft>
+                          <a:spcPts val="200"/>
+                        </a:spcAft>
+                      </a:pPr>
+                      <a:r>
+                        <a:rPr sz="1000" b="0" i="0">
+                          <a:solidFill>
+                            <a:srgbClr val="24323E"/>
+                          </a:solidFill>
+                          <a:latin typeface="Arial"/>
+                          <a:ea typeface="微軟正黑體"/>
+                          <a:cs typeface="Arial"/>
+                        </a:rPr>
+                        <a:t>您的保固即將屆滿，目前仍在保固窗口內，可先核對新車基本保證範圍；準時定保與否會影…</a:t>
                       </a:r>
                     </a:p>
                   </a:txBody>
                   <a:tcPr anchor="ctr" marL="73152" marR="54864" marT="36576" marB="27432">
                     <a:solidFill>
-                      <a:srgbClr val="FDEBD0"/>
+                      <a:srgbClr val="F7F9FB"/>
                     </a:solidFill>
                   </a:tcPr>
                 </a:tc>
@@ -16162,21 +16258,45 @@
                         </a:spcAft>
                       </a:pPr>
                       <a:r>
-                        <a:rPr sz="1200" b="1" i="0">
+                        <a:rPr sz="1000" b="1" i="0">
                           <a:solidFill>
-                            <a:srgbClr val="C05600"/>
+                            <a:srgbClr val="2F5D9F"/>
                           </a:solidFill>
                           <a:latin typeface="Arial"/>
                           <a:ea typeface="微軟正黑體"/>
                           <a:cs typeface="Arial"/>
                         </a:rPr>
-                        <a:t>【待補：Sprint 3 生成範例】</a:t>
+                        <a:t>App 通知</a:t>
+                      </a:r>
+                    </a:p>
+                    <a:p>
+                      <a:pPr>
+                        <a:lnSpc>
+                          <a:spcPct val="100000"/>
+                        </a:lnSpc>
+                        <a:spcBef>
+                          <a:spcPts val="0"/>
+                        </a:spcBef>
+                        <a:spcAft>
+                          <a:spcPts val="200"/>
+                        </a:spcAft>
+                      </a:pPr>
+                      <a:r>
+                        <a:rPr sz="1000" b="0" i="0">
+                          <a:solidFill>
+                            <a:srgbClr val="24323E"/>
+                          </a:solidFill>
+                          <a:latin typeface="Arial"/>
+                          <a:ea typeface="微軟正黑體"/>
+                          <a:cs typeface="Arial"/>
+                        </a:rPr>
+                        <a:t>Lexus尊榮安檢提供25項原廠標準檢查，全年免費。一般使用建議每半年回廠保養及…</a:t>
                       </a:r>
                     </a:p>
                   </a:txBody>
                   <a:tcPr anchor="ctr" marL="73152" marR="54864" marT="36576" marB="27432">
                     <a:solidFill>
-                      <a:srgbClr val="FDEBD0"/>
+                      <a:srgbClr val="F7F9FB"/>
                     </a:solidFill>
                   </a:tcPr>
                 </a:tc>
@@ -16197,26 +16317,50 @@
                         </a:spcAft>
                       </a:pPr>
                       <a:r>
-                        <a:rPr sz="1200" b="1" i="0">
+                        <a:rPr sz="1000" b="1" i="0">
                           <a:solidFill>
-                            <a:srgbClr val="C05600"/>
+                            <a:srgbClr val="2F5D9F"/>
                           </a:solidFill>
                           <a:latin typeface="Arial"/>
                           <a:ea typeface="微軟正黑體"/>
                           <a:cs typeface="Arial"/>
                         </a:rPr>
-                        <a:t>【待補：Sprint 3 生成範例】</a:t>
+                        <a:t>服務廠專員電話腳本</a:t>
+                      </a:r>
+                    </a:p>
+                    <a:p>
+                      <a:pPr>
+                        <a:lnSpc>
+                          <a:spcPct val="100000"/>
+                        </a:lnSpc>
+                        <a:spcBef>
+                          <a:spcPts val="0"/>
+                        </a:spcBef>
+                        <a:spcAft>
+                          <a:spcPts val="200"/>
+                        </a:spcAft>
+                      </a:pPr>
+                      <a:r>
+                        <a:rPr sz="1000" b="0" i="0">
+                          <a:solidFill>
+                            <a:srgbClr val="24323E"/>
+                          </a:solidFill>
+                          <a:latin typeface="Arial"/>
+                          <a:ea typeface="微軟正黑體"/>
+                          <a:cs typeface="Arial"/>
+                        </a:rPr>
+                        <a:t>針對您上次未同意的項目，是否處理仍由您決定。若想再確認車況，可預約回廠接受全年免…</a:t>
                       </a:r>
                     </a:p>
                   </a:txBody>
                   <a:tcPr anchor="ctr" marL="73152" marR="54864" marT="36576" marB="27432">
                     <a:solidFill>
-                      <a:srgbClr val="FDEBD0"/>
+                      <a:srgbClr val="F7F9FB"/>
                     </a:solidFill>
                   </a:tcPr>
                 </a:tc>
               </a:tr>
-              <a:tr h="466344">
+              <a:tr h="832104">
                 <a:tc>
                   <a:txBody>
                     <a:bodyPr wrap="square" anchor="ctr"/>
@@ -16234,7 +16378,7 @@
                         </a:spcAft>
                       </a:pPr>
                       <a:r>
-                        <a:rPr sz="1200" b="1" i="0">
+                        <a:rPr sz="1000" b="1" i="0">
                           <a:solidFill>
                             <a:srgbClr val="24323E"/>
                           </a:solidFill>
@@ -16269,21 +16413,45 @@
                         </a:spcAft>
                       </a:pPr>
                       <a:r>
-                        <a:rPr sz="1200" b="1" i="0">
+                        <a:rPr sz="1000" b="1" i="0">
                           <a:solidFill>
-                            <a:srgbClr val="C05600"/>
+                            <a:srgbClr val="2F5D9F"/>
                           </a:solidFill>
                           <a:latin typeface="Arial"/>
                           <a:ea typeface="微軟正黑體"/>
                           <a:cs typeface="Arial"/>
                         </a:rPr>
-                        <a:t>【待補：Sprint 3 生成範例】</a:t>
+                        <a:t>LINE 官方帳號推播</a:t>
+                      </a:r>
+                    </a:p>
+                    <a:p>
+                      <a:pPr>
+                        <a:lnSpc>
+                          <a:spcPct val="100000"/>
+                        </a:lnSpc>
+                        <a:spcBef>
+                          <a:spcPts val="0"/>
+                        </a:spcBef>
+                        <a:spcAft>
+                          <a:spcPts val="200"/>
+                        </a:spcAft>
+                      </a:pPr>
+                      <a:r>
+                        <a:rPr sz="1000" b="0" i="0">
+                          <a:solidFill>
+                            <a:srgbClr val="24323E"/>
+                          </a:solidFill>
+                          <a:latin typeface="Arial"/>
+                          <a:ea typeface="微軟正黑體"/>
+                          <a:cs typeface="Arial"/>
+                        </a:rPr>
+                        <a:t>保固即將屆滿，這則官方資訊可轉述給車友：新車基本保證為交車日起4年或120,00…</a:t>
                       </a:r>
                     </a:p>
                   </a:txBody>
                   <a:tcPr anchor="ctr" marL="73152" marR="54864" marT="36576" marB="27432">
                     <a:solidFill>
-                      <a:srgbClr val="FDEBD0"/>
+                      <a:srgbClr val="FFFFFF"/>
                     </a:solidFill>
                   </a:tcPr>
                 </a:tc>
@@ -16304,21 +16472,45 @@
                         </a:spcAft>
                       </a:pPr>
                       <a:r>
-                        <a:rPr sz="1200" b="1" i="0">
+                        <a:rPr sz="1000" b="1" i="0">
                           <a:solidFill>
-                            <a:srgbClr val="C05600"/>
+                            <a:srgbClr val="2F5D9F"/>
                           </a:solidFill>
                           <a:latin typeface="Arial"/>
                           <a:ea typeface="微軟正黑體"/>
                           <a:cs typeface="Arial"/>
                         </a:rPr>
-                        <a:t>【待補：Sprint 3 生成範例】</a:t>
+                        <a:t>Email</a:t>
+                      </a:r>
+                    </a:p>
+                    <a:p>
+                      <a:pPr>
+                        <a:lnSpc>
+                          <a:spcPct val="100000"/>
+                        </a:lnSpc>
+                        <a:spcBef>
+                          <a:spcPts val="0"/>
+                        </a:spcBef>
+                        <a:spcAft>
+                          <a:spcPts val="200"/>
+                        </a:spcAft>
+                      </a:pPr>
+                      <a:r>
+                        <a:rPr sz="1000" b="0" i="0">
+                          <a:solidFill>
+                            <a:srgbClr val="24323E"/>
+                          </a:solidFill>
+                          <a:latin typeface="Arial"/>
+                          <a:ea typeface="微軟正黑體"/>
+                          <a:cs typeface="Arial"/>
+                        </a:rPr>
+                        <a:t>這份說明可供您轉傳：一般使用建議每半年定期保養；若半年超過一萬公里，建議每一萬公…</a:t>
                       </a:r>
                     </a:p>
                   </a:txBody>
                   <a:tcPr anchor="ctr" marL="73152" marR="54864" marT="36576" marB="27432">
                     <a:solidFill>
-                      <a:srgbClr val="FDEBD0"/>
+                      <a:srgbClr val="FFFFFF"/>
                     </a:solidFill>
                   </a:tcPr>
                 </a:tc>
@@ -16339,26 +16531,50 @@
                         </a:spcAft>
                       </a:pPr>
                       <a:r>
-                        <a:rPr sz="1200" b="1" i="0">
+                        <a:rPr sz="1000" b="1" i="0">
                           <a:solidFill>
-                            <a:srgbClr val="C05600"/>
+                            <a:srgbClr val="2F5D9F"/>
                           </a:solidFill>
                           <a:latin typeface="Arial"/>
                           <a:ea typeface="微軟正黑體"/>
                           <a:cs typeface="Arial"/>
                         </a:rPr>
-                        <a:t>【待補：Sprint 3 生成範例】</a:t>
+                        <a:t>App 通知</a:t>
+                      </a:r>
+                    </a:p>
+                    <a:p>
+                      <a:pPr>
+                        <a:lnSpc>
+                          <a:spcPct val="100000"/>
+                        </a:lnSpc>
+                        <a:spcBef>
+                          <a:spcPts val="0"/>
+                        </a:spcBef>
+                        <a:spcAft>
+                          <a:spcPts val="200"/>
+                        </a:spcAft>
+                      </a:pPr>
+                      <a:r>
+                        <a:rPr sz="1000" b="0" i="0">
+                          <a:solidFill>
+                            <a:srgbClr val="24323E"/>
+                          </a:solidFill>
+                          <a:latin typeface="Arial"/>
+                          <a:ea typeface="微軟正黑體"/>
+                          <a:cs typeface="Arial"/>
+                        </a:rPr>
+                        <a:t>您好，提供一則可安心轉述的官方資訊：自費於Lexus服務廠更換的正廠零件，除消耗…</a:t>
                       </a:r>
                     </a:p>
                   </a:txBody>
                   <a:tcPr anchor="ctr" marL="73152" marR="54864" marT="36576" marB="27432">
                     <a:solidFill>
-                      <a:srgbClr val="FDEBD0"/>
+                      <a:srgbClr val="FFFFFF"/>
                     </a:solidFill>
                   </a:tcPr>
                 </a:tc>
               </a:tr>
-              <a:tr h="466344">
+              <a:tr h="832104">
                 <a:tc>
                   <a:txBody>
                     <a:bodyPr wrap="square" anchor="ctr"/>
@@ -16376,7 +16592,7 @@
                         </a:spcAft>
                       </a:pPr>
                       <a:r>
-                        <a:rPr sz="1200" b="1" i="0">
+                        <a:rPr sz="1000" b="1" i="0">
                           <a:solidFill>
                             <a:srgbClr val="24323E"/>
                           </a:solidFill>
@@ -16411,21 +16627,45 @@
                         </a:spcAft>
                       </a:pPr>
                       <a:r>
-                        <a:rPr sz="1200" b="1" i="0">
+                        <a:rPr sz="1000" b="1" i="0">
                           <a:solidFill>
-                            <a:srgbClr val="C05600"/>
+                            <a:srgbClr val="2F5D9F"/>
                           </a:solidFill>
                           <a:latin typeface="Arial"/>
                           <a:ea typeface="微軟正黑體"/>
                           <a:cs typeface="Arial"/>
                         </a:rPr>
-                        <a:t>【待補：Sprint 3 生成範例】</a:t>
+                        <a:t>App 通知</a:t>
+                      </a:r>
+                    </a:p>
+                    <a:p>
+                      <a:pPr>
+                        <a:lnSpc>
+                          <a:spcPct val="100000"/>
+                        </a:lnSpc>
+                        <a:spcBef>
+                          <a:spcPts val="0"/>
+                        </a:spcBef>
+                        <a:spcAft>
+                          <a:spcPts val="200"/>
+                        </a:spcAft>
+                      </a:pPr>
+                      <a:r>
+                        <a:rPr sz="1000" b="0" i="0">
+                          <a:solidFill>
+                            <a:srgbClr val="24323E"/>
+                          </a:solidFill>
+                          <a:latin typeface="Arial"/>
+                          <a:ea typeface="微軟正黑體"/>
+                          <a:cs typeface="Arial"/>
+                        </a:rPr>
+                        <a:t>您的愛車保固即將屆滿，仍可核對自交車日起4年或行駛120,000公里的新車基本保…</a:t>
                       </a:r>
                     </a:p>
                   </a:txBody>
                   <a:tcPr anchor="ctr" marL="73152" marR="54864" marT="36576" marB="27432">
                     <a:solidFill>
-                      <a:srgbClr val="FDEBD0"/>
+                      <a:srgbClr val="F7F9FB"/>
                     </a:solidFill>
                   </a:tcPr>
                 </a:tc>
@@ -16446,21 +16686,45 @@
                         </a:spcAft>
                       </a:pPr>
                       <a:r>
-                        <a:rPr sz="1200" b="1" i="0">
+                        <a:rPr sz="1000" b="1" i="0">
                           <a:solidFill>
-                            <a:srgbClr val="C05600"/>
+                            <a:srgbClr val="2F5D9F"/>
                           </a:solidFill>
                           <a:latin typeface="Arial"/>
                           <a:ea typeface="微軟正黑體"/>
                           <a:cs typeface="Arial"/>
                         </a:rPr>
-                        <a:t>【待補：Sprint 3 生成範例】</a:t>
+                        <a:t>LINE 官方帳號推播</a:t>
+                      </a:r>
+                    </a:p>
+                    <a:p>
+                      <a:pPr>
+                        <a:lnSpc>
+                          <a:spcPct val="100000"/>
+                        </a:lnSpc>
+                        <a:spcBef>
+                          <a:spcPts val="0"/>
+                        </a:spcBef>
+                        <a:spcAft>
+                          <a:spcPts val="200"/>
+                        </a:spcAft>
+                      </a:pPr>
+                      <a:r>
+                        <a:rPr sz="1000" b="0" i="0">
+                          <a:solidFill>
+                            <a:srgbClr val="24323E"/>
+                          </a:solidFill>
+                          <a:latin typeface="Arial"/>
+                          <a:ea typeface="微軟正黑體"/>
+                          <a:cs typeface="Arial"/>
+                        </a:rPr>
+                        <a:t>若距上次保養已有一段時間，可依一般使用每半年或每一萬公里的週期，視用車狀況安排回…</a:t>
                       </a:r>
                     </a:p>
                   </a:txBody>
                   <a:tcPr anchor="ctr" marL="73152" marR="54864" marT="36576" marB="27432">
                     <a:solidFill>
-                      <a:srgbClr val="FDEBD0"/>
+                      <a:srgbClr val="F7F9FB"/>
                     </a:solidFill>
                   </a:tcPr>
                 </a:tc>
@@ -16481,21 +16745,45 @@
                         </a:spcAft>
                       </a:pPr>
                       <a:r>
-                        <a:rPr sz="1200" b="1" i="0">
+                        <a:rPr sz="1000" b="1" i="0">
                           <a:solidFill>
-                            <a:srgbClr val="C05600"/>
+                            <a:srgbClr val="2F5D9F"/>
                           </a:solidFill>
                           <a:latin typeface="Arial"/>
                           <a:ea typeface="微軟正黑體"/>
                           <a:cs typeface="Arial"/>
                         </a:rPr>
-                        <a:t>【待補：Sprint 3 生成範例】</a:t>
+                        <a:t>Email</a:t>
+                      </a:r>
+                    </a:p>
+                    <a:p>
+                      <a:pPr>
+                        <a:lnSpc>
+                          <a:spcPct val="100000"/>
+                        </a:lnSpc>
+                        <a:spcBef>
+                          <a:spcPts val="0"/>
+                        </a:spcBef>
+                        <a:spcAft>
+                          <a:spcPts val="200"/>
+                        </a:spcAft>
+                      </a:pPr>
+                      <a:r>
+                        <a:rPr sz="1000" b="0" i="0">
+                          <a:solidFill>
+                            <a:srgbClr val="24323E"/>
+                          </a:solidFill>
+                          <a:latin typeface="Arial"/>
+                          <a:ea typeface="微軟正黑體"/>
+                          <a:cs typeface="Arial"/>
+                        </a:rPr>
+                        <a:t>若您想安排回廠，可透過官網或App預約，於回廠前1天以上選擇合適時段；預約保留2…</a:t>
                       </a:r>
                     </a:p>
                   </a:txBody>
                   <a:tcPr anchor="ctr" marL="73152" marR="54864" marT="36576" marB="27432">
                     <a:solidFill>
-                      <a:srgbClr val="FDEBD0"/>
+                      <a:srgbClr val="F7F9FB"/>
                     </a:solidFill>
                   </a:tcPr>
                 </a:tc>
@@ -16512,8 +16800,8 @@
         </p:nvSpPr>
         <p:spPr>
           <a:xfrm>
-            <a:off x="420624" y="3730752"/>
-            <a:ext cx="11356848" cy="777240"/>
+            <a:off x="420624" y="5266944"/>
+            <a:ext cx="11356848" cy="658368"/>
           </a:xfrm>
           <a:prstGeom prst="rect">
             <a:avLst/>
@@ -16538,7 +16826,7 @@
               </a:spcAft>
             </a:pPr>
             <a:r>
-              <a:rPr sz="1500" b="0" i="0">
+              <a:rPr sz="1300" b="1" i="0">
                 <a:solidFill>
                   <a:srgbClr val="24323E"/>
                 </a:solidFill>
@@ -16546,7 +16834,7 @@
                 <a:ea typeface="微軟正黑體"/>
                 <a:cs typeface="Arial"/>
               </a:rPr>
-              <a:t>觸發 → 判 Persona → 生成 → 人工審核 → 投遞 → KPI 回饋。</a:t>
+              <a:t>12 則皆通過知識庫事實查核，人工審核後才投遞。</a:t>
             </a:r>
           </a:p>
           <a:p>
@@ -16562,15 +16850,15 @@
               </a:spcAft>
             </a:pPr>
             <a:r>
-              <a:rPr sz="1400" b="0" i="0">
+              <a:rPr sz="1200" b="0" i="0">
                 <a:solidFill>
-                  <a:srgbClr val="24323E"/>
+                  <a:srgbClr val="5C6B7A"/>
                 </a:solidFill>
                 <a:latin typeface="Arial"/>
                 <a:ea typeface="微軟正黑體"/>
                 <a:cs typeface="Arial"/>
               </a:rPr>
-              <a:t>知識庫已備 40 條。價格與保固只引用有 URL 的條目，不能拿口述中位數當官方定價。</a:t>
+              <a:t>完整文字、引用條目與查核見附錄 knowledge/generated_examples.md。</a:t>
             </a:r>
           </a:p>
         </p:txBody>

--- a/deck/初賽簡報_v0.pptx
+++ b/deck/初賽簡報_v0.pptx
@@ -941,7 +941,7 @@
           <a:lstStyle/>
           <a:p>
             <a:r>
-              <a:t>四Ｂ模型只吐機率、不寫句子，八Ｇ顯卡五小時練完，一句零點七秒。</a:t>
+              <a:t>大模型標答案、按文章切考卷、四位元微調五小時；人工驗證 F1 零點八二。</a:t>
             </a:r>
           </a:p>
         </p:txBody>
@@ -14890,6 +14890,633 @@
           </a:prstGeom>
         </p:spPr>
       </p:pic>
+      <p:sp>
+        <p:nvSpPr>
+          <p:cNvPr id="10" name="Rounded Rectangle 9"/>
+          <p:cNvSpPr/>
+          <p:nvPr/>
+        </p:nvSpPr>
+        <p:spPr>
+          <a:xfrm>
+            <a:off x="420624" y="4507992"/>
+            <a:ext cx="2183587" cy="1234440"/>
+          </a:xfrm>
+          <a:prstGeom prst="roundRect">
+            <a:avLst>
+              <a:gd name="adj" fmla="val 8000"/>
+            </a:avLst>
+          </a:prstGeom>
+          <a:solidFill>
+            <a:srgbClr val="F4F7FB"/>
+          </a:solidFill>
+          <a:ln>
+            <a:noFill/>
+          </a:ln>
+        </p:spPr>
+        <p:style>
+          <a:lnRef idx="1">
+            <a:schemeClr val="accent1"/>
+          </a:lnRef>
+          <a:fillRef idx="3">
+            <a:schemeClr val="accent1"/>
+          </a:fillRef>
+          <a:effectRef idx="2">
+            <a:schemeClr val="accent1"/>
+          </a:effectRef>
+          <a:fontRef idx="minor">
+            <a:schemeClr val="lt1"/>
+          </a:fontRef>
+        </p:style>
+        <p:txBody>
+          <a:bodyPr rtlCol="0" anchor="ctr"/>
+          <a:lstStyle/>
+          <a:p>
+            <a:pPr algn="ctr"/>
+          </a:p>
+        </p:txBody>
+      </p:sp>
+      <p:sp>
+        <p:nvSpPr>
+          <p:cNvPr id="11" name="TextBox 10"/>
+          <p:cNvSpPr txBox="1"/>
+          <p:nvPr/>
+        </p:nvSpPr>
+        <p:spPr>
+          <a:xfrm>
+            <a:off x="530352" y="4581144"/>
+            <a:ext cx="1964131" cy="1097280"/>
+          </a:xfrm>
+          <a:prstGeom prst="rect">
+            <a:avLst/>
+          </a:prstGeom>
+          <a:noFill/>
+        </p:spPr>
+        <p:txBody>
+          <a:bodyPr wrap="square" lIns="36576" rIns="36576" tIns="18288" bIns="18288" anchor="t">
+            <a:spAutoFit/>
+          </a:bodyPr>
+          <a:lstStyle/>
+          <a:p>
+            <a:pPr>
+              <a:lnSpc>
+                <a:spcPct val="100000"/>
+              </a:lnSpc>
+              <a:spcBef>
+                <a:spcPts val="0"/>
+              </a:spcBef>
+              <a:spcAft>
+                <a:spcPts val="200"/>
+              </a:spcAft>
+            </a:pPr>
+            <a:r>
+              <a:rPr sz="1150" b="1" i="0">
+                <a:solidFill>
+                  <a:srgbClr val="2F5D9F"/>
+                </a:solidFill>
+                <a:latin typeface="Arial"/>
+                <a:ea typeface="微軟正黑體"/>
+                <a:cs typeface="Arial"/>
+              </a:rPr>
+              <a:t>1 ETL＋弱監督標註</a:t>
+            </a:r>
+          </a:p>
+          <a:p>
+            <a:pPr>
+              <a:lnSpc>
+                <a:spcPct val="100000"/>
+              </a:lnSpc>
+              <a:spcBef>
+                <a:spcPts val="0"/>
+              </a:spcBef>
+              <a:spcAft>
+                <a:spcPts val="200"/>
+              </a:spcAft>
+            </a:pPr>
+            <a:r>
+              <a:rPr sz="950" b="0" i="0">
+                <a:solidFill>
+                  <a:srgbClr val="24323E"/>
+                </a:solidFill>
+                <a:latin typeface="Arial"/>
+                <a:ea typeface="微軟正黑體"/>
+                <a:cs typeface="Arial"/>
+              </a:rPr>
+              <a:t>爬蟲→清洗去重→切句→關鍵詞篩選得 21,183 句；LLM-as-labeler 兩段式：Haiku 初篩、Sonnet／GPT 帶上下文複核</a:t>
+            </a:r>
+          </a:p>
+        </p:txBody>
+      </p:sp>
+      <p:sp>
+        <p:nvSpPr>
+          <p:cNvPr id="12" name="Rounded Rectangle 11"/>
+          <p:cNvSpPr/>
+          <p:nvPr/>
+        </p:nvSpPr>
+        <p:spPr>
+          <a:xfrm>
+            <a:off x="2713939" y="4507992"/>
+            <a:ext cx="2183587" cy="1234440"/>
+          </a:xfrm>
+          <a:prstGeom prst="roundRect">
+            <a:avLst>
+              <a:gd name="adj" fmla="val 8000"/>
+            </a:avLst>
+          </a:prstGeom>
+          <a:solidFill>
+            <a:srgbClr val="F4F7FB"/>
+          </a:solidFill>
+          <a:ln>
+            <a:noFill/>
+          </a:ln>
+        </p:spPr>
+        <p:style>
+          <a:lnRef idx="1">
+            <a:schemeClr val="accent1"/>
+          </a:lnRef>
+          <a:fillRef idx="3">
+            <a:schemeClr val="accent1"/>
+          </a:fillRef>
+          <a:effectRef idx="2">
+            <a:schemeClr val="accent1"/>
+          </a:effectRef>
+          <a:fontRef idx="minor">
+            <a:schemeClr val="lt1"/>
+          </a:fontRef>
+        </p:style>
+        <p:txBody>
+          <a:bodyPr rtlCol="0" anchor="ctr"/>
+          <a:lstStyle/>
+          <a:p>
+            <a:pPr algn="ctr"/>
+          </a:p>
+        </p:txBody>
+      </p:sp>
+      <p:sp>
+        <p:nvSpPr>
+          <p:cNvPr id="13" name="TextBox 12"/>
+          <p:cNvSpPr txBox="1"/>
+          <p:nvPr/>
+        </p:nvSpPr>
+        <p:spPr>
+          <a:xfrm>
+            <a:off x="2823667" y="4581144"/>
+            <a:ext cx="1964131" cy="1097280"/>
+          </a:xfrm>
+          <a:prstGeom prst="rect">
+            <a:avLst/>
+          </a:prstGeom>
+          <a:noFill/>
+        </p:spPr>
+        <p:txBody>
+          <a:bodyPr wrap="square" lIns="36576" rIns="36576" tIns="18288" bIns="18288" anchor="t">
+            <a:spAutoFit/>
+          </a:bodyPr>
+          <a:lstStyle/>
+          <a:p>
+            <a:pPr>
+              <a:lnSpc>
+                <a:spcPct val="100000"/>
+              </a:lnSpc>
+              <a:spcBef>
+                <a:spcPts val="0"/>
+              </a:spcBef>
+              <a:spcAft>
+                <a:spcPts val="200"/>
+              </a:spcAft>
+            </a:pPr>
+            <a:r>
+              <a:rPr sz="1150" b="1" i="0">
+                <a:solidFill>
+                  <a:srgbClr val="2F5D9F"/>
+                </a:solidFill>
+                <a:latin typeface="Arial"/>
+                <a:ea typeface="微軟正黑體"/>
+                <a:cs typeface="Arial"/>
+              </a:rPr>
+              <a:t>2 資料切分（防洩漏）</a:t>
+            </a:r>
+          </a:p>
+          <a:p>
+            <a:pPr>
+              <a:lnSpc>
+                <a:spcPct val="100000"/>
+              </a:lnSpc>
+              <a:spcBef>
+                <a:spcPts val="0"/>
+              </a:spcBef>
+              <a:spcAft>
+                <a:spcPts val="200"/>
+              </a:spcAft>
+            </a:pPr>
+            <a:r>
+              <a:rPr sz="950" b="0" i="0">
+                <a:solidFill>
+                  <a:srgbClr val="24323E"/>
+                </a:solidFill>
+                <a:latin typeface="Arial"/>
+                <a:ea typeface="微軟正黑體"/>
+                <a:cs typeface="Arial"/>
+              </a:rPr>
+              <a:t>GroupSplit 按 doc_id：600 句 held-out 測試集整篇排除；驗證 1,096、訓練池 9,431</a:t>
+            </a:r>
+          </a:p>
+        </p:txBody>
+      </p:sp>
+      <p:sp>
+        <p:nvSpPr>
+          <p:cNvPr id="14" name="Rounded Rectangle 13"/>
+          <p:cNvSpPr/>
+          <p:nvPr/>
+        </p:nvSpPr>
+        <p:spPr>
+          <a:xfrm>
+            <a:off x="5007254" y="4507992"/>
+            <a:ext cx="2183587" cy="1234440"/>
+          </a:xfrm>
+          <a:prstGeom prst="roundRect">
+            <a:avLst>
+              <a:gd name="adj" fmla="val 8000"/>
+            </a:avLst>
+          </a:prstGeom>
+          <a:solidFill>
+            <a:srgbClr val="F4F7FB"/>
+          </a:solidFill>
+          <a:ln>
+            <a:noFill/>
+          </a:ln>
+        </p:spPr>
+        <p:style>
+          <a:lnRef idx="1">
+            <a:schemeClr val="accent1"/>
+          </a:lnRef>
+          <a:fillRef idx="3">
+            <a:schemeClr val="accent1"/>
+          </a:fillRef>
+          <a:effectRef idx="2">
+            <a:schemeClr val="accent1"/>
+          </a:effectRef>
+          <a:fontRef idx="minor">
+            <a:schemeClr val="lt1"/>
+          </a:fontRef>
+        </p:style>
+        <p:txBody>
+          <a:bodyPr rtlCol="0" anchor="ctr"/>
+          <a:lstStyle/>
+          <a:p>
+            <a:pPr algn="ctr"/>
+          </a:p>
+        </p:txBody>
+      </p:sp>
+      <p:sp>
+        <p:nvSpPr>
+          <p:cNvPr id="15" name="TextBox 14"/>
+          <p:cNvSpPr txBox="1"/>
+          <p:nvPr/>
+        </p:nvSpPr>
+        <p:spPr>
+          <a:xfrm>
+            <a:off x="5116982" y="4581144"/>
+            <a:ext cx="1964131" cy="1097280"/>
+          </a:xfrm>
+          <a:prstGeom prst="rect">
+            <a:avLst/>
+          </a:prstGeom>
+          <a:noFill/>
+        </p:spPr>
+        <p:txBody>
+          <a:bodyPr wrap="square" lIns="36576" rIns="36576" tIns="18288" bIns="18288" anchor="t">
+            <a:spAutoFit/>
+          </a:bodyPr>
+          <a:lstStyle/>
+          <a:p>
+            <a:pPr>
+              <a:lnSpc>
+                <a:spcPct val="100000"/>
+              </a:lnSpc>
+              <a:spcBef>
+                <a:spcPts val="0"/>
+              </a:spcBef>
+              <a:spcAft>
+                <a:spcPts val="200"/>
+              </a:spcAft>
+            </a:pPr>
+            <a:r>
+              <a:rPr sz="1150" b="1" i="0">
+                <a:solidFill>
+                  <a:srgbClr val="2F5D9F"/>
+                </a:solidFill>
+                <a:latin typeface="Arial"/>
+                <a:ea typeface="微軟正黑體"/>
+                <a:cs typeface="Arial"/>
+              </a:rPr>
+              <a:t>3 任務轉換</a:t>
+            </a:r>
+          </a:p>
+          <a:p>
+            <a:pPr>
+              <a:lnSpc>
+                <a:spcPct val="100000"/>
+              </a:lnSpc>
+              <a:spcBef>
+                <a:spcPts val="0"/>
+              </a:spcBef>
+              <a:spcAft>
+                <a:spcPts val="200"/>
+              </a:spcAft>
+            </a:pPr>
+            <a:r>
+              <a:rPr sz="950" b="0" i="0">
+                <a:solidFill>
+                  <a:srgbClr val="24323E"/>
+                </a:solidFill>
+                <a:latin typeface="Arial"/>
+                <a:ea typeface="微軟正黑體"/>
+                <a:cs typeface="Arial"/>
+              </a:rPr>
+              <a:t>多類別→二元候選：流失四級拆成四個 yes/no 題，prefill-only 只取下一 token 機率</a:t>
+            </a:r>
+          </a:p>
+        </p:txBody>
+      </p:sp>
+      <p:sp>
+        <p:nvSpPr>
+          <p:cNvPr id="16" name="Rounded Rectangle 15"/>
+          <p:cNvSpPr/>
+          <p:nvPr/>
+        </p:nvSpPr>
+        <p:spPr>
+          <a:xfrm>
+            <a:off x="7300569" y="4507992"/>
+            <a:ext cx="2183587" cy="1234440"/>
+          </a:xfrm>
+          <a:prstGeom prst="roundRect">
+            <a:avLst>
+              <a:gd name="adj" fmla="val 8000"/>
+            </a:avLst>
+          </a:prstGeom>
+          <a:solidFill>
+            <a:srgbClr val="F4F7FB"/>
+          </a:solidFill>
+          <a:ln>
+            <a:noFill/>
+          </a:ln>
+        </p:spPr>
+        <p:style>
+          <a:lnRef idx="1">
+            <a:schemeClr val="accent1"/>
+          </a:lnRef>
+          <a:fillRef idx="3">
+            <a:schemeClr val="accent1"/>
+          </a:fillRef>
+          <a:effectRef idx="2">
+            <a:schemeClr val="accent1"/>
+          </a:effectRef>
+          <a:fontRef idx="minor">
+            <a:schemeClr val="lt1"/>
+          </a:fontRef>
+        </p:style>
+        <p:txBody>
+          <a:bodyPr rtlCol="0" anchor="ctr"/>
+          <a:lstStyle/>
+          <a:p>
+            <a:pPr algn="ctr"/>
+          </a:p>
+        </p:txBody>
+      </p:sp>
+      <p:sp>
+        <p:nvSpPr>
+          <p:cNvPr id="17" name="TextBox 16"/>
+          <p:cNvSpPr txBox="1"/>
+          <p:nvPr/>
+        </p:nvSpPr>
+        <p:spPr>
+          <a:xfrm>
+            <a:off x="7410297" y="4581144"/>
+            <a:ext cx="1964131" cy="1097280"/>
+          </a:xfrm>
+          <a:prstGeom prst="rect">
+            <a:avLst/>
+          </a:prstGeom>
+          <a:noFill/>
+        </p:spPr>
+        <p:txBody>
+          <a:bodyPr wrap="square" lIns="36576" rIns="36576" tIns="18288" bIns="18288" anchor="t">
+            <a:spAutoFit/>
+          </a:bodyPr>
+          <a:lstStyle/>
+          <a:p>
+            <a:pPr>
+              <a:lnSpc>
+                <a:spcPct val="100000"/>
+              </a:lnSpc>
+              <a:spcBef>
+                <a:spcPts val="0"/>
+              </a:spcBef>
+              <a:spcAft>
+                <a:spcPts val="200"/>
+              </a:spcAft>
+            </a:pPr>
+            <a:r>
+              <a:rPr sz="1150" b="1" i="0">
+                <a:solidFill>
+                  <a:srgbClr val="2F5D9F"/>
+                </a:solidFill>
+                <a:latin typeface="Arial"/>
+                <a:ea typeface="微軟正黑體"/>
+                <a:cs typeface="Arial"/>
+              </a:rPr>
+              <a:t>4 監督式微調 SFT</a:t>
+            </a:r>
+          </a:p>
+          <a:p>
+            <a:pPr>
+              <a:lnSpc>
+                <a:spcPct val="100000"/>
+              </a:lnSpc>
+              <a:spcBef>
+                <a:spcPts val="0"/>
+              </a:spcBef>
+              <a:spcAft>
+                <a:spcPts val="200"/>
+              </a:spcAft>
+            </a:pPr>
+            <a:r>
+              <a:rPr sz="950" b="0" i="0">
+                <a:solidFill>
+                  <a:srgbClr val="24323E"/>
+                </a:solidFill>
+                <a:latin typeface="Arial"/>
+                <a:ea typeface="微軟正黑體"/>
+                <a:cs typeface="Arial"/>
+              </a:rPr>
+              <a:t>Qwen3-4B NF4 4-bit QLoRA（r=16）；類別不平衡用過採樣至四成；2 epoch、8 GB VRAM、5 小時</a:t>
+            </a:r>
+          </a:p>
+        </p:txBody>
+      </p:sp>
+      <p:sp>
+        <p:nvSpPr>
+          <p:cNvPr id="18" name="Rounded Rectangle 17"/>
+          <p:cNvSpPr/>
+          <p:nvPr/>
+        </p:nvSpPr>
+        <p:spPr>
+          <a:xfrm>
+            <a:off x="9593884" y="4507992"/>
+            <a:ext cx="2183587" cy="1234440"/>
+          </a:xfrm>
+          <a:prstGeom prst="roundRect">
+            <a:avLst>
+              <a:gd name="adj" fmla="val 8000"/>
+            </a:avLst>
+          </a:prstGeom>
+          <a:solidFill>
+            <a:srgbClr val="F4F7FB"/>
+          </a:solidFill>
+          <a:ln>
+            <a:noFill/>
+          </a:ln>
+        </p:spPr>
+        <p:style>
+          <a:lnRef idx="1">
+            <a:schemeClr val="accent1"/>
+          </a:lnRef>
+          <a:fillRef idx="3">
+            <a:schemeClr val="accent1"/>
+          </a:fillRef>
+          <a:effectRef idx="2">
+            <a:schemeClr val="accent1"/>
+          </a:effectRef>
+          <a:fontRef idx="minor">
+            <a:schemeClr val="lt1"/>
+          </a:fontRef>
+        </p:style>
+        <p:txBody>
+          <a:bodyPr rtlCol="0" anchor="ctr"/>
+          <a:lstStyle/>
+          <a:p>
+            <a:pPr algn="ctr"/>
+          </a:p>
+        </p:txBody>
+      </p:sp>
+      <p:sp>
+        <p:nvSpPr>
+          <p:cNvPr id="19" name="TextBox 18"/>
+          <p:cNvSpPr txBox="1"/>
+          <p:nvPr/>
+        </p:nvSpPr>
+        <p:spPr>
+          <a:xfrm>
+            <a:off x="9703612" y="4581144"/>
+            <a:ext cx="1964131" cy="1097280"/>
+          </a:xfrm>
+          <a:prstGeom prst="rect">
+            <a:avLst/>
+          </a:prstGeom>
+          <a:noFill/>
+        </p:spPr>
+        <p:txBody>
+          <a:bodyPr wrap="square" lIns="36576" rIns="36576" tIns="18288" bIns="18288" anchor="t">
+            <a:spAutoFit/>
+          </a:bodyPr>
+          <a:lstStyle/>
+          <a:p>
+            <a:pPr>
+              <a:lnSpc>
+                <a:spcPct val="100000"/>
+              </a:lnSpc>
+              <a:spcBef>
+                <a:spcPts val="0"/>
+              </a:spcBef>
+              <a:spcAft>
+                <a:spcPts val="200"/>
+              </a:spcAft>
+            </a:pPr>
+            <a:r>
+              <a:rPr sz="1150" b="1" i="0">
+                <a:solidFill>
+                  <a:srgbClr val="2F5D9F"/>
+                </a:solidFill>
+                <a:latin typeface="Arial"/>
+                <a:ea typeface="微軟正黑體"/>
+                <a:cs typeface="Arial"/>
+              </a:rPr>
+              <a:t>5 評估與校準</a:t>
+            </a:r>
+          </a:p>
+          <a:p>
+            <a:pPr>
+              <a:lnSpc>
+                <a:spcPct val="100000"/>
+              </a:lnSpc>
+              <a:spcBef>
+                <a:spcPts val="0"/>
+              </a:spcBef>
+              <a:spcAft>
+                <a:spcPts val="200"/>
+              </a:spcAft>
+            </a:pPr>
+            <a:r>
+              <a:rPr sz="950" b="0" i="0">
+                <a:solidFill>
+                  <a:srgbClr val="24323E"/>
+                </a:solidFill>
+                <a:latin typeface="Arial"/>
+                <a:ea typeface="微軟正黑體"/>
+                <a:cs typeface="Arial"/>
+              </a:rPr>
+              <a:t>P／R／F1／Cohen's κ；五段 reliability bins；人工金標 300 句：隨機層 F1 0.82、κ 0.81</a:t>
+            </a:r>
+          </a:p>
+        </p:txBody>
+      </p:sp>
+      <p:sp>
+        <p:nvSpPr>
+          <p:cNvPr id="20" name="TextBox 19"/>
+          <p:cNvSpPr txBox="1"/>
+          <p:nvPr/>
+        </p:nvSpPr>
+        <p:spPr>
+          <a:xfrm>
+            <a:off x="420624" y="5833872"/>
+            <a:ext cx="11356848" cy="457200"/>
+          </a:xfrm>
+          <a:prstGeom prst="rect">
+            <a:avLst/>
+          </a:prstGeom>
+          <a:noFill/>
+        </p:spPr>
+        <p:txBody>
+          <a:bodyPr wrap="square" lIns="36576" rIns="36576" tIns="18288" bIns="18288" anchor="t">
+            <a:spAutoFit/>
+          </a:bodyPr>
+          <a:lstStyle/>
+          <a:p>
+            <a:pPr>
+              <a:lnSpc>
+                <a:spcPct val="100000"/>
+              </a:lnSpc>
+              <a:spcBef>
+                <a:spcPts val="0"/>
+              </a:spcBef>
+              <a:spcAft>
+                <a:spcPts val="200"/>
+              </a:spcAft>
+            </a:pPr>
+            <a:r>
+              <a:rPr sz="1000" b="0" i="0">
+                <a:solidFill>
+                  <a:srgbClr val="5C6B7A"/>
+                </a:solidFill>
+                <a:latin typeface="Arial"/>
+                <a:ea typeface="微軟正黑體"/>
+                <a:cs typeface="Arial"/>
+              </a:rPr>
+              <a:t>做法沿用 jev 的 System-One 思路（LLM2Jev 開源框架，prefill-only 只出機率），非 jev 官方模型；機率校準以測試集五段分箱事後驗證（最高信心桶約七成為真正例），尚未達官方宣稱水準。</a:t>
+            </a:r>
+          </a:p>
+        </p:txBody>
+      </p:sp>
     </p:spTree>
   </p:cSld>
   <p:clrMapOvr>

--- a/deck/初賽簡報_v0.pptx
+++ b/deck/初賽簡報_v0.pptx
@@ -25,6 +25,7 @@
     <p:sldId id="270" r:id="rId21"/>
     <p:sldId id="271" r:id="rId22"/>
     <p:sldId id="272" r:id="rId23"/>
+    <p:sldId id="273" r:id="rId24"/>
   </p:sldIdLst>
   <p:sldSz cy="6858000" cx="12192000"/>
   <p:notesSz cx="6858000" cy="9144000"/>
@@ -1232,6 +1233,64 @@
           <a:p>
             <a:r>
               <a:t>程式在私有庫，報告從Ｔ１到Ｔ１１，畫面截圖等決賽再補。</a:t>
+            </a:r>
+          </a:p>
+        </p:txBody>
+      </p:sp>
+    </p:spTree>
+  </p:cSld>
+  <p:clrMapOvr>
+    <a:masterClrMapping/>
+  </p:clrMapOvr>
+</p:notes>
+</file>
+
+<file path=ppt/notesSlides/notesSlide18.xml><?xml version="1.0" encoding="utf-8"?>
+<p:notes xmlns:a="http://schemas.openxmlformats.org/drawingml/2006/main" xmlns:p="http://schemas.openxmlformats.org/presentationml/2006/main" xmlns:r="http://schemas.openxmlformats.org/officeDocument/2006/relationships">
+  <p:cSld>
+    <p:spTree>
+      <p:nvGrpSpPr>
+        <p:cNvPr id="1" name=""/>
+        <p:cNvGrpSpPr/>
+        <p:nvPr/>
+      </p:nvGrpSpPr>
+      <p:grpSpPr>
+        <a:xfrm>
+          <a:off x="0" y="0"/>
+          <a:ext cx="0" cy="0"/>
+          <a:chOff x="0" y="0"/>
+          <a:chExt cx="0" cy="0"/>
+        </a:xfrm>
+      </p:grpSpPr>
+      <p:sp>
+        <p:nvSpPr>
+          <p:cNvPr id="2" name="Slide Image Placeholder 1"/>
+          <p:cNvSpPr>
+            <a:spLocks noGrp="1"/>
+          </p:cNvSpPr>
+          <p:nvPr>
+            <p:ph type="sldImg" idx="2"/>
+          </p:nvPr>
+        </p:nvSpPr>
+        <p:spPr/>
+      </p:sp>
+      <p:sp>
+        <p:nvSpPr>
+          <p:cNvPr id="3" name="Notes Placeholder 2"/>
+          <p:cNvSpPr>
+            <a:spLocks noGrp="1"/>
+          </p:cNvSpPr>
+          <p:nvPr>
+            <p:ph type="body" idx="1"/>
+          </p:nvPr>
+        </p:nvSpPr>
+        <p:spPr/>
+        <p:txBody>
+          <a:bodyPr/>
+          <a:lstStyle/>
+          <a:p>
+            <a:r>
+              <a:t>附錄術語表：每個名詞一句定義、一句本案用法，評審追問時翻這頁。</a:t>
             </a:r>
           </a:p>
         </p:txBody>
@@ -21323,6 +21382,1737 @@
           </a:p>
         </p:txBody>
       </p:sp>
+    </p:spTree>
+  </p:cSld>
+  <p:clrMapOvr>
+    <a:masterClrMapping/>
+  </p:clrMapOvr>
+</p:sld>
+</file>
+
+<file path=ppt/slides/slide18.xml><?xml version="1.0" encoding="utf-8"?>
+<p:sld xmlns:a="http://schemas.openxmlformats.org/drawingml/2006/main" xmlns:p="http://schemas.openxmlformats.org/presentationml/2006/main" xmlns:r="http://schemas.openxmlformats.org/officeDocument/2006/relationships">
+  <p:cSld>
+    <p:spTree>
+      <p:nvGrpSpPr>
+        <p:cNvPr id="1" name=""/>
+        <p:cNvGrpSpPr/>
+        <p:nvPr/>
+      </p:nvGrpSpPr>
+      <p:grpSpPr/>
+      <p:sp>
+        <p:nvSpPr>
+          <p:cNvPr id="2" name="TextBox 1"/>
+          <p:cNvSpPr txBox="1"/>
+          <p:nvPr/>
+        </p:nvSpPr>
+        <p:spPr>
+          <a:xfrm>
+            <a:off x="420624" y="91440"/>
+            <a:ext cx="8412480" cy="237744"/>
+          </a:xfrm>
+          <a:prstGeom prst="rect">
+            <a:avLst/>
+          </a:prstGeom>
+          <a:noFill/>
+        </p:spPr>
+        <p:txBody>
+          <a:bodyPr wrap="square" lIns="0" rIns="0" tIns="18288" bIns="18288" anchor="t">
+            <a:spAutoFit/>
+          </a:bodyPr>
+          <a:lstStyle/>
+          <a:p>
+            <a:pPr>
+              <a:lnSpc>
+                <a:spcPct val="100000"/>
+              </a:lnSpc>
+              <a:spcBef>
+                <a:spcPts val="0"/>
+              </a:spcBef>
+              <a:spcAft>
+                <a:spcPts val="200"/>
+              </a:spcAft>
+            </a:pPr>
+            <a:r>
+              <a:rPr sz="1200" b="0" i="0">
+                <a:solidFill>
+                  <a:srgbClr val="44546A"/>
+                </a:solidFill>
+                <a:latin typeface="Arial"/>
+                <a:ea typeface="微軟正黑體"/>
+                <a:cs typeface="Arial"/>
+              </a:rPr>
+              <a:t>附錄 術語表（不計入 15 頁）</a:t>
+            </a:r>
+          </a:p>
+        </p:txBody>
+      </p:sp>
+      <p:sp>
+        <p:nvSpPr>
+          <p:cNvPr id="3" name="TextBox 2"/>
+          <p:cNvSpPr txBox="1"/>
+          <p:nvPr/>
+        </p:nvSpPr>
+        <p:spPr>
+          <a:xfrm>
+            <a:off x="420624" y="6547104"/>
+            <a:ext cx="9418320" cy="219456"/>
+          </a:xfrm>
+          <a:prstGeom prst="rect">
+            <a:avLst/>
+          </a:prstGeom>
+          <a:noFill/>
+        </p:spPr>
+        <p:txBody>
+          <a:bodyPr wrap="square" lIns="0" rIns="0" tIns="18288" bIns="18288" anchor="t">
+            <a:spAutoFit/>
+          </a:bodyPr>
+          <a:lstStyle/>
+          <a:p>
+            <a:pPr>
+              <a:lnSpc>
+                <a:spcPct val="100000"/>
+              </a:lnSpc>
+              <a:spcBef>
+                <a:spcPts val="0"/>
+              </a:spcBef>
+              <a:spcAft>
+                <a:spcPts val="200"/>
+              </a:spcAft>
+            </a:pPr>
+            <a:r>
+              <a:rPr sz="1000" b="0" i="0">
+                <a:solidFill>
+                  <a:srgbClr val="5C6B7A"/>
+                </a:solidFill>
+                <a:latin typeface="Arial"/>
+                <a:ea typeface="微軟正黑體"/>
+                <a:cs typeface="Arial"/>
+              </a:rPr>
+              <a:t>來源：reports/T8_r4_report.md、T9_human_eval.md、T10_risk_persona_report.md</a:t>
+            </a:r>
+          </a:p>
+        </p:txBody>
+      </p:sp>
+      <p:sp>
+        <p:nvSpPr>
+          <p:cNvPr id="4" name="TextBox 3"/>
+          <p:cNvSpPr txBox="1"/>
+          <p:nvPr/>
+        </p:nvSpPr>
+        <p:spPr>
+          <a:xfrm>
+            <a:off x="10378440" y="6547104"/>
+            <a:ext cx="1389888" cy="219456"/>
+          </a:xfrm>
+          <a:prstGeom prst="rect">
+            <a:avLst/>
+          </a:prstGeom>
+          <a:noFill/>
+        </p:spPr>
+        <p:txBody>
+          <a:bodyPr wrap="square" lIns="0" rIns="0" tIns="18288" bIns="18288" anchor="t">
+            <a:spAutoFit/>
+          </a:bodyPr>
+          <a:lstStyle/>
+          <a:p>
+            <a:pPr algn="r">
+              <a:lnSpc>
+                <a:spcPct val="100000"/>
+              </a:lnSpc>
+              <a:spcBef>
+                <a:spcPts val="0"/>
+              </a:spcBef>
+              <a:spcAft>
+                <a:spcPts val="200"/>
+              </a:spcAft>
+            </a:pPr>
+            <a:r>
+              <a:rPr sz="1200" b="0" i="0">
+                <a:solidFill>
+                  <a:srgbClr val="44546A"/>
+                </a:solidFill>
+                <a:latin typeface="Arial"/>
+                <a:ea typeface="微軟正黑體"/>
+                <a:cs typeface="Arial"/>
+              </a:rPr>
+              <a:t>18</a:t>
+            </a:r>
+          </a:p>
+        </p:txBody>
+      </p:sp>
+      <p:sp>
+        <p:nvSpPr>
+          <p:cNvPr id="5" name="TextBox 4"/>
+          <p:cNvSpPr txBox="1"/>
+          <p:nvPr/>
+        </p:nvSpPr>
+        <p:spPr>
+          <a:xfrm>
+            <a:off x="420624" y="329184"/>
+            <a:ext cx="11356848" cy="566928"/>
+          </a:xfrm>
+          <a:prstGeom prst="rect">
+            <a:avLst/>
+          </a:prstGeom>
+          <a:noFill/>
+        </p:spPr>
+        <p:txBody>
+          <a:bodyPr wrap="square" lIns="0" rIns="0" tIns="18288" bIns="18288" anchor="t">
+            <a:spAutoFit/>
+          </a:bodyPr>
+          <a:lstStyle/>
+          <a:p>
+            <a:pPr>
+              <a:lnSpc>
+                <a:spcPct val="100000"/>
+              </a:lnSpc>
+              <a:spcBef>
+                <a:spcPts val="0"/>
+              </a:spcBef>
+              <a:spcAft>
+                <a:spcPts val="200"/>
+              </a:spcAft>
+            </a:pPr>
+            <a:r>
+              <a:rPr sz="2400" b="1" i="0">
+                <a:solidFill>
+                  <a:srgbClr val="24323E"/>
+                </a:solidFill>
+                <a:latin typeface="Arial"/>
+                <a:ea typeface="微軟正黑體"/>
+                <a:cs typeface="Arial"/>
+              </a:rPr>
+              <a:t>本案用到的技術名詞：定義與在本案的用法</a:t>
+            </a:r>
+          </a:p>
+        </p:txBody>
+      </p:sp>
+      <p:graphicFrame>
+        <p:nvGraphicFramePr>
+          <p:cNvPr id="6" name="Table 5"/>
+          <p:cNvGraphicFramePr>
+            <a:graphicFrameLocks noGrp="1"/>
+          </p:cNvGraphicFramePr>
+          <p:nvPr/>
+        </p:nvGraphicFramePr>
+        <p:xfrm>
+          <a:off x="420624" y="987552"/>
+          <a:ext cx="11356848" cy="5120640"/>
+        </p:xfrm>
+        <a:graphic>
+          <a:graphicData uri="http://schemas.openxmlformats.org/drawingml/2006/table">
+            <a:tbl>
+              <a:tblPr firstRow="1" bandRow="1">
+                <a:tableStyleId>{5C22544A-7EE6-4342-B048-85BDC9FD1C3A}</a:tableStyleId>
+              </a:tblPr>
+              <a:tblGrid>
+                <a:gridCol w="2377440"/>
+                <a:gridCol w="4572000"/>
+                <a:gridCol w="4407408"/>
+              </a:tblGrid>
+              <a:tr h="365760">
+                <a:tc>
+                  <a:txBody>
+                    <a:bodyPr wrap="square" anchor="ctr"/>
+                    <a:lstStyle/>
+                    <a:p>
+                      <a:pPr>
+                        <a:lnSpc>
+                          <a:spcPct val="100000"/>
+                        </a:lnSpc>
+                        <a:spcBef>
+                          <a:spcPts val="0"/>
+                        </a:spcBef>
+                        <a:spcAft>
+                          <a:spcPts val="200"/>
+                        </a:spcAft>
+                      </a:pPr>
+                      <a:r>
+                        <a:rPr sz="950" b="1" i="0">
+                          <a:solidFill>
+                            <a:srgbClr val="FFFFFF"/>
+                          </a:solidFill>
+                          <a:latin typeface="Arial"/>
+                          <a:ea typeface="微軟正黑體"/>
+                          <a:cs typeface="Arial"/>
+                        </a:rPr>
+                        <a:t>名詞</a:t>
+                      </a:r>
+                    </a:p>
+                  </a:txBody>
+                  <a:tcPr anchor="ctr" marL="73152" marR="54864" marT="36576" marB="27432">
+                    <a:solidFill>
+                      <a:srgbClr val="44546A"/>
+                    </a:solidFill>
+                  </a:tcPr>
+                </a:tc>
+                <a:tc>
+                  <a:txBody>
+                    <a:bodyPr wrap="square" anchor="ctr"/>
+                    <a:lstStyle/>
+                    <a:p>
+                      <a:pPr>
+                        <a:lnSpc>
+                          <a:spcPct val="100000"/>
+                        </a:lnSpc>
+                        <a:spcBef>
+                          <a:spcPts val="0"/>
+                        </a:spcBef>
+                        <a:spcAft>
+                          <a:spcPts val="200"/>
+                        </a:spcAft>
+                      </a:pPr>
+                      <a:r>
+                        <a:rPr sz="950" b="1" i="0">
+                          <a:solidFill>
+                            <a:srgbClr val="FFFFFF"/>
+                          </a:solidFill>
+                          <a:latin typeface="Arial"/>
+                          <a:ea typeface="微軟正黑體"/>
+                          <a:cs typeface="Arial"/>
+                        </a:rPr>
+                        <a:t>定義</a:t>
+                      </a:r>
+                    </a:p>
+                  </a:txBody>
+                  <a:tcPr anchor="ctr" marL="73152" marR="54864" marT="36576" marB="27432">
+                    <a:solidFill>
+                      <a:srgbClr val="44546A"/>
+                    </a:solidFill>
+                  </a:tcPr>
+                </a:tc>
+                <a:tc>
+                  <a:txBody>
+                    <a:bodyPr wrap="square" anchor="ctr"/>
+                    <a:lstStyle/>
+                    <a:p>
+                      <a:pPr>
+                        <a:lnSpc>
+                          <a:spcPct val="100000"/>
+                        </a:lnSpc>
+                        <a:spcBef>
+                          <a:spcPts val="0"/>
+                        </a:spcBef>
+                        <a:spcAft>
+                          <a:spcPts val="200"/>
+                        </a:spcAft>
+                      </a:pPr>
+                      <a:r>
+                        <a:rPr sz="950" b="1" i="0">
+                          <a:solidFill>
+                            <a:srgbClr val="FFFFFF"/>
+                          </a:solidFill>
+                          <a:latin typeface="Arial"/>
+                          <a:ea typeface="微軟正黑體"/>
+                          <a:cs typeface="Arial"/>
+                        </a:rPr>
+                        <a:t>本案用法</a:t>
+                      </a:r>
+                    </a:p>
+                  </a:txBody>
+                  <a:tcPr anchor="ctr" marL="73152" marR="54864" marT="36576" marB="27432">
+                    <a:solidFill>
+                      <a:srgbClr val="44546A"/>
+                    </a:solidFill>
+                  </a:tcPr>
+                </a:tc>
+              </a:tr>
+              <a:tr h="365760">
+                <a:tc>
+                  <a:txBody>
+                    <a:bodyPr wrap="square" anchor="ctr"/>
+                    <a:lstStyle/>
+                    <a:p>
+                      <a:pPr>
+                        <a:lnSpc>
+                          <a:spcPct val="100000"/>
+                        </a:lnSpc>
+                        <a:spcBef>
+                          <a:spcPts val="0"/>
+                        </a:spcBef>
+                        <a:spcAft>
+                          <a:spcPts val="200"/>
+                        </a:spcAft>
+                      </a:pPr>
+                      <a:r>
+                        <a:rPr sz="950" b="1" i="0">
+                          <a:solidFill>
+                            <a:srgbClr val="24323E"/>
+                          </a:solidFill>
+                          <a:latin typeface="Arial"/>
+                          <a:ea typeface="微軟正黑體"/>
+                          <a:cs typeface="Arial"/>
+                        </a:rPr>
+                        <a:t>ETL</a:t>
+                      </a:r>
+                    </a:p>
+                  </a:txBody>
+                  <a:tcPr anchor="ctr" marL="73152" marR="54864" marT="36576" marB="27432">
+                    <a:solidFill>
+                      <a:srgbClr val="FFFFFF"/>
+                    </a:solidFill>
+                  </a:tcPr>
+                </a:tc>
+                <a:tc>
+                  <a:txBody>
+                    <a:bodyPr wrap="square" anchor="ctr"/>
+                    <a:lstStyle/>
+                    <a:p>
+                      <a:pPr>
+                        <a:lnSpc>
+                          <a:spcPct val="100000"/>
+                        </a:lnSpc>
+                        <a:spcBef>
+                          <a:spcPts val="0"/>
+                        </a:spcBef>
+                        <a:spcAft>
+                          <a:spcPts val="200"/>
+                        </a:spcAft>
+                      </a:pPr>
+                      <a:r>
+                        <a:rPr sz="950" b="0" i="0">
+                          <a:solidFill>
+                            <a:srgbClr val="24323E"/>
+                          </a:solidFill>
+                          <a:latin typeface="Arial"/>
+                          <a:ea typeface="微軟正黑體"/>
+                          <a:cs typeface="Arial"/>
+                        </a:rPr>
+                        <a:t>Extract-Transform-Load：擷取、清洗轉換、載入。與 ELT（先載入再轉換）不同</a:t>
+                      </a:r>
+                    </a:p>
+                  </a:txBody>
+                  <a:tcPr anchor="ctr" marL="73152" marR="54864" marT="36576" marB="27432">
+                    <a:solidFill>
+                      <a:srgbClr val="FFFFFF"/>
+                    </a:solidFill>
+                  </a:tcPr>
+                </a:tc>
+                <a:tc>
+                  <a:txBody>
+                    <a:bodyPr wrap="square" anchor="ctr"/>
+                    <a:lstStyle/>
+                    <a:p>
+                      <a:pPr>
+                        <a:lnSpc>
+                          <a:spcPct val="100000"/>
+                        </a:lnSpc>
+                        <a:spcBef>
+                          <a:spcPts val="0"/>
+                        </a:spcBef>
+                        <a:spcAft>
+                          <a:spcPts val="200"/>
+                        </a:spcAft>
+                      </a:pPr>
+                      <a:r>
+                        <a:rPr sz="950" b="0" i="0">
+                          <a:solidFill>
+                            <a:srgbClr val="24323E"/>
+                          </a:solidFill>
+                          <a:latin typeface="Arial"/>
+                          <a:ea typeface="微軟正黑體"/>
+                          <a:cs typeface="Arial"/>
+                        </a:rPr>
+                        <a:t>爬蟲擷取→去重、切句、售後關鍵詞篩選→寫入 jsonl；23.6 萬句留 21,183 句</a:t>
+                      </a:r>
+                    </a:p>
+                  </a:txBody>
+                  <a:tcPr anchor="ctr" marL="73152" marR="54864" marT="36576" marB="27432">
+                    <a:solidFill>
+                      <a:srgbClr val="FFFFFF"/>
+                    </a:solidFill>
+                  </a:tcPr>
+                </a:tc>
+              </a:tr>
+              <a:tr h="365760">
+                <a:tc>
+                  <a:txBody>
+                    <a:bodyPr wrap="square" anchor="ctr"/>
+                    <a:lstStyle/>
+                    <a:p>
+                      <a:pPr>
+                        <a:lnSpc>
+                          <a:spcPct val="100000"/>
+                        </a:lnSpc>
+                        <a:spcBef>
+                          <a:spcPts val="0"/>
+                        </a:spcBef>
+                        <a:spcAft>
+                          <a:spcPts val="200"/>
+                        </a:spcAft>
+                      </a:pPr>
+                      <a:r>
+                        <a:rPr sz="950" b="1" i="0">
+                          <a:solidFill>
+                            <a:srgbClr val="24323E"/>
+                          </a:solidFill>
+                          <a:latin typeface="Arial"/>
+                          <a:ea typeface="微軟正黑體"/>
+                          <a:cs typeface="Arial"/>
+                        </a:rPr>
+                        <a:t>弱監督標註（LLM-as-labeler）</a:t>
+                      </a:r>
+                    </a:p>
+                  </a:txBody>
+                  <a:tcPr anchor="ctr" marL="73152" marR="54864" marT="36576" marB="27432">
+                    <a:solidFill>
+                      <a:srgbClr val="F7F9FB"/>
+                    </a:solidFill>
+                  </a:tcPr>
+                </a:tc>
+                <a:tc>
+                  <a:txBody>
+                    <a:bodyPr wrap="square" anchor="ctr"/>
+                    <a:lstStyle/>
+                    <a:p>
+                      <a:pPr>
+                        <a:lnSpc>
+                          <a:spcPct val="100000"/>
+                        </a:lnSpc>
+                        <a:spcBef>
+                          <a:spcPts val="0"/>
+                        </a:spcBef>
+                        <a:spcAft>
+                          <a:spcPts val="200"/>
+                        </a:spcAft>
+                      </a:pPr>
+                      <a:r>
+                        <a:rPr sz="950" b="0" i="0">
+                          <a:solidFill>
+                            <a:srgbClr val="24323E"/>
+                          </a:solidFill>
+                          <a:latin typeface="Arial"/>
+                          <a:ea typeface="微軟正黑體"/>
+                          <a:cs typeface="Arial"/>
+                        </a:rPr>
+                        <a:t>用模型而非人工產生訓練標籤，事後以人工樣本驗證品質</a:t>
+                      </a:r>
+                    </a:p>
+                  </a:txBody>
+                  <a:tcPr anchor="ctr" marL="73152" marR="54864" marT="36576" marB="27432">
+                    <a:solidFill>
+                      <a:srgbClr val="F7F9FB"/>
+                    </a:solidFill>
+                  </a:tcPr>
+                </a:tc>
+                <a:tc>
+                  <a:txBody>
+                    <a:bodyPr wrap="square" anchor="ctr"/>
+                    <a:lstStyle/>
+                    <a:p>
+                      <a:pPr>
+                        <a:lnSpc>
+                          <a:spcPct val="100000"/>
+                        </a:lnSpc>
+                        <a:spcBef>
+                          <a:spcPts val="0"/>
+                        </a:spcBef>
+                        <a:spcAft>
+                          <a:spcPts val="200"/>
+                        </a:spcAft>
+                      </a:pPr>
+                      <a:r>
+                        <a:rPr sz="950" b="0" i="0">
+                          <a:solidFill>
+                            <a:srgbClr val="24323E"/>
+                          </a:solidFill>
+                          <a:latin typeface="Arial"/>
+                          <a:ea typeface="微軟正黑體"/>
+                          <a:cs typeface="Arial"/>
+                        </a:rPr>
+                        <a:t>Haiku 初篩＋Sonnet／GPT 帶上下文複核；人工 300 句驗證</a:t>
+                      </a:r>
+                    </a:p>
+                  </a:txBody>
+                  <a:tcPr anchor="ctr" marL="73152" marR="54864" marT="36576" marB="27432">
+                    <a:solidFill>
+                      <a:srgbClr val="F7F9FB"/>
+                    </a:solidFill>
+                  </a:tcPr>
+                </a:tc>
+              </a:tr>
+              <a:tr h="365760">
+                <a:tc>
+                  <a:txBody>
+                    <a:bodyPr wrap="square" anchor="ctr"/>
+                    <a:lstStyle/>
+                    <a:p>
+                      <a:pPr>
+                        <a:lnSpc>
+                          <a:spcPct val="100000"/>
+                        </a:lnSpc>
+                        <a:spcBef>
+                          <a:spcPts val="0"/>
+                        </a:spcBef>
+                        <a:spcAft>
+                          <a:spcPts val="200"/>
+                        </a:spcAft>
+                      </a:pPr>
+                      <a:r>
+                        <a:rPr sz="950" b="1" i="0">
+                          <a:solidFill>
+                            <a:srgbClr val="24323E"/>
+                          </a:solidFill>
+                          <a:latin typeface="Arial"/>
+                          <a:ea typeface="微軟正黑體"/>
+                          <a:cs typeface="Arial"/>
+                        </a:rPr>
+                        <a:t>監督式學習／監督式微調 SFT</a:t>
+                      </a:r>
+                    </a:p>
+                  </a:txBody>
+                  <a:tcPr anchor="ctr" marL="73152" marR="54864" marT="36576" marB="27432">
+                    <a:solidFill>
+                      <a:srgbClr val="FFFFFF"/>
+                    </a:solidFill>
+                  </a:tcPr>
+                </a:tc>
+                <a:tc>
+                  <a:txBody>
+                    <a:bodyPr wrap="square" anchor="ctr"/>
+                    <a:lstStyle/>
+                    <a:p>
+                      <a:pPr>
+                        <a:lnSpc>
+                          <a:spcPct val="100000"/>
+                        </a:lnSpc>
+                        <a:spcBef>
+                          <a:spcPts val="0"/>
+                        </a:spcBef>
+                        <a:spcAft>
+                          <a:spcPts val="200"/>
+                        </a:spcAft>
+                      </a:pPr>
+                      <a:r>
+                        <a:rPr sz="950" b="0" i="0">
+                          <a:solidFill>
+                            <a:srgbClr val="24323E"/>
+                          </a:solidFill>
+                          <a:latin typeface="Arial"/>
+                          <a:ea typeface="微軟正黑體"/>
+                          <a:cs typeface="Arial"/>
+                        </a:rPr>
+                        <a:t>用「輸入＋正確答案」訓練；SFT 是在預訓練模型上以標籤資料微調，非從零訓練</a:t>
+                      </a:r>
+                    </a:p>
+                  </a:txBody>
+                  <a:tcPr anchor="ctr" marL="73152" marR="54864" marT="36576" marB="27432">
+                    <a:solidFill>
+                      <a:srgbClr val="FFFFFF"/>
+                    </a:solidFill>
+                  </a:tcPr>
+                </a:tc>
+                <a:tc>
+                  <a:txBody>
+                    <a:bodyPr wrap="square" anchor="ctr"/>
+                    <a:lstStyle/>
+                    <a:p>
+                      <a:pPr>
+                        <a:lnSpc>
+                          <a:spcPct val="100000"/>
+                        </a:lnSpc>
+                        <a:spcBef>
+                          <a:spcPts val="0"/>
+                        </a:spcBef>
+                        <a:spcAft>
+                          <a:spcPts val="200"/>
+                        </a:spcAft>
+                      </a:pPr>
+                      <a:r>
+                        <a:rPr sz="950" b="0" i="0">
+                          <a:solidFill>
+                            <a:srgbClr val="24323E"/>
+                          </a:solidFill>
+                          <a:latin typeface="Arial"/>
+                          <a:ea typeface="微軟正黑體"/>
+                          <a:cs typeface="Arial"/>
+                        </a:rPr>
+                        <a:t>以 21,183 句 LLM 標籤微調 Qwen3-4B</a:t>
+                      </a:r>
+                    </a:p>
+                  </a:txBody>
+                  <a:tcPr anchor="ctr" marL="73152" marR="54864" marT="36576" marB="27432">
+                    <a:solidFill>
+                      <a:srgbClr val="FFFFFF"/>
+                    </a:solidFill>
+                  </a:tcPr>
+                </a:tc>
+              </a:tr>
+              <a:tr h="365760">
+                <a:tc>
+                  <a:txBody>
+                    <a:bodyPr wrap="square" anchor="ctr"/>
+                    <a:lstStyle/>
+                    <a:p>
+                      <a:pPr>
+                        <a:lnSpc>
+                          <a:spcPct val="100000"/>
+                        </a:lnSpc>
+                        <a:spcBef>
+                          <a:spcPts val="0"/>
+                        </a:spcBef>
+                        <a:spcAft>
+                          <a:spcPts val="200"/>
+                        </a:spcAft>
+                      </a:pPr>
+                      <a:r>
+                        <a:rPr sz="950" b="1" i="0">
+                          <a:solidFill>
+                            <a:srgbClr val="24323E"/>
+                          </a:solidFill>
+                          <a:latin typeface="Arial"/>
+                          <a:ea typeface="微軟正黑體"/>
+                          <a:cs typeface="Arial"/>
+                        </a:rPr>
+                        <a:t>QLoRA（NF4 4-bit、LoRA r=16）</a:t>
+                      </a:r>
+                    </a:p>
+                  </a:txBody>
+                  <a:tcPr anchor="ctr" marL="73152" marR="54864" marT="36576" marB="27432">
+                    <a:solidFill>
+                      <a:srgbClr val="F7F9FB"/>
+                    </a:solidFill>
+                  </a:tcPr>
+                </a:tc>
+                <a:tc>
+                  <a:txBody>
+                    <a:bodyPr wrap="square" anchor="ctr"/>
+                    <a:lstStyle/>
+                    <a:p>
+                      <a:pPr>
+                        <a:lnSpc>
+                          <a:spcPct val="100000"/>
+                        </a:lnSpc>
+                        <a:spcBef>
+                          <a:spcPts val="0"/>
+                        </a:spcBef>
+                        <a:spcAft>
+                          <a:spcPts val="200"/>
+                        </a:spcAft>
+                      </a:pPr>
+                      <a:r>
+                        <a:rPr sz="950" b="0" i="0">
+                          <a:solidFill>
+                            <a:srgbClr val="24323E"/>
+                          </a:solidFill>
+                          <a:latin typeface="Arial"/>
+                          <a:ea typeface="微軟正黑體"/>
+                          <a:cs typeface="Arial"/>
+                        </a:rPr>
+                        <a:t>把基底模型量化成 4 位元，只訓練低秩附加參數，省顯存</a:t>
+                      </a:r>
+                    </a:p>
+                  </a:txBody>
+                  <a:tcPr anchor="ctr" marL="73152" marR="54864" marT="36576" marB="27432">
+                    <a:solidFill>
+                      <a:srgbClr val="F7F9FB"/>
+                    </a:solidFill>
+                  </a:tcPr>
+                </a:tc>
+                <a:tc>
+                  <a:txBody>
+                    <a:bodyPr wrap="square" anchor="ctr"/>
+                    <a:lstStyle/>
+                    <a:p>
+                      <a:pPr>
+                        <a:lnSpc>
+                          <a:spcPct val="100000"/>
+                        </a:lnSpc>
+                        <a:spcBef>
+                          <a:spcPts val="0"/>
+                        </a:spcBef>
+                        <a:spcAft>
+                          <a:spcPts val="200"/>
+                        </a:spcAft>
+                      </a:pPr>
+                      <a:r>
+                        <a:rPr sz="950" b="0" i="0">
+                          <a:solidFill>
+                            <a:srgbClr val="24323E"/>
+                          </a:solidFill>
+                          <a:latin typeface="Arial"/>
+                          <a:ea typeface="微軟正黑體"/>
+                          <a:cs typeface="Arial"/>
+                        </a:rPr>
+                        <a:t>8 GB 顯卡 5 小時完成；adapter 約數十 MB</a:t>
+                      </a:r>
+                    </a:p>
+                  </a:txBody>
+                  <a:tcPr anchor="ctr" marL="73152" marR="54864" marT="36576" marB="27432">
+                    <a:solidFill>
+                      <a:srgbClr val="F7F9FB"/>
+                    </a:solidFill>
+                  </a:tcPr>
+                </a:tc>
+              </a:tr>
+              <a:tr h="365760">
+                <a:tc>
+                  <a:txBody>
+                    <a:bodyPr wrap="square" anchor="ctr"/>
+                    <a:lstStyle/>
+                    <a:p>
+                      <a:pPr>
+                        <a:lnSpc>
+                          <a:spcPct val="100000"/>
+                        </a:lnSpc>
+                        <a:spcBef>
+                          <a:spcPts val="0"/>
+                        </a:spcBef>
+                        <a:spcAft>
+                          <a:spcPts val="200"/>
+                        </a:spcAft>
+                      </a:pPr>
+                      <a:r>
+                        <a:rPr sz="950" b="1" i="0">
+                          <a:solidFill>
+                            <a:srgbClr val="24323E"/>
+                          </a:solidFill>
+                          <a:latin typeface="Arial"/>
+                          <a:ea typeface="微軟正黑體"/>
+                          <a:cs typeface="Arial"/>
+                        </a:rPr>
+                        <a:t>GroupSplit／資料洩漏</a:t>
+                      </a:r>
+                    </a:p>
+                  </a:txBody>
+                  <a:tcPr anchor="ctr" marL="73152" marR="54864" marT="36576" marB="27432">
+                    <a:solidFill>
+                      <a:srgbClr val="FFFFFF"/>
+                    </a:solidFill>
+                  </a:tcPr>
+                </a:tc>
+                <a:tc>
+                  <a:txBody>
+                    <a:bodyPr wrap="square" anchor="ctr"/>
+                    <a:lstStyle/>
+                    <a:p>
+                      <a:pPr>
+                        <a:lnSpc>
+                          <a:spcPct val="100000"/>
+                        </a:lnSpc>
+                        <a:spcBef>
+                          <a:spcPts val="0"/>
+                        </a:spcBef>
+                        <a:spcAft>
+                          <a:spcPts val="200"/>
+                        </a:spcAft>
+                      </a:pPr>
+                      <a:r>
+                        <a:rPr sz="950" b="0" i="0">
+                          <a:solidFill>
+                            <a:srgbClr val="24323E"/>
+                          </a:solidFill>
+                          <a:latin typeface="Arial"/>
+                          <a:ea typeface="微軟正黑體"/>
+                          <a:cs typeface="Arial"/>
+                        </a:rPr>
+                        <a:t>依群組（文章）切分訓練與測試，避免同篇句子兩邊都出現而高估</a:t>
+                      </a:r>
+                    </a:p>
+                  </a:txBody>
+                  <a:tcPr anchor="ctr" marL="73152" marR="54864" marT="36576" marB="27432">
+                    <a:solidFill>
+                      <a:srgbClr val="FFFFFF"/>
+                    </a:solidFill>
+                  </a:tcPr>
+                </a:tc>
+                <a:tc>
+                  <a:txBody>
+                    <a:bodyPr wrap="square" anchor="ctr"/>
+                    <a:lstStyle/>
+                    <a:p>
+                      <a:pPr>
+                        <a:lnSpc>
+                          <a:spcPct val="100000"/>
+                        </a:lnSpc>
+                        <a:spcBef>
+                          <a:spcPts val="0"/>
+                        </a:spcBef>
+                        <a:spcAft>
+                          <a:spcPts val="200"/>
+                        </a:spcAft>
+                      </a:pPr>
+                      <a:r>
+                        <a:rPr sz="950" b="0" i="0">
+                          <a:solidFill>
+                            <a:srgbClr val="24323E"/>
+                          </a:solidFill>
+                          <a:latin typeface="Arial"/>
+                          <a:ea typeface="微軟正黑體"/>
+                          <a:cs typeface="Arial"/>
+                        </a:rPr>
+                        <a:t>600 句測試集所在 421 篇整篇排除訓練</a:t>
+                      </a:r>
+                    </a:p>
+                  </a:txBody>
+                  <a:tcPr anchor="ctr" marL="73152" marR="54864" marT="36576" marB="27432">
+                    <a:solidFill>
+                      <a:srgbClr val="FFFFFF"/>
+                    </a:solidFill>
+                  </a:tcPr>
+                </a:tc>
+              </a:tr>
+              <a:tr h="365760">
+                <a:tc>
+                  <a:txBody>
+                    <a:bodyPr wrap="square" anchor="ctr"/>
+                    <a:lstStyle/>
+                    <a:p>
+                      <a:pPr>
+                        <a:lnSpc>
+                          <a:spcPct val="100000"/>
+                        </a:lnSpc>
+                        <a:spcBef>
+                          <a:spcPts val="0"/>
+                        </a:spcBef>
+                        <a:spcAft>
+                          <a:spcPts val="200"/>
+                        </a:spcAft>
+                      </a:pPr>
+                      <a:r>
+                        <a:rPr sz="950" b="1" i="0">
+                          <a:solidFill>
+                            <a:srgbClr val="24323E"/>
+                          </a:solidFill>
+                          <a:latin typeface="Arial"/>
+                          <a:ea typeface="微軟正黑體"/>
+                          <a:cs typeface="Arial"/>
+                        </a:rPr>
+                        <a:t>類別不平衡／過採樣</a:t>
+                      </a:r>
+                    </a:p>
+                  </a:txBody>
+                  <a:tcPr anchor="ctr" marL="73152" marR="54864" marT="36576" marB="27432">
+                    <a:solidFill>
+                      <a:srgbClr val="F7F9FB"/>
+                    </a:solidFill>
+                  </a:tcPr>
+                </a:tc>
+                <a:tc>
+                  <a:txBody>
+                    <a:bodyPr wrap="square" anchor="ctr"/>
+                    <a:lstStyle/>
+                    <a:p>
+                      <a:pPr>
+                        <a:lnSpc>
+                          <a:spcPct val="100000"/>
+                        </a:lnSpc>
+                        <a:spcBef>
+                          <a:spcPts val="0"/>
+                        </a:spcBef>
+                        <a:spcAft>
+                          <a:spcPts val="200"/>
+                        </a:spcAft>
+                      </a:pPr>
+                      <a:r>
+                        <a:rPr sz="950" b="0" i="0">
+                          <a:solidFill>
+                            <a:srgbClr val="24323E"/>
+                          </a:solidFill>
+                          <a:latin typeface="Arial"/>
+                          <a:ea typeface="微軟正黑體"/>
+                          <a:cs typeface="Arial"/>
+                        </a:rPr>
+                        <a:t>正例太少時重複抽樣正例，避免模型全猜負例</a:t>
+                      </a:r>
+                    </a:p>
+                  </a:txBody>
+                  <a:tcPr anchor="ctr" marL="73152" marR="54864" marT="36576" marB="27432">
+                    <a:solidFill>
+                      <a:srgbClr val="F7F9FB"/>
+                    </a:solidFill>
+                  </a:tcPr>
+                </a:tc>
+                <a:tc>
+                  <a:txBody>
+                    <a:bodyPr wrap="square" anchor="ctr"/>
+                    <a:lstStyle/>
+                    <a:p>
+                      <a:pPr>
+                        <a:lnSpc>
+                          <a:spcPct val="100000"/>
+                        </a:lnSpc>
+                        <a:spcBef>
+                          <a:spcPts val="0"/>
+                        </a:spcBef>
+                        <a:spcAft>
+                          <a:spcPts val="200"/>
+                        </a:spcAft>
+                      </a:pPr>
+                      <a:r>
+                        <a:rPr sz="950" b="0" i="0">
+                          <a:solidFill>
+                            <a:srgbClr val="24323E"/>
+                          </a:solidFill>
+                          <a:latin typeface="Arial"/>
+                          <a:ea typeface="微軟正黑體"/>
+                          <a:cs typeface="Arial"/>
+                        </a:rPr>
+                        <a:t>流失句 7.9% → 訓練時提高到四成</a:t>
+                      </a:r>
+                    </a:p>
+                  </a:txBody>
+                  <a:tcPr anchor="ctr" marL="73152" marR="54864" marT="36576" marB="27432">
+                    <a:solidFill>
+                      <a:srgbClr val="F7F9FB"/>
+                    </a:solidFill>
+                  </a:tcPr>
+                </a:tc>
+              </a:tr>
+              <a:tr h="365760">
+                <a:tc>
+                  <a:txBody>
+                    <a:bodyPr wrap="square" anchor="ctr"/>
+                    <a:lstStyle/>
+                    <a:p>
+                      <a:pPr>
+                        <a:lnSpc>
+                          <a:spcPct val="100000"/>
+                        </a:lnSpc>
+                        <a:spcBef>
+                          <a:spcPts val="0"/>
+                        </a:spcBef>
+                        <a:spcAft>
+                          <a:spcPts val="200"/>
+                        </a:spcAft>
+                      </a:pPr>
+                      <a:r>
+                        <a:rPr sz="950" b="1" i="0">
+                          <a:solidFill>
+                            <a:srgbClr val="24323E"/>
+                          </a:solidFill>
+                          <a:latin typeface="Arial"/>
+                          <a:ea typeface="微軟正黑體"/>
+                          <a:cs typeface="Arial"/>
+                        </a:rPr>
+                        <a:t>Prefill-only（System-One 決策）</a:t>
+                      </a:r>
+                    </a:p>
+                  </a:txBody>
+                  <a:tcPr anchor="ctr" marL="73152" marR="54864" marT="36576" marB="27432">
+                    <a:solidFill>
+                      <a:srgbClr val="FFFFFF"/>
+                    </a:solidFill>
+                  </a:tcPr>
+                </a:tc>
+                <a:tc>
+                  <a:txBody>
+                    <a:bodyPr wrap="square" anchor="ctr"/>
+                    <a:lstStyle/>
+                    <a:p>
+                      <a:pPr>
+                        <a:lnSpc>
+                          <a:spcPct val="100000"/>
+                        </a:lnSpc>
+                        <a:spcBef>
+                          <a:spcPts val="0"/>
+                        </a:spcBef>
+                        <a:spcAft>
+                          <a:spcPts val="200"/>
+                        </a:spcAft>
+                      </a:pPr>
+                      <a:r>
+                        <a:rPr sz="950" b="0" i="0">
+                          <a:solidFill>
+                            <a:srgbClr val="24323E"/>
+                          </a:solidFill>
+                          <a:latin typeface="Arial"/>
+                          <a:ea typeface="微軟正黑體"/>
+                          <a:cs typeface="Arial"/>
+                        </a:rPr>
+                        <a:t>只讀 prompt 取下一個 token 在候選選項上的機率，不生成文字，快且可控</a:t>
+                      </a:r>
+                    </a:p>
+                  </a:txBody>
+                  <a:tcPr anchor="ctr" marL="73152" marR="54864" marT="36576" marB="27432">
+                    <a:solidFill>
+                      <a:srgbClr val="FFFFFF"/>
+                    </a:solidFill>
+                  </a:tcPr>
+                </a:tc>
+                <a:tc>
+                  <a:txBody>
+                    <a:bodyPr wrap="square" anchor="ctr"/>
+                    <a:lstStyle/>
+                    <a:p>
+                      <a:pPr>
+                        <a:lnSpc>
+                          <a:spcPct val="100000"/>
+                        </a:lnSpc>
+                        <a:spcBef>
+                          <a:spcPts val="0"/>
+                        </a:spcBef>
+                        <a:spcAft>
+                          <a:spcPts val="200"/>
+                        </a:spcAft>
+                      </a:pPr>
+                      <a:r>
+                        <a:rPr sz="950" b="0" i="0">
+                          <a:solidFill>
+                            <a:srgbClr val="24323E"/>
+                          </a:solidFill>
+                          <a:latin typeface="Arial"/>
+                          <a:ea typeface="微軟正黑體"/>
+                          <a:cs typeface="Arial"/>
+                        </a:rPr>
+                        <a:t>流失四級與立場各成 yes/no 候選題；每句 0.7 秒</a:t>
+                      </a:r>
+                    </a:p>
+                  </a:txBody>
+                  <a:tcPr anchor="ctr" marL="73152" marR="54864" marT="36576" marB="27432">
+                    <a:solidFill>
+                      <a:srgbClr val="FFFFFF"/>
+                    </a:solidFill>
+                  </a:tcPr>
+                </a:tc>
+              </a:tr>
+              <a:tr h="365760">
+                <a:tc>
+                  <a:txBody>
+                    <a:bodyPr wrap="square" anchor="ctr"/>
+                    <a:lstStyle/>
+                    <a:p>
+                      <a:pPr>
+                        <a:lnSpc>
+                          <a:spcPct val="100000"/>
+                        </a:lnSpc>
+                        <a:spcBef>
+                          <a:spcPts val="0"/>
+                        </a:spcBef>
+                        <a:spcAft>
+                          <a:spcPts val="200"/>
+                        </a:spcAft>
+                      </a:pPr>
+                      <a:r>
+                        <a:rPr sz="950" b="1" i="0">
+                          <a:solidFill>
+                            <a:srgbClr val="24323E"/>
+                          </a:solidFill>
+                          <a:latin typeface="Arial"/>
+                          <a:ea typeface="微軟正黑體"/>
+                          <a:cs typeface="Arial"/>
+                        </a:rPr>
+                        <a:t>Precision／Recall／F1</a:t>
+                      </a:r>
+                    </a:p>
+                  </a:txBody>
+                  <a:tcPr anchor="ctr" marL="73152" marR="54864" marT="36576" marB="27432">
+                    <a:solidFill>
+                      <a:srgbClr val="F7F9FB"/>
+                    </a:solidFill>
+                  </a:tcPr>
+                </a:tc>
+                <a:tc>
+                  <a:txBody>
+                    <a:bodyPr wrap="square" anchor="ctr"/>
+                    <a:lstStyle/>
+                    <a:p>
+                      <a:pPr>
+                        <a:lnSpc>
+                          <a:spcPct val="100000"/>
+                        </a:lnSpc>
+                        <a:spcBef>
+                          <a:spcPts val="0"/>
+                        </a:spcBef>
+                        <a:spcAft>
+                          <a:spcPts val="200"/>
+                        </a:spcAft>
+                      </a:pPr>
+                      <a:r>
+                        <a:rPr sz="950" b="0" i="0">
+                          <a:solidFill>
+                            <a:srgbClr val="24323E"/>
+                          </a:solidFill>
+                          <a:latin typeface="Arial"/>
+                          <a:ea typeface="微軟正黑體"/>
+                          <a:cs typeface="Arial"/>
+                        </a:rPr>
+                        <a:t>報流失的句子有多少是真的／真的流失有多少被抓到／兩者調和平均</a:t>
+                      </a:r>
+                    </a:p>
+                  </a:txBody>
+                  <a:tcPr anchor="ctr" marL="73152" marR="54864" marT="36576" marB="27432">
+                    <a:solidFill>
+                      <a:srgbClr val="F7F9FB"/>
+                    </a:solidFill>
+                  </a:tcPr>
+                </a:tc>
+                <a:tc>
+                  <a:txBody>
+                    <a:bodyPr wrap="square" anchor="ctr"/>
+                    <a:lstStyle/>
+                    <a:p>
+                      <a:pPr>
+                        <a:lnSpc>
+                          <a:spcPct val="100000"/>
+                        </a:lnSpc>
+                        <a:spcBef>
+                          <a:spcPts val="0"/>
+                        </a:spcBef>
+                        <a:spcAft>
+                          <a:spcPts val="200"/>
+                        </a:spcAft>
+                      </a:pPr>
+                      <a:r>
+                        <a:rPr sz="950" b="0" i="0">
+                          <a:solidFill>
+                            <a:srgbClr val="24323E"/>
+                          </a:solidFill>
+                          <a:latin typeface="Arial"/>
+                          <a:ea typeface="微軟正黑體"/>
+                          <a:cs typeface="Arial"/>
+                        </a:rPr>
+                        <a:t>r4 隨機層 P 0.88、R 0.78、F1 0.82</a:t>
+                      </a:r>
+                    </a:p>
+                  </a:txBody>
+                  <a:tcPr anchor="ctr" marL="73152" marR="54864" marT="36576" marB="27432">
+                    <a:solidFill>
+                      <a:srgbClr val="F7F9FB"/>
+                    </a:solidFill>
+                  </a:tcPr>
+                </a:tc>
+              </a:tr>
+              <a:tr h="365760">
+                <a:tc>
+                  <a:txBody>
+                    <a:bodyPr wrap="square" anchor="ctr"/>
+                    <a:lstStyle/>
+                    <a:p>
+                      <a:pPr>
+                        <a:lnSpc>
+                          <a:spcPct val="100000"/>
+                        </a:lnSpc>
+                        <a:spcBef>
+                          <a:spcPts val="0"/>
+                        </a:spcBef>
+                        <a:spcAft>
+                          <a:spcPts val="200"/>
+                        </a:spcAft>
+                      </a:pPr>
+                      <a:r>
+                        <a:rPr sz="950" b="1" i="0">
+                          <a:solidFill>
+                            <a:srgbClr val="24323E"/>
+                          </a:solidFill>
+                          <a:latin typeface="Arial"/>
+                          <a:ea typeface="微軟正黑體"/>
+                          <a:cs typeface="Arial"/>
+                        </a:rPr>
+                        <a:t>Cohen's κ</a:t>
+                      </a:r>
+                    </a:p>
+                  </a:txBody>
+                  <a:tcPr anchor="ctr" marL="73152" marR="54864" marT="36576" marB="27432">
+                    <a:solidFill>
+                      <a:srgbClr val="FFFFFF"/>
+                    </a:solidFill>
+                  </a:tcPr>
+                </a:tc>
+                <a:tc>
+                  <a:txBody>
+                    <a:bodyPr wrap="square" anchor="ctr"/>
+                    <a:lstStyle/>
+                    <a:p>
+                      <a:pPr>
+                        <a:lnSpc>
+                          <a:spcPct val="100000"/>
+                        </a:lnSpc>
+                        <a:spcBef>
+                          <a:spcPts val="0"/>
+                        </a:spcBef>
+                        <a:spcAft>
+                          <a:spcPts val="200"/>
+                        </a:spcAft>
+                      </a:pPr>
+                      <a:r>
+                        <a:rPr sz="950" b="0" i="0">
+                          <a:solidFill>
+                            <a:srgbClr val="24323E"/>
+                          </a:solidFill>
+                          <a:latin typeface="Arial"/>
+                          <a:ea typeface="微軟正黑體"/>
+                          <a:cs typeface="Arial"/>
+                        </a:rPr>
+                        <a:t>扣掉瞎猜也會對的部分後的一致程度；0.6 以上算好</a:t>
+                      </a:r>
+                    </a:p>
+                  </a:txBody>
+                  <a:tcPr anchor="ctr" marL="73152" marR="54864" marT="36576" marB="27432">
+                    <a:solidFill>
+                      <a:srgbClr val="FFFFFF"/>
+                    </a:solidFill>
+                  </a:tcPr>
+                </a:tc>
+                <a:tc>
+                  <a:txBody>
+                    <a:bodyPr wrap="square" anchor="ctr"/>
+                    <a:lstStyle/>
+                    <a:p>
+                      <a:pPr>
+                        <a:lnSpc>
+                          <a:spcPct val="100000"/>
+                        </a:lnSpc>
+                        <a:spcBef>
+                          <a:spcPts val="0"/>
+                        </a:spcBef>
+                        <a:spcAft>
+                          <a:spcPts val="200"/>
+                        </a:spcAft>
+                      </a:pPr>
+                      <a:r>
+                        <a:rPr sz="950" b="0" i="0">
+                          <a:solidFill>
+                            <a:srgbClr val="24323E"/>
+                          </a:solidFill>
+                          <a:latin typeface="Arial"/>
+                          <a:ea typeface="微軟正黑體"/>
+                          <a:cs typeface="Arial"/>
+                        </a:rPr>
+                        <a:t>人工兩人 κ 0.40（仲裁後成金標）；r4 對人工 κ 0.81</a:t>
+                      </a:r>
+                    </a:p>
+                  </a:txBody>
+                  <a:tcPr anchor="ctr" marL="73152" marR="54864" marT="36576" marB="27432">
+                    <a:solidFill>
+                      <a:srgbClr val="FFFFFF"/>
+                    </a:solidFill>
+                  </a:tcPr>
+                </a:tc>
+              </a:tr>
+              <a:tr h="365760">
+                <a:tc>
+                  <a:txBody>
+                    <a:bodyPr wrap="square" anchor="ctr"/>
+                    <a:lstStyle/>
+                    <a:p>
+                      <a:pPr>
+                        <a:lnSpc>
+                          <a:spcPct val="100000"/>
+                        </a:lnSpc>
+                        <a:spcBef>
+                          <a:spcPts val="0"/>
+                        </a:spcBef>
+                        <a:spcAft>
+                          <a:spcPts val="200"/>
+                        </a:spcAft>
+                      </a:pPr>
+                      <a:r>
+                        <a:rPr sz="950" b="1" i="0">
+                          <a:solidFill>
+                            <a:srgbClr val="24323E"/>
+                          </a:solidFill>
+                          <a:latin typeface="Arial"/>
+                          <a:ea typeface="微軟正黑體"/>
+                          <a:cs typeface="Arial"/>
+                        </a:rPr>
+                        <a:t>校準（reliability bins）</a:t>
+                      </a:r>
+                    </a:p>
+                  </a:txBody>
+                  <a:tcPr anchor="ctr" marL="73152" marR="54864" marT="36576" marB="27432">
+                    <a:solidFill>
+                      <a:srgbClr val="F7F9FB"/>
+                    </a:solidFill>
+                  </a:tcPr>
+                </a:tc>
+                <a:tc>
+                  <a:txBody>
+                    <a:bodyPr wrap="square" anchor="ctr"/>
+                    <a:lstStyle/>
+                    <a:p>
+                      <a:pPr>
+                        <a:lnSpc>
+                          <a:spcPct val="100000"/>
+                        </a:lnSpc>
+                        <a:spcBef>
+                          <a:spcPts val="0"/>
+                        </a:spcBef>
+                        <a:spcAft>
+                          <a:spcPts val="200"/>
+                        </a:spcAft>
+                      </a:pPr>
+                      <a:r>
+                        <a:rPr sz="950" b="0" i="0">
+                          <a:solidFill>
+                            <a:srgbClr val="24323E"/>
+                          </a:solidFill>
+                          <a:latin typeface="Arial"/>
+                          <a:ea typeface="微軟正黑體"/>
+                          <a:cs typeface="Arial"/>
+                        </a:rPr>
+                        <a:t>把預測機率分箱，看每箱實際正例比例是否接近機率</a:t>
+                      </a:r>
+                    </a:p>
+                  </a:txBody>
+                  <a:tcPr anchor="ctr" marL="73152" marR="54864" marT="36576" marB="27432">
+                    <a:solidFill>
+                      <a:srgbClr val="F7F9FB"/>
+                    </a:solidFill>
+                  </a:tcPr>
+                </a:tc>
+                <a:tc>
+                  <a:txBody>
+                    <a:bodyPr wrap="square" anchor="ctr"/>
+                    <a:lstStyle/>
+                    <a:p>
+                      <a:pPr>
+                        <a:lnSpc>
+                          <a:spcPct val="100000"/>
+                        </a:lnSpc>
+                        <a:spcBef>
+                          <a:spcPts val="0"/>
+                        </a:spcBef>
+                        <a:spcAft>
+                          <a:spcPts val="200"/>
+                        </a:spcAft>
+                      </a:pPr>
+                      <a:r>
+                        <a:rPr sz="950" b="0" i="0">
+                          <a:solidFill>
+                            <a:srgbClr val="24323E"/>
+                          </a:solidFill>
+                          <a:latin typeface="Arial"/>
+                          <a:ea typeface="微軟正黑體"/>
+                          <a:cs typeface="Arial"/>
+                        </a:rPr>
+                        <a:t>最高信心桶約七成為真正例，方向對、尚未完全校準</a:t>
+                      </a:r>
+                    </a:p>
+                  </a:txBody>
+                  <a:tcPr anchor="ctr" marL="73152" marR="54864" marT="36576" marB="27432">
+                    <a:solidFill>
+                      <a:srgbClr val="F7F9FB"/>
+                    </a:solidFill>
+                  </a:tcPr>
+                </a:tc>
+              </a:tr>
+              <a:tr h="365760">
+                <a:tc>
+                  <a:txBody>
+                    <a:bodyPr wrap="square" anchor="ctr"/>
+                    <a:lstStyle/>
+                    <a:p>
+                      <a:pPr>
+                        <a:lnSpc>
+                          <a:spcPct val="100000"/>
+                        </a:lnSpc>
+                        <a:spcBef>
+                          <a:spcPts val="0"/>
+                        </a:spcBef>
+                        <a:spcAft>
+                          <a:spcPts val="200"/>
+                        </a:spcAft>
+                      </a:pPr>
+                      <a:r>
+                        <a:rPr sz="950" b="1" i="0">
+                          <a:solidFill>
+                            <a:srgbClr val="24323E"/>
+                          </a:solidFill>
+                          <a:latin typeface="Arial"/>
+                          <a:ea typeface="微軟正黑體"/>
+                          <a:cs typeface="Arial"/>
+                        </a:rPr>
+                        <a:t>χ²、Cramér's V、Wilson CI</a:t>
+                      </a:r>
+                    </a:p>
+                  </a:txBody>
+                  <a:tcPr anchor="ctr" marL="73152" marR="54864" marT="36576" marB="27432">
+                    <a:solidFill>
+                      <a:srgbClr val="FFFFFF"/>
+                    </a:solidFill>
+                  </a:tcPr>
+                </a:tc>
+                <a:tc>
+                  <a:txBody>
+                    <a:bodyPr wrap="square" anchor="ctr"/>
+                    <a:lstStyle/>
+                    <a:p>
+                      <a:pPr>
+                        <a:lnSpc>
+                          <a:spcPct val="100000"/>
+                        </a:lnSpc>
+                        <a:spcBef>
+                          <a:spcPts val="0"/>
+                        </a:spcBef>
+                        <a:spcAft>
+                          <a:spcPts val="200"/>
+                        </a:spcAft>
+                      </a:pPr>
+                      <a:r>
+                        <a:rPr sz="950" b="0" i="0">
+                          <a:solidFill>
+                            <a:srgbClr val="24323E"/>
+                          </a:solidFill>
+                          <a:latin typeface="Arial"/>
+                          <a:ea typeface="微軟正黑體"/>
+                          <a:cs typeface="Arial"/>
+                        </a:rPr>
+                        <a:t>類別關聯檢定、其效果量、比例的信賴區間</a:t>
+                      </a:r>
+                    </a:p>
+                  </a:txBody>
+                  <a:tcPr anchor="ctr" marL="73152" marR="54864" marT="36576" marB="27432">
+                    <a:solidFill>
+                      <a:srgbClr val="FFFFFF"/>
+                    </a:solidFill>
+                  </a:tcPr>
+                </a:tc>
+                <a:tc>
+                  <a:txBody>
+                    <a:bodyPr wrap="square" anchor="ctr"/>
+                    <a:lstStyle/>
+                    <a:p>
+                      <a:pPr>
+                        <a:lnSpc>
+                          <a:spcPct val="100000"/>
+                        </a:lnSpc>
+                        <a:spcBef>
+                          <a:spcPts val="0"/>
+                        </a:spcBef>
+                        <a:spcAft>
+                          <a:spcPts val="200"/>
+                        </a:spcAft>
+                      </a:pPr>
+                      <a:r>
+                        <a:rPr sz="950" b="0" i="0">
+                          <a:solidFill>
+                            <a:srgbClr val="24323E"/>
+                          </a:solidFill>
+                          <a:latin typeface="Arial"/>
+                          <a:ea typeface="微軟正黑體"/>
+                          <a:cs typeface="Arial"/>
+                        </a:rPr>
+                        <a:t>來源流失率差異 χ²=99.5、V=0.125；九面向勝算比</a:t>
+                      </a:r>
+                    </a:p>
+                  </a:txBody>
+                  <a:tcPr anchor="ctr" marL="73152" marR="54864" marT="36576" marB="27432">
+                    <a:solidFill>
+                      <a:srgbClr val="FFFFFF"/>
+                    </a:solidFill>
+                  </a:tcPr>
+                </a:tc>
+              </a:tr>
+              <a:tr h="365760">
+                <a:tc>
+                  <a:txBody>
+                    <a:bodyPr wrap="square" anchor="ctr"/>
+                    <a:lstStyle/>
+                    <a:p>
+                      <a:pPr>
+                        <a:lnSpc>
+                          <a:spcPct val="100000"/>
+                        </a:lnSpc>
+                        <a:spcBef>
+                          <a:spcPts val="0"/>
+                        </a:spcBef>
+                        <a:spcAft>
+                          <a:spcPts val="200"/>
+                        </a:spcAft>
+                      </a:pPr>
+                      <a:r>
+                        <a:rPr sz="950" b="1" i="0">
+                          <a:solidFill>
+                            <a:srgbClr val="24323E"/>
+                          </a:solidFill>
+                          <a:latin typeface="Arial"/>
+                          <a:ea typeface="微軟正黑體"/>
+                          <a:cs typeface="Arial"/>
+                        </a:rPr>
+                        <a:t>RAG（檢索增強生成）</a:t>
+                      </a:r>
+                    </a:p>
+                  </a:txBody>
+                  <a:tcPr anchor="ctr" marL="73152" marR="54864" marT="36576" marB="27432">
+                    <a:solidFill>
+                      <a:srgbClr val="F7F9FB"/>
+                    </a:solidFill>
+                  </a:tcPr>
+                </a:tc>
+                <a:tc>
+                  <a:txBody>
+                    <a:bodyPr wrap="square" anchor="ctr"/>
+                    <a:lstStyle/>
+                    <a:p>
+                      <a:pPr>
+                        <a:lnSpc>
+                          <a:spcPct val="100000"/>
+                        </a:lnSpc>
+                        <a:spcBef>
+                          <a:spcPts val="0"/>
+                        </a:spcBef>
+                        <a:spcAft>
+                          <a:spcPts val="200"/>
+                        </a:spcAft>
+                      </a:pPr>
+                      <a:r>
+                        <a:rPr sz="950" b="0" i="0">
+                          <a:solidFill>
+                            <a:srgbClr val="24323E"/>
+                          </a:solidFill>
+                          <a:latin typeface="Arial"/>
+                          <a:ea typeface="微軟正黑體"/>
+                          <a:cs typeface="Arial"/>
+                        </a:rPr>
+                        <a:t>先從知識庫檢索相關條目，再讓模型只依這些內容生成</a:t>
+                      </a:r>
+                    </a:p>
+                  </a:txBody>
+                  <a:tcPr anchor="ctr" marL="73152" marR="54864" marT="36576" marB="27432">
+                    <a:solidFill>
+                      <a:srgbClr val="F7F9FB"/>
+                    </a:solidFill>
+                  </a:tcPr>
+                </a:tc>
+                <a:tc>
+                  <a:txBody>
+                    <a:bodyPr wrap="square" anchor="ctr"/>
+                    <a:lstStyle/>
+                    <a:p>
+                      <a:pPr>
+                        <a:lnSpc>
+                          <a:spcPct val="100000"/>
+                        </a:lnSpc>
+                        <a:spcBef>
+                          <a:spcPts val="0"/>
+                        </a:spcBef>
+                        <a:spcAft>
+                          <a:spcPts val="200"/>
+                        </a:spcAft>
+                      </a:pPr>
+                      <a:r>
+                        <a:rPr sz="950" b="0" i="0">
+                          <a:solidFill>
+                            <a:srgbClr val="24323E"/>
+                          </a:solidFill>
+                          <a:latin typeface="Arial"/>
+                          <a:ea typeface="微軟正黑體"/>
+                          <a:cs typeface="Arial"/>
+                        </a:rPr>
+                        <a:t>72 條官網＋手冊條目；12 則話術每則附引用與查核</a:t>
+                      </a:r>
+                    </a:p>
+                  </a:txBody>
+                  <a:tcPr anchor="ctr" marL="73152" marR="54864" marT="36576" marB="27432">
+                    <a:solidFill>
+                      <a:srgbClr val="F7F9FB"/>
+                    </a:solidFill>
+                  </a:tcPr>
+                </a:tc>
+              </a:tr>
+              <a:tr h="365760">
+                <a:tc>
+                  <a:txBody>
+                    <a:bodyPr wrap="square" anchor="ctr"/>
+                    <a:lstStyle/>
+                    <a:p>
+                      <a:pPr>
+                        <a:lnSpc>
+                          <a:spcPct val="100000"/>
+                        </a:lnSpc>
+                        <a:spcBef>
+                          <a:spcPts val="0"/>
+                        </a:spcBef>
+                        <a:spcAft>
+                          <a:spcPts val="200"/>
+                        </a:spcAft>
+                      </a:pPr>
+                      <a:r>
+                        <a:rPr sz="950" b="1" i="0">
+                          <a:solidFill>
+                            <a:srgbClr val="24323E"/>
+                          </a:solidFill>
+                          <a:latin typeface="Arial"/>
+                          <a:ea typeface="微軟正黑體"/>
+                          <a:cs typeface="Arial"/>
+                        </a:rPr>
+                        <a:t>K-means／silhouette／ARI</a:t>
+                      </a:r>
+                    </a:p>
+                  </a:txBody>
+                  <a:tcPr anchor="ctr" marL="73152" marR="54864" marT="36576" marB="27432">
+                    <a:solidFill>
+                      <a:srgbClr val="FFFFFF"/>
+                    </a:solidFill>
+                  </a:tcPr>
+                </a:tc>
+                <a:tc>
+                  <a:txBody>
+                    <a:bodyPr wrap="square" anchor="ctr"/>
+                    <a:lstStyle/>
+                    <a:p>
+                      <a:pPr>
+                        <a:lnSpc>
+                          <a:spcPct val="100000"/>
+                        </a:lnSpc>
+                        <a:spcBef>
+                          <a:spcPts val="0"/>
+                        </a:spcBef>
+                        <a:spcAft>
+                          <a:spcPts val="200"/>
+                        </a:spcAft>
+                      </a:pPr>
+                      <a:r>
+                        <a:rPr sz="950" b="0" i="0">
+                          <a:solidFill>
+                            <a:srgbClr val="24323E"/>
+                          </a:solidFill>
+                          <a:latin typeface="Arial"/>
+                          <a:ea typeface="微軟正黑體"/>
+                          <a:cs typeface="Arial"/>
+                        </a:rPr>
+                        <a:t>分群法、分群品質指標、兩種分群結果的一致度</a:t>
+                      </a:r>
+                    </a:p>
+                  </a:txBody>
+                  <a:tcPr anchor="ctr" marL="73152" marR="54864" marT="36576" marB="27432">
+                    <a:solidFill>
+                      <a:srgbClr val="FFFFFF"/>
+                    </a:solidFill>
+                  </a:tcPr>
+                </a:tc>
+                <a:tc>
+                  <a:txBody>
+                    <a:bodyPr wrap="square" anchor="ctr"/>
+                    <a:lstStyle/>
+                    <a:p>
+                      <a:pPr>
+                        <a:lnSpc>
+                          <a:spcPct val="100000"/>
+                        </a:lnSpc>
+                        <a:spcBef>
+                          <a:spcPts val="0"/>
+                        </a:spcBef>
+                        <a:spcAft>
+                          <a:spcPts val="200"/>
+                        </a:spcAft>
+                      </a:pPr>
+                      <a:r>
+                        <a:rPr sz="950" b="0" i="0">
+                          <a:solidFill>
+                            <a:srgbClr val="24323E"/>
+                          </a:solidFill>
+                          <a:latin typeface="Arial"/>
+                          <a:ea typeface="微軟正黑體"/>
+                          <a:cs typeface="Arial"/>
+                        </a:rPr>
+                        <a:t>驗證四個 Persona：只有靜默出走者被資料獨立支持</a:t>
+                      </a:r>
+                    </a:p>
+                  </a:txBody>
+                  <a:tcPr anchor="ctr" marL="73152" marR="54864" marT="36576" marB="27432">
+                    <a:solidFill>
+                      <a:srgbClr val="FFFFFF"/>
+                    </a:solidFill>
+                  </a:tcPr>
+                </a:tc>
+              </a:tr>
+            </a:tbl>
+          </a:graphicData>
+        </a:graphic>
+      </p:graphicFrame>
     </p:spTree>
   </p:cSld>
   <p:clrMapOvr>

--- a/deck/初賽簡報_v0.pptx
+++ b/deck/初賽簡報_v0.pptx
@@ -1727,7 +1727,7 @@
           <a:lstStyle/>
           <a:p>
             <a:r>
-              <a:t>八層從爬文走到接觸點，判斷在自己的顯卡上，資料不用出門。</a:t>
+              <a:t>兩個迴路：洞察每天進報告池，關懷由事件觸發，人審核過才投遞。</a:t>
             </a:r>
           </a:p>
         </p:txBody>
@@ -27630,7 +27630,7 @@
                 <a:ea typeface="微軟正黑體"/>
                 <a:cs typeface="Arial"/>
               </a:rPr>
-              <a:t>來源：專案架構_2026-09-23.md §2</a:t>
+              <a:t>來源：L7運作流程_2026-09-30.md、專案架構_2026-09-23.md §2；圖 F8</a:t>
             </a:r>
           </a:p>
         </p:txBody>
@@ -27691,7 +27691,7 @@
         <p:spPr>
           <a:xfrm>
             <a:off x="420624" y="329184"/>
-            <a:ext cx="11356848" cy="566928"/>
+            <a:ext cx="11356848" cy="841248"/>
           </a:xfrm>
           <a:prstGeom prst="rect">
             <a:avLst/>
@@ -27716,7 +27716,7 @@
               </a:spcAft>
             </a:pPr>
             <a:r>
-              <a:rPr sz="2400" b="1" i="0">
+              <a:rPr sz="2000" b="1" i="0">
                 <a:solidFill>
                   <a:srgbClr val="24323E"/>
                 </a:solidFill>
@@ -27724,56 +27724,35 @@
                 <a:ea typeface="微軟正黑體"/>
                 <a:cs typeface="Arial"/>
               </a:rPr>
-              <a:t>從蒐集到接觸點都在本機：判斷不用上雲，資料也不出門</a:t>
+              <a:t>兩個迴路：洞察每日進報告池；關懷由事件觸發，人工核准後才投遞</a:t>
             </a:r>
           </a:p>
         </p:txBody>
       </p:sp>
-      <p:sp>
-        <p:nvSpPr>
-          <p:cNvPr id="6" name="Rounded Rectangle 5"/>
-          <p:cNvSpPr/>
+      <p:pic>
+        <p:nvPicPr>
+          <p:cNvPr id="6" name="Picture 5" descr="F8.png"/>
+          <p:cNvPicPr>
+            <a:picLocks noChangeAspect="1"/>
+          </p:cNvPicPr>
           <p:nvPr/>
-        </p:nvSpPr>
+        </p:nvPicPr>
+        <p:blipFill>
+          <a:blip r:embed="rId2"/>
+          <a:stretch>
+            <a:fillRect/>
+          </a:stretch>
+        </p:blipFill>
         <p:spPr>
           <a:xfrm>
-            <a:off x="420624" y="987552"/>
-            <a:ext cx="2743200" cy="1965960"/>
+            <a:off x="795528" y="1188720"/>
+            <a:ext cx="10607040" cy="4972050"/>
           </a:xfrm>
-          <a:prstGeom prst="roundRect">
-            <a:avLst>
-              <a:gd name="adj" fmla="val 8000"/>
-            </a:avLst>
+          <a:prstGeom prst="rect">
+            <a:avLst/>
           </a:prstGeom>
-          <a:solidFill>
-            <a:srgbClr val="F4F7FB"/>
-          </a:solidFill>
-          <a:ln>
-            <a:noFill/>
-          </a:ln>
         </p:spPr>
-        <p:style>
-          <a:lnRef idx="1">
-            <a:schemeClr val="accent1"/>
-          </a:lnRef>
-          <a:fillRef idx="3">
-            <a:schemeClr val="accent1"/>
-          </a:fillRef>
-          <a:effectRef idx="2">
-            <a:schemeClr val="accent1"/>
-          </a:effectRef>
-          <a:fontRef idx="minor">
-            <a:schemeClr val="lt1"/>
-          </a:fontRef>
-        </p:style>
-        <p:txBody>
-          <a:bodyPr rtlCol="0" anchor="ctr"/>
-          <a:lstStyle/>
-          <a:p>
-            <a:pPr algn="ctr"/>
-          </a:p>
-        </p:txBody>
-      </p:sp>
+      </p:pic>
       <p:sp>
         <p:nvSpPr>
           <p:cNvPr id="7" name="TextBox 6"/>
@@ -27782,8 +27761,8 @@
         </p:nvSpPr>
         <p:spPr>
           <a:xfrm>
-            <a:off x="530352" y="1133856"/>
-            <a:ext cx="2523744" cy="1709928"/>
+            <a:off x="420624" y="6215634"/>
+            <a:ext cx="11356848" cy="310896"/>
           </a:xfrm>
           <a:prstGeom prst="rect">
             <a:avLst/>
@@ -27796,7 +27775,7 @@
           </a:bodyPr>
           <a:lstStyle/>
           <a:p>
-            <a:pPr>
+            <a:pPr algn="ctr">
               <a:lnSpc>
                 <a:spcPct val="100000"/>
               </a:lnSpc>
@@ -27808,1043 +27787,15 @@
               </a:spcAft>
             </a:pPr>
             <a:r>
-              <a:rPr sz="1800" b="1" i="0">
+              <a:rPr sz="1100" b="0" i="0">
                 <a:solidFill>
-                  <a:srgbClr val="2F5D9F"/>
+                  <a:srgbClr val="5C6B7A"/>
                 </a:solidFill>
                 <a:latin typeface="Arial"/>
                 <a:ea typeface="微軟正黑體"/>
                 <a:cs typeface="Arial"/>
               </a:rPr>
-              <a:t>L0</a:t>
-            </a:r>
-          </a:p>
-          <a:p>
-            <a:pPr>
-              <a:lnSpc>
-                <a:spcPct val="100000"/>
-              </a:lnSpc>
-              <a:spcBef>
-                <a:spcPts val="0"/>
-              </a:spcBef>
-              <a:spcAft>
-                <a:spcPts val="200"/>
-              </a:spcAft>
-            </a:pPr>
-            <a:r>
-              <a:rPr sz="1600" b="1" i="0">
-                <a:solidFill>
-                  <a:srgbClr val="24323E"/>
-                </a:solidFill>
-                <a:latin typeface="Arial"/>
-                <a:ea typeface="微軟正黑體"/>
-                <a:cs typeface="Arial"/>
-              </a:rPr>
-              <a:t>蒐集</a:t>
-            </a:r>
-          </a:p>
-          <a:p>
-            <a:pPr>
-              <a:lnSpc>
-                <a:spcPct val="100000"/>
-              </a:lnSpc>
-              <a:spcBef>
-                <a:spcPts val="0"/>
-              </a:spcBef>
-              <a:spcAft>
-                <a:spcPts val="200"/>
-              </a:spcAft>
-            </a:pPr>
-            <a:r>
-              <a:rPr sz="1300" b="0" i="0">
-                <a:solidFill>
-                  <a:srgbClr val="44546A"/>
-                </a:solidFill>
-                <a:latin typeface="Arial"/>
-                <a:ea typeface="微軟正黑體"/>
-                <a:cs typeface="Arial"/>
-              </a:rPr>
-              <a:t>三站公開論壇已爬完</a:t>
-            </a:r>
-          </a:p>
-        </p:txBody>
-      </p:sp>
-      <p:sp>
-        <p:nvSpPr>
-          <p:cNvPr id="8" name="Rounded Rectangle 7"/>
-          <p:cNvSpPr/>
-          <p:nvPr/>
-        </p:nvSpPr>
-        <p:spPr>
-          <a:xfrm>
-            <a:off x="3291840" y="987552"/>
-            <a:ext cx="2743200" cy="1965960"/>
-          </a:xfrm>
-          <a:prstGeom prst="roundRect">
-            <a:avLst>
-              <a:gd name="adj" fmla="val 8000"/>
-            </a:avLst>
-          </a:prstGeom>
-          <a:solidFill>
-            <a:srgbClr val="F4F7FB"/>
-          </a:solidFill>
-          <a:ln>
-            <a:noFill/>
-          </a:ln>
-        </p:spPr>
-        <p:style>
-          <a:lnRef idx="1">
-            <a:schemeClr val="accent1"/>
-          </a:lnRef>
-          <a:fillRef idx="3">
-            <a:schemeClr val="accent1"/>
-          </a:fillRef>
-          <a:effectRef idx="2">
-            <a:schemeClr val="accent1"/>
-          </a:effectRef>
-          <a:fontRef idx="minor">
-            <a:schemeClr val="lt1"/>
-          </a:fontRef>
-        </p:style>
-        <p:txBody>
-          <a:bodyPr rtlCol="0" anchor="ctr"/>
-          <a:lstStyle/>
-          <a:p>
-            <a:pPr algn="ctr"/>
-          </a:p>
-        </p:txBody>
-      </p:sp>
-      <p:sp>
-        <p:nvSpPr>
-          <p:cNvPr id="9" name="TextBox 8"/>
-          <p:cNvSpPr txBox="1"/>
-          <p:nvPr/>
-        </p:nvSpPr>
-        <p:spPr>
-          <a:xfrm>
-            <a:off x="3401568" y="1133856"/>
-            <a:ext cx="2523744" cy="1709928"/>
-          </a:xfrm>
-          <a:prstGeom prst="rect">
-            <a:avLst/>
-          </a:prstGeom>
-          <a:noFill/>
-        </p:spPr>
-        <p:txBody>
-          <a:bodyPr wrap="square" lIns="36576" rIns="36576" tIns="18288" bIns="18288" anchor="t">
-            <a:spAutoFit/>
-          </a:bodyPr>
-          <a:lstStyle/>
-          <a:p>
-            <a:pPr>
-              <a:lnSpc>
-                <a:spcPct val="100000"/>
-              </a:lnSpc>
-              <a:spcBef>
-                <a:spcPts val="0"/>
-              </a:spcBef>
-              <a:spcAft>
-                <a:spcPts val="200"/>
-              </a:spcAft>
-            </a:pPr>
-            <a:r>
-              <a:rPr sz="1800" b="1" i="0">
-                <a:solidFill>
-                  <a:srgbClr val="2F5D9F"/>
-                </a:solidFill>
-                <a:latin typeface="Arial"/>
-                <a:ea typeface="微軟正黑體"/>
-                <a:cs typeface="Arial"/>
-              </a:rPr>
-              <a:t>L1</a:t>
-            </a:r>
-          </a:p>
-          <a:p>
-            <a:pPr>
-              <a:lnSpc>
-                <a:spcPct val="100000"/>
-              </a:lnSpc>
-              <a:spcBef>
-                <a:spcPts val="0"/>
-              </a:spcBef>
-              <a:spcAft>
-                <a:spcPts val="200"/>
-              </a:spcAft>
-            </a:pPr>
-            <a:r>
-              <a:rPr sz="1600" b="1" i="0">
-                <a:solidFill>
-                  <a:srgbClr val="24323E"/>
-                </a:solidFill>
-                <a:latin typeface="Arial"/>
-                <a:ea typeface="微軟正黑體"/>
-                <a:cs typeface="Arial"/>
-              </a:rPr>
-              <a:t>前處理</a:t>
-            </a:r>
-          </a:p>
-          <a:p>
-            <a:pPr>
-              <a:lnSpc>
-                <a:spcPct val="100000"/>
-              </a:lnSpc>
-              <a:spcBef>
-                <a:spcPts val="0"/>
-              </a:spcBef>
-              <a:spcAft>
-                <a:spcPts val="200"/>
-              </a:spcAft>
-            </a:pPr>
-            <a:r>
-              <a:rPr sz="1300" b="0" i="0">
-                <a:solidFill>
-                  <a:srgbClr val="44546A"/>
-                </a:solidFill>
-                <a:latin typeface="Arial"/>
-                <a:ea typeface="微軟正黑體"/>
-                <a:cs typeface="Arial"/>
-              </a:rPr>
-              <a:t>合併、切句、去重，留下售後句</a:t>
-            </a:r>
-          </a:p>
-        </p:txBody>
-      </p:sp>
-      <p:sp>
-        <p:nvSpPr>
-          <p:cNvPr id="10" name="Rounded Rectangle 9"/>
-          <p:cNvSpPr/>
-          <p:nvPr/>
-        </p:nvSpPr>
-        <p:spPr>
-          <a:xfrm>
-            <a:off x="6163056" y="987552"/>
-            <a:ext cx="2743200" cy="1965960"/>
-          </a:xfrm>
-          <a:prstGeom prst="roundRect">
-            <a:avLst>
-              <a:gd name="adj" fmla="val 8000"/>
-            </a:avLst>
-          </a:prstGeom>
-          <a:solidFill>
-            <a:srgbClr val="F4F7FB"/>
-          </a:solidFill>
-          <a:ln>
-            <a:noFill/>
-          </a:ln>
-        </p:spPr>
-        <p:style>
-          <a:lnRef idx="1">
-            <a:schemeClr val="accent1"/>
-          </a:lnRef>
-          <a:fillRef idx="3">
-            <a:schemeClr val="accent1"/>
-          </a:fillRef>
-          <a:effectRef idx="2">
-            <a:schemeClr val="accent1"/>
-          </a:effectRef>
-          <a:fontRef idx="minor">
-            <a:schemeClr val="lt1"/>
-          </a:fontRef>
-        </p:style>
-        <p:txBody>
-          <a:bodyPr rtlCol="0" anchor="ctr"/>
-          <a:lstStyle/>
-          <a:p>
-            <a:pPr algn="ctr"/>
-          </a:p>
-        </p:txBody>
-      </p:sp>
-      <p:sp>
-        <p:nvSpPr>
-          <p:cNvPr id="11" name="TextBox 10"/>
-          <p:cNvSpPr txBox="1"/>
-          <p:nvPr/>
-        </p:nvSpPr>
-        <p:spPr>
-          <a:xfrm>
-            <a:off x="6272784" y="1133856"/>
-            <a:ext cx="2523744" cy="1709928"/>
-          </a:xfrm>
-          <a:prstGeom prst="rect">
-            <a:avLst/>
-          </a:prstGeom>
-          <a:noFill/>
-        </p:spPr>
-        <p:txBody>
-          <a:bodyPr wrap="square" lIns="36576" rIns="36576" tIns="18288" bIns="18288" anchor="t">
-            <a:spAutoFit/>
-          </a:bodyPr>
-          <a:lstStyle/>
-          <a:p>
-            <a:pPr>
-              <a:lnSpc>
-                <a:spcPct val="100000"/>
-              </a:lnSpc>
-              <a:spcBef>
-                <a:spcPts val="0"/>
-              </a:spcBef>
-              <a:spcAft>
-                <a:spcPts val="200"/>
-              </a:spcAft>
-            </a:pPr>
-            <a:r>
-              <a:rPr sz="1800" b="1" i="0">
-                <a:solidFill>
-                  <a:srgbClr val="2F5D9F"/>
-                </a:solidFill>
-                <a:latin typeface="Arial"/>
-                <a:ea typeface="微軟正黑體"/>
-                <a:cs typeface="Arial"/>
-              </a:rPr>
-              <a:t>L2</a:t>
-            </a:r>
-          </a:p>
-          <a:p>
-            <a:pPr>
-              <a:lnSpc>
-                <a:spcPct val="100000"/>
-              </a:lnSpc>
-              <a:spcBef>
-                <a:spcPts val="0"/>
-              </a:spcBef>
-              <a:spcAft>
-                <a:spcPts val="200"/>
-              </a:spcAft>
-            </a:pPr>
-            <a:r>
-              <a:rPr sz="1600" b="1" i="0">
-                <a:solidFill>
-                  <a:srgbClr val="24323E"/>
-                </a:solidFill>
-                <a:latin typeface="Arial"/>
-                <a:ea typeface="微軟正黑體"/>
-                <a:cs typeface="Arial"/>
-              </a:rPr>
-              <a:t>標註</a:t>
-            </a:r>
-          </a:p>
-          <a:p>
-            <a:pPr>
-              <a:lnSpc>
-                <a:spcPct val="100000"/>
-              </a:lnSpc>
-              <a:spcBef>
-                <a:spcPts val="0"/>
-              </a:spcBef>
-              <a:spcAft>
-                <a:spcPts val="200"/>
-              </a:spcAft>
-            </a:pPr>
-            <a:r>
-              <a:rPr sz="1300" b="0" i="0">
-                <a:solidFill>
-                  <a:srgbClr val="44546A"/>
-                </a:solidFill>
-                <a:latin typeface="Arial"/>
-                <a:ea typeface="微軟正黑體"/>
-                <a:cs typeface="Arial"/>
-              </a:rPr>
-              <a:t>流失、九面向、替代與車主特徵</a:t>
-            </a:r>
-          </a:p>
-        </p:txBody>
-      </p:sp>
-      <p:sp>
-        <p:nvSpPr>
-          <p:cNvPr id="12" name="Rounded Rectangle 11"/>
-          <p:cNvSpPr/>
-          <p:nvPr/>
-        </p:nvSpPr>
-        <p:spPr>
-          <a:xfrm>
-            <a:off x="9034272" y="987552"/>
-            <a:ext cx="2743200" cy="1965960"/>
-          </a:xfrm>
-          <a:prstGeom prst="roundRect">
-            <a:avLst>
-              <a:gd name="adj" fmla="val 8000"/>
-            </a:avLst>
-          </a:prstGeom>
-          <a:solidFill>
-            <a:srgbClr val="F4F7FB"/>
-          </a:solidFill>
-          <a:ln>
-            <a:noFill/>
-          </a:ln>
-        </p:spPr>
-        <p:style>
-          <a:lnRef idx="1">
-            <a:schemeClr val="accent1"/>
-          </a:lnRef>
-          <a:fillRef idx="3">
-            <a:schemeClr val="accent1"/>
-          </a:fillRef>
-          <a:effectRef idx="2">
-            <a:schemeClr val="accent1"/>
-          </a:effectRef>
-          <a:fontRef idx="minor">
-            <a:schemeClr val="lt1"/>
-          </a:fontRef>
-        </p:style>
-        <p:txBody>
-          <a:bodyPr rtlCol="0" anchor="ctr"/>
-          <a:lstStyle/>
-          <a:p>
-            <a:pPr algn="ctr"/>
-          </a:p>
-        </p:txBody>
-      </p:sp>
-      <p:sp>
-        <p:nvSpPr>
-          <p:cNvPr id="13" name="TextBox 12"/>
-          <p:cNvSpPr txBox="1"/>
-          <p:nvPr/>
-        </p:nvSpPr>
-        <p:spPr>
-          <a:xfrm>
-            <a:off x="9144000" y="1133856"/>
-            <a:ext cx="2523744" cy="1709928"/>
-          </a:xfrm>
-          <a:prstGeom prst="rect">
-            <a:avLst/>
-          </a:prstGeom>
-          <a:noFill/>
-        </p:spPr>
-        <p:txBody>
-          <a:bodyPr wrap="square" lIns="36576" rIns="36576" tIns="18288" bIns="18288" anchor="t">
-            <a:spAutoFit/>
-          </a:bodyPr>
-          <a:lstStyle/>
-          <a:p>
-            <a:pPr>
-              <a:lnSpc>
-                <a:spcPct val="100000"/>
-              </a:lnSpc>
-              <a:spcBef>
-                <a:spcPts val="0"/>
-              </a:spcBef>
-              <a:spcAft>
-                <a:spcPts val="200"/>
-              </a:spcAft>
-            </a:pPr>
-            <a:r>
-              <a:rPr sz="1800" b="1" i="0">
-                <a:solidFill>
-                  <a:srgbClr val="2F5D9F"/>
-                </a:solidFill>
-                <a:latin typeface="Arial"/>
-                <a:ea typeface="微軟正黑體"/>
-                <a:cs typeface="Arial"/>
-              </a:rPr>
-              <a:t>L3</a:t>
-            </a:r>
-          </a:p>
-          <a:p>
-            <a:pPr>
-              <a:lnSpc>
-                <a:spcPct val="100000"/>
-              </a:lnSpc>
-              <a:spcBef>
-                <a:spcPts val="0"/>
-              </a:spcBef>
-              <a:spcAft>
-                <a:spcPts val="200"/>
-              </a:spcAft>
-            </a:pPr>
-            <a:r>
-              <a:rPr sz="1600" b="1" i="0">
-                <a:solidFill>
-                  <a:srgbClr val="24323E"/>
-                </a:solidFill>
-                <a:latin typeface="Arial"/>
-                <a:ea typeface="微軟正黑體"/>
-                <a:cs typeface="Arial"/>
-              </a:rPr>
-              <a:t>決策模型</a:t>
-            </a:r>
-          </a:p>
-          <a:p>
-            <a:pPr>
-              <a:lnSpc>
-                <a:spcPct val="100000"/>
-              </a:lnSpc>
-              <a:spcBef>
-                <a:spcPts val="0"/>
-              </a:spcBef>
-              <a:spcAft>
-                <a:spcPts val="200"/>
-              </a:spcAft>
-            </a:pPr>
-            <a:r>
-              <a:rPr sz="1300" b="0" i="0">
-                <a:solidFill>
-                  <a:srgbClr val="44546A"/>
-                </a:solidFill>
-                <a:latin typeface="Arial"/>
-                <a:ea typeface="微軟正黑體"/>
-                <a:cs typeface="Arial"/>
-              </a:rPr>
-              <a:t>本機 QLoRA，只輸出各等級機率</a:t>
-            </a:r>
-          </a:p>
-        </p:txBody>
-      </p:sp>
-      <p:sp>
-        <p:nvSpPr>
-          <p:cNvPr id="14" name="Rounded Rectangle 13"/>
-          <p:cNvSpPr/>
-          <p:nvPr/>
-        </p:nvSpPr>
-        <p:spPr>
-          <a:xfrm>
-            <a:off x="420624" y="3081528"/>
-            <a:ext cx="2743200" cy="1965960"/>
-          </a:xfrm>
-          <a:prstGeom prst="roundRect">
-            <a:avLst>
-              <a:gd name="adj" fmla="val 8000"/>
-            </a:avLst>
-          </a:prstGeom>
-          <a:solidFill>
-            <a:srgbClr val="F4F7FB"/>
-          </a:solidFill>
-          <a:ln>
-            <a:noFill/>
-          </a:ln>
-        </p:spPr>
-        <p:style>
-          <a:lnRef idx="1">
-            <a:schemeClr val="accent1"/>
-          </a:lnRef>
-          <a:fillRef idx="3">
-            <a:schemeClr val="accent1"/>
-          </a:fillRef>
-          <a:effectRef idx="2">
-            <a:schemeClr val="accent1"/>
-          </a:effectRef>
-          <a:fontRef idx="minor">
-            <a:schemeClr val="lt1"/>
-          </a:fontRef>
-        </p:style>
-        <p:txBody>
-          <a:bodyPr rtlCol="0" anchor="ctr"/>
-          <a:lstStyle/>
-          <a:p>
-            <a:pPr algn="ctr"/>
-          </a:p>
-        </p:txBody>
-      </p:sp>
-      <p:sp>
-        <p:nvSpPr>
-          <p:cNvPr id="15" name="TextBox 14"/>
-          <p:cNvSpPr txBox="1"/>
-          <p:nvPr/>
-        </p:nvSpPr>
-        <p:spPr>
-          <a:xfrm>
-            <a:off x="530352" y="3227832"/>
-            <a:ext cx="2523744" cy="1709928"/>
-          </a:xfrm>
-          <a:prstGeom prst="rect">
-            <a:avLst/>
-          </a:prstGeom>
-          <a:noFill/>
-        </p:spPr>
-        <p:txBody>
-          <a:bodyPr wrap="square" lIns="36576" rIns="36576" tIns="18288" bIns="18288" anchor="t">
-            <a:spAutoFit/>
-          </a:bodyPr>
-          <a:lstStyle/>
-          <a:p>
-            <a:pPr>
-              <a:lnSpc>
-                <a:spcPct val="100000"/>
-              </a:lnSpc>
-              <a:spcBef>
-                <a:spcPts val="0"/>
-              </a:spcBef>
-              <a:spcAft>
-                <a:spcPts val="200"/>
-              </a:spcAft>
-            </a:pPr>
-            <a:r>
-              <a:rPr sz="1800" b="1" i="0">
-                <a:solidFill>
-                  <a:srgbClr val="2F5D9F"/>
-                </a:solidFill>
-                <a:latin typeface="Arial"/>
-                <a:ea typeface="微軟正黑體"/>
-                <a:cs typeface="Arial"/>
-              </a:rPr>
-              <a:t>L4</a:t>
-            </a:r>
-          </a:p>
-          <a:p>
-            <a:pPr>
-              <a:lnSpc>
-                <a:spcPct val="100000"/>
-              </a:lnSpc>
-              <a:spcBef>
-                <a:spcPts val="0"/>
-              </a:spcBef>
-              <a:spcAft>
-                <a:spcPts val="200"/>
-              </a:spcAft>
-            </a:pPr>
-            <a:r>
-              <a:rPr sz="1600" b="1" i="0">
-                <a:solidFill>
-                  <a:srgbClr val="24323E"/>
-                </a:solidFill>
-                <a:latin typeface="Arial"/>
-                <a:ea typeface="微軟正黑體"/>
-                <a:cs typeface="Arial"/>
-              </a:rPr>
-              <a:t>風險辨識</a:t>
-            </a:r>
-          </a:p>
-          <a:p>
-            <a:pPr>
-              <a:lnSpc>
-                <a:spcPct val="100000"/>
-              </a:lnSpc>
-              <a:spcBef>
-                <a:spcPts val="0"/>
-              </a:spcBef>
-              <a:spcAft>
-                <a:spcPts val="200"/>
-              </a:spcAft>
-            </a:pPr>
-            <a:r>
-              <a:rPr sz="1300" b="0" i="0">
-                <a:solidFill>
-                  <a:srgbClr val="44546A"/>
-                </a:solidFill>
-                <a:latin typeface="Arial"/>
-                <a:ea typeface="微軟正黑體"/>
-                <a:cs typeface="Arial"/>
-              </a:rPr>
-              <a:t>八條規則乘上 r4 的流失機率</a:t>
-            </a:r>
-          </a:p>
-        </p:txBody>
-      </p:sp>
-      <p:sp>
-        <p:nvSpPr>
-          <p:cNvPr id="16" name="Rounded Rectangle 15"/>
-          <p:cNvSpPr/>
-          <p:nvPr/>
-        </p:nvSpPr>
-        <p:spPr>
-          <a:xfrm>
-            <a:off x="3291840" y="3081528"/>
-            <a:ext cx="2743200" cy="1965960"/>
-          </a:xfrm>
-          <a:prstGeom prst="roundRect">
-            <a:avLst>
-              <a:gd name="adj" fmla="val 8000"/>
-            </a:avLst>
-          </a:prstGeom>
-          <a:solidFill>
-            <a:srgbClr val="F4F7FB"/>
-          </a:solidFill>
-          <a:ln>
-            <a:noFill/>
-          </a:ln>
-        </p:spPr>
-        <p:style>
-          <a:lnRef idx="1">
-            <a:schemeClr val="accent1"/>
-          </a:lnRef>
-          <a:fillRef idx="3">
-            <a:schemeClr val="accent1"/>
-          </a:fillRef>
-          <a:effectRef idx="2">
-            <a:schemeClr val="accent1"/>
-          </a:effectRef>
-          <a:fontRef idx="minor">
-            <a:schemeClr val="lt1"/>
-          </a:fontRef>
-        </p:style>
-        <p:txBody>
-          <a:bodyPr rtlCol="0" anchor="ctr"/>
-          <a:lstStyle/>
-          <a:p>
-            <a:pPr algn="ctr"/>
-          </a:p>
-        </p:txBody>
-      </p:sp>
-      <p:sp>
-        <p:nvSpPr>
-          <p:cNvPr id="17" name="TextBox 16"/>
-          <p:cNvSpPr txBox="1"/>
-          <p:nvPr/>
-        </p:nvSpPr>
-        <p:spPr>
-          <a:xfrm>
-            <a:off x="3401568" y="3227832"/>
-            <a:ext cx="2523744" cy="1709928"/>
-          </a:xfrm>
-          <a:prstGeom prst="rect">
-            <a:avLst/>
-          </a:prstGeom>
-          <a:noFill/>
-        </p:spPr>
-        <p:txBody>
-          <a:bodyPr wrap="square" lIns="36576" rIns="36576" tIns="18288" bIns="18288" anchor="t">
-            <a:spAutoFit/>
-          </a:bodyPr>
-          <a:lstStyle/>
-          <a:p>
-            <a:pPr>
-              <a:lnSpc>
-                <a:spcPct val="100000"/>
-              </a:lnSpc>
-              <a:spcBef>
-                <a:spcPts val="0"/>
-              </a:spcBef>
-              <a:spcAft>
-                <a:spcPts val="200"/>
-              </a:spcAft>
-            </a:pPr>
-            <a:r>
-              <a:rPr sz="1800" b="1" i="0">
-                <a:solidFill>
-                  <a:srgbClr val="2F5D9F"/>
-                </a:solidFill>
-                <a:latin typeface="Arial"/>
-                <a:ea typeface="微軟正黑體"/>
-                <a:cs typeface="Arial"/>
-              </a:rPr>
-              <a:t>L5</a:t>
-            </a:r>
-          </a:p>
-          <a:p>
-            <a:pPr>
-              <a:lnSpc>
-                <a:spcPct val="100000"/>
-              </a:lnSpc>
-              <a:spcBef>
-                <a:spcPts val="0"/>
-              </a:spcBef>
-              <a:spcAft>
-                <a:spcPts val="200"/>
-              </a:spcAft>
-            </a:pPr>
-            <a:r>
-              <a:rPr sz="1600" b="1" i="0">
-                <a:solidFill>
-                  <a:srgbClr val="24323E"/>
-                </a:solidFill>
-                <a:latin typeface="Arial"/>
-                <a:ea typeface="微軟正黑體"/>
-                <a:cs typeface="Arial"/>
-              </a:rPr>
-              <a:t>Persona</a:t>
-            </a:r>
-          </a:p>
-          <a:p>
-            <a:pPr>
-              <a:lnSpc>
-                <a:spcPct val="100000"/>
-              </a:lnSpc>
-              <a:spcBef>
-                <a:spcPts val="0"/>
-              </a:spcBef>
-              <a:spcAft>
-                <a:spcPts val="200"/>
-              </a:spcAft>
-            </a:pPr>
-            <a:r>
-              <a:rPr sz="1300" b="0" i="0">
-                <a:solidFill>
-                  <a:srgbClr val="44546A"/>
-                </a:solidFill>
-                <a:latin typeface="Arial"/>
-                <a:ea typeface="微軟正黑體"/>
-                <a:cs typeface="Arial"/>
-              </a:rPr>
-              <a:t>規則指派四種流失樣貌</a:t>
-            </a:r>
-          </a:p>
-        </p:txBody>
-      </p:sp>
-      <p:sp>
-        <p:nvSpPr>
-          <p:cNvPr id="18" name="Rounded Rectangle 17"/>
-          <p:cNvSpPr/>
-          <p:nvPr/>
-        </p:nvSpPr>
-        <p:spPr>
-          <a:xfrm>
-            <a:off x="6163056" y="3081528"/>
-            <a:ext cx="2743200" cy="1965960"/>
-          </a:xfrm>
-          <a:prstGeom prst="roundRect">
-            <a:avLst>
-              <a:gd name="adj" fmla="val 8000"/>
-            </a:avLst>
-          </a:prstGeom>
-          <a:solidFill>
-            <a:srgbClr val="F4F7FB"/>
-          </a:solidFill>
-          <a:ln>
-            <a:noFill/>
-          </a:ln>
-        </p:spPr>
-        <p:style>
-          <a:lnRef idx="1">
-            <a:schemeClr val="accent1"/>
-          </a:lnRef>
-          <a:fillRef idx="3">
-            <a:schemeClr val="accent1"/>
-          </a:fillRef>
-          <a:effectRef idx="2">
-            <a:schemeClr val="accent1"/>
-          </a:effectRef>
-          <a:fontRef idx="minor">
-            <a:schemeClr val="lt1"/>
-          </a:fontRef>
-        </p:style>
-        <p:txBody>
-          <a:bodyPr rtlCol="0" anchor="ctr"/>
-          <a:lstStyle/>
-          <a:p>
-            <a:pPr algn="ctr"/>
-          </a:p>
-        </p:txBody>
-      </p:sp>
-      <p:sp>
-        <p:nvSpPr>
-          <p:cNvPr id="19" name="TextBox 18"/>
-          <p:cNvSpPr txBox="1"/>
-          <p:nvPr/>
-        </p:nvSpPr>
-        <p:spPr>
-          <a:xfrm>
-            <a:off x="6272784" y="3227832"/>
-            <a:ext cx="2523744" cy="1709928"/>
-          </a:xfrm>
-          <a:prstGeom prst="rect">
-            <a:avLst/>
-          </a:prstGeom>
-          <a:noFill/>
-        </p:spPr>
-        <p:txBody>
-          <a:bodyPr wrap="square" lIns="36576" rIns="36576" tIns="18288" bIns="18288" anchor="t">
-            <a:spAutoFit/>
-          </a:bodyPr>
-          <a:lstStyle/>
-          <a:p>
-            <a:pPr>
-              <a:lnSpc>
-                <a:spcPct val="100000"/>
-              </a:lnSpc>
-              <a:spcBef>
-                <a:spcPts val="0"/>
-              </a:spcBef>
-              <a:spcAft>
-                <a:spcPts val="200"/>
-              </a:spcAft>
-            </a:pPr>
-            <a:r>
-              <a:rPr sz="1800" b="1" i="0">
-                <a:solidFill>
-                  <a:srgbClr val="2F5D9F"/>
-                </a:solidFill>
-                <a:latin typeface="Arial"/>
-                <a:ea typeface="微軟正黑體"/>
-                <a:cs typeface="Arial"/>
-              </a:rPr>
-              <a:t>L6</a:t>
-            </a:r>
-          </a:p>
-          <a:p>
-            <a:pPr>
-              <a:lnSpc>
-                <a:spcPct val="100000"/>
-              </a:lnSpc>
-              <a:spcBef>
-                <a:spcPts val="0"/>
-              </a:spcBef>
-              <a:spcAft>
-                <a:spcPts val="200"/>
-              </a:spcAft>
-            </a:pPr>
-            <a:r>
-              <a:rPr sz="1600" b="1" i="0">
-                <a:solidFill>
-                  <a:srgbClr val="24323E"/>
-                </a:solidFill>
-                <a:latin typeface="Arial"/>
-                <a:ea typeface="微軟正黑體"/>
-                <a:cs typeface="Arial"/>
-              </a:rPr>
-              <a:t>RAG 生成</a:t>
-            </a:r>
-          </a:p>
-          <a:p>
-            <a:pPr>
-              <a:lnSpc>
-                <a:spcPct val="100000"/>
-              </a:lnSpc>
-              <a:spcBef>
-                <a:spcPts val="0"/>
-              </a:spcBef>
-              <a:spcAft>
-                <a:spcPts val="200"/>
-              </a:spcAft>
-            </a:pPr>
-            <a:r>
-              <a:rPr sz="1300" b="0" i="0">
-                <a:solidFill>
-                  <a:srgbClr val="44546A"/>
-                </a:solidFill>
-                <a:latin typeface="Arial"/>
-                <a:ea typeface="微軟正黑體"/>
-                <a:cs typeface="Arial"/>
-              </a:rPr>
-              <a:t>價格與保固只引用官方知識庫</a:t>
-            </a:r>
-          </a:p>
-        </p:txBody>
-      </p:sp>
-      <p:sp>
-        <p:nvSpPr>
-          <p:cNvPr id="20" name="Rounded Rectangle 19"/>
-          <p:cNvSpPr/>
-          <p:nvPr/>
-        </p:nvSpPr>
-        <p:spPr>
-          <a:xfrm>
-            <a:off x="9034272" y="3081528"/>
-            <a:ext cx="2743200" cy="1965960"/>
-          </a:xfrm>
-          <a:prstGeom prst="roundRect">
-            <a:avLst>
-              <a:gd name="adj" fmla="val 8000"/>
-            </a:avLst>
-          </a:prstGeom>
-          <a:solidFill>
-            <a:srgbClr val="F4F7FB"/>
-          </a:solidFill>
-          <a:ln>
-            <a:noFill/>
-          </a:ln>
-        </p:spPr>
-        <p:style>
-          <a:lnRef idx="1">
-            <a:schemeClr val="accent1"/>
-          </a:lnRef>
-          <a:fillRef idx="3">
-            <a:schemeClr val="accent1"/>
-          </a:fillRef>
-          <a:effectRef idx="2">
-            <a:schemeClr val="accent1"/>
-          </a:effectRef>
-          <a:fontRef idx="minor">
-            <a:schemeClr val="lt1"/>
-          </a:fontRef>
-        </p:style>
-        <p:txBody>
-          <a:bodyPr rtlCol="0" anchor="ctr"/>
-          <a:lstStyle/>
-          <a:p>
-            <a:pPr algn="ctr"/>
-          </a:p>
-        </p:txBody>
-      </p:sp>
-      <p:sp>
-        <p:nvSpPr>
-          <p:cNvPr id="21" name="TextBox 20"/>
-          <p:cNvSpPr txBox="1"/>
-          <p:nvPr/>
-        </p:nvSpPr>
-        <p:spPr>
-          <a:xfrm>
-            <a:off x="9144000" y="3227832"/>
-            <a:ext cx="2523744" cy="1709928"/>
-          </a:xfrm>
-          <a:prstGeom prst="rect">
-            <a:avLst/>
-          </a:prstGeom>
-          <a:noFill/>
-        </p:spPr>
-        <p:txBody>
-          <a:bodyPr wrap="square" lIns="36576" rIns="36576" tIns="18288" bIns="18288" anchor="t">
-            <a:spAutoFit/>
-          </a:bodyPr>
-          <a:lstStyle/>
-          <a:p>
-            <a:pPr>
-              <a:lnSpc>
-                <a:spcPct val="100000"/>
-              </a:lnSpc>
-              <a:spcBef>
-                <a:spcPts val="0"/>
-              </a:spcBef>
-              <a:spcAft>
-                <a:spcPts val="200"/>
-              </a:spcAft>
-            </a:pPr>
-            <a:r>
-              <a:rPr sz="1800" b="1" i="0">
-                <a:solidFill>
-                  <a:srgbClr val="2F5D9F"/>
-                </a:solidFill>
-                <a:latin typeface="Arial"/>
-                <a:ea typeface="微軟正黑體"/>
-                <a:cs typeface="Arial"/>
-              </a:rPr>
-              <a:t>L7</a:t>
-            </a:r>
-          </a:p>
-          <a:p>
-            <a:pPr>
-              <a:lnSpc>
-                <a:spcPct val="100000"/>
-              </a:lnSpc>
-              <a:spcBef>
-                <a:spcPts val="0"/>
-              </a:spcBef>
-              <a:spcAft>
-                <a:spcPts val="200"/>
-              </a:spcAft>
-            </a:pPr>
-            <a:r>
-              <a:rPr sz="1600" b="1" i="0">
-                <a:solidFill>
-                  <a:srgbClr val="24323E"/>
-                </a:solidFill>
-                <a:latin typeface="Arial"/>
-                <a:ea typeface="微軟正黑體"/>
-                <a:cs typeface="Arial"/>
-              </a:rPr>
-              <a:t>接觸點</a:t>
-            </a:r>
-          </a:p>
-          <a:p>
-            <a:pPr>
-              <a:lnSpc>
-                <a:spcPct val="100000"/>
-              </a:lnSpc>
-              <a:spcBef>
-                <a:spcPts val="0"/>
-              </a:spcBef>
-              <a:spcAft>
-                <a:spcPts val="200"/>
-              </a:spcAft>
-            </a:pPr>
-            <a:r>
-              <a:rPr sz="1300" b="0" i="0">
-                <a:solidFill>
-                  <a:srgbClr val="44546A"/>
-                </a:solidFill>
-                <a:latin typeface="Arial"/>
-                <a:ea typeface="微軟正黑體"/>
-                <a:cs typeface="Arial"/>
-              </a:rPr>
-              <a:t>審核後投遞，並把 KPI 寫回去</a:t>
+              <a:t>八層對應：L0 蒐集　L1 前處理　L2 標註　L3 決策模型　L4 風險辨識　L5 Persona　L6 RAG 生成　L7 接觸點</a:t>
             </a:r>
           </a:p>
         </p:txBody>

--- a/deck/初賽簡報_v0.pptx
+++ b/deck/初賽簡報_v0.pptx
@@ -26,6 +26,7 @@
     <p:sldId id="271" r:id="rId22"/>
     <p:sldId id="272" r:id="rId23"/>
     <p:sldId id="273" r:id="rId24"/>
+    <p:sldId id="274" r:id="rId25"/>
   </p:sldIdLst>
   <p:sldSz cy="6858000" cx="12192000"/>
   <p:notesSz cx="6858000" cy="9144000"/>
@@ -826,7 +827,7 @@
           <a:lstStyle/>
           <a:p>
             <a:r>
-              <a:t>高風險七成四真有流失句；輿情訊號怎麼對上 CRM，這格還空著。</a:t>
+              <a:t>高風險七成四真有流失句；過保精算派人最多，平均風險也最高。</a:t>
             </a:r>
           </a:p>
         </p:txBody>
@@ -942,7 +943,7 @@
           <a:lstStyle/>
           <a:p>
             <a:r>
-              <a:t>大模型標答案、按文章切考卷、四位元微調五小時；人工驗證 F1 零點八二。</a:t>
+              <a:t>本機四Ｂ把流失句找回來；校準曲線放附錄，每句零點七秒。</a:t>
             </a:r>
           </a:p>
         </p:txBody>
@@ -1116,7 +1117,7 @@
           <a:lstStyle/>
           <a:p>
             <a:r>
-              <a:t>模型與語料做得到；要守住的是樣本偏誤、個資，還有生成亂編。</a:t>
+              <a:t>四面向都有原型；成本只列結構，右表五項風險已有對策。</a:t>
             </a:r>
           </a:p>
         </p:txBody>
@@ -1174,7 +1175,7 @@
           <a:lstStyle/>
           <a:p>
             <a:r>
-              <a:t>延遲和Ｆ１已經有現況，業務回廠率與導入週數都還是空格。</a:t>
+              <a:t>回廠率先假設加十點；接到全台約二十四週，監控不設終點。</a:t>
             </a:r>
           </a:p>
         </p:txBody>
@@ -1232,7 +1233,7 @@
           <a:lstStyle/>
           <a:p>
             <a:r>
-              <a:t>程式在私有庫，報告從Ｔ１到Ｔ１１，畫面截圖等決賽再補。</a:t>
+              <a:t>左邊是兩個迴路；右邊審核佇列是線框，決賽再給可操作版。</a:t>
             </a:r>
           </a:p>
         </p:txBody>
@@ -1303,6 +1304,64 @@
 </p:notes>
 </file>
 
+<file path=ppt/notesSlides/notesSlide19.xml><?xml version="1.0" encoding="utf-8"?>
+<p:notes xmlns:a="http://schemas.openxmlformats.org/drawingml/2006/main" xmlns:p="http://schemas.openxmlformats.org/presentationml/2006/main" xmlns:r="http://schemas.openxmlformats.org/officeDocument/2006/relationships">
+  <p:cSld>
+    <p:spTree>
+      <p:nvGrpSpPr>
+        <p:cNvPr id="1" name=""/>
+        <p:cNvGrpSpPr/>
+        <p:nvPr/>
+      </p:nvGrpSpPr>
+      <p:grpSpPr>
+        <a:xfrm>
+          <a:off x="0" y="0"/>
+          <a:ext cx="0" cy="0"/>
+          <a:chOff x="0" y="0"/>
+          <a:chExt cx="0" cy="0"/>
+        </a:xfrm>
+      </p:grpSpPr>
+      <p:sp>
+        <p:nvSpPr>
+          <p:cNvPr id="2" name="Slide Image Placeholder 1"/>
+          <p:cNvSpPr>
+            <a:spLocks noGrp="1"/>
+          </p:cNvSpPr>
+          <p:nvPr>
+            <p:ph type="sldImg" idx="2"/>
+          </p:nvPr>
+        </p:nvSpPr>
+        <p:spPr/>
+      </p:sp>
+      <p:sp>
+        <p:nvSpPr>
+          <p:cNvPr id="3" name="Notes Placeholder 2"/>
+          <p:cNvSpPr>
+            <a:spLocks noGrp="1"/>
+          </p:cNvSpPr>
+          <p:nvPr>
+            <p:ph type="body" idx="1"/>
+          </p:nvPr>
+        </p:nvSpPr>
+        <p:spPr/>
+        <p:txBody>
+          <a:bodyPr/>
+          <a:lstStyle/>
+          <a:p>
+            <a:r>
+              <a:t>附錄四張圖：來源差異、風險分布、校準曲線，和季趨勢預警。</a:t>
+            </a:r>
+          </a:p>
+        </p:txBody>
+      </p:sp>
+    </p:spTree>
+  </p:cSld>
+  <p:clrMapOvr>
+    <a:masterClrMapping/>
+  </p:clrMapOvr>
+</p:notes>
+</file>
+
 <file path=ppt/notesSlides/notesSlide2.xml><?xml version="1.0" encoding="utf-8"?>
 <p:notes xmlns:a="http://schemas.openxmlformats.org/drawingml/2006/main" xmlns:r="http://schemas.openxmlformats.org/officeDocument/2006/relationships" xmlns:mc="http://schemas.openxmlformats.org/markup-compatibility/2006" xmlns:mv="urn:schemas-microsoft-com:mac:vml" xmlns:p="http://schemas.openxmlformats.org/presentationml/2006/main" xmlns:c="http://schemas.openxmlformats.org/drawingml/2006/chart" xmlns:dgm="http://schemas.openxmlformats.org/drawingml/2006/diagram" xmlns:o="urn:schemas-microsoft-com:office:office" xmlns:v="urn:schemas-microsoft-com:vml" xmlns:pvml="urn:schemas-microsoft-com:office:powerpoint" xmlns:com="http://schemas.openxmlformats.org/drawingml/2006/compatibility" xmlns:p14="http://schemas.microsoft.com/office/powerpoint/2010/main" xmlns:p15="http://schemas.microsoft.com/office/powerpoint/2012/main" xmlns:ahyp="http://schemas.microsoft.com/office/drawing/2018/hyperlinkcolor" showMasterPhAnim="0" showMasterSp="0">
   <p:cSld>
@@ -1344,7 +1403,7 @@
           <a:lstStyle/>
           <a:p>
             <a:r>
-              <a:t>摘要先給評審：對象是售後決策者，模型在本機，話術還等目標值。</a:t>
+              <a:t>摘要給評審三層目標：回廠率假設加十點，核准八成，模型每季重驗。</a:t>
             </a:r>
           </a:p>
         </p:txBody>
@@ -1495,7 +1554,7 @@
           <a:lstStyle/>
           <a:p>
             <a:r>
-              <a:t>決策者現在靠客訴才知道流失，我們要用輿情把時間往前拉。</a:t>
+              <a:t>人走了才知道；三站作者流失率差一截，Dcard偏購車階段。</a:t>
             </a:r>
           </a:p>
         </p:txBody>
@@ -1785,7 +1844,7 @@
           <a:lstStyle/>
           <a:p>
             <a:r>
-              <a:t>四種人裡過保精算最多；靜默出走沒有抱怨，分群也單獨撐得住。</a:t>
+              <a:t>四種人過保精算最多；未分類一成五留觀察名單，不投遞。</a:t>
             </a:r>
           </a:p>
         </p:txBody>
@@ -11933,7 +11992,7 @@
           <a:p>
             <a:r>
               <a:rPr sz="1800"/>
-              <a:t>初賽提案簡報（v0，2026-09）</a:t>
+              <a:t>初賽提案簡報（v1，2026-09）</a:t>
             </a:r>
           </a:p>
         </p:txBody>
@@ -12045,7 +12104,7 @@
                 <a:ea typeface="微軟正黑體"/>
                 <a:cs typeface="Arial"/>
               </a:rPr>
-              <a:t>來源：reports/T10_risk_persona_report.md §2；圖 F4</a:t>
+              <a:t>來源：reports/T10_risk_persona_report.md §2、§6；圖 F7</a:t>
             </a:r>
           </a:p>
         </p:txBody>
@@ -12106,7 +12165,7 @@
         <p:spPr>
           <a:xfrm>
             <a:off x="420624" y="329184"/>
-            <a:ext cx="11356848" cy="566928"/>
+            <a:ext cx="11356848" cy="841248"/>
           </a:xfrm>
           <a:prstGeom prst="rect">
             <a:avLst/>
@@ -12131,7 +12190,7 @@
               </a:spcAft>
             </a:pPr>
             <a:r>
-              <a:rPr sz="2400" b="1" i="0">
+              <a:rPr sz="2000" b="1" i="0">
                 <a:solidFill>
                   <a:srgbClr val="24323E"/>
                 </a:solidFill>
@@ -12139,7 +12198,7 @@
                 <a:ea typeface="微軟正黑體"/>
                 <a:cs typeface="Arial"/>
               </a:rPr>
-              <a:t>高風險作者七成四真的有流失句，低風險只有百分之一點八</a:t>
+              <a:t>高風險七成四真有流失句；過保精算派規模最大、平均風險也最高</a:t>
             </a:r>
           </a:p>
         </p:txBody>
@@ -12152,8 +12211,8 @@
         </p:nvSpPr>
         <p:spPr>
           <a:xfrm>
-            <a:off x="420624" y="987552"/>
-            <a:ext cx="5806440" cy="1051560"/>
+            <a:off x="420624" y="1261872"/>
+            <a:ext cx="5989320" cy="2148840"/>
           </a:xfrm>
           <a:prstGeom prst="rect">
             <a:avLst/>
@@ -12178,7 +12237,7 @@
               </a:spcAft>
             </a:pPr>
             <a:r>
-              <a:rPr sz="1300" b="0" i="0">
+              <a:rPr sz="1400" b="0" i="0">
                 <a:solidFill>
                   <a:srgbClr val="24323E"/>
                 </a:solidFill>
@@ -12202,7 +12261,7 @@
               </a:spcAft>
             </a:pPr>
             <a:r>
-              <a:rPr sz="1600" b="1" i="0">
+              <a:rPr sz="1800" b="1" i="0">
                 <a:solidFill>
                   <a:srgbClr val="24323E"/>
                 </a:solidFill>
@@ -12226,7 +12285,7 @@
               </a:spcAft>
             </a:pPr>
             <a:r>
-              <a:rPr sz="1400" b="0" i="0">
+              <a:rPr sz="1600" b="0" i="0">
                 <a:solidFill>
                   <a:srgbClr val="24323E"/>
                 </a:solidFill>
@@ -12237,11 +12296,35 @@
               <a:t>高風險作者 74% 有流失句，低風險 1.8%。</a:t>
             </a:r>
           </a:p>
+          <a:p>
+            <a:pPr>
+              <a:lnSpc>
+                <a:spcPct val="100000"/>
+              </a:lnSpc>
+              <a:spcBef>
+                <a:spcPts val="0"/>
+              </a:spcBef>
+              <a:spcAft>
+                <a:spcPts val="200"/>
+              </a:spcAft>
+            </a:pPr>
+            <a:r>
+              <a:rPr sz="1400" b="0" i="0">
+                <a:solidFill>
+                  <a:srgbClr val="24323E"/>
+                </a:solidFill>
+                <a:latin typeface="Arial"/>
+                <a:ea typeface="微軟正黑體"/>
+                <a:cs typeface="Arial"/>
+              </a:rPr>
+              <a:t>右圖是 Persona 規模與平均風險：過保精算派 511 人、平均風險 0.73，五組裡最高。</a:t>
+            </a:r>
+          </a:p>
         </p:txBody>
       </p:sp>
       <p:pic>
         <p:nvPicPr>
-          <p:cNvPr id="7" name="Picture 6" descr="F4.png"/>
+          <p:cNvPr id="7" name="Picture 6" descr="F7.png"/>
           <p:cNvPicPr>
             <a:picLocks noChangeAspect="1"/>
           </p:cNvPicPr>
@@ -12255,8 +12338,8 @@
         </p:blipFill>
         <p:spPr>
           <a:xfrm>
-            <a:off x="6409944" y="987552"/>
-            <a:ext cx="5349240" cy="2507456"/>
+            <a:off x="6951472" y="1261872"/>
+            <a:ext cx="4421632" cy="2487168"/>
           </a:xfrm>
           <a:prstGeom prst="rect">
             <a:avLst/>
@@ -12272,8 +12355,8 @@
           <p:nvPr/>
         </p:nvGraphicFramePr>
         <p:xfrm>
-          <a:off x="420624" y="3593592"/>
-          <a:ext cx="11356848" cy="2240280"/>
+          <a:off x="420624" y="3840480"/>
+          <a:ext cx="11356848" cy="2148840"/>
         </p:xfrm>
         <a:graphic>
           <a:graphicData uri="http://schemas.openxmlformats.org/drawingml/2006/table">
@@ -12286,7 +12369,7 @@
                 <a:gridCol w="2194560"/>
                 <a:gridCol w="7973568"/>
               </a:tblGrid>
-              <a:tr h="248920">
+              <a:tr h="238760">
                 <a:tc>
                   <a:txBody>
                     <a:bodyPr wrap="square" anchor="ctr"/>
@@ -12393,7 +12476,7 @@
                   </a:tcPr>
                 </a:tc>
               </a:tr>
-              <a:tr h="248920">
+              <a:tr h="238760">
                 <a:tc>
                   <a:txBody>
                     <a:bodyPr wrap="square" anchor="ctr"/>
@@ -12500,7 +12583,7 @@
                   </a:tcPr>
                 </a:tc>
               </a:tr>
-              <a:tr h="248920">
+              <a:tr h="238760">
                 <a:tc>
                   <a:txBody>
                     <a:bodyPr wrap="square" anchor="ctr"/>
@@ -12607,7 +12690,7 @@
                   </a:tcPr>
                 </a:tc>
               </a:tr>
-              <a:tr h="248920">
+              <a:tr h="238760">
                 <a:tc>
                   <a:txBody>
                     <a:bodyPr wrap="square" anchor="ctr"/>
@@ -12714,7 +12797,7 @@
                   </a:tcPr>
                 </a:tc>
               </a:tr>
-              <a:tr h="248920">
+              <a:tr h="238760">
                 <a:tc>
                   <a:txBody>
                     <a:bodyPr wrap="square" anchor="ctr"/>
@@ -12821,7 +12904,7 @@
                   </a:tcPr>
                 </a:tc>
               </a:tr>
-              <a:tr h="248920">
+              <a:tr h="238760">
                 <a:tc>
                   <a:txBody>
                     <a:bodyPr wrap="square" anchor="ctr"/>
@@ -12928,7 +13011,7 @@
                   </a:tcPr>
                 </a:tc>
               </a:tr>
-              <a:tr h="248920">
+              <a:tr h="238760">
                 <a:tc>
                   <a:txBody>
                     <a:bodyPr wrap="square" anchor="ctr"/>
@@ -13035,7 +13118,7 @@
                   </a:tcPr>
                 </a:tc>
               </a:tr>
-              <a:tr h="248920">
+              <a:tr h="238760">
                 <a:tc>
                   <a:txBody>
                     <a:bodyPr wrap="square" anchor="ctr"/>
@@ -13142,7 +13225,7 @@
                   </a:tcPr>
                 </a:tc>
               </a:tr>
-              <a:tr h="248920">
+              <a:tr h="238760">
                 <a:tc>
                   <a:txBody>
                     <a:bodyPr wrap="square" anchor="ctr"/>
@@ -13261,8 +13344,8 @@
         </p:nvSpPr>
         <p:spPr>
           <a:xfrm>
-            <a:off x="420624" y="5879592"/>
-            <a:ext cx="11356848" cy="320040"/>
+            <a:off x="420624" y="6035040"/>
+            <a:ext cx="11356848" cy="365760"/>
           </a:xfrm>
           <a:prstGeom prst="rect">
             <a:avLst/>
@@ -14124,7 +14207,7 @@
                 <a:ea typeface="微軟正黑體"/>
                 <a:cs typeface="Arial"/>
               </a:rPr>
-              <a:t>來源：reports/T8_r4_report.md；圖 F6</a:t>
+              <a:t>來源：reports/T8_r4_report.md；校準曲線 F6 見附錄 A2</a:t>
             </a:r>
           </a:p>
         </p:txBody>
@@ -14792,7 +14875,7 @@
         <p:spPr>
           <a:xfrm>
             <a:off x="420624" y="2615184"/>
-            <a:ext cx="5623560" cy="411480"/>
+            <a:ext cx="5623560" cy="502920"/>
           </a:xfrm>
           <a:prstGeom prst="rect">
             <a:avLst/>
@@ -14828,18 +14911,87 @@
               <a:t>同一 600 句測試集。r4 原值 P 0.617、R 0.769、κ 0.642（T8 ep2）。</a:t>
             </a:r>
           </a:p>
+          <a:p>
+            <a:pPr>
+              <a:lnSpc>
+                <a:spcPct val="100000"/>
+              </a:lnSpc>
+              <a:spcBef>
+                <a:spcPts val="0"/>
+              </a:spcBef>
+              <a:spcAft>
+                <a:spcPts val="200"/>
+              </a:spcAft>
+            </a:pPr>
+            <a:r>
+              <a:rPr sz="1200" b="0" i="0">
+                <a:solidFill>
+                  <a:srgbClr val="5C6B7A"/>
+                </a:solidFill>
+                <a:latin typeface="Arial"/>
+                <a:ea typeface="微軟正黑體"/>
+                <a:cs typeface="Arial"/>
+              </a:rPr>
+              <a:t>校準曲線見附錄。</a:t>
+            </a:r>
+          </a:p>
         </p:txBody>
       </p:sp>
       <p:sp>
         <p:nvSpPr>
-          <p:cNvPr id="8" name="TextBox 7"/>
+          <p:cNvPr id="8" name="Rounded Rectangle 7"/>
+          <p:cNvSpPr/>
+          <p:nvPr/>
+        </p:nvSpPr>
+        <p:spPr>
+          <a:xfrm>
+            <a:off x="6272784" y="1261872"/>
+            <a:ext cx="5504688" cy="2880360"/>
+          </a:xfrm>
+          <a:prstGeom prst="roundRect">
+            <a:avLst>
+              <a:gd name="adj" fmla="val 8000"/>
+            </a:avLst>
+          </a:prstGeom>
+          <a:solidFill>
+            <a:srgbClr val="F4F7FB"/>
+          </a:solidFill>
+          <a:ln>
+            <a:noFill/>
+          </a:ln>
+        </p:spPr>
+        <p:style>
+          <a:lnRef idx="1">
+            <a:schemeClr val="accent1"/>
+          </a:lnRef>
+          <a:fillRef idx="3">
+            <a:schemeClr val="accent1"/>
+          </a:fillRef>
+          <a:effectRef idx="2">
+            <a:schemeClr val="accent1"/>
+          </a:effectRef>
+          <a:fontRef idx="minor">
+            <a:schemeClr val="lt1"/>
+          </a:fontRef>
+        </p:style>
+        <p:txBody>
+          <a:bodyPr rtlCol="0" anchor="ctr"/>
+          <a:lstStyle/>
+          <a:p>
+            <a:pPr algn="ctr"/>
+          </a:p>
+        </p:txBody>
+      </p:sp>
+      <p:sp>
+        <p:nvSpPr>
+          <p:cNvPr id="9" name="TextBox 8"/>
           <p:cNvSpPr txBox="1"/>
           <p:nvPr/>
         </p:nvSpPr>
         <p:spPr>
           <a:xfrm>
-            <a:off x="420624" y="3090672"/>
-            <a:ext cx="5623560" cy="1234440"/>
+            <a:off x="6419088" y="1408176"/>
+            <a:ext cx="5212080" cy="2606040"/>
           </a:xfrm>
           <a:prstGeom prst="rect">
             <a:avLst/>
@@ -14864,7 +15016,7 @@
               </a:spcAft>
             </a:pPr>
             <a:r>
-              <a:rPr sz="1400" b="0" i="0">
+              <a:rPr sz="1600" b="0" i="0">
                 <a:solidFill>
                   <a:srgbClr val="24323E"/>
                 </a:solidFill>
@@ -14888,7 +15040,7 @@
               </a:spcAft>
             </a:pPr>
             <a:r>
-              <a:rPr sz="1400" b="0" i="0">
+              <a:rPr sz="1600" b="0" i="0">
                 <a:solidFill>
                   <a:srgbClr val="24323E"/>
                 </a:solidFill>
@@ -14912,7 +15064,7 @@
               </a:spcAft>
             </a:pPr>
             <a:r>
-              <a:rPr sz="1400" b="0" i="0">
+              <a:rPr sz="1600" b="0" i="0">
                 <a:solidFill>
                   <a:srgbClr val="24323E"/>
                 </a:solidFill>
@@ -14925,30 +15077,6 @@
           </a:p>
         </p:txBody>
       </p:sp>
-      <p:pic>
-        <p:nvPicPr>
-          <p:cNvPr id="9" name="Picture 8" descr="F6.png"/>
-          <p:cNvPicPr>
-            <a:picLocks noChangeAspect="1"/>
-          </p:cNvPicPr>
-          <p:nvPr/>
-        </p:nvPicPr>
-        <p:blipFill>
-          <a:blip r:embed="rId2"/>
-          <a:stretch>
-            <a:fillRect/>
-          </a:stretch>
-        </p:blipFill>
-        <p:spPr>
-          <a:xfrm>
-            <a:off x="6272784" y="1261872"/>
-            <a:ext cx="5486400" cy="2571750"/>
-          </a:xfrm>
-          <a:prstGeom prst="rect">
-            <a:avLst/>
-          </a:prstGeom>
-        </p:spPr>
-      </p:pic>
       <p:sp>
         <p:nvSpPr>
           <p:cNvPr id="10" name="Rounded Rectangle 9"/>
@@ -17656,7 +17784,7 @@
                 <a:ea typeface="微軟正黑體"/>
                 <a:cs typeface="Arial"/>
               </a:rPr>
-              <a:t>來源：iPAS導入對照_2026-09-25.md §2.1–2.2</a:t>
+              <a:t>來源：iPAS骨架頁_草稿.md、會議記錄_2026-09-30.md §五、iPAS導入對照_2026-09-25.md</a:t>
             </a:r>
           </a:p>
         </p:txBody>
@@ -17750,7 +17878,7 @@
                 <a:ea typeface="微軟正黑體"/>
                 <a:cs typeface="Arial"/>
               </a:rPr>
-              <a:t>技術與語料已在手上；要守的是代表性、個資，和生成亂編</a:t>
+              <a:t>四個面向都有原型；成本只列結構，五項風險已有對策</a:t>
             </a:r>
           </a:p>
         </p:txBody>
@@ -17764,7 +17892,7 @@
         <p:spPr>
           <a:xfrm>
             <a:off x="420624" y="987552"/>
-            <a:ext cx="5349240" cy="987552"/>
+            <a:ext cx="5074920" cy="1042415"/>
           </a:xfrm>
           <a:prstGeom prst="roundRect">
             <a:avLst>
@@ -17808,8 +17936,8 @@
         </p:nvSpPr>
         <p:spPr>
           <a:xfrm>
-            <a:off x="548640" y="1060704"/>
-            <a:ext cx="5093207" cy="859536"/>
+            <a:off x="530352" y="1042416"/>
+            <a:ext cx="4873752" cy="932688"/>
           </a:xfrm>
           <a:prstGeom prst="rect">
             <a:avLst/>
@@ -17834,7 +17962,7 @@
               </a:spcAft>
             </a:pPr>
             <a:r>
-              <a:rPr sz="1400" b="1" i="0">
+              <a:rPr sz="1300" b="1" i="0">
                 <a:solidFill>
                   <a:srgbClr val="2F5D9F"/>
                 </a:solidFill>
@@ -17858,7 +17986,7 @@
               </a:spcAft>
             </a:pPr>
             <a:r>
-              <a:rPr sz="1300" b="0" i="0">
+              <a:rPr sz="1100" b="0" i="0">
                 <a:solidFill>
                   <a:srgbClr val="24323E"/>
                 </a:solidFill>
@@ -17866,7 +17994,7 @@
                 <a:ea typeface="微軟正黑體"/>
                 <a:cs typeface="Arial"/>
               </a:rPr>
-              <a:t>只靠客訴與回廠才知道流失，改成輿情加 CRM 提前辨識。</a:t>
+              <a:t>售後現在要等客訴或不回廠才知道車主走了；改用輿情與 CRM 訊號，在過保、刪項、回廠間隔拉長時就先找到人。</a:t>
             </a:r>
           </a:p>
         </p:txBody>
@@ -17879,8 +18007,8 @@
         </p:nvSpPr>
         <p:spPr>
           <a:xfrm>
-            <a:off x="420624" y="2066543"/>
-            <a:ext cx="5349240" cy="987552"/>
+            <a:off x="420624" y="2103120"/>
+            <a:ext cx="5074920" cy="1042415"/>
           </a:xfrm>
           <a:prstGeom prst="roundRect">
             <a:avLst>
@@ -17924,8 +18052,8 @@
         </p:nvSpPr>
         <p:spPr>
           <a:xfrm>
-            <a:off x="548640" y="2139696"/>
-            <a:ext cx="5093207" cy="859536"/>
+            <a:off x="530352" y="2157984"/>
+            <a:ext cx="4873752" cy="932688"/>
           </a:xfrm>
           <a:prstGeom prst="rect">
             <a:avLst/>
@@ -17950,7 +18078,7 @@
               </a:spcAft>
             </a:pPr>
             <a:r>
-              <a:rPr sz="1400" b="1" i="0">
+              <a:rPr sz="1300" b="1" i="0">
                 <a:solidFill>
                   <a:srgbClr val="2F5D9F"/>
                 </a:solidFill>
@@ -17974,7 +18102,7 @@
               </a:spcAft>
             </a:pPr>
             <a:r>
-              <a:rPr sz="1300" b="0" i="0">
+              <a:rPr sz="1100" b="0" i="0">
                 <a:solidFill>
                   <a:srgbClr val="24323E"/>
                 </a:solidFill>
@@ -17982,7 +18110,7 @@
                 <a:ea typeface="微軟正黑體"/>
                 <a:cs typeface="Arial"/>
               </a:rPr>
-              <a:t>監督分類、分群、RAG 都有原型。CRM 欄位對照仍空著。</a:t>
+              <a:t>判斷、分群、生成三段都有可跑的原型；八條規則已對到 DMS 欄位，導入時換成實際欄位名即可。</a:t>
             </a:r>
           </a:p>
         </p:txBody>
@@ -17995,8 +18123,8 @@
         </p:nvSpPr>
         <p:spPr>
           <a:xfrm>
-            <a:off x="420624" y="3145536"/>
-            <a:ext cx="5349240" cy="987552"/>
+            <a:off x="420624" y="3218688"/>
+            <a:ext cx="5074920" cy="1042415"/>
           </a:xfrm>
           <a:prstGeom prst="roundRect">
             <a:avLst>
@@ -18040,8 +18168,8 @@
         </p:nvSpPr>
         <p:spPr>
           <a:xfrm>
-            <a:off x="548640" y="3218688"/>
-            <a:ext cx="5093207" cy="859536"/>
+            <a:off x="530352" y="3273552"/>
+            <a:ext cx="4873752" cy="932688"/>
           </a:xfrm>
           <a:prstGeom prst="rect">
             <a:avLst/>
@@ -18066,7 +18194,7 @@
               </a:spcAft>
             </a:pPr>
             <a:r>
-              <a:rPr sz="1400" b="1" i="0">
+              <a:rPr sz="1300" b="1" i="0">
                 <a:solidFill>
                   <a:srgbClr val="2F5D9F"/>
                 </a:solidFill>
@@ -18090,7 +18218,7 @@
               </a:spcAft>
             </a:pPr>
             <a:r>
-              <a:rPr sz="1300" b="0" i="0">
+              <a:rPr sz="1100" b="0" i="0">
                 <a:solidFill>
                   <a:srgbClr val="24323E"/>
                 </a:solidFill>
@@ -18098,31 +18226,7 @@
                 <a:ea typeface="微軟正黑體"/>
                 <a:cs typeface="Arial"/>
               </a:rPr>
-              <a:t>推論零 API 費，本機 8 GB 可跑。</a:t>
-            </a:r>
-          </a:p>
-          <a:p>
-            <a:pPr>
-              <a:lnSpc>
-                <a:spcPct val="100000"/>
-              </a:lnSpc>
-              <a:spcBef>
-                <a:spcPts val="0"/>
-              </a:spcBef>
-              <a:spcAft>
-                <a:spcPts val="200"/>
-              </a:spcAft>
-            </a:pPr>
-            <a:r>
-              <a:rPr sz="1300" b="1" i="0">
-                <a:solidFill>
-                  <a:srgbClr val="C05600"/>
-                </a:solidFill>
-                <a:latin typeface="Arial"/>
-                <a:ea typeface="微軟正黑體"/>
-                <a:cs typeface="Arial"/>
-              </a:rPr>
-              <a:t>【待補：成本與回收期】</a:t>
+              <a:t>判斷在本機跑，每句 0.7 秒、零 API 費；8 GB 顯卡就能訓練與推論。成本結構已列（人力、標註、模型、整合、授權），回報待試行基期。</a:t>
             </a:r>
           </a:p>
         </p:txBody>
@@ -18135,8 +18239,8 @@
         </p:nvSpPr>
         <p:spPr>
           <a:xfrm>
-            <a:off x="420624" y="4224528"/>
-            <a:ext cx="5349240" cy="987552"/>
+            <a:off x="420624" y="4334256"/>
+            <a:ext cx="5074920" cy="1042415"/>
           </a:xfrm>
           <a:prstGeom prst="roundRect">
             <a:avLst>
@@ -18180,8 +18284,8 @@
         </p:nvSpPr>
         <p:spPr>
           <a:xfrm>
-            <a:off x="548640" y="4297680"/>
-            <a:ext cx="5093207" cy="859536"/>
+            <a:off x="530352" y="4389120"/>
+            <a:ext cx="4873752" cy="932688"/>
           </a:xfrm>
           <a:prstGeom prst="rect">
             <a:avLst/>
@@ -18206,7 +18310,7 @@
               </a:spcAft>
             </a:pPr>
             <a:r>
-              <a:rPr sz="1400" b="1" i="0">
+              <a:rPr sz="1300" b="1" i="0">
                 <a:solidFill>
                   <a:srgbClr val="2F5D9F"/>
                 </a:solidFill>
@@ -18230,7 +18334,7 @@
               </a:spcAft>
             </a:pPr>
             <a:r>
-              <a:rPr sz="1300" b="0" i="0">
+              <a:rPr sz="1100" b="0" i="0">
                 <a:solidFill>
                   <a:srgbClr val="24323E"/>
                 </a:solidFill>
@@ -18238,7 +18342,7 @@
                 <a:ea typeface="微軟正黑體"/>
                 <a:cs typeface="Arial"/>
               </a:rPr>
-              <a:t>代表性、雙模型、個資、生成幻覺。對策在右表。</a:t>
+              <a:t>代表性、雙複核模型、個資、生成亂編、Persona 主觀性；對策在右表，每項都已有處理。</a:t>
             </a:r>
           </a:p>
         </p:txBody>
@@ -18252,8 +18356,8 @@
           <p:nvPr/>
         </p:nvGraphicFramePr>
         <p:xfrm>
-          <a:off x="5952744" y="987552"/>
-          <a:ext cx="5824727" cy="4160520"/>
+          <a:off x="5650992" y="987552"/>
+          <a:ext cx="6126480" cy="4315968"/>
         </p:xfrm>
         <a:graphic>
           <a:graphicData uri="http://schemas.openxmlformats.org/drawingml/2006/table">
@@ -18262,10 +18366,12 @@
                 <a:tableStyleId>{5C22544A-7EE6-4342-B048-85BDC9FD1C3A}</a:tableStyleId>
               </a:tblPr>
               <a:tblGrid>
+                <a:gridCol w="658368"/>
                 <a:gridCol w="2148840"/>
-                <a:gridCol w="3675887"/>
+                <a:gridCol w="2606040"/>
+                <a:gridCol w="713232"/>
               </a:tblGrid>
-              <a:tr h="832104">
+              <a:tr h="719328">
                 <a:tc>
                   <a:txBody>
                     <a:bodyPr wrap="square" anchor="ctr"/>
@@ -18283,7 +18389,42 @@
                         </a:spcAft>
                       </a:pPr>
                       <a:r>
-                        <a:rPr sz="1200" b="1" i="0">
+                        <a:rPr sz="1000" b="1" i="0">
+                          <a:solidFill>
+                            <a:srgbClr val="FFFFFF"/>
+                          </a:solidFill>
+                          <a:latin typeface="Arial"/>
+                          <a:ea typeface="微軟正黑體"/>
+                          <a:cs typeface="Arial"/>
+                        </a:rPr>
+                        <a:t>層別</a:t>
+                      </a:r>
+                    </a:p>
+                  </a:txBody>
+                  <a:tcPr anchor="ctr" marL="73152" marR="54864" marT="36576" marB="27432">
+                    <a:solidFill>
+                      <a:srgbClr val="44546A"/>
+                    </a:solidFill>
+                  </a:tcPr>
+                </a:tc>
+                <a:tc>
+                  <a:txBody>
+                    <a:bodyPr wrap="square" anchor="ctr"/>
+                    <a:lstStyle/>
+                    <a:p>
+                      <a:pPr>
+                        <a:lnSpc>
+                          <a:spcPct val="100000"/>
+                        </a:lnSpc>
+                        <a:spcBef>
+                          <a:spcPts val="0"/>
+                        </a:spcBef>
+                        <a:spcAft>
+                          <a:spcPts val="200"/>
+                        </a:spcAft>
+                      </a:pPr>
+                      <a:r>
+                        <a:rPr sz="1000" b="1" i="0">
                           <a:solidFill>
                             <a:srgbClr val="FFFFFF"/>
                           </a:solidFill>
@@ -18318,7 +18459,7 @@
                         </a:spcAft>
                       </a:pPr>
                       <a:r>
-                        <a:rPr sz="1200" b="1" i="0">
+                        <a:rPr sz="1000" b="1" i="0">
                           <a:solidFill>
                             <a:srgbClr val="FFFFFF"/>
                           </a:solidFill>
@@ -18336,8 +18477,6 @@
                     </a:solidFill>
                   </a:tcPr>
                 </a:tc>
-              </a:tr>
-              <a:tr h="832104">
                 <a:tc>
                   <a:txBody>
                     <a:bodyPr wrap="square" anchor="ctr"/>
@@ -18355,7 +18494,44 @@
                         </a:spcAft>
                       </a:pPr>
                       <a:r>
-                        <a:rPr sz="1200" b="1" i="0">
+                        <a:rPr sz="1000" b="1" i="0">
+                          <a:solidFill>
+                            <a:srgbClr val="FFFFFF"/>
+                          </a:solidFill>
+                          <a:latin typeface="Arial"/>
+                          <a:ea typeface="微軟正黑體"/>
+                          <a:cs typeface="Arial"/>
+                        </a:rPr>
+                        <a:t>責任人</a:t>
+                      </a:r>
+                    </a:p>
+                  </a:txBody>
+                  <a:tcPr anchor="ctr" marL="73152" marR="54864" marT="36576" marB="27432">
+                    <a:solidFill>
+                      <a:srgbClr val="44546A"/>
+                    </a:solidFill>
+                  </a:tcPr>
+                </a:tc>
+              </a:tr>
+              <a:tr h="719328">
+                <a:tc>
+                  <a:txBody>
+                    <a:bodyPr wrap="square" anchor="ctr"/>
+                    <a:lstStyle/>
+                    <a:p>
+                      <a:pPr>
+                        <a:lnSpc>
+                          <a:spcPct val="100000"/>
+                        </a:lnSpc>
+                        <a:spcBef>
+                          <a:spcPts val="0"/>
+                        </a:spcBef>
+                        <a:spcAft>
+                          <a:spcPts val="200"/>
+                        </a:spcAft>
+                      </a:pPr>
+                      <a:r>
+                        <a:rPr sz="1000" b="1" i="0">
                           <a:solidFill>
                             <a:srgbClr val="24323E"/>
                           </a:solidFill>
@@ -18363,7 +18539,7 @@
                           <a:ea typeface="微軟正黑體"/>
                           <a:cs typeface="Arial"/>
                         </a:rPr>
-                        <a:t>兩個複核模型並存</a:t>
+                        <a:t>技術</a:t>
                       </a:r>
                     </a:p>
                   </a:txBody>
@@ -18390,7 +18566,7 @@
                         </a:spcAft>
                       </a:pPr>
                       <a:r>
-                        <a:rPr sz="1200" b="0" i="0">
+                        <a:rPr sz="1000" b="0" i="0">
                           <a:solidFill>
                             <a:srgbClr val="24323E"/>
                           </a:solidFill>
@@ -18398,7 +18574,7 @@
                           <a:ea typeface="微軟正黑體"/>
                           <a:cs typeface="Arial"/>
                         </a:rPr>
-                        <a:t>揭露。重疊 3,760 句，c≥2 一致率 98.4%</a:t>
+                        <a:t>生成內容寫錯價格或保固條款</a:t>
                       </a:r>
                     </a:p>
                   </a:txBody>
@@ -18408,8 +18584,6 @@
                     </a:solidFill>
                   </a:tcPr>
                 </a:tc>
-              </a:tr>
-              <a:tr h="832104">
                 <a:tc>
                   <a:txBody>
                     <a:bodyPr wrap="square" anchor="ctr"/>
@@ -18427,7 +18601,7 @@
                         </a:spcAft>
                       </a:pPr>
                       <a:r>
-                        <a:rPr sz="1200" b="1" i="0">
+                        <a:rPr sz="1000" b="0" i="0">
                           <a:solidFill>
                             <a:srgbClr val="24323E"/>
                           </a:solidFill>
@@ -18435,7 +18609,79 @@
                           <a:ea typeface="微軟正黑體"/>
                           <a:cs typeface="Arial"/>
                         </a:rPr>
-                        <a:t>論壇代表性</a:t>
+                        <a:t>只引用知識庫、數字逐字比對、人工審核必經</a:t>
+                      </a:r>
+                    </a:p>
+                  </a:txBody>
+                  <a:tcPr anchor="ctr" marL="73152" marR="54864" marT="36576" marB="27432">
+                    <a:solidFill>
+                      <a:srgbClr val="FFFFFF"/>
+                    </a:solidFill>
+                  </a:tcPr>
+                </a:tc>
+                <a:tc>
+                  <a:txBody>
+                    <a:bodyPr wrap="square" anchor="ctr"/>
+                    <a:lstStyle/>
+                    <a:p>
+                      <a:pPr>
+                        <a:lnSpc>
+                          <a:spcPct val="100000"/>
+                        </a:lnSpc>
+                        <a:spcBef>
+                          <a:spcPts val="0"/>
+                        </a:spcBef>
+                        <a:spcAft>
+                          <a:spcPts val="200"/>
+                        </a:spcAft>
+                      </a:pPr>
+                      <a:r>
+                        <a:rPr sz="1000" b="1" i="0">
+                          <a:solidFill>
+                            <a:srgbClr val="24323E"/>
+                          </a:solidFill>
+                          <a:latin typeface="Arial"/>
+                          <a:ea typeface="微軟正黑體"/>
+                          <a:cs typeface="Arial"/>
+                        </a:rPr>
+                        <a:t>A</a:t>
+                      </a:r>
+                    </a:p>
+                  </a:txBody>
+                  <a:tcPr anchor="ctr" marL="73152" marR="54864" marT="36576" marB="27432">
+                    <a:solidFill>
+                      <a:srgbClr val="FFFFFF"/>
+                    </a:solidFill>
+                  </a:tcPr>
+                </a:tc>
+              </a:tr>
+              <a:tr h="719328">
+                <a:tc>
+                  <a:txBody>
+                    <a:bodyPr wrap="square" anchor="ctr"/>
+                    <a:lstStyle/>
+                    <a:p>
+                      <a:pPr>
+                        <a:lnSpc>
+                          <a:spcPct val="100000"/>
+                        </a:lnSpc>
+                        <a:spcBef>
+                          <a:spcPts val="0"/>
+                        </a:spcBef>
+                        <a:spcAft>
+                          <a:spcPts val="200"/>
+                        </a:spcAft>
+                      </a:pPr>
+                      <a:r>
+                        <a:rPr sz="1000" b="1" i="0">
+                          <a:solidFill>
+                            <a:srgbClr val="24323E"/>
+                          </a:solidFill>
+                          <a:latin typeface="Arial"/>
+                          <a:ea typeface="微軟正黑體"/>
+                          <a:cs typeface="Arial"/>
+                        </a:rPr>
+                        <a:t>技術</a:t>
                       </a:r>
                     </a:p>
                   </a:txBody>
@@ -18462,7 +18708,7 @@
                         </a:spcAft>
                       </a:pPr>
                       <a:r>
-                        <a:rPr sz="1200" b="0" i="0">
+                        <a:rPr sz="1000" b="0" i="0">
                           <a:solidFill>
                             <a:srgbClr val="24323E"/>
                           </a:solidFill>
@@ -18470,7 +18716,7 @@
                           <a:ea typeface="微軟正黑體"/>
                           <a:cs typeface="Arial"/>
                         </a:rPr>
-                        <a:t>母體是論壇發言者，不是全體車主</a:t>
+                        <a:t>模型在模糊句多報（困難層 F1 ≤ 0.51，精確率 0.34）</a:t>
                       </a:r>
                     </a:p>
                   </a:txBody>
@@ -18480,8 +18726,6 @@
                     </a:solidFill>
                   </a:tcPr>
                 </a:tc>
-              </a:tr>
-              <a:tr h="832104">
                 <a:tc>
                   <a:txBody>
                     <a:bodyPr wrap="square" anchor="ctr"/>
@@ -18499,7 +18743,7 @@
                         </a:spcAft>
                       </a:pPr>
                       <a:r>
-                        <a:rPr sz="1200" b="1" i="0">
+                        <a:rPr sz="1000" b="0" i="0">
                           <a:solidFill>
                             <a:srgbClr val="24323E"/>
                           </a:solidFill>
@@ -18507,7 +18751,79 @@
                           <a:ea typeface="微軟正黑體"/>
                           <a:cs typeface="Arial"/>
                         </a:rPr>
-                        <a:t>個資與再識別</a:t>
+                        <a:t>定位成「初篩＋人工複核」</a:t>
+                      </a:r>
+                    </a:p>
+                  </a:txBody>
+                  <a:tcPr anchor="ctr" marL="73152" marR="54864" marT="36576" marB="27432">
+                    <a:solidFill>
+                      <a:srgbClr val="F7F9FB"/>
+                    </a:solidFill>
+                  </a:tcPr>
+                </a:tc>
+                <a:tc>
+                  <a:txBody>
+                    <a:bodyPr wrap="square" anchor="ctr"/>
+                    <a:lstStyle/>
+                    <a:p>
+                      <a:pPr>
+                        <a:lnSpc>
+                          <a:spcPct val="100000"/>
+                        </a:lnSpc>
+                        <a:spcBef>
+                          <a:spcPts val="0"/>
+                        </a:spcBef>
+                        <a:spcAft>
+                          <a:spcPts val="200"/>
+                        </a:spcAft>
+                      </a:pPr>
+                      <a:r>
+                        <a:rPr sz="1000" b="1" i="0">
+                          <a:solidFill>
+                            <a:srgbClr val="24323E"/>
+                          </a:solidFill>
+                          <a:latin typeface="Arial"/>
+                          <a:ea typeface="微軟正黑體"/>
+                          <a:cs typeface="Arial"/>
+                        </a:rPr>
+                        <a:t>A</a:t>
+                      </a:r>
+                    </a:p>
+                  </a:txBody>
+                  <a:tcPr anchor="ctr" marL="73152" marR="54864" marT="36576" marB="27432">
+                    <a:solidFill>
+                      <a:srgbClr val="F7F9FB"/>
+                    </a:solidFill>
+                  </a:tcPr>
+                </a:tc>
+              </a:tr>
+              <a:tr h="719328">
+                <a:tc>
+                  <a:txBody>
+                    <a:bodyPr wrap="square" anchor="ctr"/>
+                    <a:lstStyle/>
+                    <a:p>
+                      <a:pPr>
+                        <a:lnSpc>
+                          <a:spcPct val="100000"/>
+                        </a:lnSpc>
+                        <a:spcBef>
+                          <a:spcPts val="0"/>
+                        </a:spcBef>
+                        <a:spcAft>
+                          <a:spcPts val="200"/>
+                        </a:spcAft>
+                      </a:pPr>
+                      <a:r>
+                        <a:rPr sz="1000" b="1" i="0">
+                          <a:solidFill>
+                            <a:srgbClr val="24323E"/>
+                          </a:solidFill>
+                          <a:latin typeface="Arial"/>
+                          <a:ea typeface="微軟正黑體"/>
+                          <a:cs typeface="Arial"/>
+                        </a:rPr>
+                        <a:t>資料</a:t>
                       </a:r>
                     </a:p>
                   </a:txBody>
@@ -18534,7 +18850,7 @@
                         </a:spcAft>
                       </a:pPr>
                       <a:r>
-                        <a:rPr sz="1200" b="0" i="0">
+                        <a:rPr sz="1000" b="0" i="0">
                           <a:solidFill>
                             <a:srgbClr val="24323E"/>
                           </a:solidFill>
@@ -18542,7 +18858,7 @@
                           <a:ea typeface="微軟正黑體"/>
                           <a:cs typeface="Arial"/>
                         </a:rPr>
-                        <a:t>遮蔽 517 次；抽查 50 句漏網 0</a:t>
+                        <a:t>論壇代表性（正例 67% 來自 Mobile01，母體是論壇發言者）</a:t>
                       </a:r>
                     </a:p>
                   </a:txBody>
@@ -18552,8 +18868,6 @@
                     </a:solidFill>
                   </a:tcPr>
                 </a:tc>
-              </a:tr>
-              <a:tr h="832104">
                 <a:tc>
                   <a:txBody>
                     <a:bodyPr wrap="square" anchor="ctr"/>
@@ -18571,7 +18885,7 @@
                         </a:spcAft>
                       </a:pPr>
                       <a:r>
-                        <a:rPr sz="1200" b="1" i="0">
+                        <a:rPr sz="1000" b="0" i="0">
                           <a:solidFill>
                             <a:srgbClr val="24323E"/>
                           </a:solidFill>
@@ -18579,7 +18893,79 @@
                           <a:ea typeface="微軟正黑體"/>
                           <a:cs typeface="Arial"/>
                         </a:rPr>
-                        <a:t>生成幻覺</a:t>
+                        <a:t>分析頁註明母體與來源構成；上線改用 CRM 資料</a:t>
+                      </a:r>
+                    </a:p>
+                  </a:txBody>
+                  <a:tcPr anchor="ctr" marL="73152" marR="54864" marT="36576" marB="27432">
+                    <a:solidFill>
+                      <a:srgbClr val="FFFFFF"/>
+                    </a:solidFill>
+                  </a:tcPr>
+                </a:tc>
+                <a:tc>
+                  <a:txBody>
+                    <a:bodyPr wrap="square" anchor="ctr"/>
+                    <a:lstStyle/>
+                    <a:p>
+                      <a:pPr>
+                        <a:lnSpc>
+                          <a:spcPct val="100000"/>
+                        </a:lnSpc>
+                        <a:spcBef>
+                          <a:spcPts val="0"/>
+                        </a:spcBef>
+                        <a:spcAft>
+                          <a:spcPts val="200"/>
+                        </a:spcAft>
+                      </a:pPr>
+                      <a:r>
+                        <a:rPr sz="1000" b="1" i="0">
+                          <a:solidFill>
+                            <a:srgbClr val="24323E"/>
+                          </a:solidFill>
+                          <a:latin typeface="Arial"/>
+                          <a:ea typeface="微軟正黑體"/>
+                          <a:cs typeface="Arial"/>
+                        </a:rPr>
+                        <a:t>B</a:t>
+                      </a:r>
+                    </a:p>
+                  </a:txBody>
+                  <a:tcPr anchor="ctr" marL="73152" marR="54864" marT="36576" marB="27432">
+                    <a:solidFill>
+                      <a:srgbClr val="FFFFFF"/>
+                    </a:solidFill>
+                  </a:tcPr>
+                </a:tc>
+              </a:tr>
+              <a:tr h="719328">
+                <a:tc>
+                  <a:txBody>
+                    <a:bodyPr wrap="square" anchor="ctr"/>
+                    <a:lstStyle/>
+                    <a:p>
+                      <a:pPr>
+                        <a:lnSpc>
+                          <a:spcPct val="100000"/>
+                        </a:lnSpc>
+                        <a:spcBef>
+                          <a:spcPts val="0"/>
+                        </a:spcBef>
+                        <a:spcAft>
+                          <a:spcPts val="200"/>
+                        </a:spcAft>
+                      </a:pPr>
+                      <a:r>
+                        <a:rPr sz="1000" b="1" i="0">
+                          <a:solidFill>
+                            <a:srgbClr val="24323E"/>
+                          </a:solidFill>
+                          <a:latin typeface="Arial"/>
+                          <a:ea typeface="微軟正黑體"/>
+                          <a:cs typeface="Arial"/>
+                        </a:rPr>
+                        <a:t>法規</a:t>
                       </a:r>
                     </a:p>
                   </a:txBody>
@@ -18606,7 +18992,7 @@
                         </a:spcAft>
                       </a:pPr>
                       <a:r>
-                        <a:rPr sz="1200" b="0" i="0">
+                        <a:rPr sz="1000" b="0" i="0">
                           <a:solidFill>
                             <a:srgbClr val="24323E"/>
                           </a:solidFill>
@@ -18614,13 +19000,225 @@
                           <a:ea typeface="微軟正黑體"/>
                           <a:cs typeface="Arial"/>
                         </a:rPr>
-                        <a:t>價格與保固只引用知識庫，並人工審核</a:t>
+                        <a:t>個資與再識別</a:t>
                       </a:r>
                     </a:p>
                   </a:txBody>
                   <a:tcPr anchor="ctr" marL="73152" marR="54864" marT="36576" marB="27432">
                     <a:solidFill>
                       <a:srgbClr val="F7F9FB"/>
+                    </a:solidFill>
+                  </a:tcPr>
+                </a:tc>
+                <a:tc>
+                  <a:txBody>
+                    <a:bodyPr wrap="square" anchor="ctr"/>
+                    <a:lstStyle/>
+                    <a:p>
+                      <a:pPr>
+                        <a:lnSpc>
+                          <a:spcPct val="100000"/>
+                        </a:lnSpc>
+                        <a:spcBef>
+                          <a:spcPts val="0"/>
+                        </a:spcBef>
+                        <a:spcAft>
+                          <a:spcPts val="200"/>
+                        </a:spcAft>
+                      </a:pPr>
+                      <a:r>
+                        <a:rPr sz="1000" b="0" i="0">
+                          <a:solidFill>
+                            <a:srgbClr val="24323E"/>
+                          </a:solidFill>
+                          <a:latin typeface="Arial"/>
+                          <a:ea typeface="微軟正黑體"/>
+                          <a:cs typeface="Arial"/>
+                        </a:rPr>
+                        <a:t>去識別流程，簡報與 Demo 只用去識別版</a:t>
+                      </a:r>
+                    </a:p>
+                  </a:txBody>
+                  <a:tcPr anchor="ctr" marL="73152" marR="54864" marT="36576" marB="27432">
+                    <a:solidFill>
+                      <a:srgbClr val="F7F9FB"/>
+                    </a:solidFill>
+                  </a:tcPr>
+                </a:tc>
+                <a:tc>
+                  <a:txBody>
+                    <a:bodyPr wrap="square" anchor="ctr"/>
+                    <a:lstStyle/>
+                    <a:p>
+                      <a:pPr>
+                        <a:lnSpc>
+                          <a:spcPct val="100000"/>
+                        </a:lnSpc>
+                        <a:spcBef>
+                          <a:spcPts val="0"/>
+                        </a:spcBef>
+                        <a:spcAft>
+                          <a:spcPts val="200"/>
+                        </a:spcAft>
+                      </a:pPr>
+                      <a:r>
+                        <a:rPr sz="1000" b="1" i="0">
+                          <a:solidFill>
+                            <a:srgbClr val="24323E"/>
+                          </a:solidFill>
+                          <a:latin typeface="Arial"/>
+                          <a:ea typeface="微軟正黑體"/>
+                          <a:cs typeface="Arial"/>
+                        </a:rPr>
+                        <a:t>A</a:t>
+                      </a:r>
+                    </a:p>
+                  </a:txBody>
+                  <a:tcPr anchor="ctr" marL="73152" marR="54864" marT="36576" marB="27432">
+                    <a:solidFill>
+                      <a:srgbClr val="F7F9FB"/>
+                    </a:solidFill>
+                  </a:tcPr>
+                </a:tc>
+              </a:tr>
+              <a:tr h="719328">
+                <a:tc>
+                  <a:txBody>
+                    <a:bodyPr wrap="square" anchor="ctr"/>
+                    <a:lstStyle/>
+                    <a:p>
+                      <a:pPr>
+                        <a:lnSpc>
+                          <a:spcPct val="100000"/>
+                        </a:lnSpc>
+                        <a:spcBef>
+                          <a:spcPts val="0"/>
+                        </a:spcBef>
+                        <a:spcAft>
+                          <a:spcPts val="200"/>
+                        </a:spcAft>
+                      </a:pPr>
+                      <a:r>
+                        <a:rPr sz="1000" b="1" i="0">
+                          <a:solidFill>
+                            <a:srgbClr val="24323E"/>
+                          </a:solidFill>
+                          <a:latin typeface="Arial"/>
+                          <a:ea typeface="微軟正黑體"/>
+                          <a:cs typeface="Arial"/>
+                        </a:rPr>
+                        <a:t>組織</a:t>
+                      </a:r>
+                    </a:p>
+                  </a:txBody>
+                  <a:tcPr anchor="ctr" marL="73152" marR="54864" marT="36576" marB="27432">
+                    <a:solidFill>
+                      <a:srgbClr val="FFFFFF"/>
+                    </a:solidFill>
+                  </a:tcPr>
+                </a:tc>
+                <a:tc>
+                  <a:txBody>
+                    <a:bodyPr wrap="square" anchor="ctr"/>
+                    <a:lstStyle/>
+                    <a:p>
+                      <a:pPr>
+                        <a:lnSpc>
+                          <a:spcPct val="100000"/>
+                        </a:lnSpc>
+                        <a:spcBef>
+                          <a:spcPts val="0"/>
+                        </a:spcBef>
+                        <a:spcAft>
+                          <a:spcPts val="200"/>
+                        </a:spcAft>
+                      </a:pPr>
+                      <a:r>
+                        <a:rPr sz="1000" b="0" i="0">
+                          <a:solidFill>
+                            <a:srgbClr val="24323E"/>
+                          </a:solidFill>
+                          <a:latin typeface="Arial"/>
+                          <a:ea typeface="微軟正黑體"/>
+                          <a:cs typeface="Arial"/>
+                        </a:rPr>
+                        <a:t>Persona 被質疑主觀（ARI 0.08）</a:t>
+                      </a:r>
+                    </a:p>
+                  </a:txBody>
+                  <a:tcPr anchor="ctr" marL="73152" marR="54864" marT="36576" marB="27432">
+                    <a:solidFill>
+                      <a:srgbClr val="FFFFFF"/>
+                    </a:solidFill>
+                  </a:tcPr>
+                </a:tc>
+                <a:tc>
+                  <a:txBody>
+                    <a:bodyPr wrap="square" anchor="ctr"/>
+                    <a:lstStyle/>
+                    <a:p>
+                      <a:pPr>
+                        <a:lnSpc>
+                          <a:spcPct val="100000"/>
+                        </a:lnSpc>
+                        <a:spcBef>
+                          <a:spcPts val="0"/>
+                        </a:spcBef>
+                        <a:spcAft>
+                          <a:spcPts val="200"/>
+                        </a:spcAft>
+                      </a:pPr>
+                      <a:r>
+                        <a:rPr sz="1000" b="0" i="0">
+                          <a:solidFill>
+                            <a:srgbClr val="24323E"/>
+                          </a:solidFill>
+                          <a:latin typeface="Arial"/>
+                          <a:ea typeface="微軟正黑體"/>
+                          <a:cs typeface="Arial"/>
+                        </a:rPr>
+                        <a:t>寫成「規則定義、每項可回溯原句」</a:t>
+                      </a:r>
+                    </a:p>
+                  </a:txBody>
+                  <a:tcPr anchor="ctr" marL="73152" marR="54864" marT="36576" marB="27432">
+                    <a:solidFill>
+                      <a:srgbClr val="FFFFFF"/>
+                    </a:solidFill>
+                  </a:tcPr>
+                </a:tc>
+                <a:tc>
+                  <a:txBody>
+                    <a:bodyPr wrap="square" anchor="ctr"/>
+                    <a:lstStyle/>
+                    <a:p>
+                      <a:pPr>
+                        <a:lnSpc>
+                          <a:spcPct val="100000"/>
+                        </a:lnSpc>
+                        <a:spcBef>
+                          <a:spcPts val="0"/>
+                        </a:spcBef>
+                        <a:spcAft>
+                          <a:spcPts val="200"/>
+                        </a:spcAft>
+                      </a:pPr>
+                      <a:r>
+                        <a:rPr sz="1000" b="1" i="0">
+                          <a:solidFill>
+                            <a:srgbClr val="24323E"/>
+                          </a:solidFill>
+                          <a:latin typeface="Arial"/>
+                          <a:ea typeface="微軟正黑體"/>
+                          <a:cs typeface="Arial"/>
+                        </a:rPr>
+                        <a:t>B</a:t>
+                      </a:r>
+                    </a:p>
+                  </a:txBody>
+                  <a:tcPr anchor="ctr" marL="73152" marR="54864" marT="36576" marB="27432">
+                    <a:solidFill>
+                      <a:srgbClr val="FFFFFF"/>
                     </a:solidFill>
                   </a:tcPr>
                 </a:tc>
@@ -18736,7 +19334,7 @@
                 <a:ea typeface="微軟正黑體"/>
                 <a:cs typeface="Arial"/>
               </a:rPr>
-              <a:t>來源：iPAS導入對照_2026-09-25.md §2.4；現況數字見 T8、T10</a:t>
+              <a:t>來源：iPAS骨架頁_草稿.md、會議記錄_2026-09-30.md §四；模型現況見 T9、T8</a:t>
             </a:r>
           </a:p>
         </p:txBody>
@@ -18830,21 +19428,68 @@
                 <a:ea typeface="微軟正黑體"/>
                 <a:cs typeface="Arial"/>
               </a:rPr>
-              <a:t>延遲和判準已有現況；業務目標與導入週數都還沒填</a:t>
+              <a:t>回廠率先假設提升十個百分點；導入約二十四週，之後持續監控</a:t>
+            </a:r>
+          </a:p>
+        </p:txBody>
+      </p:sp>
+      <p:sp>
+        <p:nvSpPr>
+          <p:cNvPr id="6" name="TextBox 5"/>
+          <p:cNvSpPr txBox="1"/>
+          <p:nvPr/>
+        </p:nvSpPr>
+        <p:spPr>
+          <a:xfrm>
+            <a:off x="420624" y="987552"/>
+            <a:ext cx="11356848" cy="256032"/>
+          </a:xfrm>
+          <a:prstGeom prst="rect">
+            <a:avLst/>
+          </a:prstGeom>
+          <a:noFill/>
+        </p:spPr>
+        <p:txBody>
+          <a:bodyPr wrap="square" lIns="0" rIns="0" tIns="18288" bIns="18288" anchor="t">
+            <a:spAutoFit/>
+          </a:bodyPr>
+          <a:lstStyle/>
+          <a:p>
+            <a:pPr>
+              <a:lnSpc>
+                <a:spcPct val="100000"/>
+              </a:lnSpc>
+              <a:spcBef>
+                <a:spcPts val="0"/>
+              </a:spcBef>
+              <a:spcAft>
+                <a:spcPts val="200"/>
+              </a:spcAft>
+            </a:pPr>
+            <a:r>
+              <a:rPr sz="1200" b="0" i="0">
+                <a:solidFill>
+                  <a:srgbClr val="5C6B7A"/>
+                </a:solidFill>
+                <a:latin typeface="Arial"/>
+                <a:ea typeface="微軟正黑體"/>
+                <a:cs typeface="Arial"/>
+              </a:rPr>
+              <a:t>層級對照 iPAS：成果＝業務、流程＝應用、模型＝系統</a:t>
             </a:r>
           </a:p>
         </p:txBody>
       </p:sp>
       <p:graphicFrame>
         <p:nvGraphicFramePr>
-          <p:cNvPr id="6" name="Table 5"/>
+          <p:cNvPr id="7" name="Table 6"/>
           <p:cNvGraphicFramePr>
             <a:graphicFrameLocks noGrp="1"/>
           </p:cNvGraphicFramePr>
           <p:nvPr/>
         </p:nvGraphicFramePr>
         <p:xfrm>
-          <a:off x="420624" y="987552"/>
+          <a:off x="420624" y="1261872"/>
           <a:ext cx="11356848" cy="1691640"/>
         </p:xfrm>
         <a:graphic>
@@ -18854,9 +19499,10 @@
                 <a:tableStyleId>{5C22544A-7EE6-4342-B048-85BDC9FD1C3A}</a:tableStyleId>
               </a:tblPr>
               <a:tblGrid>
-                <a:gridCol w="1463040"/>
-                <a:gridCol w="5943600"/>
-                <a:gridCol w="3950208"/>
+                <a:gridCol w="1051560"/>
+                <a:gridCol w="3246120"/>
+                <a:gridCol w="3520440"/>
+                <a:gridCol w="3538728"/>
               </a:tblGrid>
               <a:tr h="422910">
                 <a:tc>
@@ -18876,7 +19522,7 @@
                         </a:spcAft>
                       </a:pPr>
                       <a:r>
-                        <a:rPr sz="1300" b="1" i="0">
+                        <a:rPr sz="1100" b="1" i="0">
                           <a:solidFill>
                             <a:srgbClr val="FFFFFF"/>
                           </a:solidFill>
@@ -18911,7 +19557,42 @@
                         </a:spcAft>
                       </a:pPr>
                       <a:r>
-                        <a:rPr sz="1300" b="1" i="0">
+                        <a:rPr sz="1100" b="1" i="0">
+                          <a:solidFill>
+                            <a:srgbClr val="FFFFFF"/>
+                          </a:solidFill>
+                          <a:latin typeface="Arial"/>
+                          <a:ea typeface="微軟正黑體"/>
+                          <a:cs typeface="Arial"/>
+                        </a:rPr>
+                        <a:t>指標</a:t>
+                      </a:r>
+                    </a:p>
+                  </a:txBody>
+                  <a:tcPr anchor="ctr" marL="73152" marR="54864" marT="36576" marB="27432">
+                    <a:solidFill>
+                      <a:srgbClr val="44546A"/>
+                    </a:solidFill>
+                  </a:tcPr>
+                </a:tc>
+                <a:tc>
+                  <a:txBody>
+                    <a:bodyPr wrap="square" anchor="ctr"/>
+                    <a:lstStyle/>
+                    <a:p>
+                      <a:pPr>
+                        <a:lnSpc>
+                          <a:spcPct val="100000"/>
+                        </a:lnSpc>
+                        <a:spcBef>
+                          <a:spcPts val="0"/>
+                        </a:spcBef>
+                        <a:spcAft>
+                          <a:spcPts val="200"/>
+                        </a:spcAft>
+                      </a:pPr>
+                      <a:r>
+                        <a:rPr sz="1100" b="1" i="0">
                           <a:solidFill>
                             <a:srgbClr val="FFFFFF"/>
                           </a:solidFill>
@@ -18946,7 +19627,7 @@
                         </a:spcAft>
                       </a:pPr>
                       <a:r>
-                        <a:rPr sz="1300" b="1" i="0">
+                        <a:rPr sz="1100" b="1" i="0">
                           <a:solidFill>
                             <a:srgbClr val="FFFFFF"/>
                           </a:solidFill>
@@ -18983,7 +19664,7 @@
                         </a:spcAft>
                       </a:pPr>
                       <a:r>
-                        <a:rPr sz="1300" b="0" i="0">
+                        <a:rPr sz="1100" b="1" i="0">
                           <a:solidFill>
                             <a:srgbClr val="24323E"/>
                           </a:solidFill>
@@ -18991,7 +19672,7 @@
                           <a:ea typeface="微軟正黑體"/>
                           <a:cs typeface="Arial"/>
                         </a:rPr>
-                        <a:t>系統</a:t>
+                        <a:t>成果</a:t>
                       </a:r>
                     </a:p>
                   </a:txBody>
@@ -19018,7 +19699,7 @@
                         </a:spcAft>
                       </a:pPr>
                       <a:r>
-                        <a:rPr sz="1300" b="0" i="0">
+                        <a:rPr sz="1100" b="0" i="0">
                           <a:solidFill>
                             <a:srgbClr val="24323E"/>
                           </a:solidFill>
@@ -19026,24 +19707,13 @@
                           <a:ea typeface="微軟正黑體"/>
                           <a:cs typeface="Arial"/>
                         </a:rPr>
-                        <a:t>每句 0.7 秒。可用率 </a:t>
-                      </a:r>
-                      <a:r>
-                        <a:rPr sz="1300" b="1" i="0">
-                          <a:solidFill>
-                            <a:srgbClr val="C05600"/>
-                          </a:solidFill>
-                          <a:latin typeface="Arial"/>
-                          <a:ea typeface="微軟正黑體"/>
-                          <a:cs typeface="Arial"/>
-                        </a:rPr>
-                        <a:t>【待補：可用率現況】</a:t>
+                        <a:t>高風險車主 12 個月回廠率</a:t>
                       </a:r>
                     </a:p>
                   </a:txBody>
                   <a:tcPr anchor="ctr" marL="73152" marR="54864" marT="36576" marB="27432">
                     <a:solidFill>
-                      <a:srgbClr val="FDEBD0"/>
+                      <a:srgbClr val="FFFFFF"/>
                     </a:solidFill>
                   </a:tcPr>
                 </a:tc>
@@ -19064,21 +19734,56 @@
                         </a:spcAft>
                       </a:pPr>
                       <a:r>
-                        <a:rPr sz="1300" b="1" i="0">
+                        <a:rPr sz="1100" b="0" i="0">
                           <a:solidFill>
-                            <a:srgbClr val="C05600"/>
+                            <a:srgbClr val="24323E"/>
                           </a:solidFill>
                           <a:latin typeface="Arial"/>
                           <a:ea typeface="微軟正黑體"/>
                           <a:cs typeface="Arial"/>
                         </a:rPr>
-                        <a:t>【待補：目標值】</a:t>
+                        <a:t>導入後建立基期</a:t>
                       </a:r>
                     </a:p>
                   </a:txBody>
                   <a:tcPr anchor="ctr" marL="73152" marR="54864" marT="36576" marB="27432">
                     <a:solidFill>
-                      <a:srgbClr val="FDEBD0"/>
+                      <a:srgbClr val="FFFFFF"/>
+                    </a:solidFill>
+                  </a:tcPr>
+                </a:tc>
+                <a:tc>
+                  <a:txBody>
+                    <a:bodyPr wrap="square" anchor="ctr"/>
+                    <a:lstStyle/>
+                    <a:p>
+                      <a:pPr>
+                        <a:lnSpc>
+                          <a:spcPct val="100000"/>
+                        </a:lnSpc>
+                        <a:spcBef>
+                          <a:spcPts val="0"/>
+                        </a:spcBef>
+                        <a:spcAft>
+                          <a:spcPts val="200"/>
+                        </a:spcAft>
+                      </a:pPr>
+                      <a:r>
+                        <a:rPr sz="1100" b="0" i="0">
+                          <a:solidFill>
+                            <a:srgbClr val="24323E"/>
+                          </a:solidFill>
+                          <a:latin typeface="Arial"/>
+                          <a:ea typeface="微軟正黑體"/>
+                          <a:cs typeface="Arial"/>
+                        </a:rPr>
+                        <a:t>提升 10 個百分點＊</a:t>
+                      </a:r>
+                    </a:p>
+                  </a:txBody>
+                  <a:tcPr anchor="ctr" marL="73152" marR="54864" marT="36576" marB="27432">
+                    <a:solidFill>
+                      <a:srgbClr val="FFFFFF"/>
                     </a:solidFill>
                   </a:tcPr>
                 </a:tc>
@@ -19101,7 +19806,7 @@
                         </a:spcAft>
                       </a:pPr>
                       <a:r>
-                        <a:rPr sz="1300" b="0" i="0">
+                        <a:rPr sz="1100" b="1" i="0">
                           <a:solidFill>
                             <a:srgbClr val="24323E"/>
                           </a:solidFill>
@@ -19109,7 +19814,7 @@
                           <a:ea typeface="微軟正黑體"/>
                           <a:cs typeface="Arial"/>
                         </a:rPr>
-                        <a:t>應用</a:t>
+                        <a:t>流程</a:t>
                       </a:r>
                     </a:p>
                   </a:txBody>
@@ -19136,7 +19841,7 @@
                         </a:spcAft>
                       </a:pPr>
                       <a:r>
-                        <a:rPr sz="1300" b="0" i="0">
+                        <a:rPr sz="1100" b="0" i="0">
                           <a:solidFill>
                             <a:srgbClr val="24323E"/>
                           </a:solidFill>
@@ -19144,7 +19849,7 @@
                           <a:ea typeface="微軟正黑體"/>
                           <a:cs typeface="Arial"/>
                         </a:rPr>
-                        <a:t>F1 0.685、κ 0.64；校準見 P10 的 F6</a:t>
+                        <a:t>高風險名單更新頻率；話術人工核准率</a:t>
                       </a:r>
                     </a:p>
                   </a:txBody>
@@ -19171,21 +19876,56 @@
                         </a:spcAft>
                       </a:pPr>
                       <a:r>
-                        <a:rPr sz="1300" b="1" i="0">
+                        <a:rPr sz="1100" b="0" i="0">
                           <a:solidFill>
-                            <a:srgbClr val="C05600"/>
+                            <a:srgbClr val="24323E"/>
                           </a:solidFill>
                           <a:latin typeface="Arial"/>
                           <a:ea typeface="微軟正黑體"/>
                           <a:cs typeface="Arial"/>
                         </a:rPr>
-                        <a:t>【待補：目標值】</a:t>
+                        <a:t>名單一次性產出；12 則已查核、待人工審</a:t>
                       </a:r>
                     </a:p>
                   </a:txBody>
                   <a:tcPr anchor="ctr" marL="73152" marR="54864" marT="36576" marB="27432">
                     <a:solidFill>
-                      <a:srgbClr val="FDEBD0"/>
+                      <a:srgbClr val="F7F9FB"/>
+                    </a:solidFill>
+                  </a:tcPr>
+                </a:tc>
+                <a:tc>
+                  <a:txBody>
+                    <a:bodyPr wrap="square" anchor="ctr"/>
+                    <a:lstStyle/>
+                    <a:p>
+                      <a:pPr>
+                        <a:lnSpc>
+                          <a:spcPct val="100000"/>
+                        </a:lnSpc>
+                        <a:spcBef>
+                          <a:spcPts val="0"/>
+                        </a:spcBef>
+                        <a:spcAft>
+                          <a:spcPts val="200"/>
+                        </a:spcAft>
+                      </a:pPr>
+                      <a:r>
+                        <a:rPr sz="1100" b="0" i="0">
+                          <a:solidFill>
+                            <a:srgbClr val="24323E"/>
+                          </a:solidFill>
+                          <a:latin typeface="Arial"/>
+                          <a:ea typeface="微軟正黑體"/>
+                          <a:cs typeface="Arial"/>
+                        </a:rPr>
+                        <a:t>每月更新；核准率 ≥ 80%</a:t>
+                      </a:r>
+                    </a:p>
+                  </a:txBody>
+                  <a:tcPr anchor="ctr" marL="73152" marR="54864" marT="36576" marB="27432">
+                    <a:solidFill>
+                      <a:srgbClr val="F7F9FB"/>
                     </a:solidFill>
                   </a:tcPr>
                 </a:tc>
@@ -19208,7 +19948,7 @@
                         </a:spcAft>
                       </a:pPr>
                       <a:r>
-                        <a:rPr sz="1300" b="0" i="0">
+                        <a:rPr sz="1100" b="1" i="0">
                           <a:solidFill>
                             <a:srgbClr val="24323E"/>
                           </a:solidFill>
@@ -19216,7 +19956,7 @@
                           <a:ea typeface="微軟正黑體"/>
                           <a:cs typeface="Arial"/>
                         </a:rPr>
-                        <a:t>業務</a:t>
+                        <a:t>模型</a:t>
                       </a:r>
                     </a:p>
                   </a:txBody>
@@ -19243,21 +19983,21 @@
                         </a:spcAft>
                       </a:pPr>
                       <a:r>
-                        <a:rPr sz="1300" b="1" i="0">
+                        <a:rPr sz="1100" b="0" i="0">
                           <a:solidFill>
-                            <a:srgbClr val="C05600"/>
+                            <a:srgbClr val="24323E"/>
                           </a:solidFill>
                           <a:latin typeface="Arial"/>
                           <a:ea typeface="微軟正黑體"/>
                           <a:cs typeface="Arial"/>
                         </a:rPr>
-                        <a:t>【待補：業務現況】</a:t>
+                        <a:t>隨機層 F1、κ；每句判斷時間</a:t>
                       </a:r>
                     </a:p>
                   </a:txBody>
                   <a:tcPr anchor="ctr" marL="73152" marR="54864" marT="36576" marB="27432">
                     <a:solidFill>
-                      <a:srgbClr val="FDEBD0"/>
+                      <a:srgbClr val="FFFFFF"/>
                     </a:solidFill>
                   </a:tcPr>
                 </a:tc>
@@ -19278,21 +20018,56 @@
                         </a:spcAft>
                       </a:pPr>
                       <a:r>
-                        <a:rPr sz="1300" b="1" i="0">
+                        <a:rPr sz="1100" b="0" i="0">
                           <a:solidFill>
-                            <a:srgbClr val="C05600"/>
+                            <a:srgbClr val="24323E"/>
                           </a:solidFill>
                           <a:latin typeface="Arial"/>
                           <a:ea typeface="微軟正黑體"/>
                           <a:cs typeface="Arial"/>
                         </a:rPr>
-                        <a:t>【待補：目標值】</a:t>
+                        <a:t>F1 0.82、κ 0.81；0.7 秒</a:t>
                       </a:r>
                     </a:p>
                   </a:txBody>
                   <a:tcPr anchor="ctr" marL="73152" marR="54864" marT="36576" marB="27432">
                     <a:solidFill>
-                      <a:srgbClr val="FDEBD0"/>
+                      <a:srgbClr val="FFFFFF"/>
+                    </a:solidFill>
+                  </a:tcPr>
+                </a:tc>
+                <a:tc>
+                  <a:txBody>
+                    <a:bodyPr wrap="square" anchor="ctr"/>
+                    <a:lstStyle/>
+                    <a:p>
+                      <a:pPr>
+                        <a:lnSpc>
+                          <a:spcPct val="100000"/>
+                        </a:lnSpc>
+                        <a:spcBef>
+                          <a:spcPts val="0"/>
+                        </a:spcBef>
+                        <a:spcAft>
+                          <a:spcPts val="200"/>
+                        </a:spcAft>
+                      </a:pPr>
+                      <a:r>
+                        <a:rPr sz="1100" b="0" i="0">
+                          <a:solidFill>
+                            <a:srgbClr val="24323E"/>
+                          </a:solidFill>
+                          <a:latin typeface="Arial"/>
+                          <a:ea typeface="微軟正黑體"/>
+                          <a:cs typeface="Arial"/>
+                        </a:rPr>
+                        <a:t>F1 ≥ 0.8、κ ≥ 0.6，每季 300 句人工金標重驗</a:t>
+                      </a:r>
+                    </a:p>
+                  </a:txBody>
+                  <a:tcPr anchor="ctr" marL="73152" marR="54864" marT="36576" marB="27432">
+                    <a:solidFill>
+                      <a:srgbClr val="FFFFFF"/>
                     </a:solidFill>
                   </a:tcPr>
                 </a:tc>
@@ -19303,59 +20078,14 @@
       </p:graphicFrame>
       <p:sp>
         <p:nvSpPr>
-          <p:cNvPr id="7" name="Rounded Rectangle 6"/>
-          <p:cNvSpPr/>
-          <p:nvPr/>
-        </p:nvSpPr>
-        <p:spPr>
-          <a:xfrm>
-            <a:off x="420624" y="2953512"/>
-            <a:ext cx="2183587" cy="1691640"/>
-          </a:xfrm>
-          <a:prstGeom prst="roundRect">
-            <a:avLst>
-              <a:gd name="adj" fmla="val 8000"/>
-            </a:avLst>
-          </a:prstGeom>
-          <a:solidFill>
-            <a:srgbClr val="F4F7FB"/>
-          </a:solidFill>
-          <a:ln>
-            <a:noFill/>
-          </a:ln>
-        </p:spPr>
-        <p:style>
-          <a:lnRef idx="1">
-            <a:schemeClr val="accent1"/>
-          </a:lnRef>
-          <a:fillRef idx="3">
-            <a:schemeClr val="accent1"/>
-          </a:fillRef>
-          <a:effectRef idx="2">
-            <a:schemeClr val="accent1"/>
-          </a:effectRef>
-          <a:fontRef idx="minor">
-            <a:schemeClr val="lt1"/>
-          </a:fontRef>
-        </p:style>
-        <p:txBody>
-          <a:bodyPr rtlCol="0" anchor="ctr"/>
-          <a:lstStyle/>
-          <a:p>
-            <a:pPr algn="ctr"/>
-          </a:p>
-        </p:txBody>
-      </p:sp>
-      <p:sp>
-        <p:nvSpPr>
           <p:cNvPr id="8" name="TextBox 7"/>
           <p:cNvSpPr txBox="1"/>
           <p:nvPr/>
         </p:nvSpPr>
         <p:spPr>
           <a:xfrm>
-            <a:off x="493776" y="3081528"/>
-            <a:ext cx="2037283" cy="1444752"/>
+            <a:off x="420624" y="2980944"/>
+            <a:ext cx="11356848" cy="237744"/>
           </a:xfrm>
           <a:prstGeom prst="rect">
             <a:avLst/>
@@ -19363,7 +20093,7 @@
           <a:noFill/>
         </p:spPr>
         <p:txBody>
-          <a:bodyPr wrap="square" lIns="36576" rIns="36576" tIns="18288" bIns="18288" anchor="t">
+          <a:bodyPr wrap="square" lIns="0" rIns="0" tIns="18288" bIns="18288" anchor="t">
             <a:spAutoFit/>
           </a:bodyPr>
           <a:lstStyle/>
@@ -19380,63 +20110,15 @@
               </a:spcAft>
             </a:pPr>
             <a:r>
-              <a:rPr sz="1800" b="1" i="0">
+              <a:rPr sz="1100" b="0" i="0">
                 <a:solidFill>
-                  <a:srgbClr val="2F5D9F"/>
+                  <a:srgbClr val="5C6B7A"/>
                 </a:solidFill>
                 <a:latin typeface="Arial"/>
                 <a:ea typeface="微軟正黑體"/>
                 <a:cs typeface="Arial"/>
               </a:rPr>
-              <a:t>1</a:t>
-            </a:r>
-          </a:p>
-          <a:p>
-            <a:pPr>
-              <a:lnSpc>
-                <a:spcPct val="100000"/>
-              </a:lnSpc>
-              <a:spcBef>
-                <a:spcPts val="0"/>
-              </a:spcBef>
-              <a:spcAft>
-                <a:spcPts val="200"/>
-              </a:spcAft>
-            </a:pPr>
-            <a:r>
-              <a:rPr sz="1300" b="1" i="0">
-                <a:solidFill>
-                  <a:srgbClr val="24323E"/>
-                </a:solidFill>
-                <a:latin typeface="Arial"/>
-                <a:ea typeface="微軟正黑體"/>
-                <a:cs typeface="Arial"/>
-              </a:rPr>
-              <a:t>問題定義</a:t>
-            </a:r>
-          </a:p>
-          <a:p>
-            <a:pPr>
-              <a:lnSpc>
-                <a:spcPct val="100000"/>
-              </a:lnSpc>
-              <a:spcBef>
-                <a:spcPts val="0"/>
-              </a:spcBef>
-              <a:spcAft>
-                <a:spcPts val="200"/>
-              </a:spcAft>
-            </a:pPr>
-            <a:r>
-              <a:rPr sz="1200" b="1" i="0">
-                <a:solidFill>
-                  <a:srgbClr val="C05600"/>
-                </a:solidFill>
-                <a:latin typeface="Arial"/>
-                <a:ea typeface="微軟正黑體"/>
-                <a:cs typeface="Arial"/>
-              </a:rPr>
-              <a:t>【待補：週數】</a:t>
+              <a:t>＊假設值，導入後以基期實測校正。模型現況用隨機層人工金標，與目標同一把尺。</a:t>
             </a:r>
           </a:p>
         </p:txBody>
@@ -19449,8 +20131,8 @@
         </p:nvSpPr>
         <p:spPr>
           <a:xfrm>
-            <a:off x="2713939" y="2953512"/>
-            <a:ext cx="2183587" cy="1691640"/>
+            <a:off x="420624" y="3291840"/>
+            <a:ext cx="2183587" cy="1417320"/>
           </a:xfrm>
           <a:prstGeom prst="roundRect">
             <a:avLst>
@@ -19494,8 +20176,8 @@
         </p:nvSpPr>
         <p:spPr>
           <a:xfrm>
-            <a:off x="2787091" y="3081528"/>
-            <a:ext cx="2037283" cy="1444752"/>
+            <a:off x="475488" y="3364992"/>
+            <a:ext cx="2073859" cy="1280160"/>
           </a:xfrm>
           <a:prstGeom prst="rect">
             <a:avLst/>
@@ -19520,7 +20202,7 @@
               </a:spcAft>
             </a:pPr>
             <a:r>
-              <a:rPr sz="1800" b="1" i="0">
+              <a:rPr sz="1600" b="1" i="0">
                 <a:solidFill>
                   <a:srgbClr val="2F5D9F"/>
                 </a:solidFill>
@@ -19528,7 +20210,7 @@
                 <a:ea typeface="微軟正黑體"/>
                 <a:cs typeface="Arial"/>
               </a:rPr>
-              <a:t>2</a:t>
+              <a:t>1</a:t>
             </a:r>
           </a:p>
           <a:p>
@@ -19552,7 +20234,7 @@
                 <a:ea typeface="微軟正黑體"/>
                 <a:cs typeface="Arial"/>
               </a:rPr>
-              <a:t>資料準備與標註</a:t>
+              <a:t>資料接入</a:t>
             </a:r>
           </a:p>
           <a:p>
@@ -19568,29 +20250,76 @@
               </a:spcAft>
             </a:pPr>
             <a:r>
-              <a:rPr sz="1200" b="1" i="0">
+              <a:rPr sz="1300" b="1" i="0">
                 <a:solidFill>
-                  <a:srgbClr val="C05600"/>
+                  <a:srgbClr val="44546A"/>
                 </a:solidFill>
                 <a:latin typeface="Arial"/>
                 <a:ea typeface="微軟正黑體"/>
                 <a:cs typeface="Arial"/>
               </a:rPr>
-              <a:t>【待補：週數】</a:t>
+              <a:t>4 週</a:t>
             </a:r>
           </a:p>
         </p:txBody>
       </p:sp>
       <p:sp>
         <p:nvSpPr>
-          <p:cNvPr id="11" name="Rounded Rectangle 10"/>
+          <p:cNvPr id="11" name="TextBox 10"/>
+          <p:cNvSpPr txBox="1"/>
+          <p:nvPr/>
+        </p:nvSpPr>
+        <p:spPr>
+          <a:xfrm>
+            <a:off x="420624" y="4754880"/>
+            <a:ext cx="2183587" cy="566928"/>
+          </a:xfrm>
+          <a:prstGeom prst="rect">
+            <a:avLst/>
+          </a:prstGeom>
+          <a:noFill/>
+        </p:spPr>
+        <p:txBody>
+          <a:bodyPr wrap="square" lIns="36576" rIns="36576" tIns="18288" bIns="18288" anchor="t">
+            <a:spAutoFit/>
+          </a:bodyPr>
+          <a:lstStyle/>
+          <a:p>
+            <a:pPr>
+              <a:lnSpc>
+                <a:spcPct val="100000"/>
+              </a:lnSpc>
+              <a:spcBef>
+                <a:spcPts val="0"/>
+              </a:spcBef>
+              <a:spcAft>
+                <a:spcPts val="200"/>
+              </a:spcAft>
+            </a:pPr>
+            <a:r>
+              <a:rPr sz="1000" b="0" i="0">
+                <a:solidFill>
+                  <a:srgbClr val="5C6B7A"/>
+                </a:solidFill>
+                <a:latin typeface="Arial"/>
+                <a:ea typeface="微軟正黑體"/>
+                <a:cs typeface="Arial"/>
+              </a:rPr>
+              <a:t>R1–R8 換成 DMS 實際欄位，工單文字去識別後接入</a:t>
+            </a:r>
+          </a:p>
+        </p:txBody>
+      </p:sp>
+      <p:sp>
+        <p:nvSpPr>
+          <p:cNvPr id="12" name="Rounded Rectangle 11"/>
           <p:cNvSpPr/>
           <p:nvPr/>
         </p:nvSpPr>
         <p:spPr>
           <a:xfrm>
-            <a:off x="5007254" y="2953512"/>
-            <a:ext cx="2183587" cy="1691640"/>
+            <a:off x="2713939" y="3291840"/>
+            <a:ext cx="2183587" cy="1417320"/>
           </a:xfrm>
           <a:prstGeom prst="roundRect">
             <a:avLst>
@@ -19628,14 +20357,14 @@
       </p:sp>
       <p:sp>
         <p:nvSpPr>
-          <p:cNvPr id="12" name="TextBox 11"/>
+          <p:cNvPr id="13" name="TextBox 12"/>
           <p:cNvSpPr txBox="1"/>
           <p:nvPr/>
         </p:nvSpPr>
         <p:spPr>
           <a:xfrm>
-            <a:off x="5080406" y="3081528"/>
-            <a:ext cx="2037283" cy="1444752"/>
+            <a:off x="2768803" y="3364992"/>
+            <a:ext cx="2073859" cy="1280160"/>
           </a:xfrm>
           <a:prstGeom prst="rect">
             <a:avLst/>
@@ -19660,7 +20389,7 @@
               </a:spcAft>
             </a:pPr>
             <a:r>
-              <a:rPr sz="1800" b="1" i="0">
+              <a:rPr sz="1600" b="1" i="0">
                 <a:solidFill>
                   <a:srgbClr val="2F5D9F"/>
                 </a:solidFill>
@@ -19668,7 +20397,7 @@
                 <a:ea typeface="微軟正黑體"/>
                 <a:cs typeface="Arial"/>
               </a:rPr>
-              <a:t>3</a:t>
+              <a:t>2</a:t>
             </a:r>
           </a:p>
           <a:p>
@@ -19692,7 +20421,7 @@
                 <a:ea typeface="微軟正黑體"/>
                 <a:cs typeface="Arial"/>
               </a:rPr>
-              <a:t>模型訓練</a:t>
+              <a:t>模型校準</a:t>
             </a:r>
           </a:p>
           <a:p>
@@ -19708,61 +20437,16 @@
               </a:spcAft>
             </a:pPr>
             <a:r>
-              <a:rPr sz="1200" b="1" i="0">
+              <a:rPr sz="1300" b="1" i="0">
                 <a:solidFill>
-                  <a:srgbClr val="C05600"/>
+                  <a:srgbClr val="44546A"/>
                 </a:solidFill>
                 <a:latin typeface="Arial"/>
                 <a:ea typeface="微軟正黑體"/>
                 <a:cs typeface="Arial"/>
               </a:rPr>
-              <a:t>【待補：週數】</a:t>
+              <a:t>4 週</a:t>
             </a:r>
-          </a:p>
-        </p:txBody>
-      </p:sp>
-      <p:sp>
-        <p:nvSpPr>
-          <p:cNvPr id="13" name="Rounded Rectangle 12"/>
-          <p:cNvSpPr/>
-          <p:nvPr/>
-        </p:nvSpPr>
-        <p:spPr>
-          <a:xfrm>
-            <a:off x="7300569" y="2953512"/>
-            <a:ext cx="2183587" cy="1691640"/>
-          </a:xfrm>
-          <a:prstGeom prst="roundRect">
-            <a:avLst>
-              <a:gd name="adj" fmla="val 8000"/>
-            </a:avLst>
-          </a:prstGeom>
-          <a:solidFill>
-            <a:srgbClr val="F4F7FB"/>
-          </a:solidFill>
-          <a:ln>
-            <a:noFill/>
-          </a:ln>
-        </p:spPr>
-        <p:style>
-          <a:lnRef idx="1">
-            <a:schemeClr val="accent1"/>
-          </a:lnRef>
-          <a:fillRef idx="3">
-            <a:schemeClr val="accent1"/>
-          </a:fillRef>
-          <a:effectRef idx="2">
-            <a:schemeClr val="accent1"/>
-          </a:effectRef>
-          <a:fontRef idx="minor">
-            <a:schemeClr val="lt1"/>
-          </a:fontRef>
-        </p:style>
-        <p:txBody>
-          <a:bodyPr rtlCol="0" anchor="ctr"/>
-          <a:lstStyle/>
-          <a:p>
-            <a:pPr algn="ctr"/>
           </a:p>
         </p:txBody>
       </p:sp>
@@ -19774,8 +20458,8 @@
         </p:nvSpPr>
         <p:spPr>
           <a:xfrm>
-            <a:off x="7373721" y="3081528"/>
-            <a:ext cx="2037283" cy="1444752"/>
+            <a:off x="2713939" y="4754880"/>
+            <a:ext cx="2183587" cy="566928"/>
           </a:xfrm>
           <a:prstGeom prst="rect">
             <a:avLst/>
@@ -19800,63 +20484,15 @@
               </a:spcAft>
             </a:pPr>
             <a:r>
-              <a:rPr sz="1800" b="1" i="0">
+              <a:rPr sz="1000" b="0" i="0">
                 <a:solidFill>
-                  <a:srgbClr val="2F5D9F"/>
+                  <a:srgbClr val="5C6B7A"/>
                 </a:solidFill>
                 <a:latin typeface="Arial"/>
                 <a:ea typeface="微軟正黑體"/>
                 <a:cs typeface="Arial"/>
               </a:rPr>
-              <a:t>4</a:t>
-            </a:r>
-          </a:p>
-          <a:p>
-            <a:pPr>
-              <a:lnSpc>
-                <a:spcPct val="100000"/>
-              </a:lnSpc>
-              <a:spcBef>
-                <a:spcPts val="0"/>
-              </a:spcBef>
-              <a:spcAft>
-                <a:spcPts val="200"/>
-              </a:spcAft>
-            </a:pPr>
-            <a:r>
-              <a:rPr sz="1300" b="1" i="0">
-                <a:solidFill>
-                  <a:srgbClr val="24323E"/>
-                </a:solidFill>
-                <a:latin typeface="Arial"/>
-                <a:ea typeface="微軟正黑體"/>
-                <a:cs typeface="Arial"/>
-              </a:rPr>
-              <a:t>驗證</a:t>
-            </a:r>
-          </a:p>
-          <a:p>
-            <a:pPr>
-              <a:lnSpc>
-                <a:spcPct val="100000"/>
-              </a:lnSpc>
-              <a:spcBef>
-                <a:spcPts val="0"/>
-              </a:spcBef>
-              <a:spcAft>
-                <a:spcPts val="200"/>
-              </a:spcAft>
-            </a:pPr>
-            <a:r>
-              <a:rPr sz="1200" b="1" i="0">
-                <a:solidFill>
-                  <a:srgbClr val="C05600"/>
-                </a:solidFill>
-                <a:latin typeface="Arial"/>
-                <a:ea typeface="微軟正黑體"/>
-                <a:cs typeface="Arial"/>
-              </a:rPr>
-              <a:t>【待補：週數】</a:t>
+              <a:t>重標 300 句金標，重驗 r4、調觸發門檻</a:t>
             </a:r>
           </a:p>
         </p:txBody>
@@ -19869,8 +20505,8 @@
         </p:nvSpPr>
         <p:spPr>
           <a:xfrm>
-            <a:off x="9593884" y="2953512"/>
-            <a:ext cx="2183587" cy="1691640"/>
+            <a:off x="5007254" y="3291840"/>
+            <a:ext cx="2183587" cy="1417320"/>
           </a:xfrm>
           <a:prstGeom prst="roundRect">
             <a:avLst>
@@ -19914,8 +20550,8 @@
         </p:nvSpPr>
         <p:spPr>
           <a:xfrm>
-            <a:off x="9667036" y="3081528"/>
-            <a:ext cx="2037283" cy="1444752"/>
+            <a:off x="5062118" y="3364992"/>
+            <a:ext cx="2073859" cy="1280160"/>
           </a:xfrm>
           <a:prstGeom prst="rect">
             <a:avLst/>
@@ -19940,7 +20576,381 @@
               </a:spcAft>
             </a:pPr>
             <a:r>
-              <a:rPr sz="1800" b="1" i="0">
+              <a:rPr sz="1600" b="1" i="0">
+                <a:solidFill>
+                  <a:srgbClr val="2F5D9F"/>
+                </a:solidFill>
+                <a:latin typeface="Arial"/>
+                <a:ea typeface="微軟正黑體"/>
+                <a:cs typeface="Arial"/>
+              </a:rPr>
+              <a:t>3</a:t>
+            </a:r>
+          </a:p>
+          <a:p>
+            <a:pPr>
+              <a:lnSpc>
+                <a:spcPct val="100000"/>
+              </a:lnSpc>
+              <a:spcBef>
+                <a:spcPts val="0"/>
+              </a:spcBef>
+              <a:spcAft>
+                <a:spcPts val="200"/>
+              </a:spcAft>
+            </a:pPr>
+            <a:r>
+              <a:rPr sz="1300" b="1" i="0">
+                <a:solidFill>
+                  <a:srgbClr val="24323E"/>
+                </a:solidFill>
+                <a:latin typeface="Arial"/>
+                <a:ea typeface="微軟正黑體"/>
+                <a:cs typeface="Arial"/>
+              </a:rPr>
+              <a:t>單一據點試行</a:t>
+            </a:r>
+          </a:p>
+          <a:p>
+            <a:pPr>
+              <a:lnSpc>
+                <a:spcPct val="100000"/>
+              </a:lnSpc>
+              <a:spcBef>
+                <a:spcPts val="0"/>
+              </a:spcBef>
+              <a:spcAft>
+                <a:spcPts val="200"/>
+              </a:spcAft>
+            </a:pPr>
+            <a:r>
+              <a:rPr sz="1300" b="1" i="0">
+                <a:solidFill>
+                  <a:srgbClr val="44546A"/>
+                </a:solidFill>
+                <a:latin typeface="Arial"/>
+                <a:ea typeface="微軟正黑體"/>
+                <a:cs typeface="Arial"/>
+              </a:rPr>
+              <a:t>8 週</a:t>
+            </a:r>
+          </a:p>
+        </p:txBody>
+      </p:sp>
+      <p:sp>
+        <p:nvSpPr>
+          <p:cNvPr id="17" name="TextBox 16"/>
+          <p:cNvSpPr txBox="1"/>
+          <p:nvPr/>
+        </p:nvSpPr>
+        <p:spPr>
+          <a:xfrm>
+            <a:off x="5007254" y="4754880"/>
+            <a:ext cx="2183587" cy="566928"/>
+          </a:xfrm>
+          <a:prstGeom prst="rect">
+            <a:avLst/>
+          </a:prstGeom>
+          <a:noFill/>
+        </p:spPr>
+        <p:txBody>
+          <a:bodyPr wrap="square" lIns="36576" rIns="36576" tIns="18288" bIns="18288" anchor="t">
+            <a:spAutoFit/>
+          </a:bodyPr>
+          <a:lstStyle/>
+          <a:p>
+            <a:pPr>
+              <a:lnSpc>
+                <a:spcPct val="100000"/>
+              </a:lnSpc>
+              <a:spcBef>
+                <a:spcPts val="0"/>
+              </a:spcBef>
+              <a:spcAft>
+                <a:spcPts val="200"/>
+              </a:spcAft>
+            </a:pPr>
+            <a:r>
+              <a:rPr sz="1000" b="0" i="0">
+                <a:solidFill>
+                  <a:srgbClr val="5C6B7A"/>
+                </a:solidFill>
+                <a:latin typeface="Arial"/>
+                <a:ea typeface="微軟正黑體"/>
+                <a:cs typeface="Arial"/>
+              </a:rPr>
+              <a:t>一個服務廠跑完流程，專員審核後投遞</a:t>
+            </a:r>
+          </a:p>
+        </p:txBody>
+      </p:sp>
+      <p:sp>
+        <p:nvSpPr>
+          <p:cNvPr id="18" name="Rounded Rectangle 17"/>
+          <p:cNvSpPr/>
+          <p:nvPr/>
+        </p:nvSpPr>
+        <p:spPr>
+          <a:xfrm>
+            <a:off x="7300569" y="3291840"/>
+            <a:ext cx="2183587" cy="1417320"/>
+          </a:xfrm>
+          <a:prstGeom prst="roundRect">
+            <a:avLst>
+              <a:gd name="adj" fmla="val 8000"/>
+            </a:avLst>
+          </a:prstGeom>
+          <a:solidFill>
+            <a:srgbClr val="F4F7FB"/>
+          </a:solidFill>
+          <a:ln>
+            <a:noFill/>
+          </a:ln>
+        </p:spPr>
+        <p:style>
+          <a:lnRef idx="1">
+            <a:schemeClr val="accent1"/>
+          </a:lnRef>
+          <a:fillRef idx="3">
+            <a:schemeClr val="accent1"/>
+          </a:fillRef>
+          <a:effectRef idx="2">
+            <a:schemeClr val="accent1"/>
+          </a:effectRef>
+          <a:fontRef idx="minor">
+            <a:schemeClr val="lt1"/>
+          </a:fontRef>
+        </p:style>
+        <p:txBody>
+          <a:bodyPr rtlCol="0" anchor="ctr"/>
+          <a:lstStyle/>
+          <a:p>
+            <a:pPr algn="ctr"/>
+          </a:p>
+        </p:txBody>
+      </p:sp>
+      <p:sp>
+        <p:nvSpPr>
+          <p:cNvPr id="19" name="TextBox 18"/>
+          <p:cNvSpPr txBox="1"/>
+          <p:nvPr/>
+        </p:nvSpPr>
+        <p:spPr>
+          <a:xfrm>
+            <a:off x="7355433" y="3364992"/>
+            <a:ext cx="2073859" cy="1280160"/>
+          </a:xfrm>
+          <a:prstGeom prst="rect">
+            <a:avLst/>
+          </a:prstGeom>
+          <a:noFill/>
+        </p:spPr>
+        <p:txBody>
+          <a:bodyPr wrap="square" lIns="36576" rIns="36576" tIns="18288" bIns="18288" anchor="t">
+            <a:spAutoFit/>
+          </a:bodyPr>
+          <a:lstStyle/>
+          <a:p>
+            <a:pPr>
+              <a:lnSpc>
+                <a:spcPct val="100000"/>
+              </a:lnSpc>
+              <a:spcBef>
+                <a:spcPts val="0"/>
+              </a:spcBef>
+              <a:spcAft>
+                <a:spcPts val="200"/>
+              </a:spcAft>
+            </a:pPr>
+            <a:r>
+              <a:rPr sz="1600" b="1" i="0">
+                <a:solidFill>
+                  <a:srgbClr val="2F5D9F"/>
+                </a:solidFill>
+                <a:latin typeface="Arial"/>
+                <a:ea typeface="微軟正黑體"/>
+                <a:cs typeface="Arial"/>
+              </a:rPr>
+              <a:t>4</a:t>
+            </a:r>
+          </a:p>
+          <a:p>
+            <a:pPr>
+              <a:lnSpc>
+                <a:spcPct val="100000"/>
+              </a:lnSpc>
+              <a:spcBef>
+                <a:spcPts val="0"/>
+              </a:spcBef>
+              <a:spcAft>
+                <a:spcPts val="200"/>
+              </a:spcAft>
+            </a:pPr>
+            <a:r>
+              <a:rPr sz="1300" b="1" i="0">
+                <a:solidFill>
+                  <a:srgbClr val="24323E"/>
+                </a:solidFill>
+                <a:latin typeface="Arial"/>
+                <a:ea typeface="微軟正黑體"/>
+                <a:cs typeface="Arial"/>
+              </a:rPr>
+              <a:t>擴大至全台</a:t>
+            </a:r>
+          </a:p>
+          <a:p>
+            <a:pPr>
+              <a:lnSpc>
+                <a:spcPct val="100000"/>
+              </a:lnSpc>
+              <a:spcBef>
+                <a:spcPts val="0"/>
+              </a:spcBef>
+              <a:spcAft>
+                <a:spcPts val="200"/>
+              </a:spcAft>
+            </a:pPr>
+            <a:r>
+              <a:rPr sz="1300" b="1" i="0">
+                <a:solidFill>
+                  <a:srgbClr val="44546A"/>
+                </a:solidFill>
+                <a:latin typeface="Arial"/>
+                <a:ea typeface="微軟正黑體"/>
+                <a:cs typeface="Arial"/>
+              </a:rPr>
+              <a:t>8 週</a:t>
+            </a:r>
+          </a:p>
+        </p:txBody>
+      </p:sp>
+      <p:sp>
+        <p:nvSpPr>
+          <p:cNvPr id="20" name="TextBox 19"/>
+          <p:cNvSpPr txBox="1"/>
+          <p:nvPr/>
+        </p:nvSpPr>
+        <p:spPr>
+          <a:xfrm>
+            <a:off x="7300569" y="4754880"/>
+            <a:ext cx="2183587" cy="566928"/>
+          </a:xfrm>
+          <a:prstGeom prst="rect">
+            <a:avLst/>
+          </a:prstGeom>
+          <a:noFill/>
+        </p:spPr>
+        <p:txBody>
+          <a:bodyPr wrap="square" lIns="36576" rIns="36576" tIns="18288" bIns="18288" anchor="t">
+            <a:spAutoFit/>
+          </a:bodyPr>
+          <a:lstStyle/>
+          <a:p>
+            <a:pPr>
+              <a:lnSpc>
+                <a:spcPct val="100000"/>
+              </a:lnSpc>
+              <a:spcBef>
+                <a:spcPts val="0"/>
+              </a:spcBef>
+              <a:spcAft>
+                <a:spcPts val="200"/>
+              </a:spcAft>
+            </a:pPr>
+            <a:r>
+              <a:rPr sz="1000" b="0" i="0">
+                <a:solidFill>
+                  <a:srgbClr val="5C6B7A"/>
+                </a:solidFill>
+                <a:latin typeface="Arial"/>
+                <a:ea typeface="微軟正黑體"/>
+                <a:cs typeface="Arial"/>
+              </a:rPr>
+              <a:t>依試行調整話術與渠道，分批上線</a:t>
+            </a:r>
+          </a:p>
+        </p:txBody>
+      </p:sp>
+      <p:sp>
+        <p:nvSpPr>
+          <p:cNvPr id="21" name="Rounded Rectangle 20"/>
+          <p:cNvSpPr/>
+          <p:nvPr/>
+        </p:nvSpPr>
+        <p:spPr>
+          <a:xfrm>
+            <a:off x="9593884" y="3291840"/>
+            <a:ext cx="2183587" cy="1417320"/>
+          </a:xfrm>
+          <a:prstGeom prst="roundRect">
+            <a:avLst>
+              <a:gd name="adj" fmla="val 8000"/>
+            </a:avLst>
+          </a:prstGeom>
+          <a:solidFill>
+            <a:srgbClr val="F4F7FB"/>
+          </a:solidFill>
+          <a:ln>
+            <a:noFill/>
+          </a:ln>
+        </p:spPr>
+        <p:style>
+          <a:lnRef idx="1">
+            <a:schemeClr val="accent1"/>
+          </a:lnRef>
+          <a:fillRef idx="3">
+            <a:schemeClr val="accent1"/>
+          </a:fillRef>
+          <a:effectRef idx="2">
+            <a:schemeClr val="accent1"/>
+          </a:effectRef>
+          <a:fontRef idx="minor">
+            <a:schemeClr val="lt1"/>
+          </a:fontRef>
+        </p:style>
+        <p:txBody>
+          <a:bodyPr rtlCol="0" anchor="ctr"/>
+          <a:lstStyle/>
+          <a:p>
+            <a:pPr algn="ctr"/>
+          </a:p>
+        </p:txBody>
+      </p:sp>
+      <p:sp>
+        <p:nvSpPr>
+          <p:cNvPr id="22" name="TextBox 21"/>
+          <p:cNvSpPr txBox="1"/>
+          <p:nvPr/>
+        </p:nvSpPr>
+        <p:spPr>
+          <a:xfrm>
+            <a:off x="9648748" y="3364992"/>
+            <a:ext cx="2073859" cy="1280160"/>
+          </a:xfrm>
+          <a:prstGeom prst="rect">
+            <a:avLst/>
+          </a:prstGeom>
+          <a:noFill/>
+        </p:spPr>
+        <p:txBody>
+          <a:bodyPr wrap="square" lIns="36576" rIns="36576" tIns="18288" bIns="18288" anchor="t">
+            <a:spAutoFit/>
+          </a:bodyPr>
+          <a:lstStyle/>
+          <a:p>
+            <a:pPr>
+              <a:lnSpc>
+                <a:spcPct val="100000"/>
+              </a:lnSpc>
+              <a:spcBef>
+                <a:spcPts val="0"/>
+              </a:spcBef>
+              <a:spcAft>
+                <a:spcPts val="200"/>
+              </a:spcAft>
+            </a:pPr>
+            <a:r>
+              <a:rPr sz="1600" b="1" i="0">
                 <a:solidFill>
                   <a:srgbClr val="2F5D9F"/>
                 </a:solidFill>
@@ -19972,7 +20982,7 @@
                 <a:ea typeface="微軟正黑體"/>
                 <a:cs typeface="Arial"/>
               </a:rPr>
-              <a:t>部署</a:t>
+              <a:t>持續監控</a:t>
             </a:r>
           </a:p>
           <a:p>
@@ -19988,15 +20998,109 @@
               </a:spcAft>
             </a:pPr>
             <a:r>
-              <a:rPr sz="1200" b="1" i="0">
+              <a:rPr sz="1300" b="1" i="0">
                 <a:solidFill>
-                  <a:srgbClr val="C05600"/>
+                  <a:srgbClr val="44546A"/>
                 </a:solidFill>
                 <a:latin typeface="Arial"/>
                 <a:ea typeface="微軟正黑體"/>
                 <a:cs typeface="Arial"/>
               </a:rPr>
-              <a:t>【待補：週數】</a:t>
+              <a:t>不設終點</a:t>
+            </a:r>
+          </a:p>
+        </p:txBody>
+      </p:sp>
+      <p:sp>
+        <p:nvSpPr>
+          <p:cNvPr id="23" name="TextBox 22"/>
+          <p:cNvSpPr txBox="1"/>
+          <p:nvPr/>
+        </p:nvSpPr>
+        <p:spPr>
+          <a:xfrm>
+            <a:off x="9593884" y="4754880"/>
+            <a:ext cx="2183587" cy="566928"/>
+          </a:xfrm>
+          <a:prstGeom prst="rect">
+            <a:avLst/>
+          </a:prstGeom>
+          <a:noFill/>
+        </p:spPr>
+        <p:txBody>
+          <a:bodyPr wrap="square" lIns="36576" rIns="36576" tIns="18288" bIns="18288" anchor="t">
+            <a:spAutoFit/>
+          </a:bodyPr>
+          <a:lstStyle/>
+          <a:p>
+            <a:pPr>
+              <a:lnSpc>
+                <a:spcPct val="100000"/>
+              </a:lnSpc>
+              <a:spcBef>
+                <a:spcPts val="0"/>
+              </a:spcBef>
+              <a:spcAft>
+                <a:spcPts val="200"/>
+              </a:spcAft>
+            </a:pPr>
+            <a:r>
+              <a:rPr sz="1000" b="0" i="0">
+                <a:solidFill>
+                  <a:srgbClr val="5C6B7A"/>
+                </a:solidFill>
+                <a:latin typeface="Arial"/>
+                <a:ea typeface="微軟正黑體"/>
+                <a:cs typeface="Arial"/>
+              </a:rPr>
+              <a:t>日監控、週收樣本、月重評、季重驗模型</a:t>
+            </a:r>
+          </a:p>
+        </p:txBody>
+      </p:sp>
+      <p:sp>
+        <p:nvSpPr>
+          <p:cNvPr id="24" name="TextBox 23"/>
+          <p:cNvSpPr txBox="1"/>
+          <p:nvPr/>
+        </p:nvSpPr>
+        <p:spPr>
+          <a:xfrm>
+            <a:off x="420624" y="5340096"/>
+            <a:ext cx="11356848" cy="256032"/>
+          </a:xfrm>
+          <a:prstGeom prst="rect">
+            <a:avLst/>
+          </a:prstGeom>
+          <a:noFill/>
+        </p:spPr>
+        <p:txBody>
+          <a:bodyPr wrap="square" lIns="0" rIns="0" tIns="18288" bIns="18288" anchor="t">
+            <a:spAutoFit/>
+          </a:bodyPr>
+          <a:lstStyle/>
+          <a:p>
+            <a:pPr>
+              <a:lnSpc>
+                <a:spcPct val="100000"/>
+              </a:lnSpc>
+              <a:spcBef>
+                <a:spcPts val="0"/>
+              </a:spcBef>
+              <a:spcAft>
+                <a:spcPts val="200"/>
+              </a:spcAft>
+            </a:pPr>
+            <a:r>
+              <a:rPr sz="1300" b="1" i="0">
+                <a:solidFill>
+                  <a:srgbClr val="24323E"/>
+                </a:solidFill>
+                <a:latin typeface="Arial"/>
+                <a:ea typeface="微軟正黑體"/>
+                <a:cs typeface="Arial"/>
+              </a:rPr>
+              <a:t>合計約 24 週（持續監控不設終點）。</a:t>
             </a:r>
           </a:p>
         </p:txBody>
@@ -20108,7 +21212,7 @@
                 <a:ea typeface="微軟正黑體"/>
                 <a:cs typeface="Arial"/>
               </a:rPr>
-              <a:t>來源：本 repo reports/T1–T11；GitHub 私有庫</a:t>
+              <a:t>來源：L7運作流程_2026-09-30.md；圖 F8。線框為示意</a:t>
             </a:r>
           </a:p>
         </p:txBody>
@@ -20202,21 +21306,253 @@
                 <a:ea typeface="微軟正黑體"/>
                 <a:cs typeface="Arial"/>
               </a:rPr>
-              <a:t>報告、模型紀錄與程式都在；畫面截圖留到決賽</a:t>
+              <a:t>流程圖在左；右邊是溝通審核佇列線框，決賽再給可操作版</a:t>
+            </a:r>
+          </a:p>
+        </p:txBody>
+      </p:sp>
+      <p:pic>
+        <p:nvPicPr>
+          <p:cNvPr id="6" name="Picture 5" descr="F8.png"/>
+          <p:cNvPicPr>
+            <a:picLocks noChangeAspect="1"/>
+          </p:cNvPicPr>
+          <p:nvPr/>
+        </p:nvPicPr>
+        <p:blipFill>
+          <a:blip r:embed="rId2"/>
+          <a:stretch>
+            <a:fillRect/>
+          </a:stretch>
+        </p:blipFill>
+        <p:spPr>
+          <a:xfrm>
+            <a:off x="420624" y="987552"/>
+            <a:ext cx="5669280" cy="2657475"/>
+          </a:xfrm>
+          <a:prstGeom prst="rect">
+            <a:avLst/>
+          </a:prstGeom>
+        </p:spPr>
+      </p:pic>
+      <p:sp>
+        <p:nvSpPr>
+          <p:cNvPr id="7" name="TextBox 6"/>
+          <p:cNvSpPr txBox="1"/>
+          <p:nvPr/>
+        </p:nvSpPr>
+        <p:spPr>
+          <a:xfrm>
+            <a:off x="420624" y="3699890"/>
+            <a:ext cx="5669280" cy="640080"/>
+          </a:xfrm>
+          <a:prstGeom prst="rect">
+            <a:avLst/>
+          </a:prstGeom>
+          <a:noFill/>
+        </p:spPr>
+        <p:txBody>
+          <a:bodyPr wrap="square" lIns="36576" rIns="36576" tIns="18288" bIns="18288" anchor="t">
+            <a:spAutoFit/>
+          </a:bodyPr>
+          <a:lstStyle/>
+          <a:p>
+            <a:pPr>
+              <a:lnSpc>
+                <a:spcPct val="100000"/>
+              </a:lnSpc>
+              <a:spcBef>
+                <a:spcPts val="0"/>
+              </a:spcBef>
+              <a:spcAft>
+                <a:spcPts val="200"/>
+              </a:spcAft>
+            </a:pPr>
+            <a:r>
+              <a:rPr sz="1300" b="0" i="0">
+                <a:solidFill>
+                  <a:srgbClr val="24323E"/>
+                </a:solidFill>
+                <a:latin typeface="Arial"/>
+                <a:ea typeface="微軟正黑體"/>
+                <a:cs typeface="Arial"/>
+              </a:rPr>
+              <a:t>兩個迴路、四個資料庫、五個 Dashboard。</a:t>
+            </a:r>
+          </a:p>
+          <a:p>
+            <a:pPr>
+              <a:lnSpc>
+                <a:spcPct val="100000"/>
+              </a:lnSpc>
+              <a:spcBef>
+                <a:spcPts val="0"/>
+              </a:spcBef>
+              <a:spcAft>
+                <a:spcPts val="200"/>
+              </a:spcAft>
+            </a:pPr>
+            <a:r>
+              <a:rPr sz="1200" b="0" i="0">
+                <a:solidFill>
+                  <a:srgbClr val="5C6B7A"/>
+                </a:solidFill>
+                <a:latin typeface="Arial"/>
+                <a:ea typeface="微軟正黑體"/>
+                <a:cs typeface="Arial"/>
+              </a:rPr>
+              <a:t>報告 T1–T15 與程式在私有庫，評審需要時開。</a:t>
             </a:r>
           </a:p>
         </p:txBody>
       </p:sp>
       <p:sp>
         <p:nvSpPr>
-          <p:cNvPr id="6" name="Rounded Rectangle 5"/>
+          <p:cNvPr id="8" name="Rounded Rectangle 7"/>
           <p:cNvSpPr/>
           <p:nvPr/>
         </p:nvSpPr>
         <p:spPr>
           <a:xfrm>
-            <a:off x="420624" y="987552"/>
-            <a:ext cx="11356848" cy="1234440"/>
+            <a:off x="6254496" y="987552"/>
+            <a:ext cx="5522976" cy="4434840"/>
+          </a:xfrm>
+          <a:prstGeom prst="roundRect">
+            <a:avLst>
+              <a:gd name="adj" fmla="val 8000"/>
+            </a:avLst>
+          </a:prstGeom>
+          <a:solidFill>
+            <a:srgbClr val="FFFFFF"/>
+          </a:solidFill>
+          <a:ln w="15875">
+            <a:solidFill>
+              <a:srgbClr val="44546A"/>
+            </a:solidFill>
+          </a:ln>
+        </p:spPr>
+        <p:style>
+          <a:lnRef idx="1">
+            <a:schemeClr val="accent1"/>
+          </a:lnRef>
+          <a:fillRef idx="3">
+            <a:schemeClr val="accent1"/>
+          </a:fillRef>
+          <a:effectRef idx="2">
+            <a:schemeClr val="accent1"/>
+          </a:effectRef>
+          <a:fontRef idx="minor">
+            <a:schemeClr val="lt1"/>
+          </a:fontRef>
+        </p:style>
+        <p:txBody>
+          <a:bodyPr rtlCol="0" anchor="ctr"/>
+          <a:lstStyle/>
+          <a:p>
+            <a:pPr algn="ctr"/>
+          </a:p>
+        </p:txBody>
+      </p:sp>
+      <p:sp>
+        <p:nvSpPr>
+          <p:cNvPr id="9" name="Rectangle 8"/>
+          <p:cNvSpPr/>
+          <p:nvPr/>
+        </p:nvSpPr>
+        <p:spPr>
+          <a:xfrm>
+            <a:off x="6254496" y="987552"/>
+            <a:ext cx="5522976" cy="384048"/>
+          </a:xfrm>
+          <a:prstGeom prst="rect">
+            <a:avLst/>
+          </a:prstGeom>
+          <a:solidFill>
+            <a:srgbClr val="44546A"/>
+          </a:solidFill>
+          <a:ln>
+            <a:noFill/>
+          </a:ln>
+        </p:spPr>
+        <p:style>
+          <a:lnRef idx="1">
+            <a:schemeClr val="accent1"/>
+          </a:lnRef>
+          <a:fillRef idx="3">
+            <a:schemeClr val="accent1"/>
+          </a:fillRef>
+          <a:effectRef idx="2">
+            <a:schemeClr val="accent1"/>
+          </a:effectRef>
+          <a:fontRef idx="minor">
+            <a:schemeClr val="lt1"/>
+          </a:fontRef>
+        </p:style>
+        <p:txBody>
+          <a:bodyPr rtlCol="0" anchor="ctr"/>
+          <a:lstStyle/>
+          <a:p>
+            <a:pPr algn="ctr"/>
+          </a:p>
+        </p:txBody>
+      </p:sp>
+      <p:sp>
+        <p:nvSpPr>
+          <p:cNvPr id="10" name="TextBox 9"/>
+          <p:cNvSpPr txBox="1"/>
+          <p:nvPr/>
+        </p:nvSpPr>
+        <p:spPr>
+          <a:xfrm>
+            <a:off x="6345936" y="1024128"/>
+            <a:ext cx="5340096" cy="310896"/>
+          </a:xfrm>
+          <a:prstGeom prst="rect">
+            <a:avLst/>
+          </a:prstGeom>
+          <a:noFill/>
+        </p:spPr>
+        <p:txBody>
+          <a:bodyPr wrap="square" lIns="0" rIns="0" tIns="18288" bIns="18288" anchor="ctr">
+            <a:spAutoFit/>
+          </a:bodyPr>
+          <a:lstStyle/>
+          <a:p>
+            <a:pPr>
+              <a:lnSpc>
+                <a:spcPct val="100000"/>
+              </a:lnSpc>
+              <a:spcBef>
+                <a:spcPts val="0"/>
+              </a:spcBef>
+              <a:spcAft>
+                <a:spcPts val="200"/>
+              </a:spcAft>
+            </a:pPr>
+            <a:r>
+              <a:rPr sz="1400" b="1" i="0">
+                <a:solidFill>
+                  <a:srgbClr val="FFFFFF"/>
+                </a:solidFill>
+                <a:latin typeface="Arial"/>
+                <a:ea typeface="微軟正黑體"/>
+                <a:cs typeface="Arial"/>
+              </a:rPr>
+              <a:t>Dashboard 5　溝通審核佇列</a:t>
+            </a:r>
+          </a:p>
+        </p:txBody>
+      </p:sp>
+      <p:sp>
+        <p:nvSpPr>
+          <p:cNvPr id="11" name="Rounded Rectangle 10"/>
+          <p:cNvSpPr/>
+          <p:nvPr/>
+        </p:nvSpPr>
+        <p:spPr>
+          <a:xfrm>
+            <a:off x="6382512" y="1481328"/>
+            <a:ext cx="5266944" cy="1051560"/>
           </a:xfrm>
           <a:prstGeom prst="roundRect">
             <a:avLst>
@@ -20254,14 +21590,14 @@
       </p:sp>
       <p:sp>
         <p:nvSpPr>
-          <p:cNvPr id="7" name="TextBox 6"/>
+          <p:cNvPr id="12" name="TextBox 11"/>
           <p:cNvSpPr txBox="1"/>
           <p:nvPr/>
         </p:nvSpPr>
         <p:spPr>
           <a:xfrm>
-            <a:off x="566928" y="1097280"/>
-            <a:ext cx="11064240" cy="1024128"/>
+            <a:off x="6473952" y="1536192"/>
+            <a:ext cx="5084064" cy="932688"/>
           </a:xfrm>
           <a:prstGeom prst="rect">
             <a:avLst/>
@@ -20286,15 +21622,15 @@
               </a:spcAft>
             </a:pPr>
             <a:r>
-              <a:rPr sz="1200" b="0" i="0">
+              <a:rPr sz="1300" b="1" i="0">
                 <a:solidFill>
-                  <a:srgbClr val="44546A"/>
+                  <a:srgbClr val="24323E"/>
                 </a:solidFill>
                 <a:latin typeface="Arial"/>
                 <a:ea typeface="微軟正黑體"/>
                 <a:cs typeface="Arial"/>
               </a:rPr>
-              <a:t>GitHub（private，評審需要時開）</a:t>
+              <a:t>車主　H-7F3A　　風險　高</a:t>
             </a:r>
           </a:p>
           <a:p>
@@ -20310,29 +21646,53 @@
               </a:spcAft>
             </a:pPr>
             <a:r>
-              <a:rPr sz="1600" b="1" i="0">
+              <a:rPr sz="1300" b="0" i="0">
                 <a:solidFill>
-                  <a:srgbClr val="2F5D9F"/>
+                  <a:srgbClr val="24323E"/>
                 </a:solidFill>
                 <a:latin typeface="Arial"/>
                 <a:ea typeface="微軟正黑體"/>
                 <a:cs typeface="Arial"/>
               </a:rPr>
-              <a:t>https://github.com/xxx789666/hotai-ai-hackathon-lexus</a:t>
+              <a:t>Persona　過保精算派</a:t>
+            </a:r>
+          </a:p>
+          <a:p>
+            <a:pPr>
+              <a:lnSpc>
+                <a:spcPct val="100000"/>
+              </a:lnSpc>
+              <a:spcBef>
+                <a:spcPts val="0"/>
+              </a:spcBef>
+              <a:spcAft>
+                <a:spcPts val="200"/>
+              </a:spcAft>
+            </a:pPr>
+            <a:r>
+              <a:rPr sz="1300" b="0" i="0">
+                <a:solidFill>
+                  <a:srgbClr val="24323E"/>
+                </a:solidFill>
+                <a:latin typeface="Arial"/>
+                <a:ea typeface="微軟正黑體"/>
+                <a:cs typeface="Arial"/>
+              </a:rPr>
+              <a:t>觸發　R1 過保</a:t>
             </a:r>
           </a:p>
         </p:txBody>
       </p:sp>
       <p:sp>
         <p:nvSpPr>
-          <p:cNvPr id="8" name="Rounded Rectangle 7"/>
+          <p:cNvPr id="13" name="Rounded Rectangle 12"/>
           <p:cNvSpPr/>
           <p:nvPr/>
         </p:nvSpPr>
         <p:spPr>
           <a:xfrm>
-            <a:off x="420624" y="2377440"/>
-            <a:ext cx="5623560" cy="457200"/>
+            <a:off x="6382512" y="2651760"/>
+            <a:ext cx="5266944" cy="1234440"/>
           </a:xfrm>
           <a:prstGeom prst="roundRect">
             <a:avLst>
@@ -20370,14 +21730,14 @@
       </p:sp>
       <p:sp>
         <p:nvSpPr>
-          <p:cNvPr id="9" name="TextBox 8"/>
+          <p:cNvPr id="14" name="TextBox 13"/>
           <p:cNvSpPr txBox="1"/>
           <p:nvPr/>
         </p:nvSpPr>
         <p:spPr>
           <a:xfrm>
-            <a:off x="530352" y="2432304"/>
-            <a:ext cx="5440680" cy="347472"/>
+            <a:off x="6473952" y="2724912"/>
+            <a:ext cx="5084064" cy="1078992"/>
           </a:xfrm>
           <a:prstGeom prst="rect">
             <a:avLst/>
@@ -20385,7 +21745,7 @@
           <a:noFill/>
         </p:spPr>
         <p:txBody>
-          <a:bodyPr wrap="square" lIns="36576" rIns="36576" tIns="18288" bIns="18288" anchor="ctr">
+          <a:bodyPr wrap="square" lIns="36576" rIns="36576" tIns="18288" bIns="18288" anchor="t">
             <a:spAutoFit/>
           </a:bodyPr>
           <a:lstStyle/>
@@ -20402,29 +21762,53 @@
               </a:spcAft>
             </a:pPr>
             <a:r>
-              <a:rPr sz="1300" b="0" i="0">
+              <a:rPr sz="1300" b="1" i="0">
                 <a:solidFill>
-                  <a:srgbClr val="24323E"/>
+                  <a:srgbClr val="2F5D9F"/>
                 </a:solidFill>
                 <a:latin typeface="Arial"/>
                 <a:ea typeface="微軟正黑體"/>
                 <a:cs typeface="Arial"/>
               </a:rPr>
-              <a:t>T1　Dcard 複核（c≥2 一致率 98.4%）</a:t>
+              <a:t>話術草稿</a:t>
+            </a:r>
+          </a:p>
+          <a:p>
+            <a:pPr>
+              <a:lnSpc>
+                <a:spcPct val="100000"/>
+              </a:lnSpc>
+              <a:spcBef>
+                <a:spcPts val="0"/>
+              </a:spcBef>
+              <a:spcAft>
+                <a:spcPts val="200"/>
+              </a:spcAft>
+            </a:pPr>
+            <a:r>
+              <a:rPr sz="1400" b="0" i="0">
+                <a:solidFill>
+                  <a:srgbClr val="44546A"/>
+                </a:solidFill>
+                <a:latin typeface="Arial"/>
+                <a:ea typeface="微軟正黑體"/>
+                <a:cs typeface="Arial"/>
+              </a:rPr>
+              <a:t>引用條目 1、13</a:t>
             </a:r>
           </a:p>
         </p:txBody>
       </p:sp>
       <p:sp>
         <p:nvSpPr>
-          <p:cNvPr id="10" name="Rounded Rectangle 9"/>
+          <p:cNvPr id="15" name="Rounded Rectangle 14"/>
           <p:cNvSpPr/>
           <p:nvPr/>
         </p:nvSpPr>
         <p:spPr>
           <a:xfrm>
-            <a:off x="6153912" y="2377440"/>
-            <a:ext cx="5623560" cy="457200"/>
+            <a:off x="6382512" y="4023360"/>
+            <a:ext cx="1694688" cy="438912"/>
           </a:xfrm>
           <a:prstGeom prst="roundRect">
             <a:avLst>
@@ -20432,7 +21816,7 @@
             </a:avLst>
           </a:prstGeom>
           <a:solidFill>
-            <a:srgbClr val="F7F9FB"/>
+            <a:srgbClr val="2F5D9F"/>
           </a:solidFill>
           <a:ln>
             <a:noFill/>
@@ -20462,14 +21846,14 @@
       </p:sp>
       <p:sp>
         <p:nvSpPr>
-          <p:cNvPr id="11" name="TextBox 10"/>
+          <p:cNvPr id="16" name="TextBox 15"/>
           <p:cNvSpPr txBox="1"/>
           <p:nvPr/>
         </p:nvSpPr>
         <p:spPr>
           <a:xfrm>
-            <a:off x="6263640" y="2432304"/>
-            <a:ext cx="5440680" cy="347472"/>
+            <a:off x="6382512" y="4078224"/>
+            <a:ext cx="1694688" cy="329184"/>
           </a:xfrm>
           <a:prstGeom prst="rect">
             <a:avLst/>
@@ -20477,12 +21861,12 @@
           <a:noFill/>
         </p:spPr>
         <p:txBody>
-          <a:bodyPr wrap="square" lIns="36576" rIns="36576" tIns="18288" bIns="18288" anchor="ctr">
+          <a:bodyPr wrap="square" lIns="0" rIns="0" tIns="18288" bIns="18288" anchor="ctr">
             <a:spAutoFit/>
           </a:bodyPr>
           <a:lstStyle/>
           <a:p>
-            <a:pPr>
+            <a:pPr algn="ctr">
               <a:lnSpc>
                 <a:spcPct val="100000"/>
               </a:lnSpc>
@@ -20494,29 +21878,29 @@
               </a:spcAft>
             </a:pPr>
             <a:r>
-              <a:rPr sz="1300" b="0" i="0">
+              <a:rPr sz="1400" b="1" i="0">
                 <a:solidFill>
-                  <a:srgbClr val="24323E"/>
+                  <a:srgbClr val="FFFFFF"/>
                 </a:solidFill>
                 <a:latin typeface="Arial"/>
                 <a:ea typeface="微軟正黑體"/>
                 <a:cs typeface="Arial"/>
               </a:rPr>
-              <a:t>T2　「其他」396 句細分</a:t>
+              <a:t>核准</a:t>
             </a:r>
           </a:p>
         </p:txBody>
       </p:sp>
       <p:sp>
         <p:nvSpPr>
-          <p:cNvPr id="12" name="Rounded Rectangle 11"/>
+          <p:cNvPr id="17" name="Rounded Rectangle 16"/>
           <p:cNvSpPr/>
           <p:nvPr/>
         </p:nvSpPr>
         <p:spPr>
           <a:xfrm>
-            <a:off x="420624" y="2907792"/>
-            <a:ext cx="5623560" cy="457200"/>
+            <a:off x="8168640" y="4023360"/>
+            <a:ext cx="1694688" cy="438912"/>
           </a:xfrm>
           <a:prstGeom prst="roundRect">
             <a:avLst>
@@ -20524,7 +21908,7 @@
             </a:avLst>
           </a:prstGeom>
           <a:solidFill>
-            <a:srgbClr val="F7F9FB"/>
+            <a:srgbClr val="44546A"/>
           </a:solidFill>
           <a:ln>
             <a:noFill/>
@@ -20554,14 +21938,14 @@
       </p:sp>
       <p:sp>
         <p:nvSpPr>
-          <p:cNvPr id="13" name="TextBox 12"/>
+          <p:cNvPr id="18" name="TextBox 17"/>
           <p:cNvSpPr txBox="1"/>
           <p:nvPr/>
         </p:nvSpPr>
         <p:spPr>
           <a:xfrm>
-            <a:off x="530352" y="2962656"/>
-            <a:ext cx="5440680" cy="347472"/>
+            <a:off x="8168640" y="4078224"/>
+            <a:ext cx="1694688" cy="329184"/>
           </a:xfrm>
           <a:prstGeom prst="rect">
             <a:avLst/>
@@ -20569,12 +21953,12 @@
           <a:noFill/>
         </p:spPr>
         <p:txBody>
-          <a:bodyPr wrap="square" lIns="36576" rIns="36576" tIns="18288" bIns="18288" anchor="ctr">
+          <a:bodyPr wrap="square" lIns="0" rIns="0" tIns="18288" bIns="18288" anchor="ctr">
             <a:spAutoFit/>
           </a:bodyPr>
           <a:lstStyle/>
           <a:p>
-            <a:pPr>
+            <a:pPr algn="ctr">
               <a:lnSpc>
                 <a:spcPct val="100000"/>
               </a:lnSpc>
@@ -20586,29 +21970,29 @@
               </a:spcAft>
             </a:pPr>
             <a:r>
-              <a:rPr sz="1300" b="0" i="0">
+              <a:rPr sz="1400" b="1" i="0">
                 <a:solidFill>
-                  <a:srgbClr val="24323E"/>
+                  <a:srgbClr val="FFFFFF"/>
                 </a:solidFill>
                 <a:latin typeface="Arial"/>
                 <a:ea typeface="微軟正黑體"/>
                 <a:cs typeface="Arial"/>
               </a:rPr>
-              <a:t>T3　靜默出走 186 句；殘餘 4 句</a:t>
+              <a:t>改寫</a:t>
             </a:r>
           </a:p>
         </p:txBody>
       </p:sp>
       <p:sp>
         <p:nvSpPr>
-          <p:cNvPr id="14" name="Rounded Rectangle 13"/>
+          <p:cNvPr id="19" name="Rounded Rectangle 18"/>
           <p:cNvSpPr/>
           <p:nvPr/>
         </p:nvSpPr>
         <p:spPr>
           <a:xfrm>
-            <a:off x="6153912" y="2907792"/>
-            <a:ext cx="5623560" cy="457200"/>
+            <a:off x="9954768" y="4023360"/>
+            <a:ext cx="1694688" cy="438912"/>
           </a:xfrm>
           <a:prstGeom prst="roundRect">
             <a:avLst>
@@ -20616,7 +22000,7 @@
             </a:avLst>
           </a:prstGeom>
           <a:solidFill>
-            <a:srgbClr val="F7F9FB"/>
+            <a:srgbClr val="C05600"/>
           </a:solidFill>
           <a:ln>
             <a:noFill/>
@@ -20646,14 +22030,14 @@
       </p:sp>
       <p:sp>
         <p:nvSpPr>
-          <p:cNvPr id="15" name="TextBox 14"/>
+          <p:cNvPr id="20" name="TextBox 19"/>
           <p:cNvSpPr txBox="1"/>
           <p:nvPr/>
         </p:nvSpPr>
         <p:spPr>
           <a:xfrm>
-            <a:off x="6263640" y="2962656"/>
-            <a:ext cx="5440680" cy="347472"/>
+            <a:off x="9954768" y="4078224"/>
+            <a:ext cx="1694688" cy="329184"/>
           </a:xfrm>
           <a:prstGeom prst="rect">
             <a:avLst/>
@@ -20661,12 +22045,12 @@
           <a:noFill/>
         </p:spPr>
         <p:txBody>
-          <a:bodyPr wrap="square" lIns="36576" rIns="36576" tIns="18288" bIns="18288" anchor="ctr">
+          <a:bodyPr wrap="square" lIns="0" rIns="0" tIns="18288" bIns="18288" anchor="ctr">
             <a:spAutoFit/>
           </a:bodyPr>
           <a:lstStyle/>
           <a:p>
-            <a:pPr>
+            <a:pPr algn="ctr">
               <a:lnSpc>
                 <a:spcPct val="100000"/>
               </a:lnSpc>
@@ -20678,245 +22062,16 @@
               </a:spcAft>
             </a:pPr>
             <a:r>
-              <a:rPr sz="1300" b="0" i="0">
+              <a:rPr sz="1400" b="1" i="0">
                 <a:solidFill>
-                  <a:srgbClr val="24323E"/>
+                  <a:srgbClr val="FFFFFF"/>
                 </a:solidFill>
                 <a:latin typeface="Arial"/>
                 <a:ea typeface="微軟正黑體"/>
                 <a:cs typeface="Arial"/>
               </a:rPr>
-              <a:t>T4　LLM2Jev 試點</a:t>
+              <a:t>退回</a:t>
             </a:r>
-          </a:p>
-        </p:txBody>
-      </p:sp>
-      <p:sp>
-        <p:nvSpPr>
-          <p:cNvPr id="16" name="Rounded Rectangle 15"/>
-          <p:cNvSpPr/>
-          <p:nvPr/>
-        </p:nvSpPr>
-        <p:spPr>
-          <a:xfrm>
-            <a:off x="420624" y="3438144"/>
-            <a:ext cx="5623560" cy="457200"/>
-          </a:xfrm>
-          <a:prstGeom prst="roundRect">
-            <a:avLst>
-              <a:gd name="adj" fmla="val 8000"/>
-            </a:avLst>
-          </a:prstGeom>
-          <a:solidFill>
-            <a:srgbClr val="F7F9FB"/>
-          </a:solidFill>
-          <a:ln>
-            <a:noFill/>
-          </a:ln>
-        </p:spPr>
-        <p:style>
-          <a:lnRef idx="1">
-            <a:schemeClr val="accent1"/>
-          </a:lnRef>
-          <a:fillRef idx="3">
-            <a:schemeClr val="accent1"/>
-          </a:fillRef>
-          <a:effectRef idx="2">
-            <a:schemeClr val="accent1"/>
-          </a:effectRef>
-          <a:fontRef idx="minor">
-            <a:schemeClr val="lt1"/>
-          </a:fontRef>
-        </p:style>
-        <p:txBody>
-          <a:bodyPr rtlCol="0" anchor="ctr"/>
-          <a:lstStyle/>
-          <a:p>
-            <a:pPr algn="ctr"/>
-          </a:p>
-        </p:txBody>
-      </p:sp>
-      <p:sp>
-        <p:nvSpPr>
-          <p:cNvPr id="17" name="TextBox 16"/>
-          <p:cNvSpPr txBox="1"/>
-          <p:nvPr/>
-        </p:nvSpPr>
-        <p:spPr>
-          <a:xfrm>
-            <a:off x="530352" y="3493008"/>
-            <a:ext cx="5440680" cy="347472"/>
-          </a:xfrm>
-          <a:prstGeom prst="rect">
-            <a:avLst/>
-          </a:prstGeom>
-          <a:noFill/>
-        </p:spPr>
-        <p:txBody>
-          <a:bodyPr wrap="square" lIns="36576" rIns="36576" tIns="18288" bIns="18288" anchor="ctr">
-            <a:spAutoFit/>
-          </a:bodyPr>
-          <a:lstStyle/>
-          <a:p>
-            <a:pPr>
-              <a:lnSpc>
-                <a:spcPct val="100000"/>
-              </a:lnSpc>
-              <a:spcBef>
-                <a:spcPts val="0"/>
-              </a:spcBef>
-              <a:spcAft>
-                <a:spcPts val="200"/>
-              </a:spcAft>
-            </a:pPr>
-            <a:r>
-              <a:rPr sz="1300" b="0" i="0">
-                <a:solidFill>
-                  <a:srgbClr val="24323E"/>
-                </a:solidFill>
-                <a:latin typeface="Arial"/>
-                <a:ea typeface="微軟正黑體"/>
-                <a:cs typeface="Arial"/>
-              </a:rPr>
-              <a:t>T5–T6　QLoRA 診斷（未採用）</a:t>
-            </a:r>
-          </a:p>
-        </p:txBody>
-      </p:sp>
-      <p:sp>
-        <p:nvSpPr>
-          <p:cNvPr id="18" name="Rounded Rectangle 17"/>
-          <p:cNvSpPr/>
-          <p:nvPr/>
-        </p:nvSpPr>
-        <p:spPr>
-          <a:xfrm>
-            <a:off x="6153912" y="3438144"/>
-            <a:ext cx="5623560" cy="457200"/>
-          </a:xfrm>
-          <a:prstGeom prst="roundRect">
-            <a:avLst>
-              <a:gd name="adj" fmla="val 8000"/>
-            </a:avLst>
-          </a:prstGeom>
-          <a:solidFill>
-            <a:srgbClr val="F7F9FB"/>
-          </a:solidFill>
-          <a:ln>
-            <a:noFill/>
-          </a:ln>
-        </p:spPr>
-        <p:style>
-          <a:lnRef idx="1">
-            <a:schemeClr val="accent1"/>
-          </a:lnRef>
-          <a:fillRef idx="3">
-            <a:schemeClr val="accent1"/>
-          </a:fillRef>
-          <a:effectRef idx="2">
-            <a:schemeClr val="accent1"/>
-          </a:effectRef>
-          <a:fontRef idx="minor">
-            <a:schemeClr val="lt1"/>
-          </a:fontRef>
-        </p:style>
-        <p:txBody>
-          <a:bodyPr rtlCol="0" anchor="ctr"/>
-          <a:lstStyle/>
-          <a:p>
-            <a:pPr algn="ctr"/>
-          </a:p>
-        </p:txBody>
-      </p:sp>
-      <p:sp>
-        <p:nvSpPr>
-          <p:cNvPr id="19" name="TextBox 18"/>
-          <p:cNvSpPr txBox="1"/>
-          <p:nvPr/>
-        </p:nvSpPr>
-        <p:spPr>
-          <a:xfrm>
-            <a:off x="6263640" y="3493008"/>
-            <a:ext cx="5440680" cy="347472"/>
-          </a:xfrm>
-          <a:prstGeom prst="rect">
-            <a:avLst/>
-          </a:prstGeom>
-          <a:noFill/>
-        </p:spPr>
-        <p:txBody>
-          <a:bodyPr wrap="square" lIns="36576" rIns="36576" tIns="18288" bIns="18288" anchor="ctr">
-            <a:spAutoFit/>
-          </a:bodyPr>
-          <a:lstStyle/>
-          <a:p>
-            <a:pPr>
-              <a:lnSpc>
-                <a:spcPct val="100000"/>
-              </a:lnSpc>
-              <a:spcBef>
-                <a:spcPts val="0"/>
-              </a:spcBef>
-              <a:spcAft>
-                <a:spcPts val="200"/>
-              </a:spcAft>
-            </a:pPr>
-            <a:r>
-              <a:rPr sz="1300" b="0" i="0">
-                <a:solidFill>
-                  <a:srgbClr val="24323E"/>
-                </a:solidFill>
-                <a:latin typeface="Arial"/>
-                <a:ea typeface="微軟正黑體"/>
-                <a:cs typeface="Arial"/>
-              </a:rPr>
-              <a:t>T7　品質、去識別、統計檢定</a:t>
-            </a:r>
-          </a:p>
-        </p:txBody>
-      </p:sp>
-      <p:sp>
-        <p:nvSpPr>
-          <p:cNvPr id="20" name="Rounded Rectangle 19"/>
-          <p:cNvSpPr/>
-          <p:nvPr/>
-        </p:nvSpPr>
-        <p:spPr>
-          <a:xfrm>
-            <a:off x="420624" y="3968496"/>
-            <a:ext cx="5623560" cy="457200"/>
-          </a:xfrm>
-          <a:prstGeom prst="roundRect">
-            <a:avLst>
-              <a:gd name="adj" fmla="val 8000"/>
-            </a:avLst>
-          </a:prstGeom>
-          <a:solidFill>
-            <a:srgbClr val="F7F9FB"/>
-          </a:solidFill>
-          <a:ln>
-            <a:noFill/>
-          </a:ln>
-        </p:spPr>
-        <p:style>
-          <a:lnRef idx="1">
-            <a:schemeClr val="accent1"/>
-          </a:lnRef>
-          <a:fillRef idx="3">
-            <a:schemeClr val="accent1"/>
-          </a:fillRef>
-          <a:effectRef idx="2">
-            <a:schemeClr val="accent1"/>
-          </a:effectRef>
-          <a:fontRef idx="minor">
-            <a:schemeClr val="lt1"/>
-          </a:fontRef>
-        </p:style>
-        <p:txBody>
-          <a:bodyPr rtlCol="0" anchor="ctr"/>
-          <a:lstStyle/>
-          <a:p>
-            <a:pPr algn="ctr"/>
           </a:p>
         </p:txBody>
       </p:sp>
@@ -20928,423 +22083,8 @@
         </p:nvSpPr>
         <p:spPr>
           <a:xfrm>
-            <a:off x="530352" y="4023359"/>
-            <a:ext cx="5440680" cy="347472"/>
-          </a:xfrm>
-          <a:prstGeom prst="rect">
-            <a:avLst/>
-          </a:prstGeom>
-          <a:noFill/>
-        </p:spPr>
-        <p:txBody>
-          <a:bodyPr wrap="square" lIns="36576" rIns="36576" tIns="18288" bIns="18288" anchor="ctr">
-            <a:spAutoFit/>
-          </a:bodyPr>
-          <a:lstStyle/>
-          <a:p>
-            <a:pPr>
-              <a:lnSpc>
-                <a:spcPct val="100000"/>
-              </a:lnSpc>
-              <a:spcBef>
-                <a:spcPts val="0"/>
-              </a:spcBef>
-              <a:spcAft>
-                <a:spcPts val="200"/>
-              </a:spcAft>
-            </a:pPr>
-            <a:r>
-              <a:rPr sz="1300" b="0" i="0">
-                <a:solidFill>
-                  <a:srgbClr val="24323E"/>
-                </a:solidFill>
-                <a:latin typeface="Arial"/>
-                <a:ea typeface="微軟正黑體"/>
-                <a:cs typeface="Arial"/>
-              </a:rPr>
-              <a:t>T8　r4 決策模型（F1 0.685）</a:t>
-            </a:r>
-          </a:p>
-        </p:txBody>
-      </p:sp>
-      <p:sp>
-        <p:nvSpPr>
-          <p:cNvPr id="22" name="Rounded Rectangle 21"/>
-          <p:cNvSpPr/>
-          <p:nvPr/>
-        </p:nvSpPr>
-        <p:spPr>
-          <a:xfrm>
-            <a:off x="6153912" y="3968496"/>
-            <a:ext cx="5623560" cy="457200"/>
-          </a:xfrm>
-          <a:prstGeom prst="roundRect">
-            <a:avLst>
-              <a:gd name="adj" fmla="val 8000"/>
-            </a:avLst>
-          </a:prstGeom>
-          <a:solidFill>
-            <a:srgbClr val="F7F9FB"/>
-          </a:solidFill>
-          <a:ln>
-            <a:noFill/>
-          </a:ln>
-        </p:spPr>
-        <p:style>
-          <a:lnRef idx="1">
-            <a:schemeClr val="accent1"/>
-          </a:lnRef>
-          <a:fillRef idx="3">
-            <a:schemeClr val="accent1"/>
-          </a:fillRef>
-          <a:effectRef idx="2">
-            <a:schemeClr val="accent1"/>
-          </a:effectRef>
-          <a:fontRef idx="minor">
-            <a:schemeClr val="lt1"/>
-          </a:fontRef>
-        </p:style>
-        <p:txBody>
-          <a:bodyPr rtlCol="0" anchor="ctr"/>
-          <a:lstStyle/>
-          <a:p>
-            <a:pPr algn="ctr"/>
-          </a:p>
-        </p:txBody>
-      </p:sp>
-      <p:sp>
-        <p:nvSpPr>
-          <p:cNvPr id="23" name="TextBox 22"/>
-          <p:cNvSpPr txBox="1"/>
-          <p:nvPr/>
-        </p:nvSpPr>
-        <p:spPr>
-          <a:xfrm>
-            <a:off x="6263640" y="4023359"/>
-            <a:ext cx="5440680" cy="347472"/>
-          </a:xfrm>
-          <a:prstGeom prst="rect">
-            <a:avLst/>
-          </a:prstGeom>
-          <a:noFill/>
-        </p:spPr>
-        <p:txBody>
-          <a:bodyPr wrap="square" lIns="36576" rIns="36576" tIns="18288" bIns="18288" anchor="ctr">
-            <a:spAutoFit/>
-          </a:bodyPr>
-          <a:lstStyle/>
-          <a:p>
-            <a:pPr>
-              <a:lnSpc>
-                <a:spcPct val="100000"/>
-              </a:lnSpc>
-              <a:spcBef>
-                <a:spcPts val="0"/>
-              </a:spcBef>
-              <a:spcAft>
-                <a:spcPts val="200"/>
-              </a:spcAft>
-            </a:pPr>
-            <a:r>
-              <a:rPr sz="1300" b="0" i="0">
-                <a:solidFill>
-                  <a:srgbClr val="24323E"/>
-                </a:solidFill>
-                <a:latin typeface="Arial"/>
-                <a:ea typeface="微軟正黑體"/>
-                <a:cs typeface="Arial"/>
-              </a:rPr>
-              <a:t>T10　風險分級與四個 Persona</a:t>
-            </a:r>
-          </a:p>
-        </p:txBody>
-      </p:sp>
-      <p:sp>
-        <p:nvSpPr>
-          <p:cNvPr id="24" name="Rounded Rectangle 23"/>
-          <p:cNvSpPr/>
-          <p:nvPr/>
-        </p:nvSpPr>
-        <p:spPr>
-          <a:xfrm>
-            <a:off x="420624" y="4498848"/>
-            <a:ext cx="5623560" cy="457200"/>
-          </a:xfrm>
-          <a:prstGeom prst="roundRect">
-            <a:avLst>
-              <a:gd name="adj" fmla="val 8000"/>
-            </a:avLst>
-          </a:prstGeom>
-          <a:solidFill>
-            <a:srgbClr val="F7F9FB"/>
-          </a:solidFill>
-          <a:ln>
-            <a:noFill/>
-          </a:ln>
-        </p:spPr>
-        <p:style>
-          <a:lnRef idx="1">
-            <a:schemeClr val="accent1"/>
-          </a:lnRef>
-          <a:fillRef idx="3">
-            <a:schemeClr val="accent1"/>
-          </a:fillRef>
-          <a:effectRef idx="2">
-            <a:schemeClr val="accent1"/>
-          </a:effectRef>
-          <a:fontRef idx="minor">
-            <a:schemeClr val="lt1"/>
-          </a:fontRef>
-        </p:style>
-        <p:txBody>
-          <a:bodyPr rtlCol="0" anchor="ctr"/>
-          <a:lstStyle/>
-          <a:p>
-            <a:pPr algn="ctr"/>
-          </a:p>
-        </p:txBody>
-      </p:sp>
-      <p:sp>
-        <p:nvSpPr>
-          <p:cNvPr id="25" name="TextBox 24"/>
-          <p:cNvSpPr txBox="1"/>
-          <p:nvPr/>
-        </p:nvSpPr>
-        <p:spPr>
-          <a:xfrm>
-            <a:off x="530352" y="4553712"/>
-            <a:ext cx="5440680" cy="347472"/>
-          </a:xfrm>
-          <a:prstGeom prst="rect">
-            <a:avLst/>
-          </a:prstGeom>
-          <a:noFill/>
-        </p:spPr>
-        <p:txBody>
-          <a:bodyPr wrap="square" lIns="36576" rIns="36576" tIns="18288" bIns="18288" anchor="ctr">
-            <a:spAutoFit/>
-          </a:bodyPr>
-          <a:lstStyle/>
-          <a:p>
-            <a:pPr>
-              <a:lnSpc>
-                <a:spcPct val="100000"/>
-              </a:lnSpc>
-              <a:spcBef>
-                <a:spcPts val="0"/>
-              </a:spcBef>
-              <a:spcAft>
-                <a:spcPts val="200"/>
-              </a:spcAft>
-            </a:pPr>
-            <a:r>
-              <a:rPr sz="1300" b="0" i="0">
-                <a:solidFill>
-                  <a:srgbClr val="24323E"/>
-                </a:solidFill>
-                <a:latin typeface="Arial"/>
-                <a:ea typeface="微軟正黑體"/>
-                <a:cs typeface="Arial"/>
-              </a:rPr>
-              <a:t>T11　口述價格（非官方定價）</a:t>
-            </a:r>
-          </a:p>
-        </p:txBody>
-      </p:sp>
-      <p:sp>
-        <p:nvSpPr>
-          <p:cNvPr id="26" name="Rounded Rectangle 25"/>
-          <p:cNvSpPr/>
-          <p:nvPr/>
-        </p:nvSpPr>
-        <p:spPr>
-          <a:xfrm>
-            <a:off x="6153912" y="4498848"/>
-            <a:ext cx="5623560" cy="457200"/>
-          </a:xfrm>
-          <a:prstGeom prst="roundRect">
-            <a:avLst>
-              <a:gd name="adj" fmla="val 8000"/>
-            </a:avLst>
-          </a:prstGeom>
-          <a:solidFill>
-            <a:srgbClr val="F7F9FB"/>
-          </a:solidFill>
-          <a:ln>
-            <a:noFill/>
-          </a:ln>
-        </p:spPr>
-        <p:style>
-          <a:lnRef idx="1">
-            <a:schemeClr val="accent1"/>
-          </a:lnRef>
-          <a:fillRef idx="3">
-            <a:schemeClr val="accent1"/>
-          </a:fillRef>
-          <a:effectRef idx="2">
-            <a:schemeClr val="accent1"/>
-          </a:effectRef>
-          <a:fontRef idx="minor">
-            <a:schemeClr val="lt1"/>
-          </a:fontRef>
-        </p:style>
-        <p:txBody>
-          <a:bodyPr rtlCol="0" anchor="ctr"/>
-          <a:lstStyle/>
-          <a:p>
-            <a:pPr algn="ctr"/>
-          </a:p>
-        </p:txBody>
-      </p:sp>
-      <p:sp>
-        <p:nvSpPr>
-          <p:cNvPr id="27" name="TextBox 26"/>
-          <p:cNvSpPr txBox="1"/>
-          <p:nvPr/>
-        </p:nvSpPr>
-        <p:spPr>
-          <a:xfrm>
-            <a:off x="6263640" y="4553712"/>
-            <a:ext cx="5440680" cy="347472"/>
-          </a:xfrm>
-          <a:prstGeom prst="rect">
-            <a:avLst/>
-          </a:prstGeom>
-          <a:noFill/>
-        </p:spPr>
-        <p:txBody>
-          <a:bodyPr wrap="square" lIns="36576" rIns="36576" tIns="18288" bIns="18288" anchor="ctr">
-            <a:spAutoFit/>
-          </a:bodyPr>
-          <a:lstStyle/>
-          <a:p>
-            <a:pPr>
-              <a:lnSpc>
-                <a:spcPct val="100000"/>
-              </a:lnSpc>
-              <a:spcBef>
-                <a:spcPts val="0"/>
-              </a:spcBef>
-              <a:spcAft>
-                <a:spcPts val="200"/>
-              </a:spcAft>
-            </a:pPr>
-            <a:r>
-              <a:rPr sz="1300" b="0" i="0">
-                <a:solidFill>
-                  <a:srgbClr val="24323E"/>
-                </a:solidFill>
-                <a:latin typeface="Arial"/>
-                <a:ea typeface="微軟正黑體"/>
-                <a:cs typeface="Arial"/>
-              </a:rPr>
-              <a:t>T9　人工評估尚未產出（見 P9）</a:t>
-            </a:r>
-          </a:p>
-        </p:txBody>
-      </p:sp>
-      <p:sp>
-        <p:nvSpPr>
-          <p:cNvPr id="28" name="Rounded Rectangle 27"/>
-          <p:cNvSpPr/>
-          <p:nvPr/>
-        </p:nvSpPr>
-        <p:spPr>
-          <a:xfrm>
-            <a:off x="420624" y="5148072"/>
-            <a:ext cx="11356848" cy="658368"/>
-          </a:xfrm>
-          <a:prstGeom prst="roundRect">
-            <a:avLst>
-              <a:gd name="adj" fmla="val 8000"/>
-            </a:avLst>
-          </a:prstGeom>
-          <a:solidFill>
-            <a:srgbClr val="FDEBD0"/>
-          </a:solidFill>
-          <a:ln>
-            <a:noFill/>
-          </a:ln>
-        </p:spPr>
-        <p:style>
-          <a:lnRef idx="1">
-            <a:schemeClr val="accent1"/>
-          </a:lnRef>
-          <a:fillRef idx="3">
-            <a:schemeClr val="accent1"/>
-          </a:fillRef>
-          <a:effectRef idx="2">
-            <a:schemeClr val="accent1"/>
-          </a:effectRef>
-          <a:fontRef idx="minor">
-            <a:schemeClr val="lt1"/>
-          </a:fontRef>
-        </p:style>
-        <p:txBody>
-          <a:bodyPr rtlCol="0" anchor="ctr"/>
-          <a:lstStyle/>
-          <a:p>
-            <a:pPr algn="ctr"/>
-          </a:p>
-        </p:txBody>
-      </p:sp>
-      <p:sp>
-        <p:nvSpPr>
-          <p:cNvPr id="29" name="TextBox 28"/>
-          <p:cNvSpPr txBox="1"/>
-          <p:nvPr/>
-        </p:nvSpPr>
-        <p:spPr>
-          <a:xfrm>
-            <a:off x="566928" y="5248656"/>
-            <a:ext cx="11064240" cy="457200"/>
-          </a:xfrm>
-          <a:prstGeom prst="rect">
-            <a:avLst/>
-          </a:prstGeom>
-          <a:noFill/>
-        </p:spPr>
-        <p:txBody>
-          <a:bodyPr wrap="square" lIns="36576" rIns="36576" tIns="18288" bIns="18288" anchor="ctr">
-            <a:spAutoFit/>
-          </a:bodyPr>
-          <a:lstStyle/>
-          <a:p>
-            <a:pPr>
-              <a:lnSpc>
-                <a:spcPct val="100000"/>
-              </a:lnSpc>
-              <a:spcBef>
-                <a:spcPts val="0"/>
-              </a:spcBef>
-              <a:spcAft>
-                <a:spcPts val="200"/>
-              </a:spcAft>
-            </a:pPr>
-            <a:r>
-              <a:rPr sz="1600" b="1" i="0">
-                <a:solidFill>
-                  <a:srgbClr val="C05600"/>
-                </a:solidFill>
-                <a:latin typeface="Arial"/>
-                <a:ea typeface="微軟正黑體"/>
-                <a:cs typeface="Arial"/>
-              </a:rPr>
-              <a:t>【待補：Prototype 畫面截圖（決賽）】</a:t>
-            </a:r>
-          </a:p>
-        </p:txBody>
-      </p:sp>
-      <p:sp>
-        <p:nvSpPr>
-          <p:cNvPr id="30" name="TextBox 29"/>
-          <p:cNvSpPr txBox="1"/>
-          <p:nvPr/>
-        </p:nvSpPr>
-        <p:spPr>
-          <a:xfrm>
-            <a:off x="420624" y="5852160"/>
-            <a:ext cx="11356848" cy="292608"/>
+            <a:off x="6382512" y="4599432"/>
+            <a:ext cx="5266944" cy="640080"/>
           </a:xfrm>
           <a:prstGeom prst="rect">
             <a:avLst/>
@@ -21369,7 +22109,31 @@
               </a:spcAft>
             </a:pPr>
             <a:r>
-              <a:rPr sz="1200" b="0" i="0">
+              <a:rPr sz="1400" b="1" i="0">
+                <a:solidFill>
+                  <a:srgbClr val="24323E"/>
+                </a:solidFill>
+                <a:latin typeface="Arial"/>
+                <a:ea typeface="微軟正黑體"/>
+                <a:cs typeface="Arial"/>
+              </a:rPr>
+              <a:t>決賽提供可操作版。</a:t>
+            </a:r>
+          </a:p>
+          <a:p>
+            <a:pPr>
+              <a:lnSpc>
+                <a:spcPct val="100000"/>
+              </a:lnSpc>
+              <a:spcBef>
+                <a:spcPts val="0"/>
+              </a:spcBef>
+              <a:spcAft>
+                <a:spcPts val="200"/>
+              </a:spcAft>
+            </a:pPr>
+            <a:r>
+              <a:rPr sz="1100" b="0" i="0">
                 <a:solidFill>
                   <a:srgbClr val="5C6B7A"/>
                 </a:solidFill>
@@ -21377,7 +22141,7 @@
                 <a:ea typeface="微軟正黑體"/>
                 <a:cs typeface="Arial"/>
               </a:rPr>
-              <a:t>Model Card 與匿名化紀錄放附錄（T8、T7 去識別報告），不計入 15 頁。</a:t>
+              <a:t>未核准不投遞。代號為示意，不是論壇帳號。</a:t>
             </a:r>
           </a:p>
         </p:txBody>
@@ -23121,6 +23885,496 @@
 </p:sld>
 </file>
 
+<file path=ppt/slides/slide19.xml><?xml version="1.0" encoding="utf-8"?>
+<p:sld xmlns:a="http://schemas.openxmlformats.org/drawingml/2006/main" xmlns:p="http://schemas.openxmlformats.org/presentationml/2006/main" xmlns:r="http://schemas.openxmlformats.org/officeDocument/2006/relationships">
+  <p:cSld>
+    <p:spTree>
+      <p:nvGrpSpPr>
+        <p:cNvPr id="1" name=""/>
+        <p:cNvGrpSpPr/>
+        <p:nvPr/>
+      </p:nvGrpSpPr>
+      <p:grpSpPr/>
+      <p:sp>
+        <p:nvSpPr>
+          <p:cNvPr id="2" name="TextBox 1"/>
+          <p:cNvSpPr txBox="1"/>
+          <p:nvPr/>
+        </p:nvSpPr>
+        <p:spPr>
+          <a:xfrm>
+            <a:off x="420624" y="91440"/>
+            <a:ext cx="8412480" cy="237744"/>
+          </a:xfrm>
+          <a:prstGeom prst="rect">
+            <a:avLst/>
+          </a:prstGeom>
+          <a:noFill/>
+        </p:spPr>
+        <p:txBody>
+          <a:bodyPr wrap="square" lIns="0" rIns="0" tIns="18288" bIns="18288" anchor="t">
+            <a:spAutoFit/>
+          </a:bodyPr>
+          <a:lstStyle/>
+          <a:p>
+            <a:pPr>
+              <a:lnSpc>
+                <a:spcPct val="100000"/>
+              </a:lnSpc>
+              <a:spcBef>
+                <a:spcPts val="0"/>
+              </a:spcBef>
+              <a:spcAft>
+                <a:spcPts val="200"/>
+              </a:spcAft>
+            </a:pPr>
+            <a:r>
+              <a:rPr sz="1200" b="0" i="0">
+                <a:solidFill>
+                  <a:srgbClr val="44546A"/>
+                </a:solidFill>
+                <a:latin typeface="Arial"/>
+                <a:ea typeface="微軟正黑體"/>
+                <a:cs typeface="Arial"/>
+              </a:rPr>
+              <a:t>附錄 補充圖表（不計入 15 頁）</a:t>
+            </a:r>
+          </a:p>
+        </p:txBody>
+      </p:sp>
+      <p:sp>
+        <p:nvSpPr>
+          <p:cNvPr id="3" name="TextBox 2"/>
+          <p:cNvSpPr txBox="1"/>
+          <p:nvPr/>
+        </p:nvSpPr>
+        <p:spPr>
+          <a:xfrm>
+            <a:off x="420624" y="6547104"/>
+            <a:ext cx="9418320" cy="219456"/>
+          </a:xfrm>
+          <a:prstGeom prst="rect">
+            <a:avLst/>
+          </a:prstGeom>
+          <a:noFill/>
+        </p:spPr>
+        <p:txBody>
+          <a:bodyPr wrap="square" lIns="0" rIns="0" tIns="18288" bIns="18288" anchor="t">
+            <a:spAutoFit/>
+          </a:bodyPr>
+          <a:lstStyle/>
+          <a:p>
+            <a:pPr>
+              <a:lnSpc>
+                <a:spcPct val="100000"/>
+              </a:lnSpc>
+              <a:spcBef>
+                <a:spcPts val="0"/>
+              </a:spcBef>
+              <a:spcAft>
+                <a:spcPts val="200"/>
+              </a:spcAft>
+            </a:pPr>
+            <a:r>
+              <a:rPr sz="1000" b="0" i="0">
+                <a:solidFill>
+                  <a:srgbClr val="5C6B7A"/>
+                </a:solidFill>
+                <a:latin typeface="Arial"/>
+                <a:ea typeface="微軟正黑體"/>
+                <a:cs typeface="Arial"/>
+              </a:rPr>
+              <a:t>來源：reports/T7_stats_tests.md、T10_risk_persona_report.md、T8_r4_report.md、T15_trend_reports.md</a:t>
+            </a:r>
+          </a:p>
+        </p:txBody>
+      </p:sp>
+      <p:sp>
+        <p:nvSpPr>
+          <p:cNvPr id="4" name="TextBox 3"/>
+          <p:cNvSpPr txBox="1"/>
+          <p:nvPr/>
+        </p:nvSpPr>
+        <p:spPr>
+          <a:xfrm>
+            <a:off x="10378440" y="6547104"/>
+            <a:ext cx="1389888" cy="219456"/>
+          </a:xfrm>
+          <a:prstGeom prst="rect">
+            <a:avLst/>
+          </a:prstGeom>
+          <a:noFill/>
+        </p:spPr>
+        <p:txBody>
+          <a:bodyPr wrap="square" lIns="0" rIns="0" tIns="18288" bIns="18288" anchor="t">
+            <a:spAutoFit/>
+          </a:bodyPr>
+          <a:lstStyle/>
+          <a:p>
+            <a:pPr algn="r">
+              <a:lnSpc>
+                <a:spcPct val="100000"/>
+              </a:lnSpc>
+              <a:spcBef>
+                <a:spcPts val="0"/>
+              </a:spcBef>
+              <a:spcAft>
+                <a:spcPts val="200"/>
+              </a:spcAft>
+            </a:pPr>
+            <a:r>
+              <a:rPr sz="1200" b="0" i="0">
+                <a:solidFill>
+                  <a:srgbClr val="44546A"/>
+                </a:solidFill>
+                <a:latin typeface="Arial"/>
+                <a:ea typeface="微軟正黑體"/>
+                <a:cs typeface="Arial"/>
+              </a:rPr>
+              <a:t>19</a:t>
+            </a:r>
+          </a:p>
+        </p:txBody>
+      </p:sp>
+      <p:sp>
+        <p:nvSpPr>
+          <p:cNvPr id="5" name="TextBox 4"/>
+          <p:cNvSpPr txBox="1"/>
+          <p:nvPr/>
+        </p:nvSpPr>
+        <p:spPr>
+          <a:xfrm>
+            <a:off x="420624" y="329184"/>
+            <a:ext cx="11356848" cy="566928"/>
+          </a:xfrm>
+          <a:prstGeom prst="rect">
+            <a:avLst/>
+          </a:prstGeom>
+          <a:noFill/>
+        </p:spPr>
+        <p:txBody>
+          <a:bodyPr wrap="square" lIns="0" rIns="0" tIns="18288" bIns="18288" anchor="t">
+            <a:spAutoFit/>
+          </a:bodyPr>
+          <a:lstStyle/>
+          <a:p>
+            <a:pPr>
+              <a:lnSpc>
+                <a:spcPct val="100000"/>
+              </a:lnSpc>
+              <a:spcBef>
+                <a:spcPts val="0"/>
+              </a:spcBef>
+              <a:spcAft>
+                <a:spcPts val="200"/>
+              </a:spcAft>
+            </a:pPr>
+            <a:r>
+              <a:rPr sz="2400" b="1" i="0">
+                <a:solidFill>
+                  <a:srgbClr val="24323E"/>
+                </a:solidFill>
+                <a:latin typeface="Arial"/>
+                <a:ea typeface="微軟正黑體"/>
+                <a:cs typeface="Arial"/>
+              </a:rPr>
+              <a:t>來源差異、風險分布、校準曲線，與季趨勢</a:t>
+            </a:r>
+          </a:p>
+        </p:txBody>
+      </p:sp>
+      <p:pic>
+        <p:nvPicPr>
+          <p:cNvPr id="6" name="Picture 5" descr="F2.png"/>
+          <p:cNvPicPr>
+            <a:picLocks noChangeAspect="1"/>
+          </p:cNvPicPr>
+          <p:nvPr/>
+        </p:nvPicPr>
+        <p:blipFill>
+          <a:blip r:embed="rId2"/>
+          <a:stretch>
+            <a:fillRect/>
+          </a:stretch>
+        </p:blipFill>
+        <p:spPr>
+          <a:xfrm>
+            <a:off x="1097280" y="987552"/>
+            <a:ext cx="4242816" cy="2386584"/>
+          </a:xfrm>
+          <a:prstGeom prst="rect">
+            <a:avLst/>
+          </a:prstGeom>
+        </p:spPr>
+      </p:pic>
+      <p:sp>
+        <p:nvSpPr>
+          <p:cNvPr id="7" name="TextBox 6"/>
+          <p:cNvSpPr txBox="1"/>
+          <p:nvPr/>
+        </p:nvSpPr>
+        <p:spPr>
+          <a:xfrm>
+            <a:off x="420624" y="3374136"/>
+            <a:ext cx="5596128" cy="292608"/>
+          </a:xfrm>
+          <a:prstGeom prst="rect">
+            <a:avLst/>
+          </a:prstGeom>
+          <a:noFill/>
+        </p:spPr>
+        <p:txBody>
+          <a:bodyPr wrap="square" lIns="36576" rIns="36576" tIns="18288" bIns="18288" anchor="t">
+            <a:spAutoFit/>
+          </a:bodyPr>
+          <a:lstStyle/>
+          <a:p>
+            <a:pPr>
+              <a:lnSpc>
+                <a:spcPct val="100000"/>
+              </a:lnSpc>
+              <a:spcBef>
+                <a:spcPts val="0"/>
+              </a:spcBef>
+              <a:spcAft>
+                <a:spcPts val="200"/>
+              </a:spcAft>
+            </a:pPr>
+            <a:r>
+              <a:rPr sz="1200" b="0" i="0">
+                <a:solidFill>
+                  <a:srgbClr val="5C6B7A"/>
+                </a:solidFill>
+                <a:latin typeface="Arial"/>
+                <a:ea typeface="微軟正黑體"/>
+                <a:cs typeface="Arial"/>
+              </a:rPr>
+              <a:t>F2　Mobile01 18.2%、PTT 14.1%、Dcard 6.8%（作者流失率）。</a:t>
+            </a:r>
+          </a:p>
+        </p:txBody>
+      </p:sp>
+      <p:pic>
+        <p:nvPicPr>
+          <p:cNvPr id="8" name="Picture 7" descr="F4.png"/>
+          <p:cNvPicPr>
+            <a:picLocks noChangeAspect="1"/>
+          </p:cNvPicPr>
+          <p:nvPr/>
+        </p:nvPicPr>
+        <p:blipFill>
+          <a:blip r:embed="rId3"/>
+          <a:stretch>
+            <a:fillRect/>
+          </a:stretch>
+        </p:blipFill>
+        <p:spPr>
+          <a:xfrm>
+            <a:off x="6858000" y="987552"/>
+            <a:ext cx="4242816" cy="2386584"/>
+          </a:xfrm>
+          <a:prstGeom prst="rect">
+            <a:avLst/>
+          </a:prstGeom>
+        </p:spPr>
+      </p:pic>
+      <p:sp>
+        <p:nvSpPr>
+          <p:cNvPr id="9" name="TextBox 8"/>
+          <p:cNvSpPr txBox="1"/>
+          <p:nvPr/>
+        </p:nvSpPr>
+        <p:spPr>
+          <a:xfrm>
+            <a:off x="6181344" y="3374136"/>
+            <a:ext cx="5596128" cy="292608"/>
+          </a:xfrm>
+          <a:prstGeom prst="rect">
+            <a:avLst/>
+          </a:prstGeom>
+          <a:noFill/>
+        </p:spPr>
+        <p:txBody>
+          <a:bodyPr wrap="square" lIns="36576" rIns="36576" tIns="18288" bIns="18288" anchor="t">
+            <a:spAutoFit/>
+          </a:bodyPr>
+          <a:lstStyle/>
+          <a:p>
+            <a:pPr>
+              <a:lnSpc>
+                <a:spcPct val="100000"/>
+              </a:lnSpc>
+              <a:spcBef>
+                <a:spcPts val="0"/>
+              </a:spcBef>
+              <a:spcAft>
+                <a:spcPts val="200"/>
+              </a:spcAft>
+            </a:pPr>
+            <a:r>
+              <a:rPr sz="1200" b="0" i="0">
+                <a:solidFill>
+                  <a:srgbClr val="5C6B7A"/>
+                </a:solidFill>
+                <a:latin typeface="Arial"/>
+                <a:ea typeface="微軟正黑體"/>
+                <a:cs typeface="Arial"/>
+              </a:rPr>
+              <a:t>F4　高風險 1,049 人（16.4%）；約八成作者在低風險。</a:t>
+            </a:r>
+          </a:p>
+        </p:txBody>
+      </p:sp>
+      <p:pic>
+        <p:nvPicPr>
+          <p:cNvPr id="10" name="Picture 9" descr="F6.png"/>
+          <p:cNvPicPr>
+            <a:picLocks noChangeAspect="1"/>
+          </p:cNvPicPr>
+          <p:nvPr/>
+        </p:nvPicPr>
+        <p:blipFill>
+          <a:blip r:embed="rId4"/>
+          <a:stretch>
+            <a:fillRect/>
+          </a:stretch>
+        </p:blipFill>
+        <p:spPr>
+          <a:xfrm>
+            <a:off x="1097280" y="3739896"/>
+            <a:ext cx="4242816" cy="2386584"/>
+          </a:xfrm>
+          <a:prstGeom prst="rect">
+            <a:avLst/>
+          </a:prstGeom>
+        </p:spPr>
+      </p:pic>
+      <p:sp>
+        <p:nvSpPr>
+          <p:cNvPr id="11" name="TextBox 10"/>
+          <p:cNvSpPr txBox="1"/>
+          <p:nvPr/>
+        </p:nvSpPr>
+        <p:spPr>
+          <a:xfrm>
+            <a:off x="420624" y="6126479"/>
+            <a:ext cx="5596128" cy="292608"/>
+          </a:xfrm>
+          <a:prstGeom prst="rect">
+            <a:avLst/>
+          </a:prstGeom>
+          <a:noFill/>
+        </p:spPr>
+        <p:txBody>
+          <a:bodyPr wrap="square" lIns="36576" rIns="36576" tIns="18288" bIns="18288" anchor="t">
+            <a:spAutoFit/>
+          </a:bodyPr>
+          <a:lstStyle/>
+          <a:p>
+            <a:pPr>
+              <a:lnSpc>
+                <a:spcPct val="100000"/>
+              </a:lnSpc>
+              <a:spcBef>
+                <a:spcPts val="0"/>
+              </a:spcBef>
+              <a:spcAft>
+                <a:spcPts val="200"/>
+              </a:spcAft>
+            </a:pPr>
+            <a:r>
+              <a:rPr sz="1200" b="0" i="0">
+                <a:solidFill>
+                  <a:srgbClr val="5C6B7A"/>
+                </a:solidFill>
+                <a:latin typeface="Arial"/>
+                <a:ea typeface="微軟正黑體"/>
+                <a:cs typeface="Arial"/>
+              </a:rPr>
+              <a:t>F6　最高信心桶 n=71，實際流失 68%（校準曲線）。</a:t>
+            </a:r>
+          </a:p>
+        </p:txBody>
+      </p:sp>
+      <p:pic>
+        <p:nvPicPr>
+          <p:cNvPr id="12" name="Picture 11" descr="F9.png"/>
+          <p:cNvPicPr>
+            <a:picLocks noChangeAspect="1"/>
+          </p:cNvPicPr>
+          <p:nvPr/>
+        </p:nvPicPr>
+        <p:blipFill>
+          <a:blip r:embed="rId5"/>
+          <a:stretch>
+            <a:fillRect/>
+          </a:stretch>
+        </p:blipFill>
+        <p:spPr>
+          <a:xfrm>
+            <a:off x="6433718" y="3739896"/>
+            <a:ext cx="5091379" cy="2386584"/>
+          </a:xfrm>
+          <a:prstGeom prst="rect">
+            <a:avLst/>
+          </a:prstGeom>
+        </p:spPr>
+      </p:pic>
+      <p:sp>
+        <p:nvSpPr>
+          <p:cNvPr id="13" name="TextBox 12"/>
+          <p:cNvSpPr txBox="1"/>
+          <p:nvPr/>
+        </p:nvSpPr>
+        <p:spPr>
+          <a:xfrm>
+            <a:off x="6181344" y="6126479"/>
+            <a:ext cx="5596128" cy="292608"/>
+          </a:xfrm>
+          <a:prstGeom prst="rect">
+            <a:avLst/>
+          </a:prstGeom>
+          <a:noFill/>
+        </p:spPr>
+        <p:txBody>
+          <a:bodyPr wrap="square" lIns="36576" rIns="36576" tIns="18288" bIns="18288" anchor="t">
+            <a:spAutoFit/>
+          </a:bodyPr>
+          <a:lstStyle/>
+          <a:p>
+            <a:pPr>
+              <a:lnSpc>
+                <a:spcPct val="100000"/>
+              </a:lnSpc>
+              <a:spcBef>
+                <a:spcPts val="0"/>
+              </a:spcBef>
+              <a:spcAft>
+                <a:spcPts val="200"/>
+              </a:spcAft>
+            </a:pPr>
+            <a:r>
+              <a:rPr sz="1200" b="0" i="0">
+                <a:solidFill>
+                  <a:srgbClr val="5C6B7A"/>
+                </a:solidFill>
+                <a:latin typeface="Arial"/>
+                <a:ea typeface="微軟正黑體"/>
+                <a:cs typeface="Arial"/>
+              </a:rPr>
+              <a:t>F9　季趨勢，日報／週報／季報與 200% 預警。</a:t>
+            </a:r>
+          </a:p>
+        </p:txBody>
+      </p:sp>
+    </p:spTree>
+  </p:cSld>
+  <p:clrMapOvr>
+    <a:masterClrMapping/>
+  </p:clrMapOvr>
+</p:sld>
+</file>
+
 <file path=ppt/slides/slide2.xml><?xml version="1.0" encoding="utf-8"?>
 <p:sld xmlns:a="http://schemas.openxmlformats.org/drawingml/2006/main" xmlns:r="http://schemas.openxmlformats.org/officeDocument/2006/relationships" xmlns:mc="http://schemas.openxmlformats.org/markup-compatibility/2006" xmlns:mv="urn:schemas-microsoft-com:mac:vml" xmlns:p="http://schemas.openxmlformats.org/presentationml/2006/main" xmlns:c="http://schemas.openxmlformats.org/drawingml/2006/chart" xmlns:dgm="http://schemas.openxmlformats.org/drawingml/2006/diagram" xmlns:o="urn:schemas-microsoft-com:office:office" xmlns:v="urn:schemas-microsoft-com:vml" xmlns:pvml="urn:schemas-microsoft-com:office:powerpoint" xmlns:com="http://schemas.openxmlformats.org/drawingml/2006/compatibility" xmlns:p14="http://schemas.microsoft.com/office/powerpoint/2010/main" xmlns:p15="http://schemas.microsoft.com/office/powerpoint/2012/main" xmlns:ahyp="http://schemas.microsoft.com/office/drawing/2018/hyperlinkcolor">
   <p:cSld>
@@ -23335,7 +24589,7 @@
         </p:nvGraphicFramePr>
         <p:xfrm>
           <a:off x="435425" y="1248788"/>
-          <a:ext cx="3000000" cy="4645151"/>
+          <a:ext cx="3000000" cy="4864608"/>
         </p:xfrm>
         <a:graphic>
           <a:graphicData uri="http://schemas.openxmlformats.org/drawingml/2006/table">
@@ -23904,7 +25158,7 @@
                   </a:tcPr>
                 </a:tc>
               </a:tr>
-              <a:tr h="1353312">
+              <a:tr h="1298448">
                 <a:tc>
                   <a:txBody>
                     <a:bodyPr/>
@@ -24115,7 +25369,7 @@
                   </a:tcPr>
                 </a:tc>
               </a:tr>
-              <a:tr h="896112">
+              <a:tr h="841248">
                 <a:tc>
                   <a:txBody>
                     <a:bodyPr/>
@@ -24273,7 +25527,7 @@
                   </a:tcPr>
                 </a:tc>
               </a:tr>
-              <a:tr h="658368">
+              <a:tr h="987552">
                 <a:tc>
                   <a:txBody>
                     <a:bodyPr/>
@@ -24355,16 +25609,34 @@
                         <a:buNone/>
                       </a:pPr>
                       <a:r>
-                        <a:rPr sz="1200" b="1" i="0">
+                        <a:rPr sz="1200" b="0" i="0">
                           <a:solidFill>
-                            <a:srgbClr val="C05600"/>
+                            <a:srgbClr val="24323E"/>
                           </a:solidFill>
                           <a:latin typeface="Arial"/>
                           <a:ea typeface="微軟正黑體"/>
                           <a:cs typeface="Arial"/>
                         </a:rPr>
-                        <a:t>【待補：KPI 目標值】</a:t>
+                        <a:t>成果：高風險車主 12 個月回廠率提升 10 個百分點（假設值，導入後以基期實測校正）。</a:t>
                       </a:r>
+                      <a:endParaRPr sz="1800">
+                        <a:solidFill>
+                          <a:srgbClr val="888888"/>
+                        </a:solidFill>
+                      </a:endParaRPr>
+                    </a:p>
+                    <a:p>
+                      <a:pPr>
+                        <a:lnSpc>
+                          <a:spcPct val="100000"/>
+                        </a:lnSpc>
+                        <a:spcBef>
+                          <a:spcPts val="0"/>
+                        </a:spcBef>
+                        <a:spcAft>
+                          <a:spcPts val="200"/>
+                        </a:spcAft>
+                      </a:pPr>
                       <a:r>
                         <a:rPr sz="1200" b="0" i="0">
                           <a:solidFill>
@@ -24374,13 +25646,32 @@
                           <a:ea typeface="微軟正黑體"/>
                           <a:cs typeface="Arial"/>
                         </a:rPr>
-                        <a:t>（框架：高風險車主關懷觸達率、過保後回廠率、留存率；每句判斷 0.7 秒、零 API 費）</a:t>
+                        <a:t>流程：高風險名單每月更新、話術人工核准率 ≥ 80%。</a:t>
                       </a:r>
-                      <a:endParaRPr sz="1800">
-                        <a:solidFill>
-                          <a:srgbClr val="888888"/>
-                        </a:solidFill>
-                      </a:endParaRPr>
+                    </a:p>
+                    <a:p>
+                      <a:pPr>
+                        <a:lnSpc>
+                          <a:spcPct val="100000"/>
+                        </a:lnSpc>
+                        <a:spcBef>
+                          <a:spcPts val="0"/>
+                        </a:spcBef>
+                        <a:spcAft>
+                          <a:spcPts val="200"/>
+                        </a:spcAft>
+                      </a:pPr>
+                      <a:r>
+                        <a:rPr sz="1200" b="0" i="0">
+                          <a:solidFill>
+                            <a:srgbClr val="24323E"/>
+                          </a:solidFill>
+                          <a:latin typeface="Arial"/>
+                          <a:ea typeface="微軟正黑體"/>
+                          <a:cs typeface="Arial"/>
+                        </a:rPr>
+                        <a:t>模型：隨機層 F1 ≥ 0.8、κ ≥ 0.6，每季 300 句人工金標重驗。每句 0.7 秒、零 API 費。</a:t>
+                      </a:r>
                     </a:p>
                   </a:txBody>
                   <a:tcPr marT="27432" marB="27432" marR="73152" marL="73152" anchor="ctr">
@@ -25255,7 +26546,7 @@
                 <a:ea typeface="微軟正黑體"/>
                 <a:cs typeface="Arial"/>
               </a:rPr>
-              <a:t>來源：reports/T7_stats_tests.md；圖 F2</a:t>
+              <a:t>來源：reports/T7_stats_tests.md（作者層級流失率；Dcard 偏購車階段）</a:t>
             </a:r>
           </a:p>
         </p:txBody>
@@ -25628,35 +26919,396 @@
                 <a:ea typeface="微軟正黑體"/>
                 <a:cs typeface="Arial"/>
               </a:rPr>
-              <a:t>使用者是售後決策者，以及服務廠的客戶關係人員。誤差線是 Wilson 95% CI。</a:t>
+              <a:t>使用者是售後決策者，以及服務廠的客戶關係人員。</a:t>
             </a:r>
           </a:p>
         </p:txBody>
       </p:sp>
-      <p:pic>
-        <p:nvPicPr>
-          <p:cNvPr id="11" name="Picture 10" descr="F2.png"/>
-          <p:cNvPicPr>
-            <a:picLocks noChangeAspect="1"/>
-          </p:cNvPicPr>
+      <p:graphicFrame>
+        <p:nvGraphicFramePr>
+          <p:cNvPr id="11" name="Table 10"/>
+          <p:cNvGraphicFramePr>
+            <a:graphicFrameLocks noGrp="1"/>
+          </p:cNvGraphicFramePr>
           <p:nvPr/>
-        </p:nvPicPr>
-        <p:blipFill>
-          <a:blip r:embed="rId2"/>
-          <a:stretch>
-            <a:fillRect/>
-          </a:stretch>
-        </p:blipFill>
+        </p:nvGraphicFramePr>
+        <p:xfrm>
+          <a:off x="5696712" y="987552"/>
+          <a:ext cx="6080760" cy="1965960"/>
+        </p:xfrm>
+        <a:graphic>
+          <a:graphicData uri="http://schemas.openxmlformats.org/drawingml/2006/table">
+            <a:tbl>
+              <a:tblPr firstRow="1" bandRow="1">
+                <a:tableStyleId>{5C22544A-7EE6-4342-B048-85BDC9FD1C3A}</a:tableStyleId>
+              </a:tblPr>
+              <a:tblGrid>
+                <a:gridCol w="3344418"/>
+                <a:gridCol w="2736342"/>
+              </a:tblGrid>
+              <a:tr h="491490">
+                <a:tc>
+                  <a:txBody>
+                    <a:bodyPr wrap="square" anchor="ctr"/>
+                    <a:lstStyle/>
+                    <a:p>
+                      <a:pPr>
+                        <a:lnSpc>
+                          <a:spcPct val="100000"/>
+                        </a:lnSpc>
+                        <a:spcBef>
+                          <a:spcPts val="0"/>
+                        </a:spcBef>
+                        <a:spcAft>
+                          <a:spcPts val="200"/>
+                        </a:spcAft>
+                      </a:pPr>
+                      <a:r>
+                        <a:rPr sz="1600" b="1" i="0">
+                          <a:solidFill>
+                            <a:srgbClr val="FFFFFF"/>
+                          </a:solidFill>
+                          <a:latin typeface="Arial"/>
+                          <a:ea typeface="微軟正黑體"/>
+                          <a:cs typeface="Arial"/>
+                        </a:rPr>
+                        <a:t>來源</a:t>
+                      </a:r>
+                    </a:p>
+                  </a:txBody>
+                  <a:tcPr anchor="ctr" marL="73152" marR="54864" marT="36576" marB="27432">
+                    <a:solidFill>
+                      <a:srgbClr val="44546A"/>
+                    </a:solidFill>
+                  </a:tcPr>
+                </a:tc>
+                <a:tc>
+                  <a:txBody>
+                    <a:bodyPr wrap="square" anchor="ctr"/>
+                    <a:lstStyle/>
+                    <a:p>
+                      <a:pPr>
+                        <a:lnSpc>
+                          <a:spcPct val="100000"/>
+                        </a:lnSpc>
+                        <a:spcBef>
+                          <a:spcPts val="0"/>
+                        </a:spcBef>
+                        <a:spcAft>
+                          <a:spcPts val="200"/>
+                        </a:spcAft>
+                      </a:pPr>
+                      <a:r>
+                        <a:rPr sz="1600" b="1" i="0">
+                          <a:solidFill>
+                            <a:srgbClr val="FFFFFF"/>
+                          </a:solidFill>
+                          <a:latin typeface="Arial"/>
+                          <a:ea typeface="微軟正黑體"/>
+                          <a:cs typeface="Arial"/>
+                        </a:rPr>
+                        <a:t>作者流失率</a:t>
+                      </a:r>
+                    </a:p>
+                  </a:txBody>
+                  <a:tcPr anchor="ctr" marL="73152" marR="54864" marT="36576" marB="27432">
+                    <a:solidFill>
+                      <a:srgbClr val="44546A"/>
+                    </a:solidFill>
+                  </a:tcPr>
+                </a:tc>
+              </a:tr>
+              <a:tr h="491490">
+                <a:tc>
+                  <a:txBody>
+                    <a:bodyPr wrap="square" anchor="ctr"/>
+                    <a:lstStyle/>
+                    <a:p>
+                      <a:pPr>
+                        <a:lnSpc>
+                          <a:spcPct val="100000"/>
+                        </a:lnSpc>
+                        <a:spcBef>
+                          <a:spcPts val="0"/>
+                        </a:spcBef>
+                        <a:spcAft>
+                          <a:spcPts val="200"/>
+                        </a:spcAft>
+                      </a:pPr>
+                      <a:r>
+                        <a:rPr sz="1600" b="1" i="0">
+                          <a:solidFill>
+                            <a:srgbClr val="24323E"/>
+                          </a:solidFill>
+                          <a:latin typeface="Arial"/>
+                          <a:ea typeface="微軟正黑體"/>
+                          <a:cs typeface="Arial"/>
+                        </a:rPr>
+                        <a:t>Mobile01</a:t>
+                      </a:r>
+                    </a:p>
+                  </a:txBody>
+                  <a:tcPr anchor="ctr" marL="73152" marR="54864" marT="36576" marB="27432">
+                    <a:solidFill>
+                      <a:srgbClr val="FFFFFF"/>
+                    </a:solidFill>
+                  </a:tcPr>
+                </a:tc>
+                <a:tc>
+                  <a:txBody>
+                    <a:bodyPr wrap="square" anchor="ctr"/>
+                    <a:lstStyle/>
+                    <a:p>
+                      <a:pPr>
+                        <a:lnSpc>
+                          <a:spcPct val="100000"/>
+                        </a:lnSpc>
+                        <a:spcBef>
+                          <a:spcPts val="0"/>
+                        </a:spcBef>
+                        <a:spcAft>
+                          <a:spcPts val="200"/>
+                        </a:spcAft>
+                      </a:pPr>
+                      <a:r>
+                        <a:rPr sz="1600" b="0" i="0">
+                          <a:solidFill>
+                            <a:srgbClr val="24323E"/>
+                          </a:solidFill>
+                          <a:latin typeface="Arial"/>
+                          <a:ea typeface="微軟正黑體"/>
+                          <a:cs typeface="Arial"/>
+                        </a:rPr>
+                        <a:t>18.2%</a:t>
+                      </a:r>
+                    </a:p>
+                  </a:txBody>
+                  <a:tcPr anchor="ctr" marL="73152" marR="54864" marT="36576" marB="27432">
+                    <a:solidFill>
+                      <a:srgbClr val="FFFFFF"/>
+                    </a:solidFill>
+                  </a:tcPr>
+                </a:tc>
+              </a:tr>
+              <a:tr h="491490">
+                <a:tc>
+                  <a:txBody>
+                    <a:bodyPr wrap="square" anchor="ctr"/>
+                    <a:lstStyle/>
+                    <a:p>
+                      <a:pPr>
+                        <a:lnSpc>
+                          <a:spcPct val="100000"/>
+                        </a:lnSpc>
+                        <a:spcBef>
+                          <a:spcPts val="0"/>
+                        </a:spcBef>
+                        <a:spcAft>
+                          <a:spcPts val="200"/>
+                        </a:spcAft>
+                      </a:pPr>
+                      <a:r>
+                        <a:rPr sz="1600" b="1" i="0">
+                          <a:solidFill>
+                            <a:srgbClr val="24323E"/>
+                          </a:solidFill>
+                          <a:latin typeface="Arial"/>
+                          <a:ea typeface="微軟正黑體"/>
+                          <a:cs typeface="Arial"/>
+                        </a:rPr>
+                        <a:t>PTT</a:t>
+                      </a:r>
+                    </a:p>
+                  </a:txBody>
+                  <a:tcPr anchor="ctr" marL="73152" marR="54864" marT="36576" marB="27432">
+                    <a:solidFill>
+                      <a:srgbClr val="F7F9FB"/>
+                    </a:solidFill>
+                  </a:tcPr>
+                </a:tc>
+                <a:tc>
+                  <a:txBody>
+                    <a:bodyPr wrap="square" anchor="ctr"/>
+                    <a:lstStyle/>
+                    <a:p>
+                      <a:pPr>
+                        <a:lnSpc>
+                          <a:spcPct val="100000"/>
+                        </a:lnSpc>
+                        <a:spcBef>
+                          <a:spcPts val="0"/>
+                        </a:spcBef>
+                        <a:spcAft>
+                          <a:spcPts val="200"/>
+                        </a:spcAft>
+                      </a:pPr>
+                      <a:r>
+                        <a:rPr sz="1600" b="0" i="0">
+                          <a:solidFill>
+                            <a:srgbClr val="24323E"/>
+                          </a:solidFill>
+                          <a:latin typeface="Arial"/>
+                          <a:ea typeface="微軟正黑體"/>
+                          <a:cs typeface="Arial"/>
+                        </a:rPr>
+                        <a:t>14.1%</a:t>
+                      </a:r>
+                    </a:p>
+                  </a:txBody>
+                  <a:tcPr anchor="ctr" marL="73152" marR="54864" marT="36576" marB="27432">
+                    <a:solidFill>
+                      <a:srgbClr val="F7F9FB"/>
+                    </a:solidFill>
+                  </a:tcPr>
+                </a:tc>
+              </a:tr>
+              <a:tr h="491490">
+                <a:tc>
+                  <a:txBody>
+                    <a:bodyPr wrap="square" anchor="ctr"/>
+                    <a:lstStyle/>
+                    <a:p>
+                      <a:pPr>
+                        <a:lnSpc>
+                          <a:spcPct val="100000"/>
+                        </a:lnSpc>
+                        <a:spcBef>
+                          <a:spcPts val="0"/>
+                        </a:spcBef>
+                        <a:spcAft>
+                          <a:spcPts val="200"/>
+                        </a:spcAft>
+                      </a:pPr>
+                      <a:r>
+                        <a:rPr sz="1600" b="1" i="0">
+                          <a:solidFill>
+                            <a:srgbClr val="24323E"/>
+                          </a:solidFill>
+                          <a:latin typeface="Arial"/>
+                          <a:ea typeface="微軟正黑體"/>
+                          <a:cs typeface="Arial"/>
+                        </a:rPr>
+                        <a:t>Dcard</a:t>
+                      </a:r>
+                    </a:p>
+                  </a:txBody>
+                  <a:tcPr anchor="ctr" marL="73152" marR="54864" marT="36576" marB="27432">
+                    <a:solidFill>
+                      <a:srgbClr val="FFFFFF"/>
+                    </a:solidFill>
+                  </a:tcPr>
+                </a:tc>
+                <a:tc>
+                  <a:txBody>
+                    <a:bodyPr wrap="square" anchor="ctr"/>
+                    <a:lstStyle/>
+                    <a:p>
+                      <a:pPr>
+                        <a:lnSpc>
+                          <a:spcPct val="100000"/>
+                        </a:lnSpc>
+                        <a:spcBef>
+                          <a:spcPts val="0"/>
+                        </a:spcBef>
+                        <a:spcAft>
+                          <a:spcPts val="200"/>
+                        </a:spcAft>
+                      </a:pPr>
+                      <a:r>
+                        <a:rPr sz="1600" b="0" i="0">
+                          <a:solidFill>
+                            <a:srgbClr val="24323E"/>
+                          </a:solidFill>
+                          <a:latin typeface="Arial"/>
+                          <a:ea typeface="微軟正黑體"/>
+                          <a:cs typeface="Arial"/>
+                        </a:rPr>
+                        <a:t>6.8%</a:t>
+                      </a:r>
+                    </a:p>
+                  </a:txBody>
+                  <a:tcPr anchor="ctr" marL="73152" marR="54864" marT="36576" marB="27432">
+                    <a:solidFill>
+                      <a:srgbClr val="FFFFFF"/>
+                    </a:solidFill>
+                  </a:tcPr>
+                </a:tc>
+              </a:tr>
+            </a:tbl>
+          </a:graphicData>
+        </a:graphic>
+      </p:graphicFrame>
+      <p:sp>
+        <p:nvSpPr>
+          <p:cNvPr id="12" name="TextBox 11"/>
+          <p:cNvSpPr txBox="1"/>
+          <p:nvPr/>
+        </p:nvSpPr>
         <p:spPr>
           <a:xfrm>
-            <a:off x="5678424" y="987552"/>
-            <a:ext cx="6080760" cy="2850356"/>
+            <a:off x="5696712" y="3090672"/>
+            <a:ext cx="6080760" cy="1051560"/>
           </a:xfrm>
           <a:prstGeom prst="rect">
             <a:avLst/>
           </a:prstGeom>
+          <a:noFill/>
         </p:spPr>
-      </p:pic>
+        <p:txBody>
+          <a:bodyPr wrap="square" lIns="36576" rIns="36576" tIns="18288" bIns="18288" anchor="t">
+            <a:spAutoFit/>
+          </a:bodyPr>
+          <a:lstStyle/>
+          <a:p>
+            <a:pPr>
+              <a:lnSpc>
+                <a:spcPct val="100000"/>
+              </a:lnSpc>
+              <a:spcBef>
+                <a:spcPts val="0"/>
+              </a:spcBef>
+              <a:spcAft>
+                <a:spcPts val="200"/>
+              </a:spcAft>
+            </a:pPr>
+            <a:r>
+              <a:rPr sz="1400" b="0" i="0">
+                <a:solidFill>
+                  <a:srgbClr val="24323E"/>
+                </a:solidFill>
+                <a:latin typeface="Arial"/>
+                <a:ea typeface="微軟正黑體"/>
+                <a:cs typeface="Arial"/>
+              </a:rPr>
+              <a:t>χ²(2)=99.5，V=0.125。母體是論壇發言者。</a:t>
+            </a:r>
+          </a:p>
+          <a:p>
+            <a:pPr>
+              <a:lnSpc>
+                <a:spcPct val="100000"/>
+              </a:lnSpc>
+              <a:spcBef>
+                <a:spcPts val="0"/>
+              </a:spcBef>
+              <a:spcAft>
+                <a:spcPts val="200"/>
+              </a:spcAft>
+            </a:pPr>
+            <a:r>
+              <a:rPr sz="1600" b="1" i="0">
+                <a:solidFill>
+                  <a:srgbClr val="24323E"/>
+                </a:solidFill>
+                <a:latin typeface="Arial"/>
+                <a:ea typeface="微軟正黑體"/>
+                <a:cs typeface="Arial"/>
+              </a:rPr>
+              <a:t>Dcard 偏購車階段。</a:t>
+            </a:r>
+          </a:p>
+        </p:txBody>
+      </p:sp>
     </p:spTree>
   </p:cSld>
   <p:clrMapOvr>
@@ -27907,7 +29559,7 @@
                 <a:ea typeface="微軟正黑體"/>
                 <a:cs typeface="Arial"/>
               </a:rPr>
-              <a:t>來源：reports/T10_risk_persona_report.md §6（例句為去識別版）</a:t>
+              <a:t>來源：reports/T10_risk_persona_report.md §6；圖 F5。未分類處置見會議記錄_2026-09-30.md §四</a:t>
             </a:r>
           </a:p>
         </p:txBody>
@@ -28015,7 +29667,7 @@
         <p:spPr>
           <a:xfrm>
             <a:off x="420624" y="987552"/>
-            <a:ext cx="2743200" cy="2788920"/>
+            <a:ext cx="2756916" cy="1874519"/>
           </a:xfrm>
           <a:prstGeom prst="roundRect">
             <a:avLst>
@@ -28059,8 +29711,8 @@
         </p:nvSpPr>
         <p:spPr>
           <a:xfrm>
-            <a:off x="512064" y="1097280"/>
-            <a:ext cx="2560320" cy="2587751"/>
+            <a:off x="512064" y="1060704"/>
+            <a:ext cx="2592324" cy="1746503"/>
           </a:xfrm>
           <a:prstGeom prst="rect">
             <a:avLst/>
@@ -28085,7 +29737,7 @@
               </a:spcAft>
             </a:pPr>
             <a:r>
-              <a:rPr sz="1500" b="1" i="0">
+              <a:rPr sz="1400" b="1" i="0">
                 <a:solidFill>
                   <a:srgbClr val="24323E"/>
                 </a:solidFill>
@@ -28109,7 +29761,7 @@
               </a:spcAft>
             </a:pPr>
             <a:r>
-              <a:rPr sz="2600" b="1" i="0">
+              <a:rPr sz="1600" b="1" i="0">
                 <a:solidFill>
                   <a:srgbClr val="2F5D9F"/>
                 </a:solidFill>
@@ -28117,7 +29769,7 @@
                 <a:ea typeface="微軟正黑體"/>
                 <a:cs typeface="Arial"/>
               </a:rPr>
-              <a:t>511 人</a:t>
+              <a:t>511 人　39.9%</a:t>
             </a:r>
           </a:p>
           <a:p>
@@ -28133,31 +29785,7 @@
               </a:spcAft>
             </a:pPr>
             <a:r>
-              <a:rPr sz="1400" b="0" i="0">
-                <a:solidFill>
-                  <a:srgbClr val="44546A"/>
-                </a:solidFill>
-                <a:latin typeface="Arial"/>
-                <a:ea typeface="微軟正黑體"/>
-                <a:cs typeface="Arial"/>
-              </a:rPr>
-              <a:t>39.9%</a:t>
-            </a:r>
-          </a:p>
-          <a:p>
-            <a:pPr>
-              <a:lnSpc>
-                <a:spcPct val="100000"/>
-              </a:lnSpc>
-              <a:spcBef>
-                <a:spcPts val="0"/>
-              </a:spcBef>
-              <a:spcAft>
-                <a:spcPts val="200"/>
-              </a:spcAft>
-            </a:pPr>
-            <a:r>
-              <a:rPr sz="1200" b="0" i="0">
+              <a:rPr sz="1100" b="0" i="0">
                 <a:solidFill>
                   <a:srgbClr val="24323E"/>
                 </a:solidFill>
@@ -28181,7 +29809,7 @@
               </a:spcAft>
             </a:pPr>
             <a:r>
-              <a:rPr sz="1200" b="0" i="0">
+              <a:rPr sz="1100" b="0" i="0">
                 <a:solidFill>
                   <a:srgbClr val="44546A"/>
                 </a:solidFill>
@@ -28202,8 +29830,8 @@
         </p:nvSpPr>
         <p:spPr>
           <a:xfrm>
-            <a:off x="3291840" y="987552"/>
-            <a:ext cx="2743200" cy="2788920"/>
+            <a:off x="3287268" y="987552"/>
+            <a:ext cx="2756916" cy="1874519"/>
           </a:xfrm>
           <a:prstGeom prst="roundRect">
             <a:avLst>
@@ -28247,8 +29875,8 @@
         </p:nvSpPr>
         <p:spPr>
           <a:xfrm>
-            <a:off x="3383280" y="1097280"/>
-            <a:ext cx="2560320" cy="2587751"/>
+            <a:off x="3378708" y="1060704"/>
+            <a:ext cx="2592324" cy="1746503"/>
           </a:xfrm>
           <a:prstGeom prst="rect">
             <a:avLst/>
@@ -28273,7 +29901,7 @@
               </a:spcAft>
             </a:pPr>
             <a:r>
-              <a:rPr sz="1500" b="1" i="0">
+              <a:rPr sz="1400" b="1" i="0">
                 <a:solidFill>
                   <a:srgbClr val="24323E"/>
                 </a:solidFill>
@@ -28297,7 +29925,7 @@
               </a:spcAft>
             </a:pPr>
             <a:r>
-              <a:rPr sz="2600" b="1" i="0">
+              <a:rPr sz="1600" b="1" i="0">
                 <a:solidFill>
                   <a:srgbClr val="2F5D9F"/>
                 </a:solidFill>
@@ -28305,7 +29933,7 @@
                 <a:ea typeface="微軟正黑體"/>
                 <a:cs typeface="Arial"/>
               </a:rPr>
-              <a:t>247 人</a:t>
+              <a:t>247 人　19.3%</a:t>
             </a:r>
           </a:p>
           <a:p>
@@ -28321,31 +29949,7 @@
               </a:spcAft>
             </a:pPr>
             <a:r>
-              <a:rPr sz="1400" b="0" i="0">
-                <a:solidFill>
-                  <a:srgbClr val="44546A"/>
-                </a:solidFill>
-                <a:latin typeface="Arial"/>
-                <a:ea typeface="微軟正黑體"/>
-                <a:cs typeface="Arial"/>
-              </a:rPr>
-              <a:t>19.3%</a:t>
-            </a:r>
-          </a:p>
-          <a:p>
-            <a:pPr>
-              <a:lnSpc>
-                <a:spcPct val="100000"/>
-              </a:lnSpc>
-              <a:spcBef>
-                <a:spcPts val="0"/>
-              </a:spcBef>
-              <a:spcAft>
-                <a:spcPts val="200"/>
-              </a:spcAft>
-            </a:pPr>
-            <a:r>
-              <a:rPr sz="1200" b="0" i="0">
+              <a:rPr sz="1100" b="0" i="0">
                 <a:solidFill>
                   <a:srgbClr val="24323E"/>
                 </a:solidFill>
@@ -28369,7 +29973,7 @@
               </a:spcAft>
             </a:pPr>
             <a:r>
-              <a:rPr sz="1200" b="0" i="0">
+              <a:rPr sz="1100" b="0" i="0">
                 <a:solidFill>
                   <a:srgbClr val="44546A"/>
                 </a:solidFill>
@@ -28390,8 +29994,8 @@
         </p:nvSpPr>
         <p:spPr>
           <a:xfrm>
-            <a:off x="6163056" y="987552"/>
-            <a:ext cx="2743200" cy="2788920"/>
+            <a:off x="420624" y="2953512"/>
+            <a:ext cx="2756916" cy="1874519"/>
           </a:xfrm>
           <a:prstGeom prst="roundRect">
             <a:avLst>
@@ -28435,8 +30039,8 @@
         </p:nvSpPr>
         <p:spPr>
           <a:xfrm>
-            <a:off x="6254496" y="1097280"/>
-            <a:ext cx="2560320" cy="2587751"/>
+            <a:off x="512064" y="3026664"/>
+            <a:ext cx="2592324" cy="1746503"/>
           </a:xfrm>
           <a:prstGeom prst="rect">
             <a:avLst/>
@@ -28461,7 +30065,7 @@
               </a:spcAft>
             </a:pPr>
             <a:r>
-              <a:rPr sz="1500" b="1" i="0">
+              <a:rPr sz="1400" b="1" i="0">
                 <a:solidFill>
                   <a:srgbClr val="24323E"/>
                 </a:solidFill>
@@ -28485,7 +30089,7 @@
               </a:spcAft>
             </a:pPr>
             <a:r>
-              <a:rPr sz="2600" b="1" i="0">
+              <a:rPr sz="1600" b="1" i="0">
                 <a:solidFill>
                   <a:srgbClr val="2F5D9F"/>
                 </a:solidFill>
@@ -28493,7 +30097,7 @@
                 <a:ea typeface="微軟正黑體"/>
                 <a:cs typeface="Arial"/>
               </a:rPr>
-              <a:t>195 人</a:t>
+              <a:t>195 人　15.2%</a:t>
             </a:r>
           </a:p>
           <a:p>
@@ -28509,31 +30113,7 @@
               </a:spcAft>
             </a:pPr>
             <a:r>
-              <a:rPr sz="1400" b="0" i="0">
-                <a:solidFill>
-                  <a:srgbClr val="44546A"/>
-                </a:solidFill>
-                <a:latin typeface="Arial"/>
-                <a:ea typeface="微軟正黑體"/>
-                <a:cs typeface="Arial"/>
-              </a:rPr>
-              <a:t>15.2%</a:t>
-            </a:r>
-          </a:p>
-          <a:p>
-            <a:pPr>
-              <a:lnSpc>
-                <a:spcPct val="100000"/>
-              </a:lnSpc>
-              <a:spcBef>
-                <a:spcPts val="0"/>
-              </a:spcBef>
-              <a:spcAft>
-                <a:spcPts val="200"/>
-              </a:spcAft>
-            </a:pPr>
-            <a:r>
-              <a:rPr sz="1200" b="0" i="0">
+              <a:rPr sz="1100" b="0" i="0">
                 <a:solidFill>
                   <a:srgbClr val="24323E"/>
                 </a:solidFill>
@@ -28557,7 +30137,7 @@
               </a:spcAft>
             </a:pPr>
             <a:r>
-              <a:rPr sz="1200" b="0" i="0">
+              <a:rPr sz="1100" b="0" i="0">
                 <a:solidFill>
                   <a:srgbClr val="44546A"/>
                 </a:solidFill>
@@ -28578,8 +30158,8 @@
         </p:nvSpPr>
         <p:spPr>
           <a:xfrm>
-            <a:off x="9034272" y="987552"/>
-            <a:ext cx="2743200" cy="2788920"/>
+            <a:off x="3287268" y="2953512"/>
+            <a:ext cx="2756916" cy="1874519"/>
           </a:xfrm>
           <a:prstGeom prst="roundRect">
             <a:avLst>
@@ -28623,8 +30203,8 @@
         </p:nvSpPr>
         <p:spPr>
           <a:xfrm>
-            <a:off x="9125712" y="1097280"/>
-            <a:ext cx="2560320" cy="2587751"/>
+            <a:off x="3378708" y="3026664"/>
+            <a:ext cx="2592324" cy="1746503"/>
           </a:xfrm>
           <a:prstGeom prst="rect">
             <a:avLst/>
@@ -28649,7 +30229,7 @@
               </a:spcAft>
             </a:pPr>
             <a:r>
-              <a:rPr sz="1500" b="1" i="0">
+              <a:rPr sz="1400" b="1" i="0">
                 <a:solidFill>
                   <a:srgbClr val="24323E"/>
                 </a:solidFill>
@@ -28673,7 +30253,7 @@
               </a:spcAft>
             </a:pPr>
             <a:r>
-              <a:rPr sz="2600" b="1" i="0">
+              <a:rPr sz="1600" b="1" i="0">
                 <a:solidFill>
                   <a:srgbClr val="2F5D9F"/>
                 </a:solidFill>
@@ -28681,7 +30261,7 @@
                 <a:ea typeface="微軟正黑體"/>
                 <a:cs typeface="Arial"/>
               </a:rPr>
-              <a:t>128 人</a:t>
+              <a:t>128 人　10.0%</a:t>
             </a:r>
           </a:p>
           <a:p>
@@ -28697,31 +30277,7 @@
               </a:spcAft>
             </a:pPr>
             <a:r>
-              <a:rPr sz="1400" b="0" i="0">
-                <a:solidFill>
-                  <a:srgbClr val="44546A"/>
-                </a:solidFill>
-                <a:latin typeface="Arial"/>
-                <a:ea typeface="微軟正黑體"/>
-                <a:cs typeface="Arial"/>
-              </a:rPr>
-              <a:t>10.0%</a:t>
-            </a:r>
-          </a:p>
-          <a:p>
-            <a:pPr>
-              <a:lnSpc>
-                <a:spcPct val="100000"/>
-              </a:lnSpc>
-              <a:spcBef>
-                <a:spcPts val="0"/>
-              </a:spcBef>
-              <a:spcAft>
-                <a:spcPts val="200"/>
-              </a:spcAft>
-            </a:pPr>
-            <a:r>
-              <a:rPr sz="1200" b="0" i="0">
+              <a:rPr sz="1100" b="0" i="0">
                 <a:solidFill>
                   <a:srgbClr val="24323E"/>
                 </a:solidFill>
@@ -28745,7 +30301,7 @@
               </a:spcAft>
             </a:pPr>
             <a:r>
-              <a:rPr sz="1200" b="0" i="0">
+              <a:rPr sz="1100" b="0" i="0">
                 <a:solidFill>
                   <a:srgbClr val="44546A"/>
                 </a:solidFill>
@@ -28758,16 +30314,40 @@
           </a:p>
         </p:txBody>
       </p:sp>
+      <p:pic>
+        <p:nvPicPr>
+          <p:cNvPr id="14" name="Picture 13" descr="F5.png"/>
+          <p:cNvPicPr>
+            <a:picLocks noChangeAspect="1"/>
+          </p:cNvPicPr>
+          <p:nvPr/>
+        </p:nvPicPr>
+        <p:blipFill>
+          <a:blip r:embed="rId2"/>
+          <a:stretch>
+            <a:fillRect/>
+          </a:stretch>
+        </p:blipFill>
+        <p:spPr>
+          <a:xfrm>
+            <a:off x="6190488" y="987552"/>
+            <a:ext cx="5586983" cy="3142678"/>
+          </a:xfrm>
+          <a:prstGeom prst="rect">
+            <a:avLst/>
+          </a:prstGeom>
+        </p:spPr>
+      </p:pic>
       <p:sp>
         <p:nvSpPr>
-          <p:cNvPr id="14" name="TextBox 13"/>
+          <p:cNvPr id="15" name="TextBox 14"/>
           <p:cNvSpPr txBox="1"/>
           <p:nvPr/>
         </p:nvSpPr>
         <p:spPr>
           <a:xfrm>
-            <a:off x="420624" y="3849624"/>
-            <a:ext cx="11356848" cy="502920"/>
+            <a:off x="420624" y="4882895"/>
+            <a:ext cx="11356848" cy="640080"/>
           </a:xfrm>
           <a:prstGeom prst="rect">
             <a:avLst/>
@@ -28792,7 +30372,7 @@
               </a:spcAft>
             </a:pPr>
             <a:r>
-              <a:rPr sz="1200" b="0" i="0">
+              <a:rPr sz="1300" b="0" i="0">
                 <a:solidFill>
                   <a:srgbClr val="5C6B7A"/>
                 </a:solidFill>
@@ -28800,7 +30380,7 @@
                 <a:ea typeface="微軟正黑體"/>
                 <a:cs typeface="Arial"/>
               </a:rPr>
-              <a:t>規則指派，分母是高／中風險 1,280 人。另有未分類 199 人（15.5%）。分群只獨立支持靜默出走者（78% 在同一群）。</a:t>
+              <a:t>規則指派，分母是高／中風險 1,280 人。未分類 199 人（15.5%）保留為觀察名單，不投遞。分群只獨立支持靜默出走者。</a:t>
             </a:r>
           </a:p>
         </p:txBody>

--- a/deck/初賽簡報_v0.pptx
+++ b/deck/初賽簡報_v0.pptx
@@ -27,6 +27,7 @@
     <p:sldId id="272" r:id="rId23"/>
     <p:sldId id="273" r:id="rId24"/>
     <p:sldId id="274" r:id="rId25"/>
+    <p:sldId id="275" r:id="rId26"/>
   </p:sldIdLst>
   <p:sldSz cy="6858000" cx="12192000"/>
   <p:notesSz cx="6858000" cy="9144000"/>
@@ -1442,6 +1443,64 @@
             </a:pathLst>
           </a:custGeom>
         </p:spPr>
+      </p:sp>
+    </p:spTree>
+  </p:cSld>
+  <p:clrMapOvr>
+    <a:masterClrMapping/>
+  </p:clrMapOvr>
+</p:notes>
+</file>
+
+<file path=ppt/notesSlides/notesSlide20.xml><?xml version="1.0" encoding="utf-8"?>
+<p:notes xmlns:a="http://schemas.openxmlformats.org/drawingml/2006/main" xmlns:p="http://schemas.openxmlformats.org/presentationml/2006/main" xmlns:r="http://schemas.openxmlformats.org/officeDocument/2006/relationships">
+  <p:cSld>
+    <p:spTree>
+      <p:nvGrpSpPr>
+        <p:cNvPr id="1" name=""/>
+        <p:cNvGrpSpPr/>
+        <p:nvPr/>
+      </p:nvGrpSpPr>
+      <p:grpSpPr>
+        <a:xfrm>
+          <a:off x="0" y="0"/>
+          <a:ext cx="0" cy="0"/>
+          <a:chOff x="0" y="0"/>
+          <a:chExt cx="0" cy="0"/>
+        </a:xfrm>
+      </p:grpSpPr>
+      <p:sp>
+        <p:nvSpPr>
+          <p:cNvPr id="2" name="Slide Image Placeholder 1"/>
+          <p:cNvSpPr>
+            <a:spLocks noGrp="1"/>
+          </p:cNvSpPr>
+          <p:nvPr>
+            <p:ph type="sldImg" idx="2"/>
+          </p:nvPr>
+        </p:nvSpPr>
+        <p:spPr/>
+      </p:sp>
+      <p:sp>
+        <p:nvSpPr>
+          <p:cNvPr id="3" name="Notes Placeholder 2"/>
+          <p:cNvSpPr>
+            <a:spLocks noGrp="1"/>
+          </p:cNvSpPr>
+          <p:nvPr>
+            <p:ph type="body" idx="1"/>
+          </p:nvPr>
+        </p:nvSpPr>
+        <p:spPr/>
+        <p:txBody>
+          <a:bodyPr/>
+          <a:lstStyle/>
+          <a:p>
+            <a:r>
+              <a:t>附錄待料通知兩則：進度不承諾到貨日，代步車只照知識庫條件。</a:t>
+            </a:r>
+          </a:p>
+        </p:txBody>
       </p:sp>
     </p:spTree>
   </p:cSld>
@@ -13979,7 +14038,7 @@
                 <a:ea typeface="微軟正黑體"/>
                 <a:cs typeface="Arial"/>
               </a:rPr>
-              <a:t>同時標九個面向、替代選項，和車主特徵（車型、是否過保）。</a:t>
+              <a:t>先寬鬆抓可能流失的句子。</a:t>
             </a:r>
           </a:p>
           <a:p>
@@ -14003,7 +14062,31 @@
                 <a:ea typeface="微軟正黑體"/>
                 <a:cs typeface="Arial"/>
               </a:rPr>
-              <a:t>流失原因裡標成「其他」的 396 句再細分；真正沒有原因的殘餘剩 4 句。</a:t>
+              <a:t>再帶上上下文複核。</a:t>
+            </a:r>
+          </a:p>
+          <a:p>
+            <a:pPr>
+              <a:lnSpc>
+                <a:spcPct val="100000"/>
+              </a:lnSpc>
+              <a:spcBef>
+                <a:spcPts val="0"/>
+              </a:spcBef>
+              <a:spcAft>
+                <a:spcPts val="200"/>
+              </a:spcAft>
+            </a:pPr>
+            <a:r>
+              <a:rPr sz="1600" b="0" i="0">
+                <a:solidFill>
+                  <a:srgbClr val="24323E"/>
+                </a:solidFill>
+                <a:latin typeface="Arial"/>
+                <a:ea typeface="微軟正黑體"/>
+                <a:cs typeface="Arial"/>
+              </a:rPr>
+              <a:t>九面向已全量標完；其他 396 句，殘餘剩 4 句。</a:t>
             </a:r>
           </a:p>
         </p:txBody>
@@ -15188,7 +15271,7 @@
                 <a:ea typeface="微軟正黑體"/>
                 <a:cs typeface="Arial"/>
               </a:rPr>
-              <a:t>爬蟲→清洗去重→切句→關鍵詞篩選得 21,183 句；LLM-as-labeler 兩段式：Haiku 初篩、Sonnet／GPT 帶上下文複核</a:t>
+              <a:t>篩出 21,183 句售後語料。先寬鬆標，再帶上下文複核。</a:t>
             </a:r>
           </a:p>
         </p:txBody>
@@ -15304,7 +15387,7 @@
                 <a:ea typeface="微軟正黑體"/>
                 <a:cs typeface="Arial"/>
               </a:rPr>
-              <a:t>GroupSplit 按 doc_id：600 句 held-out 測試集整篇排除；驗證 1,096、訓練池 9,431</a:t>
+              <a:t>GroupSplit 整篇排除測試 600 句。驗證 1,096 句，訓練池 9,431 句。</a:t>
             </a:r>
           </a:p>
         </p:txBody>
@@ -15420,7 +15503,7 @@
                 <a:ea typeface="微軟正黑體"/>
                 <a:cs typeface="Arial"/>
               </a:rPr>
-              <a:t>多類別→二元候選：流失四級拆成四個 yes/no 題，prefill-only 只取下一 token 機率</a:t>
+              <a:t>流失四級拆成四個是非題。Prefill-only 只取下一詞機率。</a:t>
             </a:r>
           </a:p>
         </p:txBody>
@@ -15536,7 +15619,7 @@
                 <a:ea typeface="微軟正黑體"/>
                 <a:cs typeface="Arial"/>
               </a:rPr>
-              <a:t>Qwen3-4B NF4 4-bit QLoRA（r=16）；類別不平衡用過採樣至四成；2 epoch、8 GB VRAM、5 小時</a:t>
+              <a:t>Qwen3-4B 用 QLoRA r=16。過採樣到四成；2 epoch、8 GB、5 小時。</a:t>
             </a:r>
           </a:p>
         </p:txBody>
@@ -15652,7 +15735,7 @@
                 <a:ea typeface="微軟正黑體"/>
                 <a:cs typeface="Arial"/>
               </a:rPr>
-              <a:t>P／R／F1／Cohen's κ；五段 reliability bins；人工金標 300 句：隨機層 F1 0.82、κ 0.81</a:t>
+              <a:t>金標 300 句：F1 0.82、κ 0.81。另看 P、R 與五段校準。</a:t>
             </a:r>
           </a:p>
         </p:txBody>
@@ -15691,7 +15774,7 @@
               </a:spcAft>
             </a:pPr>
             <a:r>
-              <a:rPr sz="1000" b="0" i="0">
+              <a:rPr sz="1100" b="0" i="0">
                 <a:solidFill>
                   <a:srgbClr val="5C6B7A"/>
                 </a:solidFill>
@@ -15699,7 +15782,7 @@
                 <a:ea typeface="微軟正黑體"/>
                 <a:cs typeface="Arial"/>
               </a:rPr>
-              <a:t>做法沿用 jev 的 System-One 思路（LLM2Jev 開源框架，prefill-only 只出機率），非 jev 官方模型；機率校準以測試集五段分箱事後驗證（最高信心桶約七成為真正例），尚未達官方宣稱水準。</a:t>
+              <a:t>沿用 jev（LLM2Jev），非官方模型。只出機率。最高桶約七成，未達宣稱。</a:t>
             </a:r>
           </a:p>
         </p:txBody>
@@ -16021,7 +16104,7 @@
                 <a:ea typeface="微軟正黑體"/>
                 <a:cs typeface="Arial"/>
               </a:rPr>
-              <a:t>別隊若只看客訴，看不到這群沒抱怨就離開的人。</a:t>
+              <a:t>只看客訴，看不到沒抱怨就走的人。</a:t>
             </a:r>
           </a:p>
         </p:txBody>
@@ -16137,7 +16220,7 @@
                 <a:ea typeface="微軟正黑體"/>
                 <a:cs typeface="Arial"/>
               </a:rPr>
-              <a:t>輸出各等級機率，並標出命中的規則，不是一顆黑箱分數。</a:t>
+              <a:t>輸出各級機率，並標出命中規則。不是黑箱分數。</a:t>
             </a:r>
           </a:p>
         </p:txBody>
@@ -16253,7 +16336,7 @@
                 <a:ea typeface="微軟正黑體"/>
                 <a:cs typeface="Arial"/>
               </a:rPr>
-              <a:t>CRM 資料不能出門。8 GB 顯卡可訓可推，零 API 費。</a:t>
+              <a:t>CRM 資料不能出門。8 GB 可訓可推，零 API 費。</a:t>
             </a:r>
           </a:p>
         </p:txBody>
@@ -16369,7 +16452,7 @@
                 <a:ea typeface="微軟正黑體"/>
                 <a:cs typeface="Arial"/>
               </a:rPr>
-              <a:t>每個比率有檢定或區間，也能回到去識別原句。</a:t>
+              <a:t>每個比率有檢定或區間。也能回到去識別原句。</a:t>
             </a:r>
           </a:p>
         </p:txBody>
@@ -16590,7 +16673,7 @@
         </p:nvGraphicFramePr>
         <p:xfrm>
           <a:off x="420624" y="987552"/>
-          <a:ext cx="11356848" cy="4160520"/>
+          <a:ext cx="11356848" cy="3977639"/>
         </p:xfrm>
         <a:graphic>
           <a:graphicData uri="http://schemas.openxmlformats.org/drawingml/2006/table">
@@ -16604,7 +16687,7 @@
                 <a:gridCol w="3291840"/>
                 <a:gridCol w="3291840"/>
               </a:tblGrid>
-              <a:tr h="832104">
+              <a:tr h="795527">
                 <a:tc>
                   <a:txBody>
                     <a:bodyPr wrap="square" anchor="ctr"/>
@@ -16746,7 +16829,7 @@
                   </a:tcPr>
                 </a:tc>
               </a:tr>
-              <a:tr h="832104">
+              <a:tr h="795527">
                 <a:tc>
                   <a:txBody>
                     <a:bodyPr wrap="square" anchor="ctr"/>
@@ -16831,7 +16914,7 @@
                           <a:ea typeface="微軟正黑體"/>
                           <a:cs typeface="Arial"/>
                         </a:rPr>
-                        <a:t>您好，您的愛車保固即將屆滿，新車基本保證為自交車日起4年或120,000公里，以…</a:t>
+                        <a:t>您好，提醒您，愛車保固即將屆滿。新車基本保證為自交車日起4年或120,000公里…</a:t>
                       </a:r>
                     </a:p>
                   </a:txBody>
@@ -16890,7 +16973,7 @@
                           <a:ea typeface="微軟正黑體"/>
                           <a:cs typeface="Arial"/>
                         </a:rPr>
-                        <a:t>一般使用建議每六個月回廠保養；若半年超過一萬公里，則以每一萬公里為週期。您可依實…</a:t>
+                        <a:t>您好，提醒您留意愛車保養週期：一般使用建議每六個月回廠；若半年超過一萬公里，則建…</a:t>
                       </a:r>
                     </a:p>
                   </a:txBody>
@@ -16949,7 +17032,7 @@
                           <a:ea typeface="微軟正黑體"/>
                           <a:cs typeface="Arial"/>
                         </a:rPr>
-                        <a:t>您好，我是Lexus服務廠專員。您上次有未同意的估價項目，因此致電說明；是否回廠…</a:t>
+                        <a:t>您好，我是服務廠專員。想提醒您，上次未同意的估價項目仍由您決定是否處理。若自費更…</a:t>
                       </a:r>
                     </a:p>
                   </a:txBody>
@@ -16960,7 +17043,7 @@
                   </a:tcPr>
                 </a:tc>
               </a:tr>
-              <a:tr h="832104">
+              <a:tr h="795527">
                 <a:tc>
                   <a:txBody>
                     <a:bodyPr wrap="square" anchor="ctr"/>
@@ -17045,7 +17128,7 @@
                           <a:ea typeface="微軟正黑體"/>
                           <a:cs typeface="Arial"/>
                         </a:rPr>
-                        <a:t>您的保固即將屆滿，目前仍在保固窗口內，可先核對新車基本保證範圍；準時定保與否會影…</a:t>
+                        <a:t>您好，提醒您，愛車的新車保固即將屆滿。保固期內，於正常使用情況下，因材質或製造不…</a:t>
                       </a:r>
                     </a:p>
                   </a:txBody>
@@ -17104,7 +17187,7 @@
                           <a:ea typeface="微軟正黑體"/>
                           <a:cs typeface="Arial"/>
                         </a:rPr>
-                        <a:t>Lexus尊榮安檢提供25項原廠標準檢查，全年免費。一般使用建議每半年回廠保養及…</a:t>
+                        <a:t>您好，提醒您，Lexus尊榮安檢提供25項原廠標準檢查，全年免費。一般使用建議每…</a:t>
                       </a:r>
                     </a:p>
                   </a:txBody>
@@ -17163,7 +17246,7 @@
                           <a:ea typeface="微軟正黑體"/>
                           <a:cs typeface="Arial"/>
                         </a:rPr>
-                        <a:t>針對您上次未同意的項目，是否處理仍由您決定。若想再確認車況，可預約回廠接受全年免…</a:t>
+                        <a:t>您好，上次未處理的項目是否進行，仍由您決定；若想再確認車況，可預約回廠安排全年免…</a:t>
                       </a:r>
                     </a:p>
                   </a:txBody>
@@ -17174,7 +17257,7 @@
                   </a:tcPr>
                 </a:tc>
               </a:tr>
-              <a:tr h="832104">
+              <a:tr h="795527">
                 <a:tc>
                   <a:txBody>
                     <a:bodyPr wrap="square" anchor="ctr"/>
@@ -17259,7 +17342,7 @@
                           <a:ea typeface="微軟正黑體"/>
                           <a:cs typeface="Arial"/>
                         </a:rPr>
-                        <a:t>保固即將屆滿，這則官方資訊可轉述給車友：新車基本保證為交車日起4年或120,00…</a:t>
+                        <a:t>您好，提醒您，愛車保固即將屆滿。新車基本保證為自交車日起4年或120,000公里…</a:t>
                       </a:r>
                     </a:p>
                   </a:txBody>
@@ -17318,7 +17401,7 @@
                           <a:ea typeface="微軟正黑體"/>
                           <a:cs typeface="Arial"/>
                         </a:rPr>
-                        <a:t>這份說明可供您轉傳：一般使用建議每半年定期保養；若半年超過一萬公里，建議每一萬公…</a:t>
+                        <a:t>您好，提醒您可依使用頻率安排愛車保養：一般使用建議每六個月回廠；若半年超過一萬公…</a:t>
                       </a:r>
                     </a:p>
                   </a:txBody>
@@ -17377,7 +17460,7 @@
                           <a:ea typeface="微軟正黑體"/>
                           <a:cs typeface="Arial"/>
                         </a:rPr>
-                        <a:t>您好，提供一則可安心轉述的官方資訊：自費於Lexus服務廠更換的正廠零件，除消耗…</a:t>
+                        <a:t>您好，官方資訊可轉述給車友：自費於Lexus服務廠更換的正廠零件（消耗性零件除外…</a:t>
                       </a:r>
                     </a:p>
                   </a:txBody>
@@ -17388,7 +17471,7 @@
                   </a:tcPr>
                 </a:tc>
               </a:tr>
-              <a:tr h="832104">
+              <a:tr h="795531">
                 <a:tc>
                   <a:txBody>
                     <a:bodyPr wrap="square" anchor="ctr"/>
@@ -17473,7 +17556,7 @@
                           <a:ea typeface="微軟正黑體"/>
                           <a:cs typeface="Arial"/>
                         </a:rPr>
-                        <a:t>您的愛車保固即將屆滿，仍可核對自交車日起4年或行駛120,000公里的新車基本保…</a:t>
+                        <a:t>您好，提醒您，愛車保固即將屆滿。新車基本保證為自交車日起4年或行駛120,000…</a:t>
                       </a:r>
                     </a:p>
                   </a:txBody>
@@ -17532,7 +17615,7 @@
                           <a:ea typeface="微軟正黑體"/>
                           <a:cs typeface="Arial"/>
                         </a:rPr>
-                        <a:t>若距上次保養已有一段時間，可依一般使用每半年或每一萬公里的週期，視用車狀況安排回…</a:t>
+                        <a:t>您好，提醒您，可依愛車使用情況安排回廠：一般使用建議每半年實施定期保養；若半年超…</a:t>
                       </a:r>
                     </a:p>
                   </a:txBody>
@@ -17591,7 +17674,7 @@
                           <a:ea typeface="微軟正黑體"/>
                           <a:cs typeface="Arial"/>
                         </a:rPr>
-                        <a:t>若您想安排回廠，可透過官網或App預約，於回廠前1天以上選擇合適時段；預約保留2…</a:t>
+                        <a:t>您好，若您想回廠，自費更換的正廠零件（消耗性零件除外），保證自更換日起2年或行駛…</a:t>
                       </a:r>
                     </a:p>
                   </a:txBody>
@@ -17614,8 +17697,8 @@
         </p:nvSpPr>
         <p:spPr>
           <a:xfrm>
-            <a:off x="420624" y="5266944"/>
-            <a:ext cx="11356848" cy="658368"/>
+            <a:off x="420624" y="5029200"/>
+            <a:ext cx="11356848" cy="868680"/>
           </a:xfrm>
           <a:prstGeom prst="rect">
             <a:avLst/>
@@ -17673,6 +17756,30 @@
                 <a:cs typeface="Arial"/>
               </a:rPr>
               <a:t>完整文字、引用條目與查核見附錄 knowledge/generated_examples.md。</a:t>
+            </a:r>
+          </a:p>
+          <a:p>
+            <a:pPr>
+              <a:lnSpc>
+                <a:spcPct val="100000"/>
+              </a:lnSpc>
+              <a:spcBef>
+                <a:spcPts val="0"/>
+              </a:spcBef>
+              <a:spcAft>
+                <a:spcPts val="200"/>
+              </a:spcAft>
+            </a:pPr>
+            <a:r>
+              <a:rPr sz="1200" b="0" i="0">
+                <a:solidFill>
+                  <a:srgbClr val="5C6B7A"/>
+                </a:solidFill>
+                <a:latin typeface="Arial"/>
+                <a:ea typeface="微軟正黑體"/>
+                <a:cs typeface="Arial"/>
+              </a:rPr>
+              <a:t>零件等料（R5）逾 7 天主動通知，範例見附錄 A3</a:t>
             </a:r>
           </a:p>
         </p:txBody>
@@ -25726,6 +25833,540 @@
 </p:sld>
 </file>
 
+<file path=ppt/slides/slide20.xml><?xml version="1.0" encoding="utf-8"?>
+<p:sld xmlns:a="http://schemas.openxmlformats.org/drawingml/2006/main" xmlns:p="http://schemas.openxmlformats.org/presentationml/2006/main" xmlns:r="http://schemas.openxmlformats.org/officeDocument/2006/relationships">
+  <p:cSld>
+    <p:spTree>
+      <p:nvGrpSpPr>
+        <p:cNvPr id="1" name=""/>
+        <p:cNvGrpSpPr/>
+        <p:nvPr/>
+      </p:nvGrpSpPr>
+      <p:grpSpPr/>
+      <p:sp>
+        <p:nvSpPr>
+          <p:cNvPr id="2" name="TextBox 1"/>
+          <p:cNvSpPr txBox="1"/>
+          <p:nvPr/>
+        </p:nvSpPr>
+        <p:spPr>
+          <a:xfrm>
+            <a:off x="420624" y="91440"/>
+            <a:ext cx="8412480" cy="237744"/>
+          </a:xfrm>
+          <a:prstGeom prst="rect">
+            <a:avLst/>
+          </a:prstGeom>
+          <a:noFill/>
+        </p:spPr>
+        <p:txBody>
+          <a:bodyPr wrap="square" lIns="0" rIns="0" tIns="18288" bIns="18288" anchor="t">
+            <a:spAutoFit/>
+          </a:bodyPr>
+          <a:lstStyle/>
+          <a:p>
+            <a:pPr>
+              <a:lnSpc>
+                <a:spcPct val="100000"/>
+              </a:lnSpc>
+              <a:spcBef>
+                <a:spcPts val="0"/>
+              </a:spcBef>
+              <a:spcAft>
+                <a:spcPts val="200"/>
+              </a:spcAft>
+            </a:pPr>
+            <a:r>
+              <a:rPr sz="1200" b="0" i="0">
+                <a:solidFill>
+                  <a:srgbClr val="44546A"/>
+                </a:solidFill>
+                <a:latin typeface="Arial"/>
+                <a:ea typeface="微軟正黑體"/>
+                <a:cs typeface="Arial"/>
+              </a:rPr>
+              <a:t>附錄 待料通知話術（不計入 15 頁）</a:t>
+            </a:r>
+          </a:p>
+        </p:txBody>
+      </p:sp>
+      <p:sp>
+        <p:nvSpPr>
+          <p:cNvPr id="3" name="TextBox 2"/>
+          <p:cNvSpPr txBox="1"/>
+          <p:nvPr/>
+        </p:nvSpPr>
+        <p:spPr>
+          <a:xfrm>
+            <a:off x="420624" y="6547104"/>
+            <a:ext cx="9418320" cy="219456"/>
+          </a:xfrm>
+          <a:prstGeom prst="rect">
+            <a:avLst/>
+          </a:prstGeom>
+          <a:noFill/>
+        </p:spPr>
+        <p:txBody>
+          <a:bodyPr wrap="square" lIns="0" rIns="0" tIns="18288" bIns="18288" anchor="t">
+            <a:spAutoFit/>
+          </a:bodyPr>
+          <a:lstStyle/>
+          <a:p>
+            <a:pPr>
+              <a:lnSpc>
+                <a:spcPct val="100000"/>
+              </a:lnSpc>
+              <a:spcBef>
+                <a:spcPts val="0"/>
+              </a:spcBef>
+              <a:spcAft>
+                <a:spcPts val="200"/>
+              </a:spcAft>
+            </a:pPr>
+            <a:r>
+              <a:rPr sz="1000" b="0" i="0">
+                <a:solidFill>
+                  <a:srgbClr val="5C6B7A"/>
+                </a:solidFill>
+                <a:latin typeface="Arial"/>
+                <a:ea typeface="微軟正黑體"/>
+                <a:cs typeface="Arial"/>
+              </a:rPr>
+              <a:t>來源：knowledge/generated_examples.md、reports/T14_generation_report.md</a:t>
+            </a:r>
+          </a:p>
+        </p:txBody>
+      </p:sp>
+      <p:sp>
+        <p:nvSpPr>
+          <p:cNvPr id="4" name="TextBox 3"/>
+          <p:cNvSpPr txBox="1"/>
+          <p:nvPr/>
+        </p:nvSpPr>
+        <p:spPr>
+          <a:xfrm>
+            <a:off x="10378440" y="6547104"/>
+            <a:ext cx="1389888" cy="219456"/>
+          </a:xfrm>
+          <a:prstGeom prst="rect">
+            <a:avLst/>
+          </a:prstGeom>
+          <a:noFill/>
+        </p:spPr>
+        <p:txBody>
+          <a:bodyPr wrap="square" lIns="0" rIns="0" tIns="18288" bIns="18288" anchor="t">
+            <a:spAutoFit/>
+          </a:bodyPr>
+          <a:lstStyle/>
+          <a:p>
+            <a:pPr algn="r">
+              <a:lnSpc>
+                <a:spcPct val="100000"/>
+              </a:lnSpc>
+              <a:spcBef>
+                <a:spcPts val="0"/>
+              </a:spcBef>
+              <a:spcAft>
+                <a:spcPts val="200"/>
+              </a:spcAft>
+            </a:pPr>
+            <a:r>
+              <a:rPr sz="1200" b="0" i="0">
+                <a:solidFill>
+                  <a:srgbClr val="44546A"/>
+                </a:solidFill>
+                <a:latin typeface="Arial"/>
+                <a:ea typeface="微軟正黑體"/>
+                <a:cs typeface="Arial"/>
+              </a:rPr>
+              <a:t>20</a:t>
+            </a:r>
+          </a:p>
+        </p:txBody>
+      </p:sp>
+      <p:sp>
+        <p:nvSpPr>
+          <p:cNvPr id="5" name="TextBox 4"/>
+          <p:cNvSpPr txBox="1"/>
+          <p:nvPr/>
+        </p:nvSpPr>
+        <p:spPr>
+          <a:xfrm>
+            <a:off x="420624" y="329184"/>
+            <a:ext cx="11356848" cy="566928"/>
+          </a:xfrm>
+          <a:prstGeom prst="rect">
+            <a:avLst/>
+          </a:prstGeom>
+          <a:noFill/>
+        </p:spPr>
+        <p:txBody>
+          <a:bodyPr wrap="square" lIns="0" rIns="0" tIns="18288" bIns="18288" anchor="t">
+            <a:spAutoFit/>
+          </a:bodyPr>
+          <a:lstStyle/>
+          <a:p>
+            <a:pPr>
+              <a:lnSpc>
+                <a:spcPct val="100000"/>
+              </a:lnSpc>
+              <a:spcBef>
+                <a:spcPts val="0"/>
+              </a:spcBef>
+              <a:spcAft>
+                <a:spcPts val="200"/>
+              </a:spcAft>
+            </a:pPr>
+            <a:r>
+              <a:rPr sz="2400" b="1" i="0">
+                <a:solidFill>
+                  <a:srgbClr val="24323E"/>
+                </a:solidFill>
+                <a:latin typeface="Arial"/>
+                <a:ea typeface="微軟正黑體"/>
+                <a:cs typeface="Arial"/>
+              </a:rPr>
+              <a:t>待料逾 7 天就主動通知，話術不寫到貨日</a:t>
+            </a:r>
+          </a:p>
+        </p:txBody>
+      </p:sp>
+      <p:sp>
+        <p:nvSpPr>
+          <p:cNvPr id="6" name="Rounded Rectangle 5"/>
+          <p:cNvSpPr/>
+          <p:nvPr/>
+        </p:nvSpPr>
+        <p:spPr>
+          <a:xfrm>
+            <a:off x="420624" y="987552"/>
+            <a:ext cx="11356848" cy="2331720"/>
+          </a:xfrm>
+          <a:prstGeom prst="roundRect">
+            <a:avLst>
+              <a:gd name="adj" fmla="val 8000"/>
+            </a:avLst>
+          </a:prstGeom>
+          <a:solidFill>
+            <a:srgbClr val="F4F7FB"/>
+          </a:solidFill>
+          <a:ln>
+            <a:noFill/>
+          </a:ln>
+        </p:spPr>
+        <p:style>
+          <a:lnRef idx="1">
+            <a:schemeClr val="accent1"/>
+          </a:lnRef>
+          <a:fillRef idx="3">
+            <a:schemeClr val="accent1"/>
+          </a:fillRef>
+          <a:effectRef idx="2">
+            <a:schemeClr val="accent1"/>
+          </a:effectRef>
+          <a:fontRef idx="minor">
+            <a:schemeClr val="lt1"/>
+          </a:fontRef>
+        </p:style>
+        <p:txBody>
+          <a:bodyPr rtlCol="0" anchor="ctr"/>
+          <a:lstStyle/>
+          <a:p>
+            <a:pPr algn="ctr"/>
+          </a:p>
+        </p:txBody>
+      </p:sp>
+      <p:sp>
+        <p:nvSpPr>
+          <p:cNvPr id="7" name="TextBox 6"/>
+          <p:cNvSpPr txBox="1"/>
+          <p:nvPr/>
+        </p:nvSpPr>
+        <p:spPr>
+          <a:xfrm>
+            <a:off x="566928" y="1060704"/>
+            <a:ext cx="11064240" cy="2203703"/>
+          </a:xfrm>
+          <a:prstGeom prst="rect">
+            <a:avLst/>
+          </a:prstGeom>
+          <a:noFill/>
+        </p:spPr>
+        <p:txBody>
+          <a:bodyPr wrap="square" lIns="36576" rIns="36576" tIns="18288" bIns="18288" anchor="t">
+            <a:spAutoFit/>
+          </a:bodyPr>
+          <a:lstStyle/>
+          <a:p>
+            <a:pPr>
+              <a:lnSpc>
+                <a:spcPct val="100000"/>
+              </a:lnSpc>
+              <a:spcBef>
+                <a:spcPts val="0"/>
+              </a:spcBef>
+              <a:spcAft>
+                <a:spcPts val="200"/>
+              </a:spcAft>
+            </a:pPr>
+            <a:r>
+              <a:rPr sz="1600" b="1" i="0">
+                <a:solidFill>
+                  <a:srgbClr val="2F5D9F"/>
+                </a:solidFill>
+                <a:latin typeface="Arial"/>
+                <a:ea typeface="微軟正黑體"/>
+                <a:cs typeface="Arial"/>
+              </a:rPr>
+              <a:t>過保精算派 × 待料通知</a:t>
+            </a:r>
+          </a:p>
+          <a:p>
+            <a:pPr>
+              <a:lnSpc>
+                <a:spcPct val="100000"/>
+              </a:lnSpc>
+              <a:spcBef>
+                <a:spcPts val="0"/>
+              </a:spcBef>
+              <a:spcAft>
+                <a:spcPts val="200"/>
+              </a:spcAft>
+            </a:pPr>
+            <a:r>
+              <a:rPr sz="1200" b="0" i="0">
+                <a:solidFill>
+                  <a:srgbClr val="44546A"/>
+                </a:solidFill>
+                <a:latin typeface="Arial"/>
+                <a:ea typeface="微軟正黑體"/>
+                <a:cs typeface="Arial"/>
+              </a:rPr>
+              <a:t>渠道：LINE 官方帳號推播　　引用條目：9、26</a:t>
+            </a:r>
+          </a:p>
+          <a:p>
+            <a:pPr>
+              <a:lnSpc>
+                <a:spcPct val="100000"/>
+              </a:lnSpc>
+              <a:spcBef>
+                <a:spcPts val="0"/>
+              </a:spcBef>
+              <a:spcAft>
+                <a:spcPts val="200"/>
+              </a:spcAft>
+            </a:pPr>
+            <a:r>
+              <a:rPr sz="1300" b="0" i="0">
+                <a:solidFill>
+                  <a:srgbClr val="24323E"/>
+                </a:solidFill>
+                <a:latin typeface="Arial"/>
+                <a:ea typeface="微軟正黑體"/>
+                <a:cs typeface="Arial"/>
+              </a:rPr>
+              <a:t>您好，您的愛車目前還在等零件，進度尚未確定；有進一步消息時，我們會再與您聯繫。 自費更換的正廠零件，保證為自更換日起2年或行駛50,000公里以內，以先到者為準。若想查詢進度，可撥顧客服務專線0800-036-036。</a:t>
+            </a:r>
+          </a:p>
+          <a:p>
+            <a:pPr>
+              <a:lnSpc>
+                <a:spcPct val="100000"/>
+              </a:lnSpc>
+              <a:spcBef>
+                <a:spcPts val="0"/>
+              </a:spcBef>
+              <a:spcAft>
+                <a:spcPts val="200"/>
+              </a:spcAft>
+            </a:pPr>
+            <a:r>
+              <a:rPr sz="1200" b="0" i="0">
+                <a:solidFill>
+                  <a:srgbClr val="5C6B7A"/>
+                </a:solidFill>
+                <a:latin typeface="Arial"/>
+                <a:ea typeface="微軟正黑體"/>
+                <a:cs typeface="Arial"/>
+              </a:rPr>
+              <a:t>查核：通過；supported 3/3；重生成 0 次；生成次數 1</a:t>
+            </a:r>
+          </a:p>
+        </p:txBody>
+      </p:sp>
+      <p:sp>
+        <p:nvSpPr>
+          <p:cNvPr id="8" name="Rounded Rectangle 7"/>
+          <p:cNvSpPr/>
+          <p:nvPr/>
+        </p:nvSpPr>
+        <p:spPr>
+          <a:xfrm>
+            <a:off x="420624" y="3447288"/>
+            <a:ext cx="11356848" cy="2331720"/>
+          </a:xfrm>
+          <a:prstGeom prst="roundRect">
+            <a:avLst>
+              <a:gd name="adj" fmla="val 8000"/>
+            </a:avLst>
+          </a:prstGeom>
+          <a:solidFill>
+            <a:srgbClr val="F4F7FB"/>
+          </a:solidFill>
+          <a:ln>
+            <a:noFill/>
+          </a:ln>
+        </p:spPr>
+        <p:style>
+          <a:lnRef idx="1">
+            <a:schemeClr val="accent1"/>
+          </a:lnRef>
+          <a:fillRef idx="3">
+            <a:schemeClr val="accent1"/>
+          </a:fillRef>
+          <a:effectRef idx="2">
+            <a:schemeClr val="accent1"/>
+          </a:effectRef>
+          <a:fontRef idx="minor">
+            <a:schemeClr val="lt1"/>
+          </a:fontRef>
+        </p:style>
+        <p:txBody>
+          <a:bodyPr rtlCol="0" anchor="ctr"/>
+          <a:lstStyle/>
+          <a:p>
+            <a:pPr algn="ctr"/>
+          </a:p>
+        </p:txBody>
+      </p:sp>
+      <p:sp>
+        <p:nvSpPr>
+          <p:cNvPr id="9" name="TextBox 8"/>
+          <p:cNvSpPr txBox="1"/>
+          <p:nvPr/>
+        </p:nvSpPr>
+        <p:spPr>
+          <a:xfrm>
+            <a:off x="566928" y="3520440"/>
+            <a:ext cx="11064240" cy="2203703"/>
+          </a:xfrm>
+          <a:prstGeom prst="rect">
+            <a:avLst/>
+          </a:prstGeom>
+          <a:noFill/>
+        </p:spPr>
+        <p:txBody>
+          <a:bodyPr wrap="square" lIns="36576" rIns="36576" tIns="18288" bIns="18288" anchor="t">
+            <a:spAutoFit/>
+          </a:bodyPr>
+          <a:lstStyle/>
+          <a:p>
+            <a:pPr>
+              <a:lnSpc>
+                <a:spcPct val="100000"/>
+              </a:lnSpc>
+              <a:spcBef>
+                <a:spcPts val="0"/>
+              </a:spcBef>
+              <a:spcAft>
+                <a:spcPts val="200"/>
+              </a:spcAft>
+            </a:pPr>
+            <a:r>
+              <a:rPr sz="1600" b="1" i="0">
+                <a:solidFill>
+                  <a:srgbClr val="2F5D9F"/>
+                </a:solidFill>
+                <a:latin typeface="Arial"/>
+                <a:ea typeface="微軟正黑體"/>
+                <a:cs typeface="Arial"/>
+              </a:rPr>
+              <a:t>品質失望派 × 待料通知</a:t>
+            </a:r>
+          </a:p>
+          <a:p>
+            <a:pPr>
+              <a:lnSpc>
+                <a:spcPct val="100000"/>
+              </a:lnSpc>
+              <a:spcBef>
+                <a:spcPts val="0"/>
+              </a:spcBef>
+              <a:spcAft>
+                <a:spcPts val="200"/>
+              </a:spcAft>
+            </a:pPr>
+            <a:r>
+              <a:rPr sz="1200" b="0" i="0">
+                <a:solidFill>
+                  <a:srgbClr val="44546A"/>
+                </a:solidFill>
+                <a:latin typeface="Arial"/>
+                <a:ea typeface="微軟正黑體"/>
+                <a:cs typeface="Arial"/>
+              </a:rPr>
+              <a:t>渠道：服務廠專員電話腳本　　引用條目：26、57、65</a:t>
+            </a:r>
+          </a:p>
+          <a:p>
+            <a:pPr>
+              <a:lnSpc>
+                <a:spcPct val="100000"/>
+              </a:lnSpc>
+              <a:spcBef>
+                <a:spcPts val="0"/>
+              </a:spcBef>
+              <a:spcAft>
+                <a:spcPts val="200"/>
+              </a:spcAft>
+            </a:pPr>
+            <a:r>
+              <a:rPr sz="1300" b="0" i="0">
+                <a:solidFill>
+                  <a:srgbClr val="24323E"/>
+                </a:solidFill>
+                <a:latin typeface="Arial"/>
+                <a:ea typeface="微軟正黑體"/>
+                <a:cs typeface="Arial"/>
+              </a:rPr>
+              <a:t>您好，讓您久等了，很抱歉。我是您的服務專員，目前零件仍在等料中，有進一步消息我會再與您聯繫。若因零件缺料，車輛無法行駛或有行車安全疑慮，且留廠達 72 小時以上，才在維修期間提供免費代步車；板金或噴漆不提供。現車需視各廠車輛調度實況而定。您也可聯絡我，或撥免付費顧客服務專線 0800-036-036。</a:t>
+            </a:r>
+          </a:p>
+          <a:p>
+            <a:pPr>
+              <a:lnSpc>
+                <a:spcPct val="100000"/>
+              </a:lnSpc>
+              <a:spcBef>
+                <a:spcPts val="0"/>
+              </a:spcBef>
+              <a:spcAft>
+                <a:spcPts val="200"/>
+              </a:spcAft>
+            </a:pPr>
+            <a:r>
+              <a:rPr sz="1200" b="0" i="0">
+                <a:solidFill>
+                  <a:srgbClr val="5C6B7A"/>
+                </a:solidFill>
+                <a:latin typeface="Arial"/>
+                <a:ea typeface="微軟正黑體"/>
+                <a:cs typeface="Arial"/>
+              </a:rPr>
+              <a:t>查核：通過；supported 7/7；重生成 0 次；生成次數 1</a:t>
+            </a:r>
+          </a:p>
+        </p:txBody>
+      </p:sp>
+    </p:spTree>
+  </p:cSld>
+  <p:clrMapOvr>
+    <a:masterClrMapping/>
+  </p:clrMapOvr>
+</p:sld>
+</file>
+
 <file path=ppt/slides/slide3.xml><?xml version="1.0" encoding="utf-8"?>
 <p:sld xmlns:a="http://schemas.openxmlformats.org/drawingml/2006/main" xmlns:p="http://schemas.openxmlformats.org/presentationml/2006/main" xmlns:r="http://schemas.openxmlformats.org/officeDocument/2006/relationships">
   <p:cSld>
@@ -25886,7 +26527,7 @@
         <p:spPr>
           <a:xfrm>
             <a:off x="420624" y="329184"/>
-            <a:ext cx="11356848" cy="841248"/>
+            <a:ext cx="11356848" cy="566928"/>
           </a:xfrm>
           <a:prstGeom prst="rect">
             <a:avLst/>
@@ -25911,7 +26552,7 @@
               </a:spcAft>
             </a:pPr>
             <a:r>
-              <a:rPr sz="2000" b="1" i="0">
+              <a:rPr sz="2400" b="1" i="0">
                 <a:solidFill>
                   <a:srgbClr val="24323E"/>
                 </a:solidFill>
@@ -25919,7 +26560,7 @@
                 <a:ea typeface="微軟正黑體"/>
                 <a:cs typeface="Arial"/>
               </a:rPr>
-              <a:t>每 6 位在論壇談 Lexus 售後的車主，就有 1 位已在找出口，而且大多沒有抱怨</a:t>
+              <a:t>每 6 位有 1 位在找出口，多數沒抱怨</a:t>
             </a:r>
           </a:p>
         </p:txBody>
@@ -25932,7 +26573,7 @@
         </p:nvSpPr>
         <p:spPr>
           <a:xfrm>
-            <a:off x="420624" y="1261872"/>
+            <a:off x="420624" y="987552"/>
             <a:ext cx="3688080" cy="1691640"/>
           </a:xfrm>
           <a:prstGeom prst="roundRect">
@@ -25977,7 +26618,7 @@
         </p:nvSpPr>
         <p:spPr>
           <a:xfrm>
-            <a:off x="530352" y="1408176"/>
+            <a:off x="530352" y="1133856"/>
             <a:ext cx="3468623" cy="1417320"/>
           </a:xfrm>
           <a:prstGeom prst="rect">
@@ -26072,7 +26713,7 @@
         </p:nvSpPr>
         <p:spPr>
           <a:xfrm>
-            <a:off x="4255008" y="1261872"/>
+            <a:off x="4255008" y="987552"/>
             <a:ext cx="3688080" cy="1691640"/>
           </a:xfrm>
           <a:prstGeom prst="roundRect">
@@ -26117,7 +26758,7 @@
         </p:nvSpPr>
         <p:spPr>
           <a:xfrm>
-            <a:off x="4364736" y="1408176"/>
+            <a:off x="4364736" y="1133856"/>
             <a:ext cx="3468623" cy="1417320"/>
           </a:xfrm>
           <a:prstGeom prst="rect">
@@ -26212,7 +26853,7 @@
         </p:nvSpPr>
         <p:spPr>
           <a:xfrm>
-            <a:off x="8089392" y="1261872"/>
+            <a:off x="8089392" y="987552"/>
             <a:ext cx="3688080" cy="1691640"/>
           </a:xfrm>
           <a:prstGeom prst="roundRect">
@@ -26257,7 +26898,7 @@
         </p:nvSpPr>
         <p:spPr>
           <a:xfrm>
-            <a:off x="8199120" y="1408176"/>
+            <a:off x="8199120" y="1133856"/>
             <a:ext cx="3468623" cy="1417320"/>
           </a:xfrm>
           <a:prstGeom prst="rect">
@@ -26352,7 +26993,7 @@
         </p:nvSpPr>
         <p:spPr>
           <a:xfrm>
-            <a:off x="420624" y="3136391"/>
+            <a:off x="420624" y="2862072"/>
             <a:ext cx="11356848" cy="1234440"/>
           </a:xfrm>
           <a:prstGeom prst="rect">
@@ -27548,7 +28189,7 @@
         <p:spPr>
           <a:xfrm>
             <a:off x="420624" y="4949190"/>
-            <a:ext cx="11356848" cy="1051560"/>
+            <a:ext cx="11356848" cy="960120"/>
           </a:xfrm>
           <a:prstGeom prst="rect">
             <a:avLst/>
@@ -27630,6 +28271,53 @@
                 <a:cs typeface="Arial"/>
               </a:rPr>
               <a:t>態度負面 61%，流失卻只有 4.7%：抱怨多，不等於人會走。</a:t>
+            </a:r>
+          </a:p>
+        </p:txBody>
+      </p:sp>
+      <p:sp>
+        <p:nvSpPr>
+          <p:cNvPr id="8" name="TextBox 7"/>
+          <p:cNvSpPr txBox="1"/>
+          <p:nvPr/>
+        </p:nvSpPr>
+        <p:spPr>
+          <a:xfrm>
+            <a:off x="420624" y="5918454"/>
+            <a:ext cx="11356848" cy="292608"/>
+          </a:xfrm>
+          <a:prstGeom prst="rect">
+            <a:avLst/>
+          </a:prstGeom>
+          <a:noFill/>
+        </p:spPr>
+        <p:txBody>
+          <a:bodyPr wrap="square" lIns="36576" rIns="36576" tIns="18288" bIns="18288" anchor="t">
+            <a:spAutoFit/>
+          </a:bodyPr>
+          <a:lstStyle/>
+          <a:p>
+            <a:pPr>
+              <a:lnSpc>
+                <a:spcPct val="100000"/>
+              </a:lnSpc>
+              <a:spcBef>
+                <a:spcPts val="0"/>
+              </a:spcBef>
+              <a:spcAft>
+                <a:spcPts val="200"/>
+              </a:spcAft>
+            </a:pPr>
+            <a:r>
+              <a:rPr sz="1200" b="0" i="0">
+                <a:solidFill>
+                  <a:srgbClr val="5C6B7A"/>
+                </a:solidFill>
+                <a:latin typeface="Arial"/>
+                <a:ea typeface="微軟正黑體"/>
+                <a:cs typeface="Arial"/>
+              </a:rPr>
+              <a:t>對應接觸點：待料通知（R5），話術見附錄 A3</a:t>
             </a:r>
           </a:p>
         </p:txBody>

--- a/deck/初賽簡報_v0.pptx
+++ b/deck/初賽簡報_v0.pptx
@@ -17128,7 +17128,7 @@
                           <a:ea typeface="微軟正黑體"/>
                           <a:cs typeface="Arial"/>
                         </a:rPr>
-                        <a:t>您好，提醒您，愛車的新車保固即將屆滿。保固期內，於正常使用情況下，因材質或製造不…</a:t>
+                        <a:t>您好，您的保固即將屆滿，目前保證窗口仍在，可先核對新車基本保證；期限為交車日起4…</a:t>
                       </a:r>
                     </a:p>
                   </a:txBody>
@@ -17731,7 +17731,7 @@
                 <a:ea typeface="微軟正黑體"/>
                 <a:cs typeface="Arial"/>
               </a:rPr>
-              <a:t>12 則皆通過知識庫事實查核，人工審核後才投遞。</a:t>
+              <a:t>12 則皆依 76 條知識庫（官網 40、手冊 36）查核通過，人工審核後才投遞。</a:t>
             </a:r>
           </a:p>
           <a:p>
@@ -18716,7 +18716,7 @@
                           <a:ea typeface="微軟正黑體"/>
                           <a:cs typeface="Arial"/>
                         </a:rPr>
-                        <a:t>只引用知識庫、數字逐字比對、人工審核必經</a:t>
+                        <a:t>只引用 76 條知識庫、數字逐字比對、人工審核必經</a:t>
                       </a:r>
                     </a:p>
                   </a:txBody>
@@ -23862,7 +23862,7 @@
                           <a:ea typeface="微軟正黑體"/>
                           <a:cs typeface="Arial"/>
                         </a:rPr>
-                        <a:t>72 條官網＋手冊條目；12 則話術每則附引用與查核</a:t>
+                        <a:t>76 條（官網 40、手冊 36）；14 則話術每則附引用與查核</a:t>
                       </a:r>
                     </a:p>
                   </a:txBody>
@@ -26354,7 +26354,7 @@
                 <a:ea typeface="微軟正黑體"/>
                 <a:cs typeface="Arial"/>
               </a:rPr>
-              <a:t>查核：通過；supported 7/7；重生成 0 次；生成次數 1</a:t>
+              <a:t>查核：通過；supported 6/6；重生成 0 次；生成次數 1</a:t>
             </a:r>
           </a:p>
         </p:txBody>

--- a/deck/初賽簡報_v0.pptx
+++ b/deck/初賽簡報_v0.pptx
@@ -28,6 +28,8 @@
     <p:sldId id="273" r:id="rId24"/>
     <p:sldId id="274" r:id="rId25"/>
     <p:sldId id="275" r:id="rId26"/>
+    <p:sldId id="276" r:id="rId27"/>
+    <p:sldId id="277" r:id="rId28"/>
   </p:sldIdLst>
   <p:sldSz cy="6858000" cx="12192000"/>
   <p:notesSz cx="6858000" cy="9144000"/>
@@ -886,7 +888,7 @@
           <a:lstStyle/>
           <a:p>
             <a:r>
-              <a:t>兩段式補上漏標，Dcard 換模型複核，重疊句一致率達百分之九十八。</a:t>
+              <a:t>人工兩人 κ 0.40，不一致處要經仲裁後才成為金標。</a:t>
             </a:r>
           </a:p>
         </p:txBody>
@@ -944,7 +946,7 @@
           <a:lstStyle/>
           <a:p>
             <a:r>
-              <a:t>本機四Ｂ把流失句找回來；校準曲線放附錄，每句零點七秒。</a:t>
+              <a:t>r4 原值 P 0.617、R 0.769、κ 0.642。</a:t>
             </a:r>
           </a:p>
         </p:txBody>
@@ -1118,7 +1120,7 @@
           <a:lstStyle/>
           <a:p>
             <a:r>
-              <a:t>四面向都有原型；成本只列結構，右表五項風險已有對策。</a:t>
+              <a:t>人工篩選工時省九成以上（估），五項風險都已有對策。</a:t>
             </a:r>
           </a:p>
         </p:txBody>
@@ -1176,7 +1178,7 @@
           <a:lstStyle/>
           <a:p>
             <a:r>
-              <a:t>回廠率先假設加十點；接到全台約二十四週，監控不設終點。</a:t>
+              <a:t>每季三百句金標、兩人共五小時，審核回饋持續再訓練。</a:t>
             </a:r>
           </a:p>
         </p:txBody>
@@ -1510,6 +1512,122 @@
 </p:notes>
 </file>
 
+<file path=ppt/notesSlides/notesSlide21.xml><?xml version="1.0" encoding="utf-8"?>
+<p:notes xmlns:a="http://schemas.openxmlformats.org/drawingml/2006/main" xmlns:p="http://schemas.openxmlformats.org/presentationml/2006/main" xmlns:r="http://schemas.openxmlformats.org/officeDocument/2006/relationships">
+  <p:cSld>
+    <p:spTree>
+      <p:nvGrpSpPr>
+        <p:cNvPr id="1" name=""/>
+        <p:cNvGrpSpPr/>
+        <p:nvPr/>
+      </p:nvGrpSpPr>
+      <p:grpSpPr>
+        <a:xfrm>
+          <a:off x="0" y="0"/>
+          <a:ext cx="0" cy="0"/>
+          <a:chOff x="0" y="0"/>
+          <a:chExt cx="0" cy="0"/>
+        </a:xfrm>
+      </p:grpSpPr>
+      <p:sp>
+        <p:nvSpPr>
+          <p:cNvPr id="2" name="Slide Image Placeholder 1"/>
+          <p:cNvSpPr>
+            <a:spLocks noGrp="1"/>
+          </p:cNvSpPr>
+          <p:nvPr>
+            <p:ph type="sldImg" idx="2"/>
+          </p:nvPr>
+        </p:nvSpPr>
+        <p:spPr/>
+      </p:sp>
+      <p:sp>
+        <p:nvSpPr>
+          <p:cNvPr id="3" name="Notes Placeholder 2"/>
+          <p:cNvSpPr>
+            <a:spLocks noGrp="1"/>
+          </p:cNvSpPr>
+          <p:nvPr>
+            <p:ph type="body" idx="1"/>
+          </p:nvPr>
+        </p:nvSpPr>
+        <p:spPr/>
+        <p:txBody>
+          <a:bodyPr/>
+          <a:lstStyle/>
+          <a:p>
+            <a:r>
+              <a:t>CRM 八條規則的門檻列在本頁，投影片只留欄位名稱。</a:t>
+            </a:r>
+          </a:p>
+        </p:txBody>
+      </p:sp>
+    </p:spTree>
+  </p:cSld>
+  <p:clrMapOvr>
+    <a:masterClrMapping/>
+  </p:clrMapOvr>
+</p:notes>
+</file>
+
+<file path=ppt/notesSlides/notesSlide22.xml><?xml version="1.0" encoding="utf-8"?>
+<p:notes xmlns:a="http://schemas.openxmlformats.org/drawingml/2006/main" xmlns:p="http://schemas.openxmlformats.org/presentationml/2006/main" xmlns:r="http://schemas.openxmlformats.org/officeDocument/2006/relationships">
+  <p:cSld>
+    <p:spTree>
+      <p:nvGrpSpPr>
+        <p:cNvPr id="1" name=""/>
+        <p:cNvGrpSpPr/>
+        <p:nvPr/>
+      </p:nvGrpSpPr>
+      <p:grpSpPr>
+        <a:xfrm>
+          <a:off x="0" y="0"/>
+          <a:ext cx="0" cy="0"/>
+          <a:chOff x="0" y="0"/>
+          <a:chExt cx="0" cy="0"/>
+        </a:xfrm>
+      </p:grpSpPr>
+      <p:sp>
+        <p:nvSpPr>
+          <p:cNvPr id="2" name="Slide Image Placeholder 1"/>
+          <p:cNvSpPr>
+            <a:spLocks noGrp="1"/>
+          </p:cNvSpPr>
+          <p:nvPr>
+            <p:ph type="sldImg" idx="2"/>
+          </p:nvPr>
+        </p:nvSpPr>
+        <p:spPr/>
+      </p:sp>
+      <p:sp>
+        <p:nvSpPr>
+          <p:cNvPr id="3" name="Notes Placeholder 2"/>
+          <p:cNvSpPr>
+            <a:spLocks noGrp="1"/>
+          </p:cNvSpPr>
+          <p:nvPr>
+            <p:ph type="body" idx="1"/>
+          </p:nvPr>
+        </p:nvSpPr>
+        <p:spPr/>
+        <p:txBody>
+          <a:bodyPr/>
+          <a:lstStyle/>
+          <a:p>
+            <a:r>
+              <a:t>客訴結案七天回訪兩則：電話先道歉，LINE 不要求刪評。</a:t>
+            </a:r>
+          </a:p>
+        </p:txBody>
+      </p:sp>
+    </p:spTree>
+  </p:cSld>
+  <p:clrMapOvr>
+    <a:masterClrMapping/>
+  </p:clrMapOvr>
+</p:notes>
+</file>
+
 <file path=ppt/notesSlides/notesSlide3.xml><?xml version="1.0" encoding="utf-8"?>
 <p:notes xmlns:a="http://schemas.openxmlformats.org/drawingml/2006/main" xmlns:p="http://schemas.openxmlformats.org/presentationml/2006/main" xmlns:r="http://schemas.openxmlformats.org/officeDocument/2006/relationships">
   <p:cSld>
@@ -1613,7 +1731,7 @@
           <a:lstStyle/>
           <a:p>
             <a:r>
-              <a:t>人走了才知道；三站作者流失率差一截，Dcard偏購車階段。</a:t>
+              <a:t>售後人走了才知道，三個前兆是過保、刪項、間隔拉長。</a:t>
             </a:r>
           </a:p>
         </p:txBody>
@@ -1671,7 +1789,7 @@
           <a:lstStyle/>
           <a:p>
             <a:r>
-              <a:t>真正送走人的是等料和價格，態度罵很多，人卻還留著。</a:t>
+              <a:t>零件勝算比二點五八、價格二點六四，分母兩萬一千句。</a:t>
             </a:r>
           </a:p>
         </p:txBody>
@@ -1787,7 +1905,7 @@
           <a:lstStyle/>
           <a:p>
             <a:r>
-              <a:t>三站切完是二十三萬句，售後兩萬一千句，遮蔽五百多次、抽查沒漏。</a:t>
+              <a:t>IQR 定 78 字門檻，上游已去掉 15,182 句重複。</a:t>
             </a:r>
           </a:p>
         </p:txBody>
@@ -1903,7 +2021,7 @@
           <a:lstStyle/>
           <a:p>
             <a:r>
-              <a:t>四種人過保精算最多；未分類一成五留觀察名單，不投遞。</a:t>
+              <a:t>分群只獨立支持靜默出走者；其餘 Persona 用規則定義。</a:t>
             </a:r>
           </a:p>
         </p:txBody>
@@ -12051,7 +12169,7 @@
           <a:p>
             <a:r>
               <a:rPr sz="1800"/>
-              <a:t>初賽提案簡報（v1，2026-09）</a:t>
+              <a:t>初賽提案簡報（v2，2026-10）</a:t>
             </a:r>
           </a:p>
         </p:txBody>
@@ -12163,7 +12281,7 @@
                 <a:ea typeface="微軟正黑體"/>
                 <a:cs typeface="Arial"/>
               </a:rPr>
-              <a:t>來源：reports/T10_risk_persona_report.md §2、§6；圖 F7</a:t>
+              <a:t>來源：風險與 Persona 報告（T10）；圖 F7</a:t>
             </a:r>
           </a:p>
         </p:txBody>
@@ -12224,7 +12342,7 @@
         <p:spPr>
           <a:xfrm>
             <a:off x="420624" y="329184"/>
-            <a:ext cx="11356848" cy="841248"/>
+            <a:ext cx="11356848" cy="566928"/>
           </a:xfrm>
           <a:prstGeom prst="rect">
             <a:avLst/>
@@ -12249,7 +12367,7 @@
               </a:spcAft>
             </a:pPr>
             <a:r>
-              <a:rPr sz="2000" b="1" i="0">
+              <a:rPr sz="2400" b="1" i="0">
                 <a:solidFill>
                   <a:srgbClr val="24323E"/>
                 </a:solidFill>
@@ -12257,7 +12375,7 @@
                 <a:ea typeface="微軟正黑體"/>
                 <a:cs typeface="Arial"/>
               </a:rPr>
-              <a:t>高風險七成四真有流失句；過保精算派規模最大、平均風險也最高</a:t>
+              <a:t>高風險車主 74% 確有流失句，分級可信</a:t>
             </a:r>
           </a:p>
         </p:txBody>
@@ -12270,7 +12388,7 @@
         </p:nvSpPr>
         <p:spPr>
           <a:xfrm>
-            <a:off x="420624" y="1261872"/>
+            <a:off x="420624" y="987552"/>
             <a:ext cx="5989320" cy="2148840"/>
           </a:xfrm>
           <a:prstGeom prst="rect">
@@ -12304,7 +12422,7 @@
                 <a:ea typeface="微軟正黑體"/>
                 <a:cs typeface="Arial"/>
               </a:rPr>
-              <a:t>分數＝作者 p_churn 最大值 × 0.6 ＋（命中規則數／8）× 0.4。</a:t>
+              <a:t>風險分＝模型機率占 6 成＋規則命中占 4 成。</a:t>
             </a:r>
           </a:p>
           <a:p>
@@ -12376,7 +12494,7 @@
                 <a:ea typeface="微軟正黑體"/>
                 <a:cs typeface="Arial"/>
               </a:rPr>
-              <a:t>右圖是 Persona 規模與平均風險：過保精算派 511 人、平均風險 0.73，五組裡最高。</a:t>
+              <a:t>過保精算派 511 人，平均風險 0.73 最高。</a:t>
             </a:r>
           </a:p>
         </p:txBody>
@@ -12397,7 +12515,7 @@
         </p:blipFill>
         <p:spPr>
           <a:xfrm>
-            <a:off x="6951472" y="1261872"/>
+            <a:off x="6951472" y="987552"/>
             <a:ext cx="4421632" cy="2487168"/>
           </a:xfrm>
           <a:prstGeom prst="rect">
@@ -12414,7 +12532,7 @@
           <p:nvPr/>
         </p:nvGraphicFramePr>
         <p:xfrm>
-          <a:off x="420624" y="3840480"/>
+          <a:off x="420624" y="3566160"/>
           <a:ext cx="11356848" cy="2148840"/>
         </p:xfrm>
         <a:graphic>
@@ -12631,7 +12749,7 @@
                           <a:ea typeface="微軟正黑體"/>
                           <a:cs typeface="Arial"/>
                         </a:rPr>
-                        <a:t>保固到期日（4 年／12 萬）、延保購買狀態：到期前 90 天未購延保</a:t>
+                        <a:t>保固到期日、延保狀態</a:t>
                       </a:r>
                     </a:p>
                   </a:txBody>
@@ -12738,7 +12856,7 @@
                           <a:ea typeface="微軟正黑體"/>
                           <a:cs typeface="Arial"/>
                         </a:rPr>
-                        <a:t>工單估價 vs 實收、拒絕估價項目、滿意度價格題：連續 2 次拒項</a:t>
+                        <a:t>工單估價與實收、拒絕估價項目、滿意度價格題</a:t>
                       </a:r>
                     </a:p>
                   </a:txBody>
@@ -12845,7 +12963,7 @@
                           <a:ea typeface="微軟正黑體"/>
                           <a:cs typeface="Arial"/>
                         </a:rPr>
-                        <a:t>回廠間隔 vs 建議週期、預約取消、App 查據點未預約：逾期 1.5 倍</a:t>
+                        <a:t>回廠間隔、預約取消、App 查據點</a:t>
                       </a:r>
                     </a:p>
                   </a:txBody>
@@ -12952,7 +13070,7 @@
                           <a:ea typeface="微軟正黑體"/>
                           <a:cs typeface="Arial"/>
                         </a:rPr>
-                        <a:t>工單自備零件／機油註記、只做換油套餐、金額逐次下降 &gt; 40%</a:t>
+                        <a:t>自備零件或機油註記、換油套餐、工單金額</a:t>
                       </a:r>
                     </a:p>
                   </a:txBody>
@@ -13059,7 +13177,7 @@
                           <a:ea typeface="微軟正黑體"/>
                           <a:cs typeface="Arial"/>
                         </a:rPr>
-                        <a:t>零件待料天數、待料改期次數：待料 &gt; 7 天或同車 ≥ 2 次</a:t>
+                        <a:t>待料天數、改期次數</a:t>
                       </a:r>
                     </a:p>
                   </a:txBody>
@@ -13166,7 +13284,7 @@
                           <a:ea typeface="微軟正黑體"/>
                           <a:cs typeface="Arial"/>
                         </a:rPr>
-                        <a:t>30 天內同項目重複進廠、技術客訴、召回未完成：comeback ≥ 2</a:t>
+                        <a:t>同項目重複進廠、技術客訴、召回未完成</a:t>
                       </a:r>
                     </a:p>
                   </a:txBody>
@@ -13273,7 +13391,7 @@
                           <a:ea typeface="微軟正黑體"/>
                           <a:cs typeface="Arial"/>
                         </a:rPr>
-                        <a:t>12 個月無工單、過戶／退出會員、App 長期未開啟（驗證用）</a:t>
+                        <a:t>無工單、過戶或退出會員、App 未開啟</a:t>
                       </a:r>
                     </a:p>
                   </a:txBody>
@@ -13380,7 +13498,7 @@
                           <a:ea typeface="微軟正黑體"/>
                           <a:cs typeface="Arial"/>
                         </a:rPr>
-                        <a:t>NPS 貶損者（0–6）且 12 個月內有客訴、推薦計畫無紀錄</a:t>
+                        <a:t>NPS、客訴紀錄、推薦計畫</a:t>
                       </a:r>
                     </a:p>
                   </a:txBody>
@@ -13403,7 +13521,7 @@
         </p:nvSpPr>
         <p:spPr>
           <a:xfrm>
-            <a:off x="420624" y="6035040"/>
+            <a:off x="420624" y="5760720"/>
             <a:ext cx="11356848" cy="365760"/>
           </a:xfrm>
           <a:prstGeom prst="rect">
@@ -13549,7 +13667,7 @@
                 <a:ea typeface="微軟正黑體"/>
                 <a:cs typeface="Arial"/>
               </a:rPr>
-              <a:t>來源：專案架構 §2、reports/T1_dcard_verify_report.md、T2、T3</a:t>
+              <a:t>來源：專案架構、Dcard 複核報告（T1）、其他精煉報告（T2）、殘餘切分報告（T3）</a:t>
             </a:r>
           </a:p>
         </p:txBody>
@@ -13643,7 +13761,7 @@
                 <a:ea typeface="微軟正黑體"/>
                 <a:cs typeface="Arial"/>
               </a:rPr>
-              <a:t>先寬鬆抓住，再帶上下文複核；九個面向已經全量標完</a:t>
+              <a:t>兩段式標註：先寬抓、再複核，一致率 98.4%</a:t>
             </a:r>
           </a:p>
         </p:txBody>
@@ -14005,7 +14123,7 @@
         <p:spPr>
           <a:xfrm>
             <a:off x="420624" y="2724912"/>
-            <a:ext cx="11356848" cy="777240"/>
+            <a:ext cx="11356848" cy="365760"/>
           </a:xfrm>
           <a:prstGeom prst="rect">
             <a:avLst/>
@@ -14038,55 +14156,7 @@
                 <a:ea typeface="微軟正黑體"/>
                 <a:cs typeface="Arial"/>
               </a:rPr>
-              <a:t>先寬鬆抓可能流失的句子。</a:t>
-            </a:r>
-          </a:p>
-          <a:p>
-            <a:pPr>
-              <a:lnSpc>
-                <a:spcPct val="100000"/>
-              </a:lnSpc>
-              <a:spcBef>
-                <a:spcPts val="0"/>
-              </a:spcBef>
-              <a:spcAft>
-                <a:spcPts val="200"/>
-              </a:spcAft>
-            </a:pPr>
-            <a:r>
-              <a:rPr sz="1600" b="0" i="0">
-                <a:solidFill>
-                  <a:srgbClr val="24323E"/>
-                </a:solidFill>
-                <a:latin typeface="Arial"/>
-                <a:ea typeface="微軟正黑體"/>
-                <a:cs typeface="Arial"/>
-              </a:rPr>
-              <a:t>再帶上上下文複核。</a:t>
-            </a:r>
-          </a:p>
-          <a:p>
-            <a:pPr>
-              <a:lnSpc>
-                <a:spcPct val="100000"/>
-              </a:lnSpc>
-              <a:spcBef>
-                <a:spcPts val="0"/>
-              </a:spcBef>
-              <a:spcAft>
-                <a:spcPts val="200"/>
-              </a:spcAft>
-            </a:pPr>
-            <a:r>
-              <a:rPr sz="1600" b="0" i="0">
-                <a:solidFill>
-                  <a:srgbClr val="24323E"/>
-                </a:solidFill>
-                <a:latin typeface="Arial"/>
-                <a:ea typeface="微軟正黑體"/>
-                <a:cs typeface="Arial"/>
-              </a:rPr>
-              <a:t>九面向已全量標完；其他 396 句，殘餘剩 4 句。</a:t>
+              <a:t>九面向全量標完，殘餘僅 4 句。</a:t>
             </a:r>
           </a:p>
         </p:txBody>
@@ -14099,8 +14169,8 @@
         </p:nvSpPr>
         <p:spPr>
           <a:xfrm>
-            <a:off x="420624" y="3639312"/>
-            <a:ext cx="11356848" cy="777240"/>
+            <a:off x="420624" y="3227832"/>
+            <a:ext cx="11356848" cy="1325880"/>
           </a:xfrm>
           <a:prstGeom prst="roundRect">
             <a:avLst>
@@ -14144,8 +14214,8 @@
         </p:nvSpPr>
         <p:spPr>
           <a:xfrm>
-            <a:off x="566928" y="3749039"/>
-            <a:ext cx="11064240" cy="566928"/>
+            <a:off x="566928" y="3319272"/>
+            <a:ext cx="11064240" cy="1143000"/>
           </a:xfrm>
           <a:prstGeom prst="rect">
             <a:avLst/>
@@ -14153,7 +14223,7 @@
           <a:noFill/>
         </p:spPr>
         <p:txBody>
-          <a:bodyPr wrap="square" lIns="36576" rIns="36576" tIns="18288" bIns="18288" anchor="ctr">
+          <a:bodyPr wrap="square" lIns="36576" rIns="36576" tIns="18288" bIns="18288" anchor="t">
             <a:spAutoFit/>
           </a:bodyPr>
           <a:lstStyle/>
@@ -14178,7 +14248,55 @@
                 <a:ea typeface="微軟正黑體"/>
                 <a:cs typeface="Arial"/>
               </a:rPr>
-              <a:t>人工金標 300 句（9/29）：兩人 κ 0.40，仲裁後隨機層 150 句以人工為準：r4 F1 0.82／κ 0.81 與 Sonnet 相同，Haiku F1 0.50；正例僅 9 句，召回 CI 0.45–0.94</a:t>
+              <a:t>人工金標 300 句：本機模型 F1 0.82，與 Sonnet 同級。</a:t>
+            </a:r>
+          </a:p>
+          <a:p>
+            <a:pPr>
+              <a:lnSpc>
+                <a:spcPct val="100000"/>
+              </a:lnSpc>
+              <a:spcBef>
+                <a:spcPts val="0"/>
+              </a:spcBef>
+              <a:spcAft>
+                <a:spcPts val="200"/>
+              </a:spcAft>
+            </a:pPr>
+            <a:r>
+              <a:rPr sz="1500" b="0" i="0">
+                <a:solidFill>
+                  <a:srgbClr val="24323E"/>
+                </a:solidFill>
+                <a:latin typeface="Arial"/>
+                <a:ea typeface="微軟正黑體"/>
+                <a:cs typeface="Arial"/>
+              </a:rPr>
+              <a:t>Haiku 只有 F1 0.50。</a:t>
+            </a:r>
+          </a:p>
+          <a:p>
+            <a:pPr>
+              <a:lnSpc>
+                <a:spcPct val="100000"/>
+              </a:lnSpc>
+              <a:spcBef>
+                <a:spcPts val="0"/>
+              </a:spcBef>
+              <a:spcAft>
+                <a:spcPts val="200"/>
+              </a:spcAft>
+            </a:pPr>
+            <a:r>
+              <a:rPr sz="1500" b="0" i="0">
+                <a:solidFill>
+                  <a:srgbClr val="24323E"/>
+                </a:solidFill>
+                <a:latin typeface="Arial"/>
+                <a:ea typeface="微軟正黑體"/>
+                <a:cs typeface="Arial"/>
+              </a:rPr>
+              <a:t>限制：正例僅 9 句，召回區間 0.45–0.94。</a:t>
             </a:r>
           </a:p>
         </p:txBody>
@@ -14290,7 +14408,7 @@
                 <a:ea typeface="微軟正黑體"/>
                 <a:cs typeface="Arial"/>
               </a:rPr>
-              <a:t>來源：reports/T8_r4_report.md；校準曲線 F6 見附錄 A2</a:t>
+              <a:t>來源：本機模型報告（T8）；校準曲線見附錄 A2</a:t>
             </a:r>
           </a:p>
         </p:txBody>
@@ -14351,7 +14469,7 @@
         <p:spPr>
           <a:xfrm>
             <a:off x="420624" y="329184"/>
-            <a:ext cx="11356848" cy="841248"/>
+            <a:ext cx="11356848" cy="566928"/>
           </a:xfrm>
           <a:prstGeom prst="rect">
             <a:avLst/>
@@ -14376,7 +14494,7 @@
               </a:spcAft>
             </a:pPr>
             <a:r>
-              <a:rPr sz="2000" b="1" i="0">
+              <a:rPr sz="2400" b="1" i="0">
                 <a:solidFill>
                   <a:srgbClr val="24323E"/>
                 </a:solidFill>
@@ -14384,7 +14502,7 @@
                 <a:ea typeface="微軟正黑體"/>
                 <a:cs typeface="Arial"/>
               </a:rPr>
-              <a:t>本機 4B 比雲端 Haiku 更會把流失句找回來，而且不生成文字</a:t>
+              <a:t>本機小模型勝過雲端 Haiku，零 API 費</a:t>
             </a:r>
           </a:p>
         </p:txBody>
@@ -14398,7 +14516,7 @@
           <p:nvPr/>
         </p:nvGraphicFramePr>
         <p:xfrm>
-          <a:off x="420624" y="1261872"/>
+          <a:off x="420624" y="987552"/>
           <a:ext cx="5623560" cy="1234440"/>
         </p:xfrm>
         <a:graphic>
@@ -14957,7 +15075,7 @@
         </p:nvSpPr>
         <p:spPr>
           <a:xfrm>
-            <a:off x="420624" y="2615184"/>
+            <a:off x="420624" y="2340864"/>
             <a:ext cx="5623560" cy="502920"/>
           </a:xfrm>
           <a:prstGeom prst="rect">
@@ -14983,7 +15101,7 @@
               </a:spcAft>
             </a:pPr>
             <a:r>
-              <a:rPr sz="1100" b="0" i="0">
+              <a:rPr sz="1200" b="0" i="0">
                 <a:solidFill>
                   <a:srgbClr val="5C6B7A"/>
                 </a:solidFill>
@@ -14991,7 +15109,7 @@
                 <a:ea typeface="微軟正黑體"/>
                 <a:cs typeface="Arial"/>
               </a:rPr>
-              <a:t>同一 600 句測試集。r4 原值 P 0.617、R 0.769、κ 0.642（T8 ep2）。</a:t>
+              <a:t>同一 600 句測試集比較。</a:t>
             </a:r>
           </a:p>
           <a:p>
@@ -15028,7 +15146,7 @@
         </p:nvSpPr>
         <p:spPr>
           <a:xfrm>
-            <a:off x="6272784" y="1261872"/>
+            <a:off x="6272784" y="987552"/>
             <a:ext cx="5504688" cy="2880360"/>
           </a:xfrm>
           <a:prstGeom prst="roundRect">
@@ -15073,7 +15191,7 @@
         </p:nvSpPr>
         <p:spPr>
           <a:xfrm>
-            <a:off x="6419088" y="1408176"/>
+            <a:off x="6419088" y="1133856"/>
             <a:ext cx="5212080" cy="2606040"/>
           </a:xfrm>
           <a:prstGeom prst="rect">
@@ -15168,7 +15286,7 @@
         </p:nvSpPr>
         <p:spPr>
           <a:xfrm>
-            <a:off x="420624" y="4507992"/>
+            <a:off x="420624" y="4233672"/>
             <a:ext cx="2183587" cy="1234440"/>
           </a:xfrm>
           <a:prstGeom prst="roundRect">
@@ -15213,7 +15331,7 @@
         </p:nvSpPr>
         <p:spPr>
           <a:xfrm>
-            <a:off x="530352" y="4581144"/>
+            <a:off x="530352" y="4306824"/>
             <a:ext cx="1964131" cy="1097280"/>
           </a:xfrm>
           <a:prstGeom prst="rect">
@@ -15284,7 +15402,7 @@
         </p:nvSpPr>
         <p:spPr>
           <a:xfrm>
-            <a:off x="2713939" y="4507992"/>
+            <a:off x="2713939" y="4233672"/>
             <a:ext cx="2183587" cy="1234440"/>
           </a:xfrm>
           <a:prstGeom prst="roundRect">
@@ -15329,7 +15447,7 @@
         </p:nvSpPr>
         <p:spPr>
           <a:xfrm>
-            <a:off x="2823667" y="4581144"/>
+            <a:off x="2823667" y="4306824"/>
             <a:ext cx="1964131" cy="1097280"/>
           </a:xfrm>
           <a:prstGeom prst="rect">
@@ -15400,7 +15518,7 @@
         </p:nvSpPr>
         <p:spPr>
           <a:xfrm>
-            <a:off x="5007254" y="4507992"/>
+            <a:off x="5007254" y="4233672"/>
             <a:ext cx="2183587" cy="1234440"/>
           </a:xfrm>
           <a:prstGeom prst="roundRect">
@@ -15445,7 +15563,7 @@
         </p:nvSpPr>
         <p:spPr>
           <a:xfrm>
-            <a:off x="5116982" y="4581144"/>
+            <a:off x="5116982" y="4306824"/>
             <a:ext cx="1964131" cy="1097280"/>
           </a:xfrm>
           <a:prstGeom prst="rect">
@@ -15516,7 +15634,7 @@
         </p:nvSpPr>
         <p:spPr>
           <a:xfrm>
-            <a:off x="7300569" y="4507992"/>
+            <a:off x="7300569" y="4233672"/>
             <a:ext cx="2183587" cy="1234440"/>
           </a:xfrm>
           <a:prstGeom prst="roundRect">
@@ -15561,7 +15679,7 @@
         </p:nvSpPr>
         <p:spPr>
           <a:xfrm>
-            <a:off x="7410297" y="4581144"/>
+            <a:off x="7410297" y="4306824"/>
             <a:ext cx="1964131" cy="1097280"/>
           </a:xfrm>
           <a:prstGeom prst="rect">
@@ -15632,7 +15750,7 @@
         </p:nvSpPr>
         <p:spPr>
           <a:xfrm>
-            <a:off x="9593884" y="4507992"/>
+            <a:off x="9593884" y="4233672"/>
             <a:ext cx="2183587" cy="1234440"/>
           </a:xfrm>
           <a:prstGeom prst="roundRect">
@@ -15677,7 +15795,7 @@
         </p:nvSpPr>
         <p:spPr>
           <a:xfrm>
-            <a:off x="9703612" y="4581144"/>
+            <a:off x="9703612" y="4306824"/>
             <a:ext cx="1964131" cy="1097280"/>
           </a:xfrm>
           <a:prstGeom prst="rect">
@@ -15748,7 +15866,7 @@
         </p:nvSpPr>
         <p:spPr>
           <a:xfrm>
-            <a:off x="420624" y="5833872"/>
+            <a:off x="420624" y="5559552"/>
             <a:ext cx="11356848" cy="457200"/>
           </a:xfrm>
           <a:prstGeom prst="rect">
@@ -15774,7 +15892,7 @@
               </a:spcAft>
             </a:pPr>
             <a:r>
-              <a:rPr sz="1100" b="0" i="0">
+              <a:rPr sz="1200" b="0" i="0">
                 <a:solidFill>
                   <a:srgbClr val="5C6B7A"/>
                 </a:solidFill>
@@ -15782,7 +15900,31 @@
                 <a:ea typeface="微軟正黑體"/>
                 <a:cs typeface="Arial"/>
               </a:rPr>
-              <a:t>沿用 jev（LLM2Jev），非官方模型。只出機率。最高桶約七成，未達宣稱。</a:t>
+              <a:t>架構沿用開源 LLM2Jev。</a:t>
+            </a:r>
+          </a:p>
+          <a:p>
+            <a:pPr>
+              <a:lnSpc>
+                <a:spcPct val="100000"/>
+              </a:lnSpc>
+              <a:spcBef>
+                <a:spcPts val="0"/>
+              </a:spcBef>
+              <a:spcAft>
+                <a:spcPts val="200"/>
+              </a:spcAft>
+            </a:pPr>
+            <a:r>
+              <a:rPr sz="1200" b="0" i="0">
+                <a:solidFill>
+                  <a:srgbClr val="5C6B7A"/>
+                </a:solidFill>
+                <a:latin typeface="Arial"/>
+                <a:ea typeface="微軟正黑體"/>
+                <a:cs typeface="Arial"/>
+              </a:rPr>
+              <a:t>最高信心桶命中約七成，見附錄。</a:t>
             </a:r>
           </a:p>
         </p:txBody>
@@ -15894,7 +16036,7 @@
                 <a:ea typeface="微軟正黑體"/>
                 <a:cs typeface="Arial"/>
               </a:rPr>
-              <a:t>來源：reports/T10_risk_persona_report.md、reports/T8_r4_report.md、專案架構 §2</a:t>
+              <a:t>來源：風險與 Persona 報告（T10）、本機模型報告（T8）、專案架構</a:t>
             </a:r>
           </a:p>
         </p:txBody>
@@ -15988,7 +16130,7 @@
                 <a:ea typeface="微軟正黑體"/>
                 <a:cs typeface="Arial"/>
               </a:rPr>
-              <a:t>靜默出走別隊看不到；分數說得出是哪條規則，也能回到原句</a:t>
+              <a:t>看得見沒抱怨就走的人，分數說得出原因</a:t>
             </a:r>
           </a:p>
         </p:txBody>
@@ -16564,7 +16706,7 @@
                 <a:ea typeface="微軟正黑體"/>
                 <a:cs typeface="Arial"/>
               </a:rPr>
-              <a:t>來源：knowledge/generated_examples.md、reports/T14_generation_report.md</a:t>
+              <a:t>來源：話術範例、生成與查核報告（T14）</a:t>
             </a:r>
           </a:p>
         </p:txBody>
@@ -16658,7 +16800,7 @@
                 <a:ea typeface="微軟正黑體"/>
                 <a:cs typeface="Arial"/>
               </a:rPr>
-              <a:t>先對上是誰、在什麼時候開口；十二則話術已對過知識庫</a:t>
+              <a:t>對的人、對的時機開口；12 則話術全數查核</a:t>
             </a:r>
           </a:p>
         </p:txBody>
@@ -16673,7 +16815,7 @@
         </p:nvGraphicFramePr>
         <p:xfrm>
           <a:off x="420624" y="987552"/>
-          <a:ext cx="11356848" cy="3977639"/>
+          <a:ext cx="11356848" cy="3703320"/>
         </p:xfrm>
         <a:graphic>
           <a:graphicData uri="http://schemas.openxmlformats.org/drawingml/2006/table">
@@ -16687,7 +16829,7 @@
                 <a:gridCol w="3291840"/>
                 <a:gridCol w="3291840"/>
               </a:tblGrid>
-              <a:tr h="795527">
+              <a:tr h="740664">
                 <a:tc>
                   <a:txBody>
                     <a:bodyPr wrap="square" anchor="ctr"/>
@@ -16829,7 +16971,7 @@
                   </a:tcPr>
                 </a:tc>
               </a:tr>
-              <a:tr h="795527">
+              <a:tr h="740664">
                 <a:tc>
                   <a:txBody>
                     <a:bodyPr wrap="square" anchor="ctr"/>
@@ -17043,7 +17185,7 @@
                   </a:tcPr>
                 </a:tc>
               </a:tr>
-              <a:tr h="795527">
+              <a:tr h="740664">
                 <a:tc>
                   <a:txBody>
                     <a:bodyPr wrap="square" anchor="ctr"/>
@@ -17257,7 +17399,7 @@
                   </a:tcPr>
                 </a:tc>
               </a:tr>
-              <a:tr h="795527">
+              <a:tr h="740664">
                 <a:tc>
                   <a:txBody>
                     <a:bodyPr wrap="square" anchor="ctr"/>
@@ -17471,7 +17613,7 @@
                   </a:tcPr>
                 </a:tc>
               </a:tr>
-              <a:tr h="795531">
+              <a:tr h="740664">
                 <a:tc>
                   <a:txBody>
                     <a:bodyPr wrap="square" anchor="ctr"/>
@@ -17697,8 +17839,8 @@
         </p:nvSpPr>
         <p:spPr>
           <a:xfrm>
-            <a:off x="420624" y="5029200"/>
-            <a:ext cx="11356848" cy="868680"/>
+            <a:off x="420624" y="4754880"/>
+            <a:ext cx="11356848" cy="1097280"/>
           </a:xfrm>
           <a:prstGeom prst="rect">
             <a:avLst/>
@@ -17731,7 +17873,31 @@
                 <a:ea typeface="微軟正黑體"/>
                 <a:cs typeface="Arial"/>
               </a:rPr>
-              <a:t>12 則皆依 76 條知識庫（官網 40、手冊 36）查核通過，人工審核後才投遞。</a:t>
+              <a:t>12 則對 76 條官方條款查核通過。</a:t>
+            </a:r>
+          </a:p>
+          <a:p>
+            <a:pPr>
+              <a:lnSpc>
+                <a:spcPct val="100000"/>
+              </a:lnSpc>
+              <a:spcBef>
+                <a:spcPts val="0"/>
+              </a:spcBef>
+              <a:spcAft>
+                <a:spcPts val="200"/>
+              </a:spcAft>
+            </a:pPr>
+            <a:r>
+              <a:rPr sz="1300" b="0" i="0">
+                <a:solidFill>
+                  <a:srgbClr val="24323E"/>
+                </a:solidFill>
+                <a:latin typeface="Arial"/>
+                <a:ea typeface="微軟正黑體"/>
+                <a:cs typeface="Arial"/>
+              </a:rPr>
+              <a:t>人工核准才投遞。</a:t>
             </a:r>
           </a:p>
           <a:p>
@@ -17755,7 +17921,7 @@
                 <a:ea typeface="微軟正黑體"/>
                 <a:cs typeface="Arial"/>
               </a:rPr>
-              <a:t>完整文字、引用條目與查核見附錄 knowledge/generated_examples.md。</a:t>
+              <a:t>全文與查核見附錄 A3。</a:t>
             </a:r>
           </a:p>
           <a:p>
@@ -17779,7 +17945,7 @@
                 <a:ea typeface="微軟正黑體"/>
                 <a:cs typeface="Arial"/>
               </a:rPr>
-              <a:t>零件等料（R5）逾 7 天主動通知，範例見附錄 A3</a:t>
+              <a:t>客訴結案後 7 天回訪，見附錄 A5。</a:t>
             </a:r>
           </a:p>
         </p:txBody>
@@ -17891,7 +18057,7 @@
                 <a:ea typeface="微軟正黑體"/>
                 <a:cs typeface="Arial"/>
               </a:rPr>
-              <a:t>來源：iPAS骨架頁_草稿.md、會議記錄_2026-09-30.md §五、iPAS導入對照_2026-09-25.md</a:t>
+              <a:t>來源：iPAS 骨架頁、9/30 會議記錄、iPAS 導入對照</a:t>
             </a:r>
           </a:p>
         </p:txBody>
@@ -17985,7 +18151,7 @@
                 <a:ea typeface="微軟正黑體"/>
                 <a:cs typeface="Arial"/>
               </a:rPr>
-              <a:t>四個面向都有原型；成本只列結構，五項風險已有對策</a:t>
+              <a:t>人工篩選工時省九成以上；五項風險都有對策</a:t>
             </a:r>
           </a:p>
         </p:txBody>
@@ -18101,7 +18267,7 @@
                 <a:ea typeface="微軟正黑體"/>
                 <a:cs typeface="Arial"/>
               </a:rPr>
-              <a:t>售後現在要等客訴或不回廠才知道車主走了；改用輿情與 CRM 訊號，在過保、刪項、回廠間隔拉長時就先找到人。</a:t>
+              <a:t>人走了才知道 → 過保、刪項、間隔拉長時先找到人。</a:t>
             </a:r>
           </a:p>
         </p:txBody>
@@ -18217,7 +18383,7 @@
                 <a:ea typeface="微軟正黑體"/>
                 <a:cs typeface="Arial"/>
               </a:rPr>
-              <a:t>判斷、分群、生成三段都有可跑的原型；八條規則已對到 DMS 欄位，導入時換成實際欄位名即可。</a:t>
+              <a:t>判斷、分群、生成都有原型。8 條規則已對到 DMS 欄位。</a:t>
             </a:r>
           </a:p>
         </p:txBody>
@@ -18309,7 +18475,7 @@
                 <a:ea typeface="微軟正黑體"/>
                 <a:cs typeface="Arial"/>
               </a:rPr>
-              <a:t>財務</a:t>
+              <a:t>財務：人力成本節省</a:t>
             </a:r>
           </a:p>
           <a:p>
@@ -18333,7 +18499,7 @@
                 <a:ea typeface="微軟正黑體"/>
                 <a:cs typeface="Arial"/>
               </a:rPr>
-              <a:t>判斷在本機跑，每句 0.7 秒、零 API 費；8 GB 顯卡就能訓練與推論。成本結構已列（人力、標註、模型、整合、授權），回報待試行基期。</a:t>
+              <a:t>人工逐句篩 2.1 萬句約需 106 人時（估）。本機模型 4.1 小時跑完，零 API 費。人力改花在審名單、審話術。</a:t>
             </a:r>
           </a:p>
         </p:txBody>
@@ -18449,7 +18615,7 @@
                 <a:ea typeface="微軟正黑體"/>
                 <a:cs typeface="Arial"/>
               </a:rPr>
-              <a:t>代表性、雙複核模型、個資、生成亂編、Persona 主觀性；對策在右表，每項都已有處理。</a:t>
+              <a:t>五項主要風險，對策見右表。</a:t>
             </a:r>
           </a:p>
         </p:txBody>
@@ -19441,7 +19607,7 @@
                 <a:ea typeface="微軟正黑體"/>
                 <a:cs typeface="Arial"/>
               </a:rPr>
-              <a:t>來源：iPAS骨架頁_草稿.md、會議記錄_2026-09-30.md §四；模型現況見 T9、T8</a:t>
+              <a:t>來源：iPAS 骨架頁、9/30 會議記錄；模型現況見人工評估（T9）與本機模型報告（T8）</a:t>
             </a:r>
           </a:p>
         </p:txBody>
@@ -19535,7 +19701,7 @@
                 <a:ea typeface="微軟正黑體"/>
                 <a:cs typeface="Arial"/>
               </a:rPr>
-              <a:t>回廠率先假設提升十個百分點；導入約二十四週，之後持續監控</a:t>
+              <a:t>24 週導入，目標高風險回廠率 +10 個百分點</a:t>
             </a:r>
           </a:p>
         </p:txBody>
@@ -19596,8 +19762,8 @@
           <p:nvPr/>
         </p:nvGraphicFramePr>
         <p:xfrm>
-          <a:off x="420624" y="1261872"/>
-          <a:ext cx="11356848" cy="1691640"/>
+          <a:off x="420624" y="1225296"/>
+          <a:ext cx="11356848" cy="1874519"/>
         </p:xfrm>
         <a:graphic>
           <a:graphicData uri="http://schemas.openxmlformats.org/drawingml/2006/table">
@@ -19611,7 +19777,7 @@
                 <a:gridCol w="3520440"/>
                 <a:gridCol w="3538728"/>
               </a:tblGrid>
-              <a:tr h="422910">
+              <a:tr h="374903">
                 <a:tc>
                   <a:txBody>
                     <a:bodyPr wrap="square" anchor="ctr"/>
@@ -19629,7 +19795,7 @@
                         </a:spcAft>
                       </a:pPr>
                       <a:r>
-                        <a:rPr sz="1100" b="1" i="0">
+                        <a:rPr sz="1000" b="1" i="0">
                           <a:solidFill>
                             <a:srgbClr val="FFFFFF"/>
                           </a:solidFill>
@@ -19664,7 +19830,7 @@
                         </a:spcAft>
                       </a:pPr>
                       <a:r>
-                        <a:rPr sz="1100" b="1" i="0">
+                        <a:rPr sz="1000" b="1" i="0">
                           <a:solidFill>
                             <a:srgbClr val="FFFFFF"/>
                           </a:solidFill>
@@ -19699,7 +19865,7 @@
                         </a:spcAft>
                       </a:pPr>
                       <a:r>
-                        <a:rPr sz="1100" b="1" i="0">
+                        <a:rPr sz="1000" b="1" i="0">
                           <a:solidFill>
                             <a:srgbClr val="FFFFFF"/>
                           </a:solidFill>
@@ -19734,7 +19900,7 @@
                         </a:spcAft>
                       </a:pPr>
                       <a:r>
-                        <a:rPr sz="1100" b="1" i="0">
+                        <a:rPr sz="1000" b="1" i="0">
                           <a:solidFill>
                             <a:srgbClr val="FFFFFF"/>
                           </a:solidFill>
@@ -19753,7 +19919,7 @@
                   </a:tcPr>
                 </a:tc>
               </a:tr>
-              <a:tr h="422910">
+              <a:tr h="374903">
                 <a:tc>
                   <a:txBody>
                     <a:bodyPr wrap="square" anchor="ctr"/>
@@ -19771,7 +19937,7 @@
                         </a:spcAft>
                       </a:pPr>
                       <a:r>
-                        <a:rPr sz="1100" b="1" i="0">
+                        <a:rPr sz="1000" b="1" i="0">
                           <a:solidFill>
                             <a:srgbClr val="24323E"/>
                           </a:solidFill>
@@ -19806,7 +19972,7 @@
                         </a:spcAft>
                       </a:pPr>
                       <a:r>
-                        <a:rPr sz="1100" b="0" i="0">
+                        <a:rPr sz="1000" b="0" i="0">
                           <a:solidFill>
                             <a:srgbClr val="24323E"/>
                           </a:solidFill>
@@ -19841,7 +20007,7 @@
                         </a:spcAft>
                       </a:pPr>
                       <a:r>
-                        <a:rPr sz="1100" b="0" i="0">
+                        <a:rPr sz="1000" b="0" i="0">
                           <a:solidFill>
                             <a:srgbClr val="24323E"/>
                           </a:solidFill>
@@ -19876,7 +20042,7 @@
                         </a:spcAft>
                       </a:pPr>
                       <a:r>
-                        <a:rPr sz="1100" b="0" i="0">
+                        <a:rPr sz="1000" b="0" i="0">
                           <a:solidFill>
                             <a:srgbClr val="24323E"/>
                           </a:solidFill>
@@ -19895,7 +20061,7 @@
                   </a:tcPr>
                 </a:tc>
               </a:tr>
-              <a:tr h="422910">
+              <a:tr h="374903">
                 <a:tc>
                   <a:txBody>
                     <a:bodyPr wrap="square" anchor="ctr"/>
@@ -19913,7 +20079,7 @@
                         </a:spcAft>
                       </a:pPr>
                       <a:r>
-                        <a:rPr sz="1100" b="1" i="0">
+                        <a:rPr sz="1000" b="1" i="0">
                           <a:solidFill>
                             <a:srgbClr val="24323E"/>
                           </a:solidFill>
@@ -19948,7 +20114,7 @@
                         </a:spcAft>
                       </a:pPr>
                       <a:r>
-                        <a:rPr sz="1100" b="0" i="0">
+                        <a:rPr sz="1000" b="0" i="0">
                           <a:solidFill>
                             <a:srgbClr val="24323E"/>
                           </a:solidFill>
@@ -19983,7 +20149,7 @@
                         </a:spcAft>
                       </a:pPr>
                       <a:r>
-                        <a:rPr sz="1100" b="0" i="0">
+                        <a:rPr sz="1000" b="0" i="0">
                           <a:solidFill>
                             <a:srgbClr val="24323E"/>
                           </a:solidFill>
@@ -20018,7 +20184,7 @@
                         </a:spcAft>
                       </a:pPr>
                       <a:r>
-                        <a:rPr sz="1100" b="0" i="0">
+                        <a:rPr sz="1000" b="0" i="0">
                           <a:solidFill>
                             <a:srgbClr val="24323E"/>
                           </a:solidFill>
@@ -20037,7 +20203,7 @@
                   </a:tcPr>
                 </a:tc>
               </a:tr>
-              <a:tr h="422910">
+              <a:tr h="374903">
                 <a:tc>
                   <a:txBody>
                     <a:bodyPr wrap="square" anchor="ctr"/>
@@ -20055,7 +20221,7 @@
                         </a:spcAft>
                       </a:pPr>
                       <a:r>
-                        <a:rPr sz="1100" b="1" i="0">
+                        <a:rPr sz="1000" b="1" i="0">
                           <a:solidFill>
                             <a:srgbClr val="24323E"/>
                           </a:solidFill>
@@ -20063,7 +20229,7 @@
                           <a:ea typeface="微軟正黑體"/>
                           <a:cs typeface="Arial"/>
                         </a:rPr>
-                        <a:t>模型</a:t>
+                        <a:t>流程</a:t>
                       </a:r>
                     </a:p>
                   </a:txBody>
@@ -20090,7 +20256,7 @@
                         </a:spcAft>
                       </a:pPr>
                       <a:r>
-                        <a:rPr sz="1100" b="0" i="0">
+                        <a:rPr sz="1000" b="0" i="0">
                           <a:solidFill>
                             <a:srgbClr val="24323E"/>
                           </a:solidFill>
@@ -20098,7 +20264,7 @@
                           <a:ea typeface="微軟正黑體"/>
                           <a:cs typeface="Arial"/>
                         </a:rPr>
-                        <a:t>隨機層 F1、κ；每句判斷時間</a:t>
+                        <a:t>高風險名單人工篩選工時</a:t>
                       </a:r>
                     </a:p>
                   </a:txBody>
@@ -20125,7 +20291,7 @@
                         </a:spcAft>
                       </a:pPr>
                       <a:r>
-                        <a:rPr sz="1100" b="0" i="0">
+                        <a:rPr sz="1000" b="0" i="0">
                           <a:solidFill>
                             <a:srgbClr val="24323E"/>
                           </a:solidFill>
@@ -20133,7 +20299,7 @@
                           <a:ea typeface="微軟正黑體"/>
                           <a:cs typeface="Arial"/>
                         </a:rPr>
-                        <a:t>F1 0.82、κ 0.81；0.7 秒</a:t>
+                        <a:t>人工約 106 人時 → 模型 4.1 小時</a:t>
                       </a:r>
                     </a:p>
                   </a:txBody>
@@ -20160,7 +20326,149 @@
                         </a:spcAft>
                       </a:pPr>
                       <a:r>
-                        <a:rPr sz="1100" b="0" i="0">
+                        <a:rPr sz="1000" b="0" i="0">
+                          <a:solidFill>
+                            <a:srgbClr val="24323E"/>
+                          </a:solidFill>
+                          <a:latin typeface="Arial"/>
+                          <a:ea typeface="微軟正黑體"/>
+                          <a:cs typeface="Arial"/>
+                        </a:rPr>
+                        <a:t>−90% 以上（估）</a:t>
+                      </a:r>
+                    </a:p>
+                  </a:txBody>
+                  <a:tcPr anchor="ctr" marL="73152" marR="54864" marT="36576" marB="27432">
+                    <a:solidFill>
+                      <a:srgbClr val="FFFFFF"/>
+                    </a:solidFill>
+                  </a:tcPr>
+                </a:tc>
+              </a:tr>
+              <a:tr h="374907">
+                <a:tc>
+                  <a:txBody>
+                    <a:bodyPr wrap="square" anchor="ctr"/>
+                    <a:lstStyle/>
+                    <a:p>
+                      <a:pPr>
+                        <a:lnSpc>
+                          <a:spcPct val="100000"/>
+                        </a:lnSpc>
+                        <a:spcBef>
+                          <a:spcPts val="0"/>
+                        </a:spcBef>
+                        <a:spcAft>
+                          <a:spcPts val="200"/>
+                        </a:spcAft>
+                      </a:pPr>
+                      <a:r>
+                        <a:rPr sz="1000" b="1" i="0">
+                          <a:solidFill>
+                            <a:srgbClr val="24323E"/>
+                          </a:solidFill>
+                          <a:latin typeface="Arial"/>
+                          <a:ea typeface="微軟正黑體"/>
+                          <a:cs typeface="Arial"/>
+                        </a:rPr>
+                        <a:t>模型</a:t>
+                      </a:r>
+                    </a:p>
+                  </a:txBody>
+                  <a:tcPr anchor="ctr" marL="73152" marR="54864" marT="36576" marB="27432">
+                    <a:solidFill>
+                      <a:srgbClr val="F7F9FB"/>
+                    </a:solidFill>
+                  </a:tcPr>
+                </a:tc>
+                <a:tc>
+                  <a:txBody>
+                    <a:bodyPr wrap="square" anchor="ctr"/>
+                    <a:lstStyle/>
+                    <a:p>
+                      <a:pPr>
+                        <a:lnSpc>
+                          <a:spcPct val="100000"/>
+                        </a:lnSpc>
+                        <a:spcBef>
+                          <a:spcPts val="0"/>
+                        </a:spcBef>
+                        <a:spcAft>
+                          <a:spcPts val="200"/>
+                        </a:spcAft>
+                      </a:pPr>
+                      <a:r>
+                        <a:rPr sz="1000" b="0" i="0">
+                          <a:solidFill>
+                            <a:srgbClr val="24323E"/>
+                          </a:solidFill>
+                          <a:latin typeface="Arial"/>
+                          <a:ea typeface="微軟正黑體"/>
+                          <a:cs typeface="Arial"/>
+                        </a:rPr>
+                        <a:t>隨機層 F1、κ；每句判斷時間</a:t>
+                      </a:r>
+                    </a:p>
+                  </a:txBody>
+                  <a:tcPr anchor="ctr" marL="73152" marR="54864" marT="36576" marB="27432">
+                    <a:solidFill>
+                      <a:srgbClr val="F7F9FB"/>
+                    </a:solidFill>
+                  </a:tcPr>
+                </a:tc>
+                <a:tc>
+                  <a:txBody>
+                    <a:bodyPr wrap="square" anchor="ctr"/>
+                    <a:lstStyle/>
+                    <a:p>
+                      <a:pPr>
+                        <a:lnSpc>
+                          <a:spcPct val="100000"/>
+                        </a:lnSpc>
+                        <a:spcBef>
+                          <a:spcPts val="0"/>
+                        </a:spcBef>
+                        <a:spcAft>
+                          <a:spcPts val="200"/>
+                        </a:spcAft>
+                      </a:pPr>
+                      <a:r>
+                        <a:rPr sz="1000" b="0" i="0">
+                          <a:solidFill>
+                            <a:srgbClr val="24323E"/>
+                          </a:solidFill>
+                          <a:latin typeface="Arial"/>
+                          <a:ea typeface="微軟正黑體"/>
+                          <a:cs typeface="Arial"/>
+                        </a:rPr>
+                        <a:t>F1 0.82、κ 0.81；0.7 秒</a:t>
+                      </a:r>
+                    </a:p>
+                  </a:txBody>
+                  <a:tcPr anchor="ctr" marL="73152" marR="54864" marT="36576" marB="27432">
+                    <a:solidFill>
+                      <a:srgbClr val="F7F9FB"/>
+                    </a:solidFill>
+                  </a:tcPr>
+                </a:tc>
+                <a:tc>
+                  <a:txBody>
+                    <a:bodyPr wrap="square" anchor="ctr"/>
+                    <a:lstStyle/>
+                    <a:p>
+                      <a:pPr>
+                        <a:lnSpc>
+                          <a:spcPct val="100000"/>
+                        </a:lnSpc>
+                        <a:spcBef>
+                          <a:spcPts val="0"/>
+                        </a:spcBef>
+                        <a:spcAft>
+                          <a:spcPts val="200"/>
+                        </a:spcAft>
+                      </a:pPr>
+                      <a:r>
+                        <a:rPr sz="1000" b="0" i="0">
                           <a:solidFill>
                             <a:srgbClr val="24323E"/>
                           </a:solidFill>
@@ -20174,7 +20482,7 @@
                   </a:txBody>
                   <a:tcPr anchor="ctr" marL="73152" marR="54864" marT="36576" marB="27432">
                     <a:solidFill>
-                      <a:srgbClr val="FFFFFF"/>
+                      <a:srgbClr val="F7F9FB"/>
                     </a:solidFill>
                   </a:tcPr>
                 </a:tc>
@@ -20191,8 +20499,8 @@
         </p:nvSpPr>
         <p:spPr>
           <a:xfrm>
-            <a:off x="420624" y="2980944"/>
-            <a:ext cx="11356848" cy="237744"/>
+            <a:off x="420624" y="3108960"/>
+            <a:ext cx="11356848" cy="201168"/>
           </a:xfrm>
           <a:prstGeom prst="rect">
             <a:avLst/>
@@ -20238,8 +20546,8 @@
         </p:nvSpPr>
         <p:spPr>
           <a:xfrm>
-            <a:off x="420624" y="3291840"/>
-            <a:ext cx="2183587" cy="1417320"/>
+            <a:off x="420624" y="3328416"/>
+            <a:ext cx="11356848" cy="1170432"/>
           </a:xfrm>
           <a:prstGeom prst="roundRect">
             <a:avLst>
@@ -20283,8 +20591,8 @@
         </p:nvSpPr>
         <p:spPr>
           <a:xfrm>
-            <a:off x="475488" y="3364992"/>
-            <a:ext cx="2073859" cy="1280160"/>
+            <a:off x="548640" y="3383280"/>
+            <a:ext cx="11100816" cy="1060704"/>
           </a:xfrm>
           <a:prstGeom prst="rect">
             <a:avLst/>
@@ -20309,7 +20617,7 @@
               </a:spcAft>
             </a:pPr>
             <a:r>
-              <a:rPr sz="1600" b="1" i="0">
+              <a:rPr sz="1400" b="1" i="0">
                 <a:solidFill>
                   <a:srgbClr val="2F5D9F"/>
                 </a:solidFill>
@@ -20317,7 +20625,7 @@
                 <a:ea typeface="微軟正黑體"/>
                 <a:cs typeface="Arial"/>
               </a:rPr>
-              <a:t>1</a:t>
+              <a:t>數據護城河：三項資產，全部留在和泰內網</a:t>
             </a:r>
           </a:p>
           <a:p>
@@ -20333,7 +20641,7 @@
               </a:spcAft>
             </a:pPr>
             <a:r>
-              <a:rPr sz="1300" b="1" i="0">
+              <a:rPr sz="1300" b="0" i="0">
                 <a:solidFill>
                   <a:srgbClr val="24323E"/>
                 </a:solidFill>
@@ -20341,7 +20649,7 @@
                 <a:ea typeface="微軟正黑體"/>
                 <a:cs typeface="Arial"/>
               </a:rPr>
-              <a:t>資料接入</a:t>
+              <a:t>語料：2.1 萬句標註＋300 句人工金標</a:t>
             </a:r>
           </a:p>
           <a:p>
@@ -20357,76 +20665,53 @@
               </a:spcAft>
             </a:pPr>
             <a:r>
-              <a:rPr sz="1300" b="1" i="0">
+              <a:rPr sz="1300" b="0" i="0">
                 <a:solidFill>
-                  <a:srgbClr val="44546A"/>
+                  <a:srgbClr val="24323E"/>
                 </a:solidFill>
                 <a:latin typeface="Arial"/>
                 <a:ea typeface="微軟正黑體"/>
                 <a:cs typeface="Arial"/>
               </a:rPr>
-              <a:t>4 週</a:t>
+              <a:t>模型：自有 4B 模型，8 GB 顯卡 5 小時可重訓。人工審核回饋持續再訓練。</a:t>
+            </a:r>
+          </a:p>
+          <a:p>
+            <a:pPr>
+              <a:lnSpc>
+                <a:spcPct val="100000"/>
+              </a:lnSpc>
+              <a:spcBef>
+                <a:spcPts val="0"/>
+              </a:spcBef>
+              <a:spcAft>
+                <a:spcPts val="200"/>
+              </a:spcAft>
+            </a:pPr>
+            <a:r>
+              <a:rPr sz="1300" b="0" i="0">
+                <a:solidFill>
+                  <a:srgbClr val="24323E"/>
+                </a:solidFill>
+                <a:latin typeface="Arial"/>
+                <a:ea typeface="微軟正黑體"/>
+                <a:cs typeface="Arial"/>
+              </a:rPr>
+              <a:t>知識庫：76 條官方條款＋每則話術查核紀錄</a:t>
             </a:r>
           </a:p>
         </p:txBody>
       </p:sp>
       <p:sp>
         <p:nvSpPr>
-          <p:cNvPr id="11" name="TextBox 10"/>
-          <p:cNvSpPr txBox="1"/>
-          <p:nvPr/>
-        </p:nvSpPr>
-        <p:spPr>
-          <a:xfrm>
-            <a:off x="420624" y="4754880"/>
-            <a:ext cx="2183587" cy="566928"/>
-          </a:xfrm>
-          <a:prstGeom prst="rect">
-            <a:avLst/>
-          </a:prstGeom>
-          <a:noFill/>
-        </p:spPr>
-        <p:txBody>
-          <a:bodyPr wrap="square" lIns="36576" rIns="36576" tIns="18288" bIns="18288" anchor="t">
-            <a:spAutoFit/>
-          </a:bodyPr>
-          <a:lstStyle/>
-          <a:p>
-            <a:pPr>
-              <a:lnSpc>
-                <a:spcPct val="100000"/>
-              </a:lnSpc>
-              <a:spcBef>
-                <a:spcPts val="0"/>
-              </a:spcBef>
-              <a:spcAft>
-                <a:spcPts val="200"/>
-              </a:spcAft>
-            </a:pPr>
-            <a:r>
-              <a:rPr sz="1000" b="0" i="0">
-                <a:solidFill>
-                  <a:srgbClr val="5C6B7A"/>
-                </a:solidFill>
-                <a:latin typeface="Arial"/>
-                <a:ea typeface="微軟正黑體"/>
-                <a:cs typeface="Arial"/>
-              </a:rPr>
-              <a:t>R1–R8 換成 DMS 實際欄位，工單文字去識別後接入</a:t>
-            </a:r>
-          </a:p>
-        </p:txBody>
-      </p:sp>
-      <p:sp>
-        <p:nvSpPr>
-          <p:cNvPr id="12" name="Rounded Rectangle 11"/>
+          <p:cNvPr id="11" name="Rounded Rectangle 10"/>
           <p:cNvSpPr/>
           <p:nvPr/>
         </p:nvSpPr>
         <p:spPr>
           <a:xfrm>
-            <a:off x="2713939" y="3291840"/>
-            <a:ext cx="2183587" cy="1417320"/>
+            <a:off x="420624" y="4572000"/>
+            <a:ext cx="2183587" cy="960120"/>
           </a:xfrm>
           <a:prstGeom prst="roundRect">
             <a:avLst>
@@ -20464,14 +20749,14 @@
       </p:sp>
       <p:sp>
         <p:nvSpPr>
-          <p:cNvPr id="13" name="TextBox 12"/>
+          <p:cNvPr id="12" name="TextBox 11"/>
           <p:cNvSpPr txBox="1"/>
           <p:nvPr/>
         </p:nvSpPr>
         <p:spPr>
           <a:xfrm>
-            <a:off x="2768803" y="3364992"/>
-            <a:ext cx="2073859" cy="1280160"/>
+            <a:off x="475488" y="4608576"/>
+            <a:ext cx="2073859" cy="896112"/>
           </a:xfrm>
           <a:prstGeom prst="rect">
             <a:avLst/>
@@ -20496,7 +20781,7 @@
               </a:spcAft>
             </a:pPr>
             <a:r>
-              <a:rPr sz="1600" b="1" i="0">
+              <a:rPr sz="1200" b="1" i="0">
                 <a:solidFill>
                   <a:srgbClr val="2F5D9F"/>
                 </a:solidFill>
@@ -20504,7 +20789,7 @@
                 <a:ea typeface="微軟正黑體"/>
                 <a:cs typeface="Arial"/>
               </a:rPr>
-              <a:t>2</a:t>
+              <a:t>1  資料接入</a:t>
             </a:r>
           </a:p>
           <a:p>
@@ -20520,31 +20805,7 @@
               </a:spcAft>
             </a:pPr>
             <a:r>
-              <a:rPr sz="1300" b="1" i="0">
-                <a:solidFill>
-                  <a:srgbClr val="24323E"/>
-                </a:solidFill>
-                <a:latin typeface="Arial"/>
-                <a:ea typeface="微軟正黑體"/>
-                <a:cs typeface="Arial"/>
-              </a:rPr>
-              <a:t>模型校準</a:t>
-            </a:r>
-          </a:p>
-          <a:p>
-            <a:pPr>
-              <a:lnSpc>
-                <a:spcPct val="100000"/>
-              </a:lnSpc>
-              <a:spcBef>
-                <a:spcPts val="0"/>
-              </a:spcBef>
-              <a:spcAft>
-                <a:spcPts val="200"/>
-              </a:spcAft>
-            </a:pPr>
-            <a:r>
-              <a:rPr sz="1300" b="1" i="0">
+              <a:rPr sz="1200" b="1" i="0">
                 <a:solidFill>
                   <a:srgbClr val="44546A"/>
                 </a:solidFill>
@@ -20554,6 +20815,75 @@
               </a:rPr>
               <a:t>4 週</a:t>
             </a:r>
+          </a:p>
+          <a:p>
+            <a:pPr>
+              <a:lnSpc>
+                <a:spcPct val="100000"/>
+              </a:lnSpc>
+              <a:spcBef>
+                <a:spcPts val="0"/>
+              </a:spcBef>
+              <a:spcAft>
+                <a:spcPts val="200"/>
+              </a:spcAft>
+            </a:pPr>
+            <a:r>
+              <a:rPr sz="1000" b="0" i="0">
+                <a:solidFill>
+                  <a:srgbClr val="5C6B7A"/>
+                </a:solidFill>
+                <a:latin typeface="Arial"/>
+                <a:ea typeface="微軟正黑體"/>
+                <a:cs typeface="Arial"/>
+              </a:rPr>
+              <a:t>R1–R8 換成 DMS 實際欄位，工單文字去識別後接入</a:t>
+            </a:r>
+          </a:p>
+        </p:txBody>
+      </p:sp>
+      <p:sp>
+        <p:nvSpPr>
+          <p:cNvPr id="13" name="Rounded Rectangle 12"/>
+          <p:cNvSpPr/>
+          <p:nvPr/>
+        </p:nvSpPr>
+        <p:spPr>
+          <a:xfrm>
+            <a:off x="2713939" y="4572000"/>
+            <a:ext cx="2183587" cy="960120"/>
+          </a:xfrm>
+          <a:prstGeom prst="roundRect">
+            <a:avLst>
+              <a:gd name="adj" fmla="val 8000"/>
+            </a:avLst>
+          </a:prstGeom>
+          <a:solidFill>
+            <a:srgbClr val="F4F7FB"/>
+          </a:solidFill>
+          <a:ln>
+            <a:noFill/>
+          </a:ln>
+        </p:spPr>
+        <p:style>
+          <a:lnRef idx="1">
+            <a:schemeClr val="accent1"/>
+          </a:lnRef>
+          <a:fillRef idx="3">
+            <a:schemeClr val="accent1"/>
+          </a:fillRef>
+          <a:effectRef idx="2">
+            <a:schemeClr val="accent1"/>
+          </a:effectRef>
+          <a:fontRef idx="minor">
+            <a:schemeClr val="lt1"/>
+          </a:fontRef>
+        </p:style>
+        <p:txBody>
+          <a:bodyPr rtlCol="0" anchor="ctr"/>
+          <a:lstStyle/>
+          <a:p>
+            <a:pPr algn="ctr"/>
           </a:p>
         </p:txBody>
       </p:sp>
@@ -20565,8 +20895,8 @@
         </p:nvSpPr>
         <p:spPr>
           <a:xfrm>
-            <a:off x="2713939" y="4754880"/>
-            <a:ext cx="2183587" cy="566928"/>
+            <a:off x="2768803" y="4608576"/>
+            <a:ext cx="2073859" cy="896112"/>
           </a:xfrm>
           <a:prstGeom prst="rect">
             <a:avLst/>
@@ -20578,6 +20908,54 @@
             <a:spAutoFit/>
           </a:bodyPr>
           <a:lstStyle/>
+          <a:p>
+            <a:pPr>
+              <a:lnSpc>
+                <a:spcPct val="100000"/>
+              </a:lnSpc>
+              <a:spcBef>
+                <a:spcPts val="0"/>
+              </a:spcBef>
+              <a:spcAft>
+                <a:spcPts val="200"/>
+              </a:spcAft>
+            </a:pPr>
+            <a:r>
+              <a:rPr sz="1200" b="1" i="0">
+                <a:solidFill>
+                  <a:srgbClr val="2F5D9F"/>
+                </a:solidFill>
+                <a:latin typeface="Arial"/>
+                <a:ea typeface="微軟正黑體"/>
+                <a:cs typeface="Arial"/>
+              </a:rPr>
+              <a:t>2  模型校準</a:t>
+            </a:r>
+          </a:p>
+          <a:p>
+            <a:pPr>
+              <a:lnSpc>
+                <a:spcPct val="100000"/>
+              </a:lnSpc>
+              <a:spcBef>
+                <a:spcPts val="0"/>
+              </a:spcBef>
+              <a:spcAft>
+                <a:spcPts val="200"/>
+              </a:spcAft>
+            </a:pPr>
+            <a:r>
+              <a:rPr sz="1200" b="1" i="0">
+                <a:solidFill>
+                  <a:srgbClr val="44546A"/>
+                </a:solidFill>
+                <a:latin typeface="Arial"/>
+                <a:ea typeface="微軟正黑體"/>
+                <a:cs typeface="Arial"/>
+              </a:rPr>
+              <a:t>4 週</a:t>
+            </a:r>
+          </a:p>
           <a:p>
             <a:pPr>
               <a:lnSpc>
@@ -20612,8 +20990,8 @@
         </p:nvSpPr>
         <p:spPr>
           <a:xfrm>
-            <a:off x="5007254" y="3291840"/>
-            <a:ext cx="2183587" cy="1417320"/>
+            <a:off x="5007254" y="4572000"/>
+            <a:ext cx="2183587" cy="960120"/>
           </a:xfrm>
           <a:prstGeom prst="roundRect">
             <a:avLst>
@@ -20657,8 +21035,8 @@
         </p:nvSpPr>
         <p:spPr>
           <a:xfrm>
-            <a:off x="5062118" y="3364992"/>
-            <a:ext cx="2073859" cy="1280160"/>
+            <a:off x="5062118" y="4608576"/>
+            <a:ext cx="2073859" cy="896112"/>
           </a:xfrm>
           <a:prstGeom prst="rect">
             <a:avLst/>
@@ -20683,7 +21061,7 @@
               </a:spcAft>
             </a:pPr>
             <a:r>
-              <a:rPr sz="1600" b="1" i="0">
+              <a:rPr sz="1200" b="1" i="0">
                 <a:solidFill>
                   <a:srgbClr val="2F5D9F"/>
                 </a:solidFill>
@@ -20691,7 +21069,7 @@
                 <a:ea typeface="微軟正黑體"/>
                 <a:cs typeface="Arial"/>
               </a:rPr>
-              <a:t>3</a:t>
+              <a:t>3  單一據點試行</a:t>
             </a:r>
           </a:p>
           <a:p>
@@ -20707,31 +21085,7 @@
               </a:spcAft>
             </a:pPr>
             <a:r>
-              <a:rPr sz="1300" b="1" i="0">
-                <a:solidFill>
-                  <a:srgbClr val="24323E"/>
-                </a:solidFill>
-                <a:latin typeface="Arial"/>
-                <a:ea typeface="微軟正黑體"/>
-                <a:cs typeface="Arial"/>
-              </a:rPr>
-              <a:t>單一據點試行</a:t>
-            </a:r>
-          </a:p>
-          <a:p>
-            <a:pPr>
-              <a:lnSpc>
-                <a:spcPct val="100000"/>
-              </a:lnSpc>
-              <a:spcBef>
-                <a:spcPts val="0"/>
-              </a:spcBef>
-              <a:spcAft>
-                <a:spcPts val="200"/>
-              </a:spcAft>
-            </a:pPr>
-            <a:r>
-              <a:rPr sz="1300" b="1" i="0">
+              <a:rPr sz="1200" b="1" i="0">
                 <a:solidFill>
                   <a:srgbClr val="44546A"/>
                 </a:solidFill>
@@ -20742,29 +21096,6 @@
               <a:t>8 週</a:t>
             </a:r>
           </a:p>
-        </p:txBody>
-      </p:sp>
-      <p:sp>
-        <p:nvSpPr>
-          <p:cNvPr id="17" name="TextBox 16"/>
-          <p:cNvSpPr txBox="1"/>
-          <p:nvPr/>
-        </p:nvSpPr>
-        <p:spPr>
-          <a:xfrm>
-            <a:off x="5007254" y="4754880"/>
-            <a:ext cx="2183587" cy="566928"/>
-          </a:xfrm>
-          <a:prstGeom prst="rect">
-            <a:avLst/>
-          </a:prstGeom>
-          <a:noFill/>
-        </p:spPr>
-        <p:txBody>
-          <a:bodyPr wrap="square" lIns="36576" rIns="36576" tIns="18288" bIns="18288" anchor="t">
-            <a:spAutoFit/>
-          </a:bodyPr>
-          <a:lstStyle/>
           <a:p>
             <a:pPr>
               <a:lnSpc>
@@ -20793,14 +21124,14 @@
       </p:sp>
       <p:sp>
         <p:nvSpPr>
-          <p:cNvPr id="18" name="Rounded Rectangle 17"/>
+          <p:cNvPr id="17" name="Rounded Rectangle 16"/>
           <p:cNvSpPr/>
           <p:nvPr/>
         </p:nvSpPr>
         <p:spPr>
           <a:xfrm>
-            <a:off x="7300569" y="3291840"/>
-            <a:ext cx="2183587" cy="1417320"/>
+            <a:off x="7300569" y="4572000"/>
+            <a:ext cx="2183587" cy="960120"/>
           </a:xfrm>
           <a:prstGeom prst="roundRect">
             <a:avLst>
@@ -20838,14 +21169,14 @@
       </p:sp>
       <p:sp>
         <p:nvSpPr>
-          <p:cNvPr id="19" name="TextBox 18"/>
+          <p:cNvPr id="18" name="TextBox 17"/>
           <p:cNvSpPr txBox="1"/>
           <p:nvPr/>
         </p:nvSpPr>
         <p:spPr>
           <a:xfrm>
-            <a:off x="7355433" y="3364992"/>
-            <a:ext cx="2073859" cy="1280160"/>
+            <a:off x="7355433" y="4608576"/>
+            <a:ext cx="2073859" cy="896112"/>
           </a:xfrm>
           <a:prstGeom prst="rect">
             <a:avLst/>
@@ -20870,7 +21201,7 @@
               </a:spcAft>
             </a:pPr>
             <a:r>
-              <a:rPr sz="1600" b="1" i="0">
+              <a:rPr sz="1200" b="1" i="0">
                 <a:solidFill>
                   <a:srgbClr val="2F5D9F"/>
                 </a:solidFill>
@@ -20878,7 +21209,7 @@
                 <a:ea typeface="微軟正黑體"/>
                 <a:cs typeface="Arial"/>
               </a:rPr>
-              <a:t>4</a:t>
+              <a:t>4  擴大至全台</a:t>
             </a:r>
           </a:p>
           <a:p>
@@ -20894,31 +21225,7 @@
               </a:spcAft>
             </a:pPr>
             <a:r>
-              <a:rPr sz="1300" b="1" i="0">
-                <a:solidFill>
-                  <a:srgbClr val="24323E"/>
-                </a:solidFill>
-                <a:latin typeface="Arial"/>
-                <a:ea typeface="微軟正黑體"/>
-                <a:cs typeface="Arial"/>
-              </a:rPr>
-              <a:t>擴大至全台</a:t>
-            </a:r>
-          </a:p>
-          <a:p>
-            <a:pPr>
-              <a:lnSpc>
-                <a:spcPct val="100000"/>
-              </a:lnSpc>
-              <a:spcBef>
-                <a:spcPts val="0"/>
-              </a:spcBef>
-              <a:spcAft>
-                <a:spcPts val="200"/>
-              </a:spcAft>
-            </a:pPr>
-            <a:r>
-              <a:rPr sz="1300" b="1" i="0">
+              <a:rPr sz="1200" b="1" i="0">
                 <a:solidFill>
                   <a:srgbClr val="44546A"/>
                 </a:solidFill>
@@ -20929,29 +21236,6 @@
               <a:t>8 週</a:t>
             </a:r>
           </a:p>
-        </p:txBody>
-      </p:sp>
-      <p:sp>
-        <p:nvSpPr>
-          <p:cNvPr id="20" name="TextBox 19"/>
-          <p:cNvSpPr txBox="1"/>
-          <p:nvPr/>
-        </p:nvSpPr>
-        <p:spPr>
-          <a:xfrm>
-            <a:off x="7300569" y="4754880"/>
-            <a:ext cx="2183587" cy="566928"/>
-          </a:xfrm>
-          <a:prstGeom prst="rect">
-            <a:avLst/>
-          </a:prstGeom>
-          <a:noFill/>
-        </p:spPr>
-        <p:txBody>
-          <a:bodyPr wrap="square" lIns="36576" rIns="36576" tIns="18288" bIns="18288" anchor="t">
-            <a:spAutoFit/>
-          </a:bodyPr>
-          <a:lstStyle/>
           <a:p>
             <a:pPr>
               <a:lnSpc>
@@ -20980,14 +21264,14 @@
       </p:sp>
       <p:sp>
         <p:nvSpPr>
-          <p:cNvPr id="21" name="Rounded Rectangle 20"/>
+          <p:cNvPr id="19" name="Rounded Rectangle 18"/>
           <p:cNvSpPr/>
           <p:nvPr/>
         </p:nvSpPr>
         <p:spPr>
           <a:xfrm>
-            <a:off x="9593884" y="3291840"/>
-            <a:ext cx="2183587" cy="1417320"/>
+            <a:off x="9593884" y="4572000"/>
+            <a:ext cx="2183587" cy="960120"/>
           </a:xfrm>
           <a:prstGeom prst="roundRect">
             <a:avLst>
@@ -21025,14 +21309,14 @@
       </p:sp>
       <p:sp>
         <p:nvSpPr>
-          <p:cNvPr id="22" name="TextBox 21"/>
+          <p:cNvPr id="20" name="TextBox 19"/>
           <p:cNvSpPr txBox="1"/>
           <p:nvPr/>
         </p:nvSpPr>
         <p:spPr>
           <a:xfrm>
-            <a:off x="9648748" y="3364992"/>
-            <a:ext cx="2073859" cy="1280160"/>
+            <a:off x="9648748" y="4608576"/>
+            <a:ext cx="2073859" cy="896112"/>
           </a:xfrm>
           <a:prstGeom prst="rect">
             <a:avLst/>
@@ -21057,7 +21341,7 @@
               </a:spcAft>
             </a:pPr>
             <a:r>
-              <a:rPr sz="1600" b="1" i="0">
+              <a:rPr sz="1200" b="1" i="0">
                 <a:solidFill>
                   <a:srgbClr val="2F5D9F"/>
                 </a:solidFill>
@@ -21065,7 +21349,7 @@
                 <a:ea typeface="微軟正黑體"/>
                 <a:cs typeface="Arial"/>
               </a:rPr>
-              <a:t>5</a:t>
+              <a:t>5  持續監控</a:t>
             </a:r>
           </a:p>
           <a:p>
@@ -21081,31 +21365,7 @@
               </a:spcAft>
             </a:pPr>
             <a:r>
-              <a:rPr sz="1300" b="1" i="0">
-                <a:solidFill>
-                  <a:srgbClr val="24323E"/>
-                </a:solidFill>
-                <a:latin typeface="Arial"/>
-                <a:ea typeface="微軟正黑體"/>
-                <a:cs typeface="Arial"/>
-              </a:rPr>
-              <a:t>持續監控</a:t>
-            </a:r>
-          </a:p>
-          <a:p>
-            <a:pPr>
-              <a:lnSpc>
-                <a:spcPct val="100000"/>
-              </a:lnSpc>
-              <a:spcBef>
-                <a:spcPts val="0"/>
-              </a:spcBef>
-              <a:spcAft>
-                <a:spcPts val="200"/>
-              </a:spcAft>
-            </a:pPr>
-            <a:r>
-              <a:rPr sz="1300" b="1" i="0">
+              <a:rPr sz="1200" b="1" i="0">
                 <a:solidFill>
                   <a:srgbClr val="44546A"/>
                 </a:solidFill>
@@ -21116,29 +21376,6 @@
               <a:t>不設終點</a:t>
             </a:r>
           </a:p>
-        </p:txBody>
-      </p:sp>
-      <p:sp>
-        <p:nvSpPr>
-          <p:cNvPr id="23" name="TextBox 22"/>
-          <p:cNvSpPr txBox="1"/>
-          <p:nvPr/>
-        </p:nvSpPr>
-        <p:spPr>
-          <a:xfrm>
-            <a:off x="9593884" y="4754880"/>
-            <a:ext cx="2183587" cy="566928"/>
-          </a:xfrm>
-          <a:prstGeom prst="rect">
-            <a:avLst/>
-          </a:prstGeom>
-          <a:noFill/>
-        </p:spPr>
-        <p:txBody>
-          <a:bodyPr wrap="square" lIns="36576" rIns="36576" tIns="18288" bIns="18288" anchor="t">
-            <a:spAutoFit/>
-          </a:bodyPr>
-          <a:lstStyle/>
           <a:p>
             <a:pPr>
               <a:lnSpc>
@@ -21167,14 +21404,14 @@
       </p:sp>
       <p:sp>
         <p:nvSpPr>
-          <p:cNvPr id="24" name="TextBox 23"/>
+          <p:cNvPr id="21" name="TextBox 20"/>
           <p:cNvSpPr txBox="1"/>
           <p:nvPr/>
         </p:nvSpPr>
         <p:spPr>
           <a:xfrm>
-            <a:off x="420624" y="5340096"/>
-            <a:ext cx="11356848" cy="256032"/>
+            <a:off x="420624" y="5577840"/>
+            <a:ext cx="11356848" cy="219456"/>
           </a:xfrm>
           <a:prstGeom prst="rect">
             <a:avLst/>
@@ -21199,7 +21436,7 @@
               </a:spcAft>
             </a:pPr>
             <a:r>
-              <a:rPr sz="1300" b="1" i="0">
+              <a:rPr sz="1200" b="1" i="0">
                 <a:solidFill>
                   <a:srgbClr val="24323E"/>
                 </a:solidFill>
@@ -21319,7 +21556,7 @@
                 <a:ea typeface="微軟正黑體"/>
                 <a:cs typeface="Arial"/>
               </a:rPr>
-              <a:t>來源：L7運作流程_2026-09-30.md；圖 F8。線框為示意</a:t>
+              <a:t>來源：L7 運作流程；圖 F8。線框為示意</a:t>
             </a:r>
           </a:p>
         </p:txBody>
@@ -21413,7 +21650,7 @@
                 <a:ea typeface="微軟正黑體"/>
                 <a:cs typeface="Arial"/>
               </a:rPr>
-              <a:t>流程圖在左；右邊是溝通審核佇列線框，決賽再給可操作版</a:t>
+              <a:t>每則話術都經人工核准；決賽提供可操作版</a:t>
             </a:r>
           </a:p>
         </p:txBody>
@@ -22360,7 +22597,7 @@
                 <a:ea typeface="微軟正黑體"/>
                 <a:cs typeface="Arial"/>
               </a:rPr>
-              <a:t>來源：reports/T8_r4_report.md、T9_human_eval.md、T10_risk_persona_report.md</a:t>
+              <a:t>來源：本機模型報告（T8）、人工評估（T9）、風險與 Persona 報告（T10）</a:t>
             </a:r>
           </a:p>
         </p:txBody>
@@ -23862,7 +24099,7 @@
                           <a:ea typeface="微軟正黑體"/>
                           <a:cs typeface="Arial"/>
                         </a:rPr>
-                        <a:t>76 條（官網 40、手冊 36）；14 則話術每則附引用與查核</a:t>
+                        <a:t>76 條（官網 40、手冊 36）；16 則話術每則附引用與查核</a:t>
                       </a:r>
                     </a:p>
                   </a:txBody>
@@ -24091,7 +24328,7 @@
                 <a:ea typeface="微軟正黑體"/>
                 <a:cs typeface="Arial"/>
               </a:rPr>
-              <a:t>來源：reports/T7_stats_tests.md、T10_risk_persona_report.md、T8_r4_report.md、T15_trend_reports.md</a:t>
+              <a:t>來源：統計檢定報告（T7）、風險與 Persona 報告（T10）、本機模型報告（T8）、趨勢報告（T15）</a:t>
             </a:r>
           </a:p>
         </p:txBody>
@@ -24696,7 +24933,7 @@
         </p:nvGraphicFramePr>
         <p:xfrm>
           <a:off x="435425" y="1248788"/>
-          <a:ext cx="3000000" cy="4864608"/>
+          <a:ext cx="3000000" cy="4919472"/>
         </p:xfrm>
         <a:graphic>
           <a:graphicData uri="http://schemas.openxmlformats.org/drawingml/2006/table">
@@ -25265,7 +25502,7 @@
                   </a:tcPr>
                 </a:tc>
               </a:tr>
-              <a:tr h="1298448">
+              <a:tr h="1170432">
                 <a:tc>
                   <a:txBody>
                     <a:bodyPr/>
@@ -25634,7 +25871,7 @@
                   </a:tcPr>
                 </a:tc>
               </a:tr>
-              <a:tr h="987552">
+              <a:tr h="1170432">
                 <a:tc>
                   <a:txBody>
                     <a:bodyPr/>
@@ -25753,7 +25990,7 @@
                           <a:ea typeface="微軟正黑體"/>
                           <a:cs typeface="Arial"/>
                         </a:rPr>
-                        <a:t>流程：高風險名單每月更新、話術人工核准率 ≥ 80%。</a:t>
+                        <a:t>流程：高風險名單每月更新、話術人工核准率 ≥ 80%。高風險名單人工篩選工時 −90% 以上（估）。</a:t>
                       </a:r>
                     </a:p>
                     <a:p>
@@ -25932,7 +26169,7 @@
                 <a:ea typeface="微軟正黑體"/>
                 <a:cs typeface="Arial"/>
               </a:rPr>
-              <a:t>來源：knowledge/generated_examples.md、reports/T14_generation_report.md</a:t>
+              <a:t>來源：話術範例、生成與查核報告（T14）</a:t>
             </a:r>
           </a:p>
         </p:txBody>
@@ -26367,6 +26604,1736 @@
 </p:sld>
 </file>
 
+<file path=ppt/slides/slide21.xml><?xml version="1.0" encoding="utf-8"?>
+<p:sld xmlns:a="http://schemas.openxmlformats.org/drawingml/2006/main" xmlns:p="http://schemas.openxmlformats.org/presentationml/2006/main" xmlns:r="http://schemas.openxmlformats.org/officeDocument/2006/relationships">
+  <p:cSld>
+    <p:spTree>
+      <p:nvGrpSpPr>
+        <p:cNvPr id="1" name=""/>
+        <p:cNvGrpSpPr/>
+        <p:nvPr/>
+      </p:nvGrpSpPr>
+      <p:grpSpPr/>
+      <p:sp>
+        <p:nvSpPr>
+          <p:cNvPr id="2" name="TextBox 1"/>
+          <p:cNvSpPr txBox="1"/>
+          <p:nvPr/>
+        </p:nvSpPr>
+        <p:spPr>
+          <a:xfrm>
+            <a:off x="420624" y="91440"/>
+            <a:ext cx="8412480" cy="237744"/>
+          </a:xfrm>
+          <a:prstGeom prst="rect">
+            <a:avLst/>
+          </a:prstGeom>
+          <a:noFill/>
+        </p:spPr>
+        <p:txBody>
+          <a:bodyPr wrap="square" lIns="0" rIns="0" tIns="18288" bIns="18288" anchor="t">
+            <a:spAutoFit/>
+          </a:bodyPr>
+          <a:lstStyle/>
+          <a:p>
+            <a:pPr>
+              <a:lnSpc>
+                <a:spcPct val="100000"/>
+              </a:lnSpc>
+              <a:spcBef>
+                <a:spcPts val="0"/>
+              </a:spcBef>
+              <a:spcAft>
+                <a:spcPts val="200"/>
+              </a:spcAft>
+            </a:pPr>
+            <a:r>
+              <a:rPr sz="1200" b="0" i="0">
+                <a:solidFill>
+                  <a:srgbClr val="44546A"/>
+                </a:solidFill>
+                <a:latin typeface="Arial"/>
+                <a:ea typeface="微軟正黑體"/>
+                <a:cs typeface="Arial"/>
+              </a:rPr>
+              <a:t>附錄 CRM 觸發門檻（不計入 15 頁）</a:t>
+            </a:r>
+          </a:p>
+        </p:txBody>
+      </p:sp>
+      <p:sp>
+        <p:nvSpPr>
+          <p:cNvPr id="3" name="TextBox 2"/>
+          <p:cNvSpPr txBox="1"/>
+          <p:nvPr/>
+        </p:nvSpPr>
+        <p:spPr>
+          <a:xfrm>
+            <a:off x="420624" y="6547104"/>
+            <a:ext cx="9418320" cy="219456"/>
+          </a:xfrm>
+          <a:prstGeom prst="rect">
+            <a:avLst/>
+          </a:prstGeom>
+          <a:noFill/>
+        </p:spPr>
+        <p:txBody>
+          <a:bodyPr wrap="square" lIns="0" rIns="0" tIns="18288" bIns="18288" anchor="t">
+            <a:spAutoFit/>
+          </a:bodyPr>
+          <a:lstStyle/>
+          <a:p>
+            <a:pPr>
+              <a:lnSpc>
+                <a:spcPct val="100000"/>
+              </a:lnSpc>
+              <a:spcBef>
+                <a:spcPts val="0"/>
+              </a:spcBef>
+              <a:spcAft>
+                <a:spcPts val="200"/>
+              </a:spcAft>
+            </a:pPr>
+            <a:r>
+              <a:rPr sz="1000" b="0" i="0">
+                <a:solidFill>
+                  <a:srgbClr val="5C6B7A"/>
+                </a:solidFill>
+                <a:latin typeface="Arial"/>
+                <a:ea typeface="微軟正黑體"/>
+                <a:cs typeface="Arial"/>
+              </a:rPr>
+              <a:t>來源：風險與 Persona 報告（T10）、L7 運作流程</a:t>
+            </a:r>
+          </a:p>
+        </p:txBody>
+      </p:sp>
+      <p:sp>
+        <p:nvSpPr>
+          <p:cNvPr id="4" name="TextBox 3"/>
+          <p:cNvSpPr txBox="1"/>
+          <p:nvPr/>
+        </p:nvSpPr>
+        <p:spPr>
+          <a:xfrm>
+            <a:off x="10378440" y="6547104"/>
+            <a:ext cx="1389888" cy="219456"/>
+          </a:xfrm>
+          <a:prstGeom prst="rect">
+            <a:avLst/>
+          </a:prstGeom>
+          <a:noFill/>
+        </p:spPr>
+        <p:txBody>
+          <a:bodyPr wrap="square" lIns="0" rIns="0" tIns="18288" bIns="18288" anchor="t">
+            <a:spAutoFit/>
+          </a:bodyPr>
+          <a:lstStyle/>
+          <a:p>
+            <a:pPr algn="r">
+              <a:lnSpc>
+                <a:spcPct val="100000"/>
+              </a:lnSpc>
+              <a:spcBef>
+                <a:spcPts val="0"/>
+              </a:spcBef>
+              <a:spcAft>
+                <a:spcPts val="200"/>
+              </a:spcAft>
+            </a:pPr>
+            <a:r>
+              <a:rPr sz="1200" b="0" i="0">
+                <a:solidFill>
+                  <a:srgbClr val="44546A"/>
+                </a:solidFill>
+                <a:latin typeface="Arial"/>
+                <a:ea typeface="微軟正黑體"/>
+                <a:cs typeface="Arial"/>
+              </a:rPr>
+              <a:t>21</a:t>
+            </a:r>
+          </a:p>
+        </p:txBody>
+      </p:sp>
+      <p:sp>
+        <p:nvSpPr>
+          <p:cNvPr id="5" name="TextBox 4"/>
+          <p:cNvSpPr txBox="1"/>
+          <p:nvPr/>
+        </p:nvSpPr>
+        <p:spPr>
+          <a:xfrm>
+            <a:off x="420624" y="329184"/>
+            <a:ext cx="11356848" cy="566928"/>
+          </a:xfrm>
+          <a:prstGeom prst="rect">
+            <a:avLst/>
+          </a:prstGeom>
+          <a:noFill/>
+        </p:spPr>
+        <p:txBody>
+          <a:bodyPr wrap="square" lIns="0" rIns="0" tIns="18288" bIns="18288" anchor="t">
+            <a:spAutoFit/>
+          </a:bodyPr>
+          <a:lstStyle/>
+          <a:p>
+            <a:pPr>
+              <a:lnSpc>
+                <a:spcPct val="100000"/>
+              </a:lnSpc>
+              <a:spcBef>
+                <a:spcPts val="0"/>
+              </a:spcBef>
+              <a:spcAft>
+                <a:spcPts val="200"/>
+              </a:spcAft>
+            </a:pPr>
+            <a:r>
+              <a:rPr sz="2400" b="1" i="0">
+                <a:solidFill>
+                  <a:srgbClr val="24323E"/>
+                </a:solidFill>
+                <a:latin typeface="Arial"/>
+                <a:ea typeface="微軟正黑體"/>
+                <a:cs typeface="Arial"/>
+              </a:rPr>
+              <a:t>八條規則的欄位與門檻；投影片只留欄位名</a:t>
+            </a:r>
+          </a:p>
+        </p:txBody>
+      </p:sp>
+      <p:graphicFrame>
+        <p:nvGraphicFramePr>
+          <p:cNvPr id="6" name="Table 5"/>
+          <p:cNvGraphicFramePr>
+            <a:graphicFrameLocks noGrp="1"/>
+          </p:cNvGraphicFramePr>
+          <p:nvPr/>
+        </p:nvGraphicFramePr>
+        <p:xfrm>
+          <a:off x="420624" y="987552"/>
+          <a:ext cx="11356848" cy="4937760"/>
+        </p:xfrm>
+        <a:graphic>
+          <a:graphicData uri="http://schemas.openxmlformats.org/drawingml/2006/table">
+            <a:tbl>
+              <a:tblPr firstRow="1" bandRow="1">
+                <a:tableStyleId>{5C22544A-7EE6-4342-B048-85BDC9FD1C3A}</a:tableStyleId>
+              </a:tblPr>
+              <a:tblGrid>
+                <a:gridCol w="2103120"/>
+                <a:gridCol w="4846320"/>
+                <a:gridCol w="4407408"/>
+              </a:tblGrid>
+              <a:tr h="548640">
+                <a:tc>
+                  <a:txBody>
+                    <a:bodyPr wrap="square" anchor="ctr"/>
+                    <a:lstStyle/>
+                    <a:p>
+                      <a:pPr>
+                        <a:lnSpc>
+                          <a:spcPct val="100000"/>
+                        </a:lnSpc>
+                        <a:spcBef>
+                          <a:spcPts val="0"/>
+                        </a:spcBef>
+                        <a:spcAft>
+                          <a:spcPts val="200"/>
+                        </a:spcAft>
+                      </a:pPr>
+                      <a:r>
+                        <a:rPr sz="1200" b="1" i="0">
+                          <a:solidFill>
+                            <a:srgbClr val="FFFFFF"/>
+                          </a:solidFill>
+                          <a:latin typeface="Arial"/>
+                          <a:ea typeface="微軟正黑體"/>
+                          <a:cs typeface="Arial"/>
+                        </a:rPr>
+                        <a:t>規則</a:t>
+                      </a:r>
+                    </a:p>
+                  </a:txBody>
+                  <a:tcPr anchor="ctr" marL="73152" marR="54864" marT="36576" marB="27432">
+                    <a:solidFill>
+                      <a:srgbClr val="44546A"/>
+                    </a:solidFill>
+                  </a:tcPr>
+                </a:tc>
+                <a:tc>
+                  <a:txBody>
+                    <a:bodyPr wrap="square" anchor="ctr"/>
+                    <a:lstStyle/>
+                    <a:p>
+                      <a:pPr>
+                        <a:lnSpc>
+                          <a:spcPct val="100000"/>
+                        </a:lnSpc>
+                        <a:spcBef>
+                          <a:spcPts val="0"/>
+                        </a:spcBef>
+                        <a:spcAft>
+                          <a:spcPts val="200"/>
+                        </a:spcAft>
+                      </a:pPr>
+                      <a:r>
+                        <a:rPr sz="1200" b="1" i="0">
+                          <a:solidFill>
+                            <a:srgbClr val="FFFFFF"/>
+                          </a:solidFill>
+                          <a:latin typeface="Arial"/>
+                          <a:ea typeface="微軟正黑體"/>
+                          <a:cs typeface="Arial"/>
+                        </a:rPr>
+                        <a:t>欄位</a:t>
+                      </a:r>
+                    </a:p>
+                  </a:txBody>
+                  <a:tcPr anchor="ctr" marL="73152" marR="54864" marT="36576" marB="27432">
+                    <a:solidFill>
+                      <a:srgbClr val="44546A"/>
+                    </a:solidFill>
+                  </a:tcPr>
+                </a:tc>
+                <a:tc>
+                  <a:txBody>
+                    <a:bodyPr wrap="square" anchor="ctr"/>
+                    <a:lstStyle/>
+                    <a:p>
+                      <a:pPr>
+                        <a:lnSpc>
+                          <a:spcPct val="100000"/>
+                        </a:lnSpc>
+                        <a:spcBef>
+                          <a:spcPts val="0"/>
+                        </a:spcBef>
+                        <a:spcAft>
+                          <a:spcPts val="200"/>
+                        </a:spcAft>
+                      </a:pPr>
+                      <a:r>
+                        <a:rPr sz="1200" b="1" i="0">
+                          <a:solidFill>
+                            <a:srgbClr val="FFFFFF"/>
+                          </a:solidFill>
+                          <a:latin typeface="Arial"/>
+                          <a:ea typeface="微軟正黑體"/>
+                          <a:cs typeface="Arial"/>
+                        </a:rPr>
+                        <a:t>門檻</a:t>
+                      </a:r>
+                    </a:p>
+                  </a:txBody>
+                  <a:tcPr anchor="ctr" marL="73152" marR="54864" marT="36576" marB="27432">
+                    <a:solidFill>
+                      <a:srgbClr val="44546A"/>
+                    </a:solidFill>
+                  </a:tcPr>
+                </a:tc>
+              </a:tr>
+              <a:tr h="548640">
+                <a:tc>
+                  <a:txBody>
+                    <a:bodyPr wrap="square" anchor="ctr"/>
+                    <a:lstStyle/>
+                    <a:p>
+                      <a:pPr>
+                        <a:lnSpc>
+                          <a:spcPct val="100000"/>
+                        </a:lnSpc>
+                        <a:spcBef>
+                          <a:spcPts val="0"/>
+                        </a:spcBef>
+                        <a:spcAft>
+                          <a:spcPts val="200"/>
+                        </a:spcAft>
+                      </a:pPr>
+                      <a:r>
+                        <a:rPr sz="1200" b="1" i="0">
+                          <a:solidFill>
+                            <a:srgbClr val="24323E"/>
+                          </a:solidFill>
+                          <a:latin typeface="Arial"/>
+                          <a:ea typeface="微軟正黑體"/>
+                          <a:cs typeface="Arial"/>
+                        </a:rPr>
+                        <a:t>R1 過保</a:t>
+                      </a:r>
+                    </a:p>
+                  </a:txBody>
+                  <a:tcPr anchor="ctr" marL="73152" marR="54864" marT="36576" marB="27432">
+                    <a:solidFill>
+                      <a:srgbClr val="FFFFFF"/>
+                    </a:solidFill>
+                  </a:tcPr>
+                </a:tc>
+                <a:tc>
+                  <a:txBody>
+                    <a:bodyPr wrap="square" anchor="ctr"/>
+                    <a:lstStyle/>
+                    <a:p>
+                      <a:pPr>
+                        <a:lnSpc>
+                          <a:spcPct val="100000"/>
+                        </a:lnSpc>
+                        <a:spcBef>
+                          <a:spcPts val="0"/>
+                        </a:spcBef>
+                        <a:spcAft>
+                          <a:spcPts val="200"/>
+                        </a:spcAft>
+                      </a:pPr>
+                      <a:r>
+                        <a:rPr sz="1200" b="0" i="0">
+                          <a:solidFill>
+                            <a:srgbClr val="24323E"/>
+                          </a:solidFill>
+                          <a:latin typeface="Arial"/>
+                          <a:ea typeface="微軟正黑體"/>
+                          <a:cs typeface="Arial"/>
+                        </a:rPr>
+                        <a:t>保固到期日、延保狀態</a:t>
+                      </a:r>
+                    </a:p>
+                  </a:txBody>
+                  <a:tcPr anchor="ctr" marL="73152" marR="54864" marT="36576" marB="27432">
+                    <a:solidFill>
+                      <a:srgbClr val="FFFFFF"/>
+                    </a:solidFill>
+                  </a:tcPr>
+                </a:tc>
+                <a:tc>
+                  <a:txBody>
+                    <a:bodyPr wrap="square" anchor="ctr"/>
+                    <a:lstStyle/>
+                    <a:p>
+                      <a:pPr>
+                        <a:lnSpc>
+                          <a:spcPct val="100000"/>
+                        </a:lnSpc>
+                        <a:spcBef>
+                          <a:spcPts val="0"/>
+                        </a:spcBef>
+                        <a:spcAft>
+                          <a:spcPts val="200"/>
+                        </a:spcAft>
+                      </a:pPr>
+                      <a:r>
+                        <a:rPr sz="1200" b="0" i="0">
+                          <a:solidFill>
+                            <a:srgbClr val="24323E"/>
+                          </a:solidFill>
+                          <a:latin typeface="Arial"/>
+                          <a:ea typeface="微軟正黑體"/>
+                          <a:cs typeface="Arial"/>
+                        </a:rPr>
+                        <a:t>到期前 90 天未購延保</a:t>
+                      </a:r>
+                    </a:p>
+                  </a:txBody>
+                  <a:tcPr anchor="ctr" marL="73152" marR="54864" marT="36576" marB="27432">
+                    <a:solidFill>
+                      <a:srgbClr val="FFFFFF"/>
+                    </a:solidFill>
+                  </a:tcPr>
+                </a:tc>
+              </a:tr>
+              <a:tr h="548640">
+                <a:tc>
+                  <a:txBody>
+                    <a:bodyPr wrap="square" anchor="ctr"/>
+                    <a:lstStyle/>
+                    <a:p>
+                      <a:pPr>
+                        <a:lnSpc>
+                          <a:spcPct val="100000"/>
+                        </a:lnSpc>
+                        <a:spcBef>
+                          <a:spcPts val="0"/>
+                        </a:spcBef>
+                        <a:spcAft>
+                          <a:spcPts val="200"/>
+                        </a:spcAft>
+                      </a:pPr>
+                      <a:r>
+                        <a:rPr sz="1200" b="1" i="0">
+                          <a:solidFill>
+                            <a:srgbClr val="24323E"/>
+                          </a:solidFill>
+                          <a:latin typeface="Arial"/>
+                          <a:ea typeface="微軟正黑體"/>
+                          <a:cs typeface="Arial"/>
+                        </a:rPr>
+                        <a:t>R2 價格負面</a:t>
+                      </a:r>
+                    </a:p>
+                  </a:txBody>
+                  <a:tcPr anchor="ctr" marL="73152" marR="54864" marT="36576" marB="27432">
+                    <a:solidFill>
+                      <a:srgbClr val="F7F9FB"/>
+                    </a:solidFill>
+                  </a:tcPr>
+                </a:tc>
+                <a:tc>
+                  <a:txBody>
+                    <a:bodyPr wrap="square" anchor="ctr"/>
+                    <a:lstStyle/>
+                    <a:p>
+                      <a:pPr>
+                        <a:lnSpc>
+                          <a:spcPct val="100000"/>
+                        </a:lnSpc>
+                        <a:spcBef>
+                          <a:spcPts val="0"/>
+                        </a:spcBef>
+                        <a:spcAft>
+                          <a:spcPts val="200"/>
+                        </a:spcAft>
+                      </a:pPr>
+                      <a:r>
+                        <a:rPr sz="1200" b="0" i="0">
+                          <a:solidFill>
+                            <a:srgbClr val="24323E"/>
+                          </a:solidFill>
+                          <a:latin typeface="Arial"/>
+                          <a:ea typeface="微軟正黑體"/>
+                          <a:cs typeface="Arial"/>
+                        </a:rPr>
+                        <a:t>工單估價與實收、拒絕估價項目、滿意度價格題</a:t>
+                      </a:r>
+                    </a:p>
+                  </a:txBody>
+                  <a:tcPr anchor="ctr" marL="73152" marR="54864" marT="36576" marB="27432">
+                    <a:solidFill>
+                      <a:srgbClr val="F7F9FB"/>
+                    </a:solidFill>
+                  </a:tcPr>
+                </a:tc>
+                <a:tc>
+                  <a:txBody>
+                    <a:bodyPr wrap="square" anchor="ctr"/>
+                    <a:lstStyle/>
+                    <a:p>
+                      <a:pPr>
+                        <a:lnSpc>
+                          <a:spcPct val="100000"/>
+                        </a:lnSpc>
+                        <a:spcBef>
+                          <a:spcPts val="0"/>
+                        </a:spcBef>
+                        <a:spcAft>
+                          <a:spcPts val="200"/>
+                        </a:spcAft>
+                      </a:pPr>
+                      <a:r>
+                        <a:rPr sz="1200" b="0" i="0">
+                          <a:solidFill>
+                            <a:srgbClr val="24323E"/>
+                          </a:solidFill>
+                          <a:latin typeface="Arial"/>
+                          <a:ea typeface="微軟正黑體"/>
+                          <a:cs typeface="Arial"/>
+                        </a:rPr>
+                        <a:t>連續 2 次拒絕估價項目</a:t>
+                      </a:r>
+                    </a:p>
+                  </a:txBody>
+                  <a:tcPr anchor="ctr" marL="73152" marR="54864" marT="36576" marB="27432">
+                    <a:solidFill>
+                      <a:srgbClr val="F7F9FB"/>
+                    </a:solidFill>
+                  </a:tcPr>
+                </a:tc>
+              </a:tr>
+              <a:tr h="548640">
+                <a:tc>
+                  <a:txBody>
+                    <a:bodyPr wrap="square" anchor="ctr"/>
+                    <a:lstStyle/>
+                    <a:p>
+                      <a:pPr>
+                        <a:lnSpc>
+                          <a:spcPct val="100000"/>
+                        </a:lnSpc>
+                        <a:spcBef>
+                          <a:spcPts val="0"/>
+                        </a:spcBef>
+                        <a:spcAft>
+                          <a:spcPts val="200"/>
+                        </a:spcAft>
+                      </a:pPr>
+                      <a:r>
+                        <a:rPr sz="1200" b="1" i="0">
+                          <a:solidFill>
+                            <a:srgbClr val="24323E"/>
+                          </a:solidFill>
+                          <a:latin typeface="Arial"/>
+                          <a:ea typeface="微軟正黑體"/>
+                          <a:cs typeface="Arial"/>
+                        </a:rPr>
+                        <a:t>R3 找出口</a:t>
+                      </a:r>
+                    </a:p>
+                  </a:txBody>
+                  <a:tcPr anchor="ctr" marL="73152" marR="54864" marT="36576" marB="27432">
+                    <a:solidFill>
+                      <a:srgbClr val="FFFFFF"/>
+                    </a:solidFill>
+                  </a:tcPr>
+                </a:tc>
+                <a:tc>
+                  <a:txBody>
+                    <a:bodyPr wrap="square" anchor="ctr"/>
+                    <a:lstStyle/>
+                    <a:p>
+                      <a:pPr>
+                        <a:lnSpc>
+                          <a:spcPct val="100000"/>
+                        </a:lnSpc>
+                        <a:spcBef>
+                          <a:spcPts val="0"/>
+                        </a:spcBef>
+                        <a:spcAft>
+                          <a:spcPts val="200"/>
+                        </a:spcAft>
+                      </a:pPr>
+                      <a:r>
+                        <a:rPr sz="1200" b="0" i="0">
+                          <a:solidFill>
+                            <a:srgbClr val="24323E"/>
+                          </a:solidFill>
+                          <a:latin typeface="Arial"/>
+                          <a:ea typeface="微軟正黑體"/>
+                          <a:cs typeface="Arial"/>
+                        </a:rPr>
+                        <a:t>回廠間隔、預約取消、App 查據點</a:t>
+                      </a:r>
+                    </a:p>
+                  </a:txBody>
+                  <a:tcPr anchor="ctr" marL="73152" marR="54864" marT="36576" marB="27432">
+                    <a:solidFill>
+                      <a:srgbClr val="FFFFFF"/>
+                    </a:solidFill>
+                  </a:tcPr>
+                </a:tc>
+                <a:tc>
+                  <a:txBody>
+                    <a:bodyPr wrap="square" anchor="ctr"/>
+                    <a:lstStyle/>
+                    <a:p>
+                      <a:pPr>
+                        <a:lnSpc>
+                          <a:spcPct val="100000"/>
+                        </a:lnSpc>
+                        <a:spcBef>
+                          <a:spcPts val="0"/>
+                        </a:spcBef>
+                        <a:spcAft>
+                          <a:spcPts val="200"/>
+                        </a:spcAft>
+                      </a:pPr>
+                      <a:r>
+                        <a:rPr sz="1200" b="0" i="0">
+                          <a:solidFill>
+                            <a:srgbClr val="24323E"/>
+                          </a:solidFill>
+                          <a:latin typeface="Arial"/>
+                          <a:ea typeface="微軟正黑體"/>
+                          <a:cs typeface="Arial"/>
+                        </a:rPr>
+                        <a:t>逾期超過建議週期 1.5 倍</a:t>
+                      </a:r>
+                    </a:p>
+                  </a:txBody>
+                  <a:tcPr anchor="ctr" marL="73152" marR="54864" marT="36576" marB="27432">
+                    <a:solidFill>
+                      <a:srgbClr val="FFFFFF"/>
+                    </a:solidFill>
+                  </a:tcPr>
+                </a:tc>
+              </a:tr>
+              <a:tr h="548640">
+                <a:tc>
+                  <a:txBody>
+                    <a:bodyPr wrap="square" anchor="ctr"/>
+                    <a:lstStyle/>
+                    <a:p>
+                      <a:pPr>
+                        <a:lnSpc>
+                          <a:spcPct val="100000"/>
+                        </a:lnSpc>
+                        <a:spcBef>
+                          <a:spcPts val="0"/>
+                        </a:spcBef>
+                        <a:spcAft>
+                          <a:spcPts val="200"/>
+                        </a:spcAft>
+                      </a:pPr>
+                      <a:r>
+                        <a:rPr sz="1200" b="1" i="0">
+                          <a:solidFill>
+                            <a:srgbClr val="24323E"/>
+                          </a:solidFill>
+                          <a:latin typeface="Arial"/>
+                          <a:ea typeface="微軟正黑體"/>
+                          <a:cs typeface="Arial"/>
+                        </a:rPr>
+                        <a:t>R4 自理</a:t>
+                      </a:r>
+                    </a:p>
+                  </a:txBody>
+                  <a:tcPr anchor="ctr" marL="73152" marR="54864" marT="36576" marB="27432">
+                    <a:solidFill>
+                      <a:srgbClr val="F7F9FB"/>
+                    </a:solidFill>
+                  </a:tcPr>
+                </a:tc>
+                <a:tc>
+                  <a:txBody>
+                    <a:bodyPr wrap="square" anchor="ctr"/>
+                    <a:lstStyle/>
+                    <a:p>
+                      <a:pPr>
+                        <a:lnSpc>
+                          <a:spcPct val="100000"/>
+                        </a:lnSpc>
+                        <a:spcBef>
+                          <a:spcPts val="0"/>
+                        </a:spcBef>
+                        <a:spcAft>
+                          <a:spcPts val="200"/>
+                        </a:spcAft>
+                      </a:pPr>
+                      <a:r>
+                        <a:rPr sz="1200" b="0" i="0">
+                          <a:solidFill>
+                            <a:srgbClr val="24323E"/>
+                          </a:solidFill>
+                          <a:latin typeface="Arial"/>
+                          <a:ea typeface="微軟正黑體"/>
+                          <a:cs typeface="Arial"/>
+                        </a:rPr>
+                        <a:t>自備零件或機油註記、換油套餐、工單金額</a:t>
+                      </a:r>
+                    </a:p>
+                  </a:txBody>
+                  <a:tcPr anchor="ctr" marL="73152" marR="54864" marT="36576" marB="27432">
+                    <a:solidFill>
+                      <a:srgbClr val="F7F9FB"/>
+                    </a:solidFill>
+                  </a:tcPr>
+                </a:tc>
+                <a:tc>
+                  <a:txBody>
+                    <a:bodyPr wrap="square" anchor="ctr"/>
+                    <a:lstStyle/>
+                    <a:p>
+                      <a:pPr>
+                        <a:lnSpc>
+                          <a:spcPct val="100000"/>
+                        </a:lnSpc>
+                        <a:spcBef>
+                          <a:spcPts val="0"/>
+                        </a:spcBef>
+                        <a:spcAft>
+                          <a:spcPts val="200"/>
+                        </a:spcAft>
+                      </a:pPr>
+                      <a:r>
+                        <a:rPr sz="1200" b="0" i="0">
+                          <a:solidFill>
+                            <a:srgbClr val="24323E"/>
+                          </a:solidFill>
+                          <a:latin typeface="Arial"/>
+                          <a:ea typeface="微軟正黑體"/>
+                          <a:cs typeface="Arial"/>
+                        </a:rPr>
+                        <a:t>金額較前次下降超過 40%</a:t>
+                      </a:r>
+                    </a:p>
+                  </a:txBody>
+                  <a:tcPr anchor="ctr" marL="73152" marR="54864" marT="36576" marB="27432">
+                    <a:solidFill>
+                      <a:srgbClr val="F7F9FB"/>
+                    </a:solidFill>
+                  </a:tcPr>
+                </a:tc>
+              </a:tr>
+              <a:tr h="548640">
+                <a:tc>
+                  <a:txBody>
+                    <a:bodyPr wrap="square" anchor="ctr"/>
+                    <a:lstStyle/>
+                    <a:p>
+                      <a:pPr>
+                        <a:lnSpc>
+                          <a:spcPct val="100000"/>
+                        </a:lnSpc>
+                        <a:spcBef>
+                          <a:spcPts val="0"/>
+                        </a:spcBef>
+                        <a:spcAft>
+                          <a:spcPts val="200"/>
+                        </a:spcAft>
+                      </a:pPr>
+                      <a:r>
+                        <a:rPr sz="1200" b="1" i="0">
+                          <a:solidFill>
+                            <a:srgbClr val="24323E"/>
+                          </a:solidFill>
+                          <a:latin typeface="Arial"/>
+                          <a:ea typeface="微軟正黑體"/>
+                          <a:cs typeface="Arial"/>
+                        </a:rPr>
+                        <a:t>R5 零件等料</a:t>
+                      </a:r>
+                    </a:p>
+                  </a:txBody>
+                  <a:tcPr anchor="ctr" marL="73152" marR="54864" marT="36576" marB="27432">
+                    <a:solidFill>
+                      <a:srgbClr val="FFFFFF"/>
+                    </a:solidFill>
+                  </a:tcPr>
+                </a:tc>
+                <a:tc>
+                  <a:txBody>
+                    <a:bodyPr wrap="square" anchor="ctr"/>
+                    <a:lstStyle/>
+                    <a:p>
+                      <a:pPr>
+                        <a:lnSpc>
+                          <a:spcPct val="100000"/>
+                        </a:lnSpc>
+                        <a:spcBef>
+                          <a:spcPts val="0"/>
+                        </a:spcBef>
+                        <a:spcAft>
+                          <a:spcPts val="200"/>
+                        </a:spcAft>
+                      </a:pPr>
+                      <a:r>
+                        <a:rPr sz="1200" b="0" i="0">
+                          <a:solidFill>
+                            <a:srgbClr val="24323E"/>
+                          </a:solidFill>
+                          <a:latin typeface="Arial"/>
+                          <a:ea typeface="微軟正黑體"/>
+                          <a:cs typeface="Arial"/>
+                        </a:rPr>
+                        <a:t>待料天數、改期次數</a:t>
+                      </a:r>
+                    </a:p>
+                  </a:txBody>
+                  <a:tcPr anchor="ctr" marL="73152" marR="54864" marT="36576" marB="27432">
+                    <a:solidFill>
+                      <a:srgbClr val="FFFFFF"/>
+                    </a:solidFill>
+                  </a:tcPr>
+                </a:tc>
+                <a:tc>
+                  <a:txBody>
+                    <a:bodyPr wrap="square" anchor="ctr"/>
+                    <a:lstStyle/>
+                    <a:p>
+                      <a:pPr>
+                        <a:lnSpc>
+                          <a:spcPct val="100000"/>
+                        </a:lnSpc>
+                        <a:spcBef>
+                          <a:spcPts val="0"/>
+                        </a:spcBef>
+                        <a:spcAft>
+                          <a:spcPts val="200"/>
+                        </a:spcAft>
+                      </a:pPr>
+                      <a:r>
+                        <a:rPr sz="1200" b="0" i="0">
+                          <a:solidFill>
+                            <a:srgbClr val="24323E"/>
+                          </a:solidFill>
+                          <a:latin typeface="Arial"/>
+                          <a:ea typeface="微軟正黑體"/>
+                          <a:cs typeface="Arial"/>
+                        </a:rPr>
+                        <a:t>待料超過 7 天，或同車至少 2 次</a:t>
+                      </a:r>
+                    </a:p>
+                  </a:txBody>
+                  <a:tcPr anchor="ctr" marL="73152" marR="54864" marT="36576" marB="27432">
+                    <a:solidFill>
+                      <a:srgbClr val="FFFFFF"/>
+                    </a:solidFill>
+                  </a:tcPr>
+                </a:tc>
+              </a:tr>
+              <a:tr h="548640">
+                <a:tc>
+                  <a:txBody>
+                    <a:bodyPr wrap="square" anchor="ctr"/>
+                    <a:lstStyle/>
+                    <a:p>
+                      <a:pPr>
+                        <a:lnSpc>
+                          <a:spcPct val="100000"/>
+                        </a:lnSpc>
+                        <a:spcBef>
+                          <a:spcPts val="0"/>
+                        </a:spcBef>
+                        <a:spcAft>
+                          <a:spcPts val="200"/>
+                        </a:spcAft>
+                      </a:pPr>
+                      <a:r>
+                        <a:rPr sz="1200" b="1" i="0">
+                          <a:solidFill>
+                            <a:srgbClr val="24323E"/>
+                          </a:solidFill>
+                          <a:latin typeface="Arial"/>
+                          <a:ea typeface="微軟正黑體"/>
+                          <a:cs typeface="Arial"/>
+                        </a:rPr>
+                        <a:t>R6 品質失望</a:t>
+                      </a:r>
+                    </a:p>
+                  </a:txBody>
+                  <a:tcPr anchor="ctr" marL="73152" marR="54864" marT="36576" marB="27432">
+                    <a:solidFill>
+                      <a:srgbClr val="F7F9FB"/>
+                    </a:solidFill>
+                  </a:tcPr>
+                </a:tc>
+                <a:tc>
+                  <a:txBody>
+                    <a:bodyPr wrap="square" anchor="ctr"/>
+                    <a:lstStyle/>
+                    <a:p>
+                      <a:pPr>
+                        <a:lnSpc>
+                          <a:spcPct val="100000"/>
+                        </a:lnSpc>
+                        <a:spcBef>
+                          <a:spcPts val="0"/>
+                        </a:spcBef>
+                        <a:spcAft>
+                          <a:spcPts val="200"/>
+                        </a:spcAft>
+                      </a:pPr>
+                      <a:r>
+                        <a:rPr sz="1200" b="0" i="0">
+                          <a:solidFill>
+                            <a:srgbClr val="24323E"/>
+                          </a:solidFill>
+                          <a:latin typeface="Arial"/>
+                          <a:ea typeface="微軟正黑體"/>
+                          <a:cs typeface="Arial"/>
+                        </a:rPr>
+                        <a:t>同項目重複進廠、技術客訴、召回未完成</a:t>
+                      </a:r>
+                    </a:p>
+                  </a:txBody>
+                  <a:tcPr anchor="ctr" marL="73152" marR="54864" marT="36576" marB="27432">
+                    <a:solidFill>
+                      <a:srgbClr val="F7F9FB"/>
+                    </a:solidFill>
+                  </a:tcPr>
+                </a:tc>
+                <a:tc>
+                  <a:txBody>
+                    <a:bodyPr wrap="square" anchor="ctr"/>
+                    <a:lstStyle/>
+                    <a:p>
+                      <a:pPr>
+                        <a:lnSpc>
+                          <a:spcPct val="100000"/>
+                        </a:lnSpc>
+                        <a:spcBef>
+                          <a:spcPts val="0"/>
+                        </a:spcBef>
+                        <a:spcAft>
+                          <a:spcPts val="200"/>
+                        </a:spcAft>
+                      </a:pPr>
+                      <a:r>
+                        <a:rPr sz="1200" b="0" i="0">
+                          <a:solidFill>
+                            <a:srgbClr val="24323E"/>
+                          </a:solidFill>
+                          <a:latin typeface="Arial"/>
+                          <a:ea typeface="微軟正黑體"/>
+                          <a:cs typeface="Arial"/>
+                        </a:rPr>
+                        <a:t>30 天內同項目回廠至少 2 次</a:t>
+                      </a:r>
+                    </a:p>
+                  </a:txBody>
+                  <a:tcPr anchor="ctr" marL="73152" marR="54864" marT="36576" marB="27432">
+                    <a:solidFill>
+                      <a:srgbClr val="F7F9FB"/>
+                    </a:solidFill>
+                  </a:tcPr>
+                </a:tc>
+              </a:tr>
+              <a:tr h="548640">
+                <a:tc>
+                  <a:txBody>
+                    <a:bodyPr wrap="square" anchor="ctr"/>
+                    <a:lstStyle/>
+                    <a:p>
+                      <a:pPr>
+                        <a:lnSpc>
+                          <a:spcPct val="100000"/>
+                        </a:lnSpc>
+                        <a:spcBef>
+                          <a:spcPts val="0"/>
+                        </a:spcBef>
+                        <a:spcAft>
+                          <a:spcPts val="200"/>
+                        </a:spcAft>
+                      </a:pPr>
+                      <a:r>
+                        <a:rPr sz="1200" b="1" i="0">
+                          <a:solidFill>
+                            <a:srgbClr val="24323E"/>
+                          </a:solidFill>
+                          <a:latin typeface="Arial"/>
+                          <a:ea typeface="微軟正黑體"/>
+                          <a:cs typeface="Arial"/>
+                        </a:rPr>
+                        <a:t>R7 已離開</a:t>
+                      </a:r>
+                    </a:p>
+                  </a:txBody>
+                  <a:tcPr anchor="ctr" marL="73152" marR="54864" marT="36576" marB="27432">
+                    <a:solidFill>
+                      <a:srgbClr val="FFFFFF"/>
+                    </a:solidFill>
+                  </a:tcPr>
+                </a:tc>
+                <a:tc>
+                  <a:txBody>
+                    <a:bodyPr wrap="square" anchor="ctr"/>
+                    <a:lstStyle/>
+                    <a:p>
+                      <a:pPr>
+                        <a:lnSpc>
+                          <a:spcPct val="100000"/>
+                        </a:lnSpc>
+                        <a:spcBef>
+                          <a:spcPts val="0"/>
+                        </a:spcBef>
+                        <a:spcAft>
+                          <a:spcPts val="200"/>
+                        </a:spcAft>
+                      </a:pPr>
+                      <a:r>
+                        <a:rPr sz="1200" b="0" i="0">
+                          <a:solidFill>
+                            <a:srgbClr val="24323E"/>
+                          </a:solidFill>
+                          <a:latin typeface="Arial"/>
+                          <a:ea typeface="微軟正黑體"/>
+                          <a:cs typeface="Arial"/>
+                        </a:rPr>
+                        <a:t>無工單、過戶或退出會員、App 未開啟</a:t>
+                      </a:r>
+                    </a:p>
+                  </a:txBody>
+                  <a:tcPr anchor="ctr" marL="73152" marR="54864" marT="36576" marB="27432">
+                    <a:solidFill>
+                      <a:srgbClr val="FFFFFF"/>
+                    </a:solidFill>
+                  </a:tcPr>
+                </a:tc>
+                <a:tc>
+                  <a:txBody>
+                    <a:bodyPr wrap="square" anchor="ctr"/>
+                    <a:lstStyle/>
+                    <a:p>
+                      <a:pPr>
+                        <a:lnSpc>
+                          <a:spcPct val="100000"/>
+                        </a:lnSpc>
+                        <a:spcBef>
+                          <a:spcPts val="0"/>
+                        </a:spcBef>
+                        <a:spcAft>
+                          <a:spcPts val="200"/>
+                        </a:spcAft>
+                      </a:pPr>
+                      <a:r>
+                        <a:rPr sz="1200" b="0" i="0">
+                          <a:solidFill>
+                            <a:srgbClr val="24323E"/>
+                          </a:solidFill>
+                          <a:latin typeface="Arial"/>
+                          <a:ea typeface="微軟正黑體"/>
+                          <a:cs typeface="Arial"/>
+                        </a:rPr>
+                        <a:t>12 個月無工單（只驗證，不觸發）</a:t>
+                      </a:r>
+                    </a:p>
+                  </a:txBody>
+                  <a:tcPr anchor="ctr" marL="73152" marR="54864" marT="36576" marB="27432">
+                    <a:solidFill>
+                      <a:srgbClr val="FFFFFF"/>
+                    </a:solidFill>
+                  </a:tcPr>
+                </a:tc>
+              </a:tr>
+              <a:tr h="548640">
+                <a:tc>
+                  <a:txBody>
+                    <a:bodyPr wrap="square" anchor="ctr"/>
+                    <a:lstStyle/>
+                    <a:p>
+                      <a:pPr>
+                        <a:lnSpc>
+                          <a:spcPct val="100000"/>
+                        </a:lnSpc>
+                        <a:spcBef>
+                          <a:spcPts val="0"/>
+                        </a:spcBef>
+                        <a:spcAft>
+                          <a:spcPts val="200"/>
+                        </a:spcAft>
+                      </a:pPr>
+                      <a:r>
+                        <a:rPr sz="1200" b="1" i="0">
+                          <a:solidFill>
+                            <a:srgbClr val="24323E"/>
+                          </a:solidFill>
+                          <a:latin typeface="Arial"/>
+                          <a:ea typeface="微軟正黑體"/>
+                          <a:cs typeface="Arial"/>
+                        </a:rPr>
+                        <a:t>R8 帶人走</a:t>
+                      </a:r>
+                    </a:p>
+                  </a:txBody>
+                  <a:tcPr anchor="ctr" marL="73152" marR="54864" marT="36576" marB="27432">
+                    <a:solidFill>
+                      <a:srgbClr val="F7F9FB"/>
+                    </a:solidFill>
+                  </a:tcPr>
+                </a:tc>
+                <a:tc>
+                  <a:txBody>
+                    <a:bodyPr wrap="square" anchor="ctr"/>
+                    <a:lstStyle/>
+                    <a:p>
+                      <a:pPr>
+                        <a:lnSpc>
+                          <a:spcPct val="100000"/>
+                        </a:lnSpc>
+                        <a:spcBef>
+                          <a:spcPts val="0"/>
+                        </a:spcBef>
+                        <a:spcAft>
+                          <a:spcPts val="200"/>
+                        </a:spcAft>
+                      </a:pPr>
+                      <a:r>
+                        <a:rPr sz="1200" b="0" i="0">
+                          <a:solidFill>
+                            <a:srgbClr val="24323E"/>
+                          </a:solidFill>
+                          <a:latin typeface="Arial"/>
+                          <a:ea typeface="微軟正黑體"/>
+                          <a:cs typeface="Arial"/>
+                        </a:rPr>
+                        <a:t>NPS、客訴紀錄、推薦計畫</a:t>
+                      </a:r>
+                    </a:p>
+                  </a:txBody>
+                  <a:tcPr anchor="ctr" marL="73152" marR="54864" marT="36576" marB="27432">
+                    <a:solidFill>
+                      <a:srgbClr val="F7F9FB"/>
+                    </a:solidFill>
+                  </a:tcPr>
+                </a:tc>
+                <a:tc>
+                  <a:txBody>
+                    <a:bodyPr wrap="square" anchor="ctr"/>
+                    <a:lstStyle/>
+                    <a:p>
+                      <a:pPr>
+                        <a:lnSpc>
+                          <a:spcPct val="100000"/>
+                        </a:lnSpc>
+                        <a:spcBef>
+                          <a:spcPts val="0"/>
+                        </a:spcBef>
+                        <a:spcAft>
+                          <a:spcPts val="200"/>
+                        </a:spcAft>
+                      </a:pPr>
+                      <a:r>
+                        <a:rPr sz="1200" b="0" i="0">
+                          <a:solidFill>
+                            <a:srgbClr val="24323E"/>
+                          </a:solidFill>
+                          <a:latin typeface="Arial"/>
+                          <a:ea typeface="微軟正黑體"/>
+                          <a:cs typeface="Arial"/>
+                        </a:rPr>
+                        <a:t>NPS 0–6，且 12 個月內有客訴</a:t>
+                      </a:r>
+                    </a:p>
+                  </a:txBody>
+                  <a:tcPr anchor="ctr" marL="73152" marR="54864" marT="36576" marB="27432">
+                    <a:solidFill>
+                      <a:srgbClr val="F7F9FB"/>
+                    </a:solidFill>
+                  </a:tcPr>
+                </a:tc>
+              </a:tr>
+            </a:tbl>
+          </a:graphicData>
+        </a:graphic>
+      </p:graphicFrame>
+    </p:spTree>
+  </p:cSld>
+  <p:clrMapOvr>
+    <a:masterClrMapping/>
+  </p:clrMapOvr>
+</p:sld>
+</file>
+
+<file path=ppt/slides/slide22.xml><?xml version="1.0" encoding="utf-8"?>
+<p:sld xmlns:a="http://schemas.openxmlformats.org/drawingml/2006/main" xmlns:p="http://schemas.openxmlformats.org/presentationml/2006/main" xmlns:r="http://schemas.openxmlformats.org/officeDocument/2006/relationships">
+  <p:cSld>
+    <p:spTree>
+      <p:nvGrpSpPr>
+        <p:cNvPr id="1" name=""/>
+        <p:cNvGrpSpPr/>
+        <p:nvPr/>
+      </p:nvGrpSpPr>
+      <p:grpSpPr/>
+      <p:sp>
+        <p:nvSpPr>
+          <p:cNvPr id="2" name="TextBox 1"/>
+          <p:cNvSpPr txBox="1"/>
+          <p:nvPr/>
+        </p:nvSpPr>
+        <p:spPr>
+          <a:xfrm>
+            <a:off x="420624" y="91440"/>
+            <a:ext cx="8412480" cy="237744"/>
+          </a:xfrm>
+          <a:prstGeom prst="rect">
+            <a:avLst/>
+          </a:prstGeom>
+          <a:noFill/>
+        </p:spPr>
+        <p:txBody>
+          <a:bodyPr wrap="square" lIns="0" rIns="0" tIns="18288" bIns="18288" anchor="t">
+            <a:spAutoFit/>
+          </a:bodyPr>
+          <a:lstStyle/>
+          <a:p>
+            <a:pPr>
+              <a:lnSpc>
+                <a:spcPct val="100000"/>
+              </a:lnSpc>
+              <a:spcBef>
+                <a:spcPts val="0"/>
+              </a:spcBef>
+              <a:spcAft>
+                <a:spcPts val="200"/>
+              </a:spcAft>
+            </a:pPr>
+            <a:r>
+              <a:rPr sz="1200" b="0" i="0">
+                <a:solidFill>
+                  <a:srgbClr val="44546A"/>
+                </a:solidFill>
+                <a:latin typeface="Arial"/>
+                <a:ea typeface="微軟正黑體"/>
+                <a:cs typeface="Arial"/>
+              </a:rPr>
+              <a:t>附錄 客訴回訪話術（不計入 15 頁）</a:t>
+            </a:r>
+          </a:p>
+        </p:txBody>
+      </p:sp>
+      <p:sp>
+        <p:nvSpPr>
+          <p:cNvPr id="3" name="TextBox 2"/>
+          <p:cNvSpPr txBox="1"/>
+          <p:nvPr/>
+        </p:nvSpPr>
+        <p:spPr>
+          <a:xfrm>
+            <a:off x="420624" y="6547104"/>
+            <a:ext cx="9418320" cy="219456"/>
+          </a:xfrm>
+          <a:prstGeom prst="rect">
+            <a:avLst/>
+          </a:prstGeom>
+          <a:noFill/>
+        </p:spPr>
+        <p:txBody>
+          <a:bodyPr wrap="square" lIns="0" rIns="0" tIns="18288" bIns="18288" anchor="t">
+            <a:spAutoFit/>
+          </a:bodyPr>
+          <a:lstStyle/>
+          <a:p>
+            <a:pPr>
+              <a:lnSpc>
+                <a:spcPct val="100000"/>
+              </a:lnSpc>
+              <a:spcBef>
+                <a:spcPts val="0"/>
+              </a:spcBef>
+              <a:spcAft>
+                <a:spcPts val="200"/>
+              </a:spcAft>
+            </a:pPr>
+            <a:r>
+              <a:rPr sz="1000" b="0" i="0">
+                <a:solidFill>
+                  <a:srgbClr val="5C6B7A"/>
+                </a:solidFill>
+                <a:latin typeface="Arial"/>
+                <a:ea typeface="微軟正黑體"/>
+                <a:cs typeface="Arial"/>
+              </a:rPr>
+              <a:t>來源：客訴關懷策略、話術範例</a:t>
+            </a:r>
+          </a:p>
+        </p:txBody>
+      </p:sp>
+      <p:sp>
+        <p:nvSpPr>
+          <p:cNvPr id="4" name="TextBox 3"/>
+          <p:cNvSpPr txBox="1"/>
+          <p:nvPr/>
+        </p:nvSpPr>
+        <p:spPr>
+          <a:xfrm>
+            <a:off x="10378440" y="6547104"/>
+            <a:ext cx="1389888" cy="219456"/>
+          </a:xfrm>
+          <a:prstGeom prst="rect">
+            <a:avLst/>
+          </a:prstGeom>
+          <a:noFill/>
+        </p:spPr>
+        <p:txBody>
+          <a:bodyPr wrap="square" lIns="0" rIns="0" tIns="18288" bIns="18288" anchor="t">
+            <a:spAutoFit/>
+          </a:bodyPr>
+          <a:lstStyle/>
+          <a:p>
+            <a:pPr algn="r">
+              <a:lnSpc>
+                <a:spcPct val="100000"/>
+              </a:lnSpc>
+              <a:spcBef>
+                <a:spcPts val="0"/>
+              </a:spcBef>
+              <a:spcAft>
+                <a:spcPts val="200"/>
+              </a:spcAft>
+            </a:pPr>
+            <a:r>
+              <a:rPr sz="1200" b="0" i="0">
+                <a:solidFill>
+                  <a:srgbClr val="44546A"/>
+                </a:solidFill>
+                <a:latin typeface="Arial"/>
+                <a:ea typeface="微軟正黑體"/>
+                <a:cs typeface="Arial"/>
+              </a:rPr>
+              <a:t>22</a:t>
+            </a:r>
+          </a:p>
+        </p:txBody>
+      </p:sp>
+      <p:sp>
+        <p:nvSpPr>
+          <p:cNvPr id="5" name="TextBox 4"/>
+          <p:cNvSpPr txBox="1"/>
+          <p:nvPr/>
+        </p:nvSpPr>
+        <p:spPr>
+          <a:xfrm>
+            <a:off x="420624" y="329184"/>
+            <a:ext cx="11356848" cy="566928"/>
+          </a:xfrm>
+          <a:prstGeom prst="rect">
+            <a:avLst/>
+          </a:prstGeom>
+          <a:noFill/>
+        </p:spPr>
+        <p:txBody>
+          <a:bodyPr wrap="square" lIns="0" rIns="0" tIns="18288" bIns="18288" anchor="t">
+            <a:spAutoFit/>
+          </a:bodyPr>
+          <a:lstStyle/>
+          <a:p>
+            <a:pPr>
+              <a:lnSpc>
+                <a:spcPct val="100000"/>
+              </a:lnSpc>
+              <a:spcBef>
+                <a:spcPts val="0"/>
+              </a:spcBef>
+              <a:spcAft>
+                <a:spcPts val="200"/>
+              </a:spcAft>
+            </a:pPr>
+            <a:r>
+              <a:rPr sz="2400" b="1" i="0">
+                <a:solidFill>
+                  <a:srgbClr val="24323E"/>
+                </a:solidFill>
+                <a:latin typeface="Arial"/>
+                <a:ea typeface="微軟正黑體"/>
+                <a:cs typeface="Arial"/>
+              </a:rPr>
+              <a:t>客訴結案第 7 天回訪，不推銷、不要求刪評</a:t>
+            </a:r>
+          </a:p>
+        </p:txBody>
+      </p:sp>
+      <p:sp>
+        <p:nvSpPr>
+          <p:cNvPr id="6" name="Rounded Rectangle 5"/>
+          <p:cNvSpPr/>
+          <p:nvPr/>
+        </p:nvSpPr>
+        <p:spPr>
+          <a:xfrm>
+            <a:off x="420624" y="987552"/>
+            <a:ext cx="11356848" cy="2331720"/>
+          </a:xfrm>
+          <a:prstGeom prst="roundRect">
+            <a:avLst>
+              <a:gd name="adj" fmla="val 8000"/>
+            </a:avLst>
+          </a:prstGeom>
+          <a:solidFill>
+            <a:srgbClr val="F4F7FB"/>
+          </a:solidFill>
+          <a:ln>
+            <a:noFill/>
+          </a:ln>
+        </p:spPr>
+        <p:style>
+          <a:lnRef idx="1">
+            <a:schemeClr val="accent1"/>
+          </a:lnRef>
+          <a:fillRef idx="3">
+            <a:schemeClr val="accent1"/>
+          </a:fillRef>
+          <a:effectRef idx="2">
+            <a:schemeClr val="accent1"/>
+          </a:effectRef>
+          <a:fontRef idx="minor">
+            <a:schemeClr val="lt1"/>
+          </a:fontRef>
+        </p:style>
+        <p:txBody>
+          <a:bodyPr rtlCol="0" anchor="ctr"/>
+          <a:lstStyle/>
+          <a:p>
+            <a:pPr algn="ctr"/>
+          </a:p>
+        </p:txBody>
+      </p:sp>
+      <p:sp>
+        <p:nvSpPr>
+          <p:cNvPr id="7" name="TextBox 6"/>
+          <p:cNvSpPr txBox="1"/>
+          <p:nvPr/>
+        </p:nvSpPr>
+        <p:spPr>
+          <a:xfrm>
+            <a:off x="566928" y="1060704"/>
+            <a:ext cx="11064240" cy="2203703"/>
+          </a:xfrm>
+          <a:prstGeom prst="rect">
+            <a:avLst/>
+          </a:prstGeom>
+          <a:noFill/>
+        </p:spPr>
+        <p:txBody>
+          <a:bodyPr wrap="square" lIns="36576" rIns="36576" tIns="18288" bIns="18288" anchor="t">
+            <a:spAutoFit/>
+          </a:bodyPr>
+          <a:lstStyle/>
+          <a:p>
+            <a:pPr>
+              <a:lnSpc>
+                <a:spcPct val="100000"/>
+              </a:lnSpc>
+              <a:spcBef>
+                <a:spcPts val="0"/>
+              </a:spcBef>
+              <a:spcAft>
+                <a:spcPts val="200"/>
+              </a:spcAft>
+            </a:pPr>
+            <a:r>
+              <a:rPr sz="1600" b="1" i="0">
+                <a:solidFill>
+                  <a:srgbClr val="2F5D9F"/>
+                </a:solidFill>
+                <a:latin typeface="Arial"/>
+                <a:ea typeface="微軟正黑體"/>
+                <a:cs typeface="Arial"/>
+              </a:rPr>
+              <a:t>品質失望派 × 客訴結案後 7 天回訪</a:t>
+            </a:r>
+          </a:p>
+          <a:p>
+            <a:pPr>
+              <a:lnSpc>
+                <a:spcPct val="100000"/>
+              </a:lnSpc>
+              <a:spcBef>
+                <a:spcPts val="0"/>
+              </a:spcBef>
+              <a:spcAft>
+                <a:spcPts val="200"/>
+              </a:spcAft>
+            </a:pPr>
+            <a:r>
+              <a:rPr sz="1200" b="0" i="0">
+                <a:solidFill>
+                  <a:srgbClr val="44546A"/>
+                </a:solidFill>
+                <a:latin typeface="Arial"/>
+                <a:ea typeface="微軟正黑體"/>
+                <a:cs typeface="Arial"/>
+              </a:rPr>
+              <a:t>渠道：專員電話腳本　　引用條目：21</a:t>
+            </a:r>
+          </a:p>
+          <a:p>
+            <a:pPr>
+              <a:lnSpc>
+                <a:spcPct val="100000"/>
+              </a:lnSpc>
+              <a:spcBef>
+                <a:spcPts val="0"/>
+              </a:spcBef>
+              <a:spcAft>
+                <a:spcPts val="200"/>
+              </a:spcAft>
+            </a:pPr>
+            <a:r>
+              <a:rPr sz="1300" b="0" i="0">
+                <a:solidFill>
+                  <a:srgbClr val="24323E"/>
+                </a:solidFill>
+                <a:latin typeface="Arial"/>
+                <a:ea typeface="微軟正黑體"/>
+                <a:cs typeface="Arial"/>
+              </a:rPr>
+              <a:t>您好，我是上次為您服務的專員。很抱歉先前維修的狀況讓您費心了，想跟您確認，愛車修好後，同樣的狀況是否還有再出現？如果有，請直接找我，我會協助安排後續確認。您也可以預約全年免費的25項尊榮安檢，協助確認目前車況；後續有任何狀況，都可以由我作為您的服務窗口。</a:t>
+            </a:r>
+          </a:p>
+          <a:p>
+            <a:pPr>
+              <a:lnSpc>
+                <a:spcPct val="100000"/>
+              </a:lnSpc>
+              <a:spcBef>
+                <a:spcPts val="0"/>
+              </a:spcBef>
+              <a:spcAft>
+                <a:spcPts val="200"/>
+              </a:spcAft>
+            </a:pPr>
+            <a:r>
+              <a:rPr sz="1200" b="0" i="0">
+                <a:solidFill>
+                  <a:srgbClr val="5C6B7A"/>
+                </a:solidFill>
+                <a:latin typeface="Arial"/>
+                <a:ea typeface="微軟正黑體"/>
+                <a:cs typeface="Arial"/>
+              </a:rPr>
+              <a:t>查核：通過；supported 3/3；重生成 0 次；生成次數 1</a:t>
+            </a:r>
+          </a:p>
+        </p:txBody>
+      </p:sp>
+      <p:sp>
+        <p:nvSpPr>
+          <p:cNvPr id="8" name="Rounded Rectangle 7"/>
+          <p:cNvSpPr/>
+          <p:nvPr/>
+        </p:nvSpPr>
+        <p:spPr>
+          <a:xfrm>
+            <a:off x="420624" y="3447288"/>
+            <a:ext cx="11356848" cy="2331720"/>
+          </a:xfrm>
+          <a:prstGeom prst="roundRect">
+            <a:avLst>
+              <a:gd name="adj" fmla="val 8000"/>
+            </a:avLst>
+          </a:prstGeom>
+          <a:solidFill>
+            <a:srgbClr val="F4F7FB"/>
+          </a:solidFill>
+          <a:ln>
+            <a:noFill/>
+          </a:ln>
+        </p:spPr>
+        <p:style>
+          <a:lnRef idx="1">
+            <a:schemeClr val="accent1"/>
+          </a:lnRef>
+          <a:fillRef idx="3">
+            <a:schemeClr val="accent1"/>
+          </a:fillRef>
+          <a:effectRef idx="2">
+            <a:schemeClr val="accent1"/>
+          </a:effectRef>
+          <a:fontRef idx="minor">
+            <a:schemeClr val="lt1"/>
+          </a:fontRef>
+        </p:style>
+        <p:txBody>
+          <a:bodyPr rtlCol="0" anchor="ctr"/>
+          <a:lstStyle/>
+          <a:p>
+            <a:pPr algn="ctr"/>
+          </a:p>
+        </p:txBody>
+      </p:sp>
+      <p:sp>
+        <p:nvSpPr>
+          <p:cNvPr id="9" name="TextBox 8"/>
+          <p:cNvSpPr txBox="1"/>
+          <p:nvPr/>
+        </p:nvSpPr>
+        <p:spPr>
+          <a:xfrm>
+            <a:off x="566928" y="3520440"/>
+            <a:ext cx="11064240" cy="2203703"/>
+          </a:xfrm>
+          <a:prstGeom prst="rect">
+            <a:avLst/>
+          </a:prstGeom>
+          <a:noFill/>
+        </p:spPr>
+        <p:txBody>
+          <a:bodyPr wrap="square" lIns="36576" rIns="36576" tIns="18288" bIns="18288" anchor="t">
+            <a:spAutoFit/>
+          </a:bodyPr>
+          <a:lstStyle/>
+          <a:p>
+            <a:pPr>
+              <a:lnSpc>
+                <a:spcPct val="100000"/>
+              </a:lnSpc>
+              <a:spcBef>
+                <a:spcPts val="0"/>
+              </a:spcBef>
+              <a:spcAft>
+                <a:spcPts val="200"/>
+              </a:spcAft>
+            </a:pPr>
+            <a:r>
+              <a:rPr sz="1600" b="1" i="0">
+                <a:solidFill>
+                  <a:srgbClr val="2F5D9F"/>
+                </a:solidFill>
+                <a:latin typeface="Arial"/>
+                <a:ea typeface="微軟正黑體"/>
+                <a:cs typeface="Arial"/>
+              </a:rPr>
+              <a:t>口碑建議者 × 客訴結案後 7 天回訪</a:t>
+            </a:r>
+          </a:p>
+          <a:p>
+            <a:pPr>
+              <a:lnSpc>
+                <a:spcPct val="100000"/>
+              </a:lnSpc>
+              <a:spcBef>
+                <a:spcPts val="0"/>
+              </a:spcBef>
+              <a:spcAft>
+                <a:spcPts val="200"/>
+              </a:spcAft>
+            </a:pPr>
+            <a:r>
+              <a:rPr sz="1200" b="0" i="0">
+                <a:solidFill>
+                  <a:srgbClr val="44546A"/>
+                </a:solidFill>
+                <a:latin typeface="Arial"/>
+                <a:ea typeface="微軟正黑體"/>
+                <a:cs typeface="Arial"/>
+              </a:rPr>
+              <a:t>渠道：LINE 一對一　　引用條目：65、73</a:t>
+            </a:r>
+          </a:p>
+          <a:p>
+            <a:pPr>
+              <a:lnSpc>
+                <a:spcPct val="100000"/>
+              </a:lnSpc>
+              <a:spcBef>
+                <a:spcPts val="0"/>
+              </a:spcBef>
+              <a:spcAft>
+                <a:spcPts val="200"/>
+              </a:spcAft>
+            </a:pPr>
+            <a:r>
+              <a:rPr sz="1300" b="0" i="0">
+                <a:solidFill>
+                  <a:srgbClr val="24323E"/>
+                </a:solidFill>
+                <a:latin typeface="Arial"/>
+                <a:ea typeface="微軟正黑體"/>
+                <a:cs typeface="Arial"/>
+              </a:rPr>
+              <a:t>您好，感謝您提出意見，讓我們有機會檢視服務。後續改善為【改善做法，由專員填入】。若仍有疑問，您可聯絡服務專員、Lexus LINE 官方帳號的 AI 客服，或免付費專線 0800-036-036 反映；預約可於入廠前一日完成。也歡迎您回覆目前的感受，我們會持續聆聽。</a:t>
+            </a:r>
+          </a:p>
+          <a:p>
+            <a:pPr>
+              <a:lnSpc>
+                <a:spcPct val="100000"/>
+              </a:lnSpc>
+              <a:spcBef>
+                <a:spcPts val="0"/>
+              </a:spcBef>
+              <a:spcAft>
+                <a:spcPts val="200"/>
+              </a:spcAft>
+            </a:pPr>
+            <a:r>
+              <a:rPr sz="1200" b="0" i="0">
+                <a:solidFill>
+                  <a:srgbClr val="5C6B7A"/>
+                </a:solidFill>
+                <a:latin typeface="Arial"/>
+                <a:ea typeface="微軟正黑體"/>
+                <a:cs typeface="Arial"/>
+              </a:rPr>
+              <a:t>查核：通過；supported 1/1；重生成 0 次；生成次數 1</a:t>
+            </a:r>
+          </a:p>
+        </p:txBody>
+      </p:sp>
+    </p:spTree>
+  </p:cSld>
+  <p:clrMapOvr>
+    <a:masterClrMapping/>
+  </p:clrMapOvr>
+</p:sld>
+</file>
+
 <file path=ppt/slides/slide3.xml><?xml version="1.0" encoding="utf-8"?>
 <p:sld xmlns:a="http://schemas.openxmlformats.org/drawingml/2006/main" xmlns:p="http://schemas.openxmlformats.org/presentationml/2006/main" xmlns:r="http://schemas.openxmlformats.org/officeDocument/2006/relationships">
   <p:cSld>
@@ -26466,7 +28433,7 @@
                 <a:ea typeface="微軟正黑體"/>
                 <a:cs typeface="Arial"/>
               </a:rPr>
-              <a:t>來源：reports/T7_stats_tests.md、reports/T3_residual_split_report.md</a:t>
+              <a:t>來源：統計檢定報告（T7）、殘餘切分報告（T3）</a:t>
             </a:r>
           </a:p>
         </p:txBody>
@@ -26700,7 +28667,7 @@
                 <a:ea typeface="微軟正黑體"/>
                 <a:cs typeface="Arial"/>
               </a:rPr>
-              <a:t>作者流失率最高</a:t>
+              <a:t>作者流失率</a:t>
             </a:r>
           </a:p>
         </p:txBody>
@@ -26840,7 +28807,7 @@
                 <a:ea typeface="微軟正黑體"/>
                 <a:cs typeface="Arial"/>
               </a:rPr>
-              <a:t>介於兩者之間</a:t>
+              <a:t>作者流失率</a:t>
             </a:r>
           </a:p>
         </p:txBody>
@@ -26980,7 +28947,7 @@
                 <a:ea typeface="微軟正黑體"/>
                 <a:cs typeface="Arial"/>
               </a:rPr>
-              <a:t>作者流失率最低</a:t>
+              <a:t>作者流失率</a:t>
             </a:r>
           </a:p>
         </p:txBody>
@@ -27027,7 +28994,7 @@
                 <a:ea typeface="微軟正黑體"/>
                 <a:cs typeface="Arial"/>
               </a:rPr>
-              <a:t>作者層級 χ²=99.5，p&lt;.001（Cramér's V=0.125）。母體是論壇發言者，不是全體車主。</a:t>
+              <a:t>三站差異顯著（χ²=99.5）。</a:t>
             </a:r>
           </a:p>
           <a:p>
@@ -27051,7 +29018,31 @@
                 <a:ea typeface="微軟正黑體"/>
                 <a:cs typeface="Arial"/>
               </a:rPr>
-              <a:t>靜默出走：1,671 句流失裡，186 句沒有痛點訊號，只是在找出口。</a:t>
+              <a:t>母體為論壇發言者。</a:t>
+            </a:r>
+          </a:p>
+          <a:p>
+            <a:pPr>
+              <a:lnSpc>
+                <a:spcPct val="100000"/>
+              </a:lnSpc>
+              <a:spcBef>
+                <a:spcPts val="0"/>
+              </a:spcBef>
+              <a:spcAft>
+                <a:spcPts val="200"/>
+              </a:spcAft>
+            </a:pPr>
+            <a:r>
+              <a:rPr sz="1600" b="0" i="0">
+                <a:solidFill>
+                  <a:srgbClr val="24323E"/>
+                </a:solidFill>
+                <a:latin typeface="Arial"/>
+                <a:ea typeface="微軟正黑體"/>
+                <a:cs typeface="Arial"/>
+              </a:rPr>
+              <a:t>1,671 句流失中，186 句沒抱怨就找出口。</a:t>
             </a:r>
           </a:p>
           <a:p>
@@ -27187,7 +29178,7 @@
                 <a:ea typeface="微軟正黑體"/>
                 <a:cs typeface="Arial"/>
               </a:rPr>
-              <a:t>來源：reports/T7_stats_tests.md（作者層級流失率；Dcard 偏購車階段）</a:t>
+              <a:t>來源：統計檢定報告（T7）；Dcard 偏購車階段</a:t>
             </a:r>
           </a:p>
         </p:txBody>
@@ -27281,7 +29272,7 @@
                 <a:ea typeface="微軟正黑體"/>
                 <a:cs typeface="Arial"/>
               </a:rPr>
-              <a:t>售後現在是人走了才知道，公開輿情可以把時間往前拉</a:t>
+              <a:t>售後是人走了才知道；輿情能提前預警</a:t>
             </a:r>
           </a:p>
         </p:txBody>
@@ -27565,330 +29556,108 @@
           </a:p>
         </p:txBody>
       </p:sp>
-      <p:graphicFrame>
-        <p:nvGraphicFramePr>
-          <p:cNvPr id="11" name="Table 10"/>
-          <p:cNvGraphicFramePr>
-            <a:graphicFrameLocks noGrp="1"/>
-          </p:cNvGraphicFramePr>
-          <p:nvPr/>
-        </p:nvGraphicFramePr>
-        <p:xfrm>
-          <a:off x="5696712" y="987552"/>
-          <a:ext cx="6080760" cy="1965960"/>
-        </p:xfrm>
-        <a:graphic>
-          <a:graphicData uri="http://schemas.openxmlformats.org/drawingml/2006/table">
-            <a:tbl>
-              <a:tblPr firstRow="1" bandRow="1">
-                <a:tableStyleId>{5C22544A-7EE6-4342-B048-85BDC9FD1C3A}</a:tableStyleId>
-              </a:tblPr>
-              <a:tblGrid>
-                <a:gridCol w="3344418"/>
-                <a:gridCol w="2736342"/>
-              </a:tblGrid>
-              <a:tr h="491490">
-                <a:tc>
-                  <a:txBody>
-                    <a:bodyPr wrap="square" anchor="ctr"/>
-                    <a:lstStyle/>
-                    <a:p>
-                      <a:pPr>
-                        <a:lnSpc>
-                          <a:spcPct val="100000"/>
-                        </a:lnSpc>
-                        <a:spcBef>
-                          <a:spcPts val="0"/>
-                        </a:spcBef>
-                        <a:spcAft>
-                          <a:spcPts val="200"/>
-                        </a:spcAft>
-                      </a:pPr>
-                      <a:r>
-                        <a:rPr sz="1600" b="1" i="0">
-                          <a:solidFill>
-                            <a:srgbClr val="FFFFFF"/>
-                          </a:solidFill>
-                          <a:latin typeface="Arial"/>
-                          <a:ea typeface="微軟正黑體"/>
-                          <a:cs typeface="Arial"/>
-                        </a:rPr>
-                        <a:t>來源</a:t>
-                      </a:r>
-                    </a:p>
-                  </a:txBody>
-                  <a:tcPr anchor="ctr" marL="73152" marR="54864" marT="36576" marB="27432">
-                    <a:solidFill>
-                      <a:srgbClr val="44546A"/>
-                    </a:solidFill>
-                  </a:tcPr>
-                </a:tc>
-                <a:tc>
-                  <a:txBody>
-                    <a:bodyPr wrap="square" anchor="ctr"/>
-                    <a:lstStyle/>
-                    <a:p>
-                      <a:pPr>
-                        <a:lnSpc>
-                          <a:spcPct val="100000"/>
-                        </a:lnSpc>
-                        <a:spcBef>
-                          <a:spcPts val="0"/>
-                        </a:spcBef>
-                        <a:spcAft>
-                          <a:spcPts val="200"/>
-                        </a:spcAft>
-                      </a:pPr>
-                      <a:r>
-                        <a:rPr sz="1600" b="1" i="0">
-                          <a:solidFill>
-                            <a:srgbClr val="FFFFFF"/>
-                          </a:solidFill>
-                          <a:latin typeface="Arial"/>
-                          <a:ea typeface="微軟正黑體"/>
-                          <a:cs typeface="Arial"/>
-                        </a:rPr>
-                        <a:t>作者流失率</a:t>
-                      </a:r>
-                    </a:p>
-                  </a:txBody>
-                  <a:tcPr anchor="ctr" marL="73152" marR="54864" marT="36576" marB="27432">
-                    <a:solidFill>
-                      <a:srgbClr val="44546A"/>
-                    </a:solidFill>
-                  </a:tcPr>
-                </a:tc>
-              </a:tr>
-              <a:tr h="491490">
-                <a:tc>
-                  <a:txBody>
-                    <a:bodyPr wrap="square" anchor="ctr"/>
-                    <a:lstStyle/>
-                    <a:p>
-                      <a:pPr>
-                        <a:lnSpc>
-                          <a:spcPct val="100000"/>
-                        </a:lnSpc>
-                        <a:spcBef>
-                          <a:spcPts val="0"/>
-                        </a:spcBef>
-                        <a:spcAft>
-                          <a:spcPts val="200"/>
-                        </a:spcAft>
-                      </a:pPr>
-                      <a:r>
-                        <a:rPr sz="1600" b="1" i="0">
-                          <a:solidFill>
-                            <a:srgbClr val="24323E"/>
-                          </a:solidFill>
-                          <a:latin typeface="Arial"/>
-                          <a:ea typeface="微軟正黑體"/>
-                          <a:cs typeface="Arial"/>
-                        </a:rPr>
-                        <a:t>Mobile01</a:t>
-                      </a:r>
-                    </a:p>
-                  </a:txBody>
-                  <a:tcPr anchor="ctr" marL="73152" marR="54864" marT="36576" marB="27432">
-                    <a:solidFill>
-                      <a:srgbClr val="FFFFFF"/>
-                    </a:solidFill>
-                  </a:tcPr>
-                </a:tc>
-                <a:tc>
-                  <a:txBody>
-                    <a:bodyPr wrap="square" anchor="ctr"/>
-                    <a:lstStyle/>
-                    <a:p>
-                      <a:pPr>
-                        <a:lnSpc>
-                          <a:spcPct val="100000"/>
-                        </a:lnSpc>
-                        <a:spcBef>
-                          <a:spcPts val="0"/>
-                        </a:spcBef>
-                        <a:spcAft>
-                          <a:spcPts val="200"/>
-                        </a:spcAft>
-                      </a:pPr>
-                      <a:r>
-                        <a:rPr sz="1600" b="0" i="0">
-                          <a:solidFill>
-                            <a:srgbClr val="24323E"/>
-                          </a:solidFill>
-                          <a:latin typeface="Arial"/>
-                          <a:ea typeface="微軟正黑體"/>
-                          <a:cs typeface="Arial"/>
-                        </a:rPr>
-                        <a:t>18.2%</a:t>
-                      </a:r>
-                    </a:p>
-                  </a:txBody>
-                  <a:tcPr anchor="ctr" marL="73152" marR="54864" marT="36576" marB="27432">
-                    <a:solidFill>
-                      <a:srgbClr val="FFFFFF"/>
-                    </a:solidFill>
-                  </a:tcPr>
-                </a:tc>
-              </a:tr>
-              <a:tr h="491490">
-                <a:tc>
-                  <a:txBody>
-                    <a:bodyPr wrap="square" anchor="ctr"/>
-                    <a:lstStyle/>
-                    <a:p>
-                      <a:pPr>
-                        <a:lnSpc>
-                          <a:spcPct val="100000"/>
-                        </a:lnSpc>
-                        <a:spcBef>
-                          <a:spcPts val="0"/>
-                        </a:spcBef>
-                        <a:spcAft>
-                          <a:spcPts val="200"/>
-                        </a:spcAft>
-                      </a:pPr>
-                      <a:r>
-                        <a:rPr sz="1600" b="1" i="0">
-                          <a:solidFill>
-                            <a:srgbClr val="24323E"/>
-                          </a:solidFill>
-                          <a:latin typeface="Arial"/>
-                          <a:ea typeface="微軟正黑體"/>
-                          <a:cs typeface="Arial"/>
-                        </a:rPr>
-                        <a:t>PTT</a:t>
-                      </a:r>
-                    </a:p>
-                  </a:txBody>
-                  <a:tcPr anchor="ctr" marL="73152" marR="54864" marT="36576" marB="27432">
-                    <a:solidFill>
-                      <a:srgbClr val="F7F9FB"/>
-                    </a:solidFill>
-                  </a:tcPr>
-                </a:tc>
-                <a:tc>
-                  <a:txBody>
-                    <a:bodyPr wrap="square" anchor="ctr"/>
-                    <a:lstStyle/>
-                    <a:p>
-                      <a:pPr>
-                        <a:lnSpc>
-                          <a:spcPct val="100000"/>
-                        </a:lnSpc>
-                        <a:spcBef>
-                          <a:spcPts val="0"/>
-                        </a:spcBef>
-                        <a:spcAft>
-                          <a:spcPts val="200"/>
-                        </a:spcAft>
-                      </a:pPr>
-                      <a:r>
-                        <a:rPr sz="1600" b="0" i="0">
-                          <a:solidFill>
-                            <a:srgbClr val="24323E"/>
-                          </a:solidFill>
-                          <a:latin typeface="Arial"/>
-                          <a:ea typeface="微軟正黑體"/>
-                          <a:cs typeface="Arial"/>
-                        </a:rPr>
-                        <a:t>14.1%</a:t>
-                      </a:r>
-                    </a:p>
-                  </a:txBody>
-                  <a:tcPr anchor="ctr" marL="73152" marR="54864" marT="36576" marB="27432">
-                    <a:solidFill>
-                      <a:srgbClr val="F7F9FB"/>
-                    </a:solidFill>
-                  </a:tcPr>
-                </a:tc>
-              </a:tr>
-              <a:tr h="491490">
-                <a:tc>
-                  <a:txBody>
-                    <a:bodyPr wrap="square" anchor="ctr"/>
-                    <a:lstStyle/>
-                    <a:p>
-                      <a:pPr>
-                        <a:lnSpc>
-                          <a:spcPct val="100000"/>
-                        </a:lnSpc>
-                        <a:spcBef>
-                          <a:spcPts val="0"/>
-                        </a:spcBef>
-                        <a:spcAft>
-                          <a:spcPts val="200"/>
-                        </a:spcAft>
-                      </a:pPr>
-                      <a:r>
-                        <a:rPr sz="1600" b="1" i="0">
-                          <a:solidFill>
-                            <a:srgbClr val="24323E"/>
-                          </a:solidFill>
-                          <a:latin typeface="Arial"/>
-                          <a:ea typeface="微軟正黑體"/>
-                          <a:cs typeface="Arial"/>
-                        </a:rPr>
-                        <a:t>Dcard</a:t>
-                      </a:r>
-                    </a:p>
-                  </a:txBody>
-                  <a:tcPr anchor="ctr" marL="73152" marR="54864" marT="36576" marB="27432">
-                    <a:solidFill>
-                      <a:srgbClr val="FFFFFF"/>
-                    </a:solidFill>
-                  </a:tcPr>
-                </a:tc>
-                <a:tc>
-                  <a:txBody>
-                    <a:bodyPr wrap="square" anchor="ctr"/>
-                    <a:lstStyle/>
-                    <a:p>
-                      <a:pPr>
-                        <a:lnSpc>
-                          <a:spcPct val="100000"/>
-                        </a:lnSpc>
-                        <a:spcBef>
-                          <a:spcPts val="0"/>
-                        </a:spcBef>
-                        <a:spcAft>
-                          <a:spcPts val="200"/>
-                        </a:spcAft>
-                      </a:pPr>
-                      <a:r>
-                        <a:rPr sz="1600" b="0" i="0">
-                          <a:solidFill>
-                            <a:srgbClr val="24323E"/>
-                          </a:solidFill>
-                          <a:latin typeface="Arial"/>
-                          <a:ea typeface="微軟正黑體"/>
-                          <a:cs typeface="Arial"/>
-                        </a:rPr>
-                        <a:t>6.8%</a:t>
-                      </a:r>
-                    </a:p>
-                  </a:txBody>
-                  <a:tcPr anchor="ctr" marL="73152" marR="54864" marT="36576" marB="27432">
-                    <a:solidFill>
-                      <a:srgbClr val="FFFFFF"/>
-                    </a:solidFill>
-                  </a:tcPr>
-                </a:tc>
-              </a:tr>
-            </a:tbl>
-          </a:graphicData>
-        </a:graphic>
-      </p:graphicFrame>
       <p:sp>
         <p:nvSpPr>
-          <p:cNvPr id="12" name="TextBox 11"/>
+          <p:cNvPr id="11" name="TextBox 10"/>
           <p:cNvSpPr txBox="1"/>
           <p:nvPr/>
         </p:nvSpPr>
         <p:spPr>
           <a:xfrm>
-            <a:off x="5696712" y="3090672"/>
-            <a:ext cx="6080760" cy="1051560"/>
+            <a:off x="5696712" y="987552"/>
+            <a:ext cx="6080760" cy="292608"/>
+          </a:xfrm>
+          <a:prstGeom prst="rect">
+            <a:avLst/>
+          </a:prstGeom>
+          <a:noFill/>
+        </p:spPr>
+        <p:txBody>
+          <a:bodyPr wrap="square" lIns="0" rIns="0" tIns="18288" bIns="18288" anchor="t">
+            <a:spAutoFit/>
+          </a:bodyPr>
+          <a:lstStyle/>
+          <a:p>
+            <a:pPr>
+              <a:lnSpc>
+                <a:spcPct val="100000"/>
+              </a:lnSpc>
+              <a:spcBef>
+                <a:spcPts val="0"/>
+              </a:spcBef>
+              <a:spcAft>
+                <a:spcPts val="200"/>
+              </a:spcAft>
+            </a:pPr>
+            <a:r>
+              <a:rPr sz="1600" b="1" i="0">
+                <a:solidFill>
+                  <a:srgbClr val="2F5D9F"/>
+                </a:solidFill>
+                <a:latin typeface="Arial"/>
+                <a:ea typeface="微軟正黑體"/>
+                <a:cs typeface="Arial"/>
+              </a:rPr>
+              <a:t>三個流失前兆</a:t>
+            </a:r>
+          </a:p>
+        </p:txBody>
+      </p:sp>
+      <p:sp>
+        <p:nvSpPr>
+          <p:cNvPr id="12" name="Rounded Rectangle 11"/>
+          <p:cNvSpPr/>
+          <p:nvPr/>
+        </p:nvSpPr>
+        <p:spPr>
+          <a:xfrm>
+            <a:off x="5696712" y="1353312"/>
+            <a:ext cx="6080760" cy="1115568"/>
+          </a:xfrm>
+          <a:prstGeom prst="roundRect">
+            <a:avLst>
+              <a:gd name="adj" fmla="val 8000"/>
+            </a:avLst>
+          </a:prstGeom>
+          <a:solidFill>
+            <a:srgbClr val="F4F7FB"/>
+          </a:solidFill>
+          <a:ln>
+            <a:noFill/>
+          </a:ln>
+        </p:spPr>
+        <p:style>
+          <a:lnRef idx="1">
+            <a:schemeClr val="accent1"/>
+          </a:lnRef>
+          <a:fillRef idx="3">
+            <a:schemeClr val="accent1"/>
+          </a:fillRef>
+          <a:effectRef idx="2">
+            <a:schemeClr val="accent1"/>
+          </a:effectRef>
+          <a:fontRef idx="minor">
+            <a:schemeClr val="lt1"/>
+          </a:fontRef>
+        </p:style>
+        <p:txBody>
+          <a:bodyPr rtlCol="0" anchor="ctr"/>
+          <a:lstStyle/>
+          <a:p>
+            <a:pPr algn="ctr"/>
+          </a:p>
+        </p:txBody>
+      </p:sp>
+      <p:sp>
+        <p:nvSpPr>
+          <p:cNvPr id="13" name="TextBox 12"/>
+          <p:cNvSpPr txBox="1"/>
+          <p:nvPr/>
+        </p:nvSpPr>
+        <p:spPr>
+          <a:xfrm>
+            <a:off x="5824727" y="1463040"/>
+            <a:ext cx="5824728" cy="914400"/>
           </a:xfrm>
           <a:prstGeom prst="rect">
             <a:avLst/>
@@ -27913,6 +29682,30 @@
               </a:spcAft>
             </a:pPr>
             <a:r>
+              <a:rPr sz="1600" b="1" i="0">
+                <a:solidFill>
+                  <a:srgbClr val="24323E"/>
+                </a:solidFill>
+                <a:latin typeface="Arial"/>
+                <a:ea typeface="微軟正黑體"/>
+                <a:cs typeface="Arial"/>
+              </a:rPr>
+              <a:t>過保</a:t>
+            </a:r>
+          </a:p>
+          <a:p>
+            <a:pPr>
+              <a:lnSpc>
+                <a:spcPct val="100000"/>
+              </a:lnSpc>
+              <a:spcBef>
+                <a:spcPts val="0"/>
+              </a:spcBef>
+              <a:spcAft>
+                <a:spcPts val="200"/>
+              </a:spcAft>
+            </a:pPr>
+            <a:r>
               <a:rPr sz="1400" b="0" i="0">
                 <a:solidFill>
                   <a:srgbClr val="24323E"/>
@@ -27921,9 +29714,77 @@
                 <a:ea typeface="微軟正黑體"/>
                 <a:cs typeface="Arial"/>
               </a:rPr>
-              <a:t>χ²(2)=99.5，V=0.125。母體是論壇發言者。</a:t>
+              <a:t>保固到期前先找到人。</a:t>
             </a:r>
           </a:p>
+        </p:txBody>
+      </p:sp>
+      <p:sp>
+        <p:nvSpPr>
+          <p:cNvPr id="14" name="Rounded Rectangle 13"/>
+          <p:cNvSpPr/>
+          <p:nvPr/>
+        </p:nvSpPr>
+        <p:spPr>
+          <a:xfrm>
+            <a:off x="5696712" y="2587752"/>
+            <a:ext cx="6080760" cy="1115568"/>
+          </a:xfrm>
+          <a:prstGeom prst="roundRect">
+            <a:avLst>
+              <a:gd name="adj" fmla="val 8000"/>
+            </a:avLst>
+          </a:prstGeom>
+          <a:solidFill>
+            <a:srgbClr val="F4F7FB"/>
+          </a:solidFill>
+          <a:ln>
+            <a:noFill/>
+          </a:ln>
+        </p:spPr>
+        <p:style>
+          <a:lnRef idx="1">
+            <a:schemeClr val="accent1"/>
+          </a:lnRef>
+          <a:fillRef idx="3">
+            <a:schemeClr val="accent1"/>
+          </a:fillRef>
+          <a:effectRef idx="2">
+            <a:schemeClr val="accent1"/>
+          </a:effectRef>
+          <a:fontRef idx="minor">
+            <a:schemeClr val="lt1"/>
+          </a:fontRef>
+        </p:style>
+        <p:txBody>
+          <a:bodyPr rtlCol="0" anchor="ctr"/>
+          <a:lstStyle/>
+          <a:p>
+            <a:pPr algn="ctr"/>
+          </a:p>
+        </p:txBody>
+      </p:sp>
+      <p:sp>
+        <p:nvSpPr>
+          <p:cNvPr id="15" name="TextBox 14"/>
+          <p:cNvSpPr txBox="1"/>
+          <p:nvPr/>
+        </p:nvSpPr>
+        <p:spPr>
+          <a:xfrm>
+            <a:off x="5824727" y="2697480"/>
+            <a:ext cx="5824728" cy="914400"/>
+          </a:xfrm>
+          <a:prstGeom prst="rect">
+            <a:avLst/>
+          </a:prstGeom>
+          <a:noFill/>
+        </p:spPr>
+        <p:txBody>
+          <a:bodyPr wrap="square" lIns="36576" rIns="36576" tIns="18288" bIns="18288" anchor="t">
+            <a:spAutoFit/>
+          </a:bodyPr>
+          <a:lstStyle/>
           <a:p>
             <a:pPr>
               <a:lnSpc>
@@ -27945,7 +29806,147 @@
                 <a:ea typeface="微軟正黑體"/>
                 <a:cs typeface="Arial"/>
               </a:rPr>
-              <a:t>Dcard 偏購車階段。</a:t>
+              <a:t>刪項</a:t>
+            </a:r>
+          </a:p>
+          <a:p>
+            <a:pPr>
+              <a:lnSpc>
+                <a:spcPct val="100000"/>
+              </a:lnSpc>
+              <a:spcBef>
+                <a:spcPts val="0"/>
+              </a:spcBef>
+              <a:spcAft>
+                <a:spcPts val="200"/>
+              </a:spcAft>
+            </a:pPr>
+            <a:r>
+              <a:rPr sz="1400" b="0" i="0">
+                <a:solidFill>
+                  <a:srgbClr val="24323E"/>
+                </a:solidFill>
+                <a:latin typeface="Arial"/>
+                <a:ea typeface="微軟正黑體"/>
+                <a:cs typeface="Arial"/>
+              </a:rPr>
+              <a:t>未同意的項目，回廠時再問。</a:t>
+            </a:r>
+          </a:p>
+        </p:txBody>
+      </p:sp>
+      <p:sp>
+        <p:nvSpPr>
+          <p:cNvPr id="16" name="Rounded Rectangle 15"/>
+          <p:cNvSpPr/>
+          <p:nvPr/>
+        </p:nvSpPr>
+        <p:spPr>
+          <a:xfrm>
+            <a:off x="5696712" y="3822191"/>
+            <a:ext cx="6080760" cy="1115568"/>
+          </a:xfrm>
+          <a:prstGeom prst="roundRect">
+            <a:avLst>
+              <a:gd name="adj" fmla="val 8000"/>
+            </a:avLst>
+          </a:prstGeom>
+          <a:solidFill>
+            <a:srgbClr val="F4F7FB"/>
+          </a:solidFill>
+          <a:ln>
+            <a:noFill/>
+          </a:ln>
+        </p:spPr>
+        <p:style>
+          <a:lnRef idx="1">
+            <a:schemeClr val="accent1"/>
+          </a:lnRef>
+          <a:fillRef idx="3">
+            <a:schemeClr val="accent1"/>
+          </a:fillRef>
+          <a:effectRef idx="2">
+            <a:schemeClr val="accent1"/>
+          </a:effectRef>
+          <a:fontRef idx="minor">
+            <a:schemeClr val="lt1"/>
+          </a:fontRef>
+        </p:style>
+        <p:txBody>
+          <a:bodyPr rtlCol="0" anchor="ctr"/>
+          <a:lstStyle/>
+          <a:p>
+            <a:pPr algn="ctr"/>
+          </a:p>
+        </p:txBody>
+      </p:sp>
+      <p:sp>
+        <p:nvSpPr>
+          <p:cNvPr id="17" name="TextBox 16"/>
+          <p:cNvSpPr txBox="1"/>
+          <p:nvPr/>
+        </p:nvSpPr>
+        <p:spPr>
+          <a:xfrm>
+            <a:off x="5824727" y="3931920"/>
+            <a:ext cx="5824728" cy="914400"/>
+          </a:xfrm>
+          <a:prstGeom prst="rect">
+            <a:avLst/>
+          </a:prstGeom>
+          <a:noFill/>
+        </p:spPr>
+        <p:txBody>
+          <a:bodyPr wrap="square" lIns="36576" rIns="36576" tIns="18288" bIns="18288" anchor="t">
+            <a:spAutoFit/>
+          </a:bodyPr>
+          <a:lstStyle/>
+          <a:p>
+            <a:pPr>
+              <a:lnSpc>
+                <a:spcPct val="100000"/>
+              </a:lnSpc>
+              <a:spcBef>
+                <a:spcPts val="0"/>
+              </a:spcBef>
+              <a:spcAft>
+                <a:spcPts val="200"/>
+              </a:spcAft>
+            </a:pPr>
+            <a:r>
+              <a:rPr sz="1600" b="1" i="0">
+                <a:solidFill>
+                  <a:srgbClr val="24323E"/>
+                </a:solidFill>
+                <a:latin typeface="Arial"/>
+                <a:ea typeface="微軟正黑體"/>
+                <a:cs typeface="Arial"/>
+              </a:rPr>
+              <a:t>回廠間隔拉長</a:t>
+            </a:r>
+          </a:p>
+          <a:p>
+            <a:pPr>
+              <a:lnSpc>
+                <a:spcPct val="100000"/>
+              </a:lnSpc>
+              <a:spcBef>
+                <a:spcPts val="0"/>
+              </a:spcBef>
+              <a:spcAft>
+                <a:spcPts val="200"/>
+              </a:spcAft>
+            </a:pPr>
+            <a:r>
+              <a:rPr sz="1400" b="0" i="0">
+                <a:solidFill>
+                  <a:srgbClr val="24323E"/>
+                </a:solidFill>
+                <a:latin typeface="Arial"/>
+                <a:ea typeface="微軟正黑體"/>
+                <a:cs typeface="Arial"/>
+              </a:rPr>
+              <a:t>間隔超過建議週期就提醒。</a:t>
             </a:r>
           </a:p>
         </p:txBody>
@@ -28057,7 +30058,7 @@
                 <a:ea typeface="微軟正黑體"/>
                 <a:cs typeface="Arial"/>
               </a:rPr>
-              <a:t>來源：reports/T7_stats_tests.md；圖 F1</a:t>
+              <a:t>來源：統計檢定報告（T7）；圖 F1</a:t>
             </a:r>
           </a:p>
         </p:txBody>
@@ -28151,7 +30152,7 @@
                 <a:ea typeface="微軟正黑體"/>
                 <a:cs typeface="Arial"/>
               </a:rPr>
-              <a:t>等料和價格才把人送走；態度抱怨很多，人卻很少真的離開</a:t>
+              <a:t>等料和價格送走人；態度抱怨多，卻少有人走</a:t>
             </a:r>
           </a:p>
         </p:txBody>
@@ -28222,7 +30223,7 @@
                 <a:ea typeface="微軟正黑體"/>
                 <a:cs typeface="Arial"/>
               </a:rPr>
-              <a:t>零件供應 17.3%（勝算比 2.58）、價格 15.0%（勝算比 2.64），是流失率最高的兩面向。</a:t>
+              <a:t>流失率最高：零件供應 17.3%、價格 15.0%。</a:t>
             </a:r>
           </a:p>
           <a:p>
@@ -28246,7 +30247,7 @@
                 <a:ea typeface="微軟正黑體"/>
                 <a:cs typeface="Arial"/>
               </a:rPr>
-              <a:t>銷售交車 1.4%（勝算比 0.15）最低。分母是全部 21,183 句。</a:t>
+              <a:t>最低：銷售交車 1.4%。</a:t>
             </a:r>
           </a:p>
           <a:p>
@@ -28270,7 +30271,7 @@
                 <a:ea typeface="微軟正黑體"/>
                 <a:cs typeface="Arial"/>
               </a:rPr>
-              <a:t>態度負面 61%，流失卻只有 4.7%：抱怨多，不等於人會走。</a:t>
+              <a:t>態度負面占 61%，流失只有 4.7%。</a:t>
             </a:r>
           </a:p>
         </p:txBody>
@@ -28429,7 +30430,7 @@
                 <a:ea typeface="微軟正黑體"/>
                 <a:cs typeface="Arial"/>
               </a:rPr>
-              <a:t>來源：reports/T10_risk_persona_report.md（F3）、專案架構 §0.1、reports/T11_kb_prices_report.md</a:t>
+              <a:t>來源：風險與 Persona 報告（T10）、專案架構、知識庫價格摘錄（T11）</a:t>
             </a:r>
           </a:p>
         </p:txBody>
@@ -28523,7 +30524,7 @@
                 <a:ea typeface="微軟正黑體"/>
                 <a:cs typeface="Arial"/>
               </a:rPr>
-              <a:t>人主要去一般外廠；過保之後，口述價差把人推出去</a:t>
+              <a:t>出口是一般外廠；過保後價差把人推走</a:t>
             </a:r>
           </a:p>
         </p:txBody>
@@ -28561,7 +30562,7 @@
         <p:spPr>
           <a:xfrm>
             <a:off x="420624" y="4949190"/>
-            <a:ext cx="11356848" cy="1051560"/>
+            <a:ext cx="11356848" cy="1417320"/>
           </a:xfrm>
           <a:prstGeom prst="rect">
             <a:avLst/>
@@ -28594,7 +30595,31 @@
                 <a:ea typeface="微軟正黑體"/>
                 <a:cs typeface="Arial"/>
               </a:rPr>
-              <a:t>一般外廠 736、自備料 234、DIY 135。一句可以多選，母體是 1,671 句流失。</a:t>
+              <a:t>去向：一般外廠 736 句、自備料 234、DIY 135。</a:t>
+            </a:r>
+          </a:p>
+          <a:p>
+            <a:pPr>
+              <a:lnSpc>
+                <a:spcPct val="100000"/>
+              </a:lnSpc>
+              <a:spcBef>
+                <a:spcPts val="0"/>
+              </a:spcBef>
+              <a:spcAft>
+                <a:spcPts val="200"/>
+              </a:spcAft>
+            </a:pPr>
+            <a:r>
+              <a:rPr sz="1200" b="0" i="0">
+                <a:solidFill>
+                  <a:srgbClr val="5C6B7A"/>
+                </a:solidFill>
+                <a:latin typeface="Arial"/>
+                <a:ea typeface="微軟正黑體"/>
+                <a:cs typeface="Arial"/>
+              </a:rPr>
+              <a:t>可複選；母體 1,671 句流失</a:t>
             </a:r>
           </a:p>
           <a:p>
@@ -28618,7 +30643,7 @@
                 <a:ea typeface="微軟正黑體"/>
                 <a:cs typeface="Arial"/>
               </a:rPr>
-              <a:t>標得到保固狀態的流失句：過保 62，保固內 17。</a:t>
+              <a:t>過保 62 句，保固內僅 17 句。</a:t>
             </a:r>
           </a:p>
           <a:p>
@@ -28642,7 +30667,31 @@
                 <a:ea typeface="微軟正黑體"/>
                 <a:cs typeface="Arial"/>
               </a:rPr>
-              <a:t>口述中位，不是定價：定保原廠 9,000 對外廠 3,500；機油 5,000 對 1,950。</a:t>
+              <a:t>定保口述價：原廠 9,000、外廠 3,500。</a:t>
+            </a:r>
+          </a:p>
+          <a:p>
+            <a:pPr>
+              <a:lnSpc>
+                <a:spcPct val="100000"/>
+              </a:lnSpc>
+              <a:spcBef>
+                <a:spcPts val="0"/>
+              </a:spcBef>
+              <a:spcAft>
+                <a:spcPts val="200"/>
+              </a:spcAft>
+            </a:pPr>
+            <a:r>
+              <a:rPr sz="1200" b="0" i="0">
+                <a:solidFill>
+                  <a:srgbClr val="5C6B7A"/>
+                </a:solidFill>
+                <a:latin typeface="Arial"/>
+                <a:ea typeface="微軟正黑體"/>
+                <a:cs typeface="Arial"/>
+              </a:rPr>
+              <a:t>論壇口述中位數，非公告價</a:t>
             </a:r>
           </a:p>
         </p:txBody>
@@ -28754,7 +30803,7 @@
                 <a:ea typeface="微軟正黑體"/>
                 <a:cs typeface="Arial"/>
               </a:rPr>
-              <a:t>來源：題目選擇分析 §6.5、reports/T7_data_quality.md、reports/T7_deid_report.md</a:t>
+              <a:t>來源：題目選擇分析、資料品質報告（T7）、去識別報告（T7）</a:t>
             </a:r>
           </a:p>
         </p:txBody>
@@ -28848,7 +30897,7 @@
                 <a:ea typeface="微軟正黑體"/>
                 <a:cs typeface="Arial"/>
               </a:rPr>
-              <a:t>三站售後語料已經齊，品質門檻過了，句子也去過識別</a:t>
+              <a:t>2.1 萬句售後語料，品質過關、全數去識別</a:t>
             </a:r>
           </a:p>
         </p:txBody>
@@ -29858,7 +31907,7 @@
                 <a:ea typeface="微軟正黑體"/>
                 <a:cs typeface="Arial"/>
               </a:rPr>
-              <a:t>異常值是字數超過 Q3+1.5×IQR 的句子，門檻 78 字，占 7.77%。上游已先去掉 15,182 句重複。</a:t>
+              <a:t>異常值＝超過 78 字的長句，占 7.77%。</a:t>
             </a:r>
           </a:p>
         </p:txBody>
@@ -29970,7 +32019,7 @@
                 <a:ea typeface="微軟正黑體"/>
                 <a:cs typeface="Arial"/>
               </a:rPr>
-              <a:t>來源：L7運作流程_2026-09-30.md、專案架構_2026-09-23.md §2；圖 F8</a:t>
+              <a:t>來源：L7 運作流程、專案架構；圖 F8</a:t>
             </a:r>
           </a:p>
         </p:txBody>
@@ -30031,7 +32080,7 @@
         <p:spPr>
           <a:xfrm>
             <a:off x="420624" y="329184"/>
-            <a:ext cx="11356848" cy="841248"/>
+            <a:ext cx="11356848" cy="566928"/>
           </a:xfrm>
           <a:prstGeom prst="rect">
             <a:avLst/>
@@ -30056,7 +32105,7 @@
               </a:spcAft>
             </a:pPr>
             <a:r>
-              <a:rPr sz="2000" b="1" i="0">
+              <a:rPr sz="2400" b="1" i="0">
                 <a:solidFill>
                   <a:srgbClr val="24323E"/>
                 </a:solidFill>
@@ -30064,7 +32113,7 @@
                 <a:ea typeface="微軟正黑體"/>
                 <a:cs typeface="Arial"/>
               </a:rPr>
-              <a:t>兩個迴路：洞察每日進報告池；關懷由事件觸發，人工核准後才投遞</a:t>
+              <a:t>洞察每日產出；關懷由事件觸發、人工核准才發</a:t>
             </a:r>
           </a:p>
         </p:txBody>
@@ -30085,7 +32134,7 @@
         </p:blipFill>
         <p:spPr>
           <a:xfrm>
-            <a:off x="795528" y="1188720"/>
+            <a:off x="795528" y="914400"/>
             <a:ext cx="10607040" cy="4972050"/>
           </a:xfrm>
           <a:prstGeom prst="rect">
@@ -30101,7 +32150,7 @@
         </p:nvSpPr>
         <p:spPr>
           <a:xfrm>
-            <a:off x="420624" y="6215634"/>
+            <a:off x="420624" y="5941314"/>
             <a:ext cx="11356848" cy="310896"/>
           </a:xfrm>
           <a:prstGeom prst="rect">
@@ -30247,7 +32296,7 @@
                 <a:ea typeface="微軟正黑體"/>
                 <a:cs typeface="Arial"/>
               </a:rPr>
-              <a:t>來源：reports/T10_risk_persona_report.md §6；圖 F5。未分類處置見會議記錄_2026-09-30.md §四</a:t>
+              <a:t>來源：風險與 Persona 報告（T10）；圖 F5。未分類處置見 9/30 會議記錄</a:t>
             </a:r>
           </a:p>
         </p:txBody>
@@ -30341,7 +32390,7 @@
                 <a:ea typeface="微軟正黑體"/>
                 <a:cs typeface="Arial"/>
               </a:rPr>
-              <a:t>四種流失樣貌裡，最多的是過保之後還在算價格的人</a:t>
+              <a:t>四種流失車主，過保精算派最多（511 人）</a:t>
             </a:r>
           </a:p>
         </p:txBody>
@@ -31035,7 +33084,7 @@
         <p:spPr>
           <a:xfrm>
             <a:off x="420624" y="4882895"/>
-            <a:ext cx="11356848" cy="640080"/>
+            <a:ext cx="11356848" cy="868680"/>
           </a:xfrm>
           <a:prstGeom prst="rect">
             <a:avLst/>
@@ -31068,7 +33117,55 @@
                 <a:ea typeface="微軟正黑體"/>
                 <a:cs typeface="Arial"/>
               </a:rPr>
-              <a:t>規則指派，分母是高／中風險 1,280 人。未分類 199 人（15.5%）保留為觀察名單，不投遞。分群只獨立支持靜默出走者。</a:t>
+              <a:t>分母：高、中風險 1,280 人。</a:t>
+            </a:r>
+          </a:p>
+          <a:p>
+            <a:pPr>
+              <a:lnSpc>
+                <a:spcPct val="100000"/>
+              </a:lnSpc>
+              <a:spcBef>
+                <a:spcPts val="0"/>
+              </a:spcBef>
+              <a:spcAft>
+                <a:spcPts val="200"/>
+              </a:spcAft>
+            </a:pPr>
+            <a:r>
+              <a:rPr sz="1300" b="0" i="0">
+                <a:solidFill>
+                  <a:srgbClr val="5C6B7A"/>
+                </a:solidFill>
+                <a:latin typeface="Arial"/>
+                <a:ea typeface="微軟正黑體"/>
+                <a:cs typeface="Arial"/>
+              </a:rPr>
+              <a:t>未分類 199 人列觀察名單，不投遞。</a:t>
+            </a:r>
+          </a:p>
+          <a:p>
+            <a:pPr>
+              <a:lnSpc>
+                <a:spcPct val="100000"/>
+              </a:lnSpc>
+              <a:spcBef>
+                <a:spcPts val="0"/>
+              </a:spcBef>
+              <a:spcAft>
+                <a:spcPts val="200"/>
+              </a:spcAft>
+            </a:pPr>
+            <a:r>
+              <a:rPr sz="1300" b="0" i="0">
+                <a:solidFill>
+                  <a:srgbClr val="5C6B7A"/>
+                </a:solidFill>
+                <a:latin typeface="Arial"/>
+                <a:ea typeface="微軟正黑體"/>
+                <a:cs typeface="Arial"/>
+              </a:rPr>
+              <a:t>Persona 為規則定義，每項可回溯原句。</a:t>
             </a:r>
           </a:p>
         </p:txBody>

--- a/deck/初賽簡報_v0.pptx
+++ b/deck/初賽簡報_v0.pptx
@@ -20157,7 +20157,7 @@
                           <a:ea typeface="微軟正黑體"/>
                           <a:cs typeface="Arial"/>
                         </a:rPr>
-                        <a:t>名單一次性產出；12 則已查核、待人工審</a:t>
+                        <a:t>名單一次性產出；16 則已查核、待人工審</a:t>
                       </a:r>
                     </a:p>
                   </a:txBody>

--- a/deck/初賽簡報_v0.pptx
+++ b/deck/初賽簡報_v0.pptx
@@ -26379,7 +26379,7 @@
                 <a:ea typeface="微軟正黑體"/>
                 <a:cs typeface="Arial"/>
               </a:rPr>
-              <a:t>渠道：LINE 官方帳號推播　　引用條目：9、26</a:t>
+              <a:t>渠道：LINE 官方帳號推播　　引用條目：26、65</a:t>
             </a:r>
           </a:p>
           <a:p>
@@ -26403,7 +26403,7 @@
                 <a:ea typeface="微軟正黑體"/>
                 <a:cs typeface="Arial"/>
               </a:rPr>
-              <a:t>您好，您的愛車目前還在等零件，進度尚未確定；有進一步消息時，我們會再與您聯繫。 自費更換的正廠零件，保證為自更換日起2年或行駛50,000公里以內，以先到者為準。若想查詢進度，可撥顧客服務專線0800-036-036。</a:t>
+              <a:t>您好，零件還在等料，讓您久等了，很抱歉。到貨時間確定後，我們會第一時間通知您。 到貨後如需到府取送車，可在保養或維修預定入廠日前 2 天預約，單程距離限 10 公里以內。若想了解目前進度，請聯絡您的服務專員。</a:t>
             </a:r>
           </a:p>
           <a:p>
@@ -26567,7 +26567,7 @@
                 <a:ea typeface="微軟正黑體"/>
                 <a:cs typeface="Arial"/>
               </a:rPr>
-              <a:t>您好，讓您久等了，很抱歉。我是您的服務專員，目前零件仍在等料中，有進一步消息我會再與您聯繫。若因零件缺料，車輛無法行駛或有行車安全疑慮，且留廠達 72 小時以上，才在維修期間提供免費代步車；板金或噴漆不提供。現車需視各廠車輛調度實況而定。您也可聯絡我，或撥免付費顧客服務專線 0800-036-036。</a:t>
+              <a:t>您好，讓您久等了，很抱歉。目前零件仍在等待中，有進一步消息我會再聯繫您。如果愛車因零件缺料而無法行駛或有行車安全疑慮，需要留廠72小時以上，維修期間我們會提供免費代步車；板金或噴漆維修恕無法提供，現車仍需視服務廠車輛調度實況而定。您也可聯絡我這位服務專員，或致電0800-036-036。</a:t>
             </a:r>
           </a:p>
           <a:p>
@@ -26591,7 +26591,7 @@
                 <a:ea typeface="微軟正黑體"/>
                 <a:cs typeface="Arial"/>
               </a:rPr>
-              <a:t>查核：通過；supported 6/6；重生成 0 次；生成次數 1</a:t>
+              <a:t>查核：通過；supported 6/6；重生成 1 次；生成次數 2</a:t>
             </a:r>
           </a:p>
         </p:txBody>

--- a/deck/初賽簡報_v0.pptx
+++ b/deck/初賽簡報_v0.pptx
@@ -17329,7 +17329,7 @@
                           <a:ea typeface="微軟正黑體"/>
                           <a:cs typeface="Arial"/>
                         </a:rPr>
-                        <a:t>您好，提醒您，Lexus尊榮安檢提供25項原廠標準檢查，全年免費。一般使用建議每…</a:t>
+                        <a:t>您好，提醒您，Lexus提供全年免費的尊榮安檢。一般使用建議每六個月回廠保養及檢…</a:t>
                       </a:r>
                     </a:p>
                   </a:txBody>
@@ -28109,7 +28109,7 @@
                 <a:ea typeface="微軟正黑體"/>
                 <a:cs typeface="Arial"/>
               </a:rPr>
-              <a:t>渠道：專員電話腳本　　引用條目：21</a:t>
+              <a:t>渠道：專員電話腳本　　引用條目：20</a:t>
             </a:r>
           </a:p>
           <a:p>
@@ -28133,7 +28133,7 @@
                 <a:ea typeface="微軟正黑體"/>
                 <a:cs typeface="Arial"/>
               </a:rPr>
-              <a:t>您好，我是上次為您服務的專員。很抱歉先前維修的狀況讓您費心了，想跟您確認，愛車修好後，同樣的狀況是否還有再出現？如果有，請直接找我，我會協助安排後續確認。您也可以預約全年免費的25項尊榮安檢，協助確認目前車況；後續有任何狀況，都可以由我作為您的服務窗口。</a:t>
+              <a:t>您好，我是上次為您服務的專員。很抱歉先前維修的狀況讓您費心了，想跟您確認，愛車修好後，同樣的狀況是否還有再出現？如果有，請直接找我，我會協助安排後續確認。您也可以預約全年免費的尊榮安檢，協助確認目前車況；後續有任何狀況，都可以由我作為您的服務窗口。</a:t>
             </a:r>
           </a:p>
           <a:p>
@@ -28157,7 +28157,7 @@
                 <a:ea typeface="微軟正黑體"/>
                 <a:cs typeface="Arial"/>
               </a:rPr>
-              <a:t>查核：通過；supported 3/3；重生成 0 次；生成次數 1</a:t>
+              <a:t>查核：通過；supported 1/1；重生成 0 次；生成次數 1</a:t>
             </a:r>
           </a:p>
         </p:txBody>
